--- a/docs/Tech_Drawdown_Executive_Showcase.pptx
+++ b/docs/Tech_Drawdown_Executive_Showcase.pptx
@@ -1,41 +1,41 @@
 
 <file path=ppt/presentation.xml><?xml version="1.0" encoding="utf-8"?>
-<p:presentation xmlns:a="http://schemas.openxmlformats.org/drawingml/2006/main" xmlns:r="http://schemas.openxmlformats.org/officeDocument/2006/relationships" xmlns:p="http://schemas.openxmlformats.org/presentationml/2006/main" saveSubsetFonts="1" autoCompressPictures="0">
+<p:presentation xmlns:a="http://schemas.openxmlformats.org/drawingml/2006/main" xmlns:r="http://schemas.openxmlformats.org/officeDocument/2006/relationships" xmlns:p="http://schemas.openxmlformats.org/presentationml/2006/main" removePersonalInfoOnSave="1" saveSubsetFonts="1" autoCompressPictures="0">
   <p:sldMasterIdLst>
     <p:sldMasterId id="2147483648" r:id="rId1"/>
   </p:sldMasterIdLst>
   <p:sldIdLst>
-    <p:sldId id="256" r:id="rId7"/>
-    <p:sldId id="257" r:id="rId8"/>
-    <p:sldId id="258" r:id="rId9"/>
-    <p:sldId id="259" r:id="rId10"/>
-    <p:sldId id="260" r:id="rId11"/>
-    <p:sldId id="261" r:id="rId12"/>
-    <p:sldId id="262" r:id="rId13"/>
-    <p:sldId id="263" r:id="rId14"/>
-    <p:sldId id="264" r:id="rId15"/>
-    <p:sldId id="265" r:id="rId16"/>
-    <p:sldId id="266" r:id="rId17"/>
-    <p:sldId id="267" r:id="rId18"/>
-    <p:sldId id="268" r:id="rId19"/>
-    <p:sldId id="269" r:id="rId20"/>
-    <p:sldId id="270" r:id="rId21"/>
-    <p:sldId id="271" r:id="rId22"/>
-    <p:sldId id="272" r:id="rId23"/>
-    <p:sldId id="273" r:id="rId24"/>
-    <p:sldId id="274" r:id="rId25"/>
-    <p:sldId id="275" r:id="rId26"/>
-    <p:sldId id="276" r:id="rId27"/>
-    <p:sldId id="277" r:id="rId28"/>
-    <p:sldId id="278" r:id="rId29"/>
-    <p:sldId id="279" r:id="rId30"/>
-    <p:sldId id="280" r:id="rId31"/>
-    <p:sldId id="281" r:id="rId32"/>
-    <p:sldId id="282" r:id="rId33"/>
-    <p:sldId id="283" r:id="rId34"/>
-    <p:sldId id="284" r:id="rId35"/>
+    <p:sldId id="256" r:id="rId2"/>
+    <p:sldId id="257" r:id="rId3"/>
+    <p:sldId id="258" r:id="rId4"/>
+    <p:sldId id="259" r:id="rId5"/>
+    <p:sldId id="260" r:id="rId6"/>
+    <p:sldId id="261" r:id="rId7"/>
+    <p:sldId id="262" r:id="rId8"/>
+    <p:sldId id="263" r:id="rId9"/>
+    <p:sldId id="264" r:id="rId10"/>
+    <p:sldId id="265" r:id="rId11"/>
+    <p:sldId id="266" r:id="rId12"/>
+    <p:sldId id="267" r:id="rId13"/>
+    <p:sldId id="268" r:id="rId14"/>
+    <p:sldId id="269" r:id="rId15"/>
+    <p:sldId id="270" r:id="rId16"/>
+    <p:sldId id="271" r:id="rId17"/>
+    <p:sldId id="272" r:id="rId18"/>
+    <p:sldId id="273" r:id="rId19"/>
+    <p:sldId id="274" r:id="rId20"/>
+    <p:sldId id="275" r:id="rId21"/>
+    <p:sldId id="276" r:id="rId22"/>
+    <p:sldId id="277" r:id="rId23"/>
+    <p:sldId id="278" r:id="rId24"/>
+    <p:sldId id="279" r:id="rId25"/>
+    <p:sldId id="280" r:id="rId26"/>
+    <p:sldId id="281" r:id="rId27"/>
+    <p:sldId id="282" r:id="rId28"/>
+    <p:sldId id="283" r:id="rId29"/>
+    <p:sldId id="284" r:id="rId30"/>
   </p:sldIdLst>
-  <p:sldSz cx="12188952" cy="6858000" type="screen4x3"/>
+  <p:sldSz cx="12188825" cy="6858000"/>
   <p:notesSz cx="6858000" cy="9144000"/>
   <p:defaultTextStyle>
     <a:defPPr>
@@ -132,6 +132,22 @@
       </a:defRPr>
     </a:lvl9pPr>
   </p:defaultTextStyle>
+  <p:extLst>
+    <p:ext uri="{EFAFB233-063F-42B5-8137-9DF3F51BA10A}">
+      <p15:sldGuideLst xmlns:p15="http://schemas.microsoft.com/office/powerpoint/2012/main">
+        <p15:guide id="1" orient="horz" pos="2160">
+          <p15:clr>
+            <a:srgbClr val="A4A3A4"/>
+          </p15:clr>
+        </p15:guide>
+        <p15:guide id="2" pos="2880">
+          <p15:clr>
+            <a:srgbClr val="A4A3A4"/>
+          </p15:clr>
+        </p15:guide>
+      </p15:sldGuideLst>
+    </p:ext>
+  </p:extLst>
 </p:presentation>
 </file>
 
@@ -173,10 +189,9 @@
           <a:lstStyle/>
           <a:p>
             <a:r>
-              <a:rPr lang="en-US" smtClean="0"/>
+              <a:rPr lang="en-US"/>
               <a:t>Click to edit Master title style</a:t>
             </a:r>
-            <a:endParaRPr lang="en-US"/>
           </a:p>
         </p:txBody>
       </p:sp>
@@ -292,10 +307,9 @@
           </a:lstStyle>
           <a:p>
             <a:r>
-              <a:rPr lang="en-US" smtClean="0"/>
+              <a:rPr lang="en-US"/>
               <a:t>Click to edit Master subtitle style</a:t>
             </a:r>
-            <a:endParaRPr lang="en-US"/>
           </a:p>
         </p:txBody>
       </p:sp>
@@ -316,7 +330,7 @@
           <a:p>
             <a:fld id="{5BCAD085-E8A6-8845-BD4E-CB4CCA059FC4}" type="datetimeFigureOut">
               <a:rPr lang="en-US" smtClean="0"/>
-              <a:t>1/27/13</a:t>
+              <a:t>8/29/2026</a:t>
             </a:fld>
             <a:endParaRPr lang="en-US"/>
           </a:p>
@@ -410,10 +424,9 @@
           <a:lstStyle/>
           <a:p>
             <a:r>
-              <a:rPr lang="en-US" smtClean="0"/>
+              <a:rPr lang="en-US"/>
               <a:t>Click to edit Master title style</a:t>
             </a:r>
-            <a:endParaRPr lang="en-US"/>
           </a:p>
         </p:txBody>
       </p:sp>
@@ -434,38 +447,37 @@
           <a:p>
             <a:pPr lvl="0"/>
             <a:r>
-              <a:rPr lang="en-US" smtClean="0"/>
+              <a:rPr lang="en-US"/>
               <a:t>Click to edit Master text styles</a:t>
             </a:r>
           </a:p>
           <a:p>
             <a:pPr lvl="1"/>
             <a:r>
-              <a:rPr lang="en-US" smtClean="0"/>
+              <a:rPr lang="en-US"/>
               <a:t>Second level</a:t>
             </a:r>
           </a:p>
           <a:p>
             <a:pPr lvl="2"/>
             <a:r>
-              <a:rPr lang="en-US" smtClean="0"/>
+              <a:rPr lang="en-US"/>
               <a:t>Third level</a:t>
             </a:r>
           </a:p>
           <a:p>
             <a:pPr lvl="3"/>
             <a:r>
-              <a:rPr lang="en-US" smtClean="0"/>
+              <a:rPr lang="en-US"/>
               <a:t>Fourth level</a:t>
             </a:r>
           </a:p>
           <a:p>
             <a:pPr lvl="4"/>
             <a:r>
-              <a:rPr lang="en-US" smtClean="0"/>
+              <a:rPr lang="en-US"/>
               <a:t>Fifth level</a:t>
             </a:r>
-            <a:endParaRPr lang="en-US"/>
           </a:p>
         </p:txBody>
       </p:sp>
@@ -486,7 +498,7 @@
           <a:p>
             <a:fld id="{5BCAD085-E8A6-8845-BD4E-CB4CCA059FC4}" type="datetimeFigureOut">
               <a:rPr lang="en-US" smtClean="0"/>
-              <a:t>1/27/13</a:t>
+              <a:t>8/29/2026</a:t>
             </a:fld>
             <a:endParaRPr lang="en-US"/>
           </a:p>
@@ -585,10 +597,9 @@
           <a:lstStyle/>
           <a:p>
             <a:r>
-              <a:rPr lang="en-US" smtClean="0"/>
+              <a:rPr lang="en-US"/>
               <a:t>Click to edit Master title style</a:t>
             </a:r>
-            <a:endParaRPr lang="en-US"/>
           </a:p>
         </p:txBody>
       </p:sp>
@@ -614,38 +625,37 @@
           <a:p>
             <a:pPr lvl="0"/>
             <a:r>
-              <a:rPr lang="en-US" smtClean="0"/>
+              <a:rPr lang="en-US"/>
               <a:t>Click to edit Master text styles</a:t>
             </a:r>
           </a:p>
           <a:p>
             <a:pPr lvl="1"/>
             <a:r>
-              <a:rPr lang="en-US" smtClean="0"/>
+              <a:rPr lang="en-US"/>
               <a:t>Second level</a:t>
             </a:r>
           </a:p>
           <a:p>
             <a:pPr lvl="2"/>
             <a:r>
-              <a:rPr lang="en-US" smtClean="0"/>
+              <a:rPr lang="en-US"/>
               <a:t>Third level</a:t>
             </a:r>
           </a:p>
           <a:p>
             <a:pPr lvl="3"/>
             <a:r>
-              <a:rPr lang="en-US" smtClean="0"/>
+              <a:rPr lang="en-US"/>
               <a:t>Fourth level</a:t>
             </a:r>
           </a:p>
           <a:p>
             <a:pPr lvl="4"/>
             <a:r>
-              <a:rPr lang="en-US" smtClean="0"/>
+              <a:rPr lang="en-US"/>
               <a:t>Fifth level</a:t>
             </a:r>
-            <a:endParaRPr lang="en-US"/>
           </a:p>
         </p:txBody>
       </p:sp>
@@ -666,7 +676,7 @@
           <a:p>
             <a:fld id="{5BCAD085-E8A6-8845-BD4E-CB4CCA059FC4}" type="datetimeFigureOut">
               <a:rPr lang="en-US" smtClean="0"/>
-              <a:t>1/27/13</a:t>
+              <a:t>8/29/2026</a:t>
             </a:fld>
             <a:endParaRPr lang="en-US"/>
           </a:p>
@@ -760,10 +770,9 @@
           <a:lstStyle/>
           <a:p>
             <a:r>
-              <a:rPr lang="en-US" smtClean="0"/>
+              <a:rPr lang="en-US"/>
               <a:t>Click to edit Master title style</a:t>
             </a:r>
-            <a:endParaRPr lang="en-US"/>
           </a:p>
         </p:txBody>
       </p:sp>
@@ -784,38 +793,37 @@
           <a:p>
             <a:pPr lvl="0"/>
             <a:r>
-              <a:rPr lang="en-US" smtClean="0"/>
+              <a:rPr lang="en-US"/>
               <a:t>Click to edit Master text styles</a:t>
             </a:r>
           </a:p>
           <a:p>
             <a:pPr lvl="1"/>
             <a:r>
-              <a:rPr lang="en-US" smtClean="0"/>
+              <a:rPr lang="en-US"/>
               <a:t>Second level</a:t>
             </a:r>
           </a:p>
           <a:p>
             <a:pPr lvl="2"/>
             <a:r>
-              <a:rPr lang="en-US" smtClean="0"/>
+              <a:rPr lang="en-US"/>
               <a:t>Third level</a:t>
             </a:r>
           </a:p>
           <a:p>
             <a:pPr lvl="3"/>
             <a:r>
-              <a:rPr lang="en-US" smtClean="0"/>
+              <a:rPr lang="en-US"/>
               <a:t>Fourth level</a:t>
             </a:r>
           </a:p>
           <a:p>
             <a:pPr lvl="4"/>
             <a:r>
-              <a:rPr lang="en-US" smtClean="0"/>
+              <a:rPr lang="en-US"/>
               <a:t>Fifth level</a:t>
             </a:r>
-            <a:endParaRPr lang="en-US"/>
           </a:p>
         </p:txBody>
       </p:sp>
@@ -836,7 +844,7 @@
           <a:p>
             <a:fld id="{5BCAD085-E8A6-8845-BD4E-CB4CCA059FC4}" type="datetimeFigureOut">
               <a:rPr lang="en-US" smtClean="0"/>
-              <a:t>1/27/13</a:t>
+              <a:t>8/29/2026</a:t>
             </a:fld>
             <a:endParaRPr lang="en-US"/>
           </a:p>
@@ -939,10 +947,9 @@
           </a:lstStyle>
           <a:p>
             <a:r>
-              <a:rPr lang="en-US" smtClean="0"/>
+              <a:rPr lang="en-US"/>
               <a:t>Click to edit Master title style</a:t>
             </a:r>
-            <a:endParaRPr lang="en-US"/>
           </a:p>
         </p:txBody>
       </p:sp>
@@ -1059,7 +1066,7 @@
           <a:p>
             <a:pPr lvl="0"/>
             <a:r>
-              <a:rPr lang="en-US" smtClean="0"/>
+              <a:rPr lang="en-US"/>
               <a:t>Click to edit Master text styles</a:t>
             </a:r>
           </a:p>
@@ -1082,7 +1089,7 @@
           <a:p>
             <a:fld id="{5BCAD085-E8A6-8845-BD4E-CB4CCA059FC4}" type="datetimeFigureOut">
               <a:rPr lang="en-US" smtClean="0"/>
-              <a:t>1/27/13</a:t>
+              <a:t>8/29/2026</a:t>
             </a:fld>
             <a:endParaRPr lang="en-US"/>
           </a:p>
@@ -1176,10 +1183,9 @@
           <a:lstStyle/>
           <a:p>
             <a:r>
-              <a:rPr lang="en-US" smtClean="0"/>
+              <a:rPr lang="en-US"/>
               <a:t>Click to edit Master title style</a:t>
             </a:r>
-            <a:endParaRPr lang="en-US"/>
           </a:p>
         </p:txBody>
       </p:sp>
@@ -1233,38 +1239,37 @@
           <a:p>
             <a:pPr lvl="0"/>
             <a:r>
-              <a:rPr lang="en-US" smtClean="0"/>
+              <a:rPr lang="en-US"/>
               <a:t>Click to edit Master text styles</a:t>
             </a:r>
           </a:p>
           <a:p>
             <a:pPr lvl="1"/>
             <a:r>
-              <a:rPr lang="en-US" smtClean="0"/>
+              <a:rPr lang="en-US"/>
               <a:t>Second level</a:t>
             </a:r>
           </a:p>
           <a:p>
             <a:pPr lvl="2"/>
             <a:r>
-              <a:rPr lang="en-US" smtClean="0"/>
+              <a:rPr lang="en-US"/>
               <a:t>Third level</a:t>
             </a:r>
           </a:p>
           <a:p>
             <a:pPr lvl="3"/>
             <a:r>
-              <a:rPr lang="en-US" smtClean="0"/>
+              <a:rPr lang="en-US"/>
               <a:t>Fourth level</a:t>
             </a:r>
           </a:p>
           <a:p>
             <a:pPr lvl="4"/>
             <a:r>
-              <a:rPr lang="en-US" smtClean="0"/>
+              <a:rPr lang="en-US"/>
               <a:t>Fifth level</a:t>
             </a:r>
-            <a:endParaRPr lang="en-US"/>
           </a:p>
         </p:txBody>
       </p:sp>
@@ -1318,38 +1323,37 @@
           <a:p>
             <a:pPr lvl="0"/>
             <a:r>
-              <a:rPr lang="en-US" smtClean="0"/>
+              <a:rPr lang="en-US"/>
               <a:t>Click to edit Master text styles</a:t>
             </a:r>
           </a:p>
           <a:p>
             <a:pPr lvl="1"/>
             <a:r>
-              <a:rPr lang="en-US" smtClean="0"/>
+              <a:rPr lang="en-US"/>
               <a:t>Second level</a:t>
             </a:r>
           </a:p>
           <a:p>
             <a:pPr lvl="2"/>
             <a:r>
-              <a:rPr lang="en-US" smtClean="0"/>
+              <a:rPr lang="en-US"/>
               <a:t>Third level</a:t>
             </a:r>
           </a:p>
           <a:p>
             <a:pPr lvl="3"/>
             <a:r>
-              <a:rPr lang="en-US" smtClean="0"/>
+              <a:rPr lang="en-US"/>
               <a:t>Fourth level</a:t>
             </a:r>
           </a:p>
           <a:p>
             <a:pPr lvl="4"/>
             <a:r>
-              <a:rPr lang="en-US" smtClean="0"/>
+              <a:rPr lang="en-US"/>
               <a:t>Fifth level</a:t>
             </a:r>
-            <a:endParaRPr lang="en-US"/>
           </a:p>
         </p:txBody>
       </p:sp>
@@ -1370,7 +1374,7 @@
           <a:p>
             <a:fld id="{5BCAD085-E8A6-8845-BD4E-CB4CCA059FC4}" type="datetimeFigureOut">
               <a:rPr lang="en-US" smtClean="0"/>
-              <a:t>1/27/13</a:t>
+              <a:t>8/29/2026</a:t>
             </a:fld>
             <a:endParaRPr lang="en-US"/>
           </a:p>
@@ -1468,10 +1472,9 @@
           </a:lstStyle>
           <a:p>
             <a:r>
-              <a:rPr lang="en-US" smtClean="0"/>
+              <a:rPr lang="en-US"/>
               <a:t>Click to edit Master title style</a:t>
             </a:r>
-            <a:endParaRPr lang="en-US"/>
           </a:p>
         </p:txBody>
       </p:sp>
@@ -1534,7 +1537,7 @@
           <a:p>
             <a:pPr lvl="0"/>
             <a:r>
-              <a:rPr lang="en-US" smtClean="0"/>
+              <a:rPr lang="en-US"/>
               <a:t>Click to edit Master text styles</a:t>
             </a:r>
           </a:p>
@@ -1590,38 +1593,37 @@
           <a:p>
             <a:pPr lvl="0"/>
             <a:r>
-              <a:rPr lang="en-US" smtClean="0"/>
+              <a:rPr lang="en-US"/>
               <a:t>Click to edit Master text styles</a:t>
             </a:r>
           </a:p>
           <a:p>
             <a:pPr lvl="1"/>
             <a:r>
-              <a:rPr lang="en-US" smtClean="0"/>
+              <a:rPr lang="en-US"/>
               <a:t>Second level</a:t>
             </a:r>
           </a:p>
           <a:p>
             <a:pPr lvl="2"/>
             <a:r>
-              <a:rPr lang="en-US" smtClean="0"/>
+              <a:rPr lang="en-US"/>
               <a:t>Third level</a:t>
             </a:r>
           </a:p>
           <a:p>
             <a:pPr lvl="3"/>
             <a:r>
-              <a:rPr lang="en-US" smtClean="0"/>
+              <a:rPr lang="en-US"/>
               <a:t>Fourth level</a:t>
             </a:r>
           </a:p>
           <a:p>
             <a:pPr lvl="4"/>
             <a:r>
-              <a:rPr lang="en-US" smtClean="0"/>
+              <a:rPr lang="en-US"/>
               <a:t>Fifth level</a:t>
             </a:r>
-            <a:endParaRPr lang="en-US"/>
           </a:p>
         </p:txBody>
       </p:sp>
@@ -1684,7 +1686,7 @@
           <a:p>
             <a:pPr lvl="0"/>
             <a:r>
-              <a:rPr lang="en-US" smtClean="0"/>
+              <a:rPr lang="en-US"/>
               <a:t>Click to edit Master text styles</a:t>
             </a:r>
           </a:p>
@@ -1740,38 +1742,37 @@
           <a:p>
             <a:pPr lvl="0"/>
             <a:r>
-              <a:rPr lang="en-US" smtClean="0"/>
+              <a:rPr lang="en-US"/>
               <a:t>Click to edit Master text styles</a:t>
             </a:r>
           </a:p>
           <a:p>
             <a:pPr lvl="1"/>
             <a:r>
-              <a:rPr lang="en-US" smtClean="0"/>
+              <a:rPr lang="en-US"/>
               <a:t>Second level</a:t>
             </a:r>
           </a:p>
           <a:p>
             <a:pPr lvl="2"/>
             <a:r>
-              <a:rPr lang="en-US" smtClean="0"/>
+              <a:rPr lang="en-US"/>
               <a:t>Third level</a:t>
             </a:r>
           </a:p>
           <a:p>
             <a:pPr lvl="3"/>
             <a:r>
-              <a:rPr lang="en-US" smtClean="0"/>
+              <a:rPr lang="en-US"/>
               <a:t>Fourth level</a:t>
             </a:r>
           </a:p>
           <a:p>
             <a:pPr lvl="4"/>
             <a:r>
-              <a:rPr lang="en-US" smtClean="0"/>
+              <a:rPr lang="en-US"/>
               <a:t>Fifth level</a:t>
             </a:r>
-            <a:endParaRPr lang="en-US"/>
           </a:p>
         </p:txBody>
       </p:sp>
@@ -1792,7 +1793,7 @@
           <a:p>
             <a:fld id="{5BCAD085-E8A6-8845-BD4E-CB4CCA059FC4}" type="datetimeFigureOut">
               <a:rPr lang="en-US" smtClean="0"/>
-              <a:t>1/27/13</a:t>
+              <a:t>8/29/2026</a:t>
             </a:fld>
             <a:endParaRPr lang="en-US"/>
           </a:p>
@@ -1886,10 +1887,9 @@
           <a:lstStyle/>
           <a:p>
             <a:r>
-              <a:rPr lang="en-US" smtClean="0"/>
+              <a:rPr lang="en-US"/>
               <a:t>Click to edit Master title style</a:t>
             </a:r>
-            <a:endParaRPr lang="en-US"/>
           </a:p>
         </p:txBody>
       </p:sp>
@@ -1910,7 +1910,7 @@
           <a:p>
             <a:fld id="{5BCAD085-E8A6-8845-BD4E-CB4CCA059FC4}" type="datetimeFigureOut">
               <a:rPr lang="en-US" smtClean="0"/>
-              <a:t>1/27/13</a:t>
+              <a:t>8/29/2026</a:t>
             </a:fld>
             <a:endParaRPr lang="en-US"/>
           </a:p>
@@ -2005,7 +2005,7 @@
           <a:p>
             <a:fld id="{5BCAD085-E8A6-8845-BD4E-CB4CCA059FC4}" type="datetimeFigureOut">
               <a:rPr lang="en-US" smtClean="0"/>
-              <a:t>1/27/13</a:t>
+              <a:t>8/29/2026</a:t>
             </a:fld>
             <a:endParaRPr lang="en-US"/>
           </a:p>
@@ -2108,10 +2108,9 @@
           </a:lstStyle>
           <a:p>
             <a:r>
-              <a:rPr lang="en-US" smtClean="0"/>
+              <a:rPr lang="en-US"/>
               <a:t>Click to edit Master title style</a:t>
             </a:r>
-            <a:endParaRPr lang="en-US"/>
           </a:p>
         </p:txBody>
       </p:sp>
@@ -2165,38 +2164,37 @@
           <a:p>
             <a:pPr lvl="0"/>
             <a:r>
-              <a:rPr lang="en-US" smtClean="0"/>
+              <a:rPr lang="en-US"/>
               <a:t>Click to edit Master text styles</a:t>
             </a:r>
           </a:p>
           <a:p>
             <a:pPr lvl="1"/>
             <a:r>
-              <a:rPr lang="en-US" smtClean="0"/>
+              <a:rPr lang="en-US"/>
               <a:t>Second level</a:t>
             </a:r>
           </a:p>
           <a:p>
             <a:pPr lvl="2"/>
             <a:r>
-              <a:rPr lang="en-US" smtClean="0"/>
+              <a:rPr lang="en-US"/>
               <a:t>Third level</a:t>
             </a:r>
           </a:p>
           <a:p>
             <a:pPr lvl="3"/>
             <a:r>
-              <a:rPr lang="en-US" smtClean="0"/>
+              <a:rPr lang="en-US"/>
               <a:t>Fourth level</a:t>
             </a:r>
           </a:p>
           <a:p>
             <a:pPr lvl="4"/>
             <a:r>
-              <a:rPr lang="en-US" smtClean="0"/>
+              <a:rPr lang="en-US"/>
               <a:t>Fifth level</a:t>
             </a:r>
-            <a:endParaRPr lang="en-US"/>
           </a:p>
         </p:txBody>
       </p:sp>
@@ -2259,7 +2257,7 @@
           <a:p>
             <a:pPr lvl="0"/>
             <a:r>
-              <a:rPr lang="en-US" smtClean="0"/>
+              <a:rPr lang="en-US"/>
               <a:t>Click to edit Master text styles</a:t>
             </a:r>
           </a:p>
@@ -2282,7 +2280,7 @@
           <a:p>
             <a:fld id="{5BCAD085-E8A6-8845-BD4E-CB4CCA059FC4}" type="datetimeFigureOut">
               <a:rPr lang="en-US" smtClean="0"/>
-              <a:t>1/27/13</a:t>
+              <a:t>8/29/2026</a:t>
             </a:fld>
             <a:endParaRPr lang="en-US"/>
           </a:p>
@@ -2385,10 +2383,9 @@
           </a:lstStyle>
           <a:p>
             <a:r>
-              <a:rPr lang="en-US" smtClean="0"/>
+              <a:rPr lang="en-US"/>
               <a:t>Click to edit Master title style</a:t>
             </a:r>
-            <a:endParaRPr lang="en-US"/>
           </a:p>
         </p:txBody>
       </p:sp>
@@ -2512,7 +2509,7 @@
           <a:p>
             <a:pPr lvl="0"/>
             <a:r>
-              <a:rPr lang="en-US" smtClean="0"/>
+              <a:rPr lang="en-US"/>
               <a:t>Click to edit Master text styles</a:t>
             </a:r>
           </a:p>
@@ -2535,7 +2532,7 @@
           <a:p>
             <a:fld id="{5BCAD085-E8A6-8845-BD4E-CB4CCA059FC4}" type="datetimeFigureOut">
               <a:rPr lang="en-US" smtClean="0"/>
-              <a:t>1/27/13</a:t>
+              <a:t>8/29/2026</a:t>
             </a:fld>
             <a:endParaRPr lang="en-US"/>
           </a:p>
@@ -2644,10 +2641,9 @@
           <a:lstStyle/>
           <a:p>
             <a:r>
-              <a:rPr lang="en-US" smtClean="0"/>
+              <a:rPr lang="en-US"/>
               <a:t>Click to edit Master title style</a:t>
             </a:r>
-            <a:endParaRPr lang="en-US"/>
           </a:p>
         </p:txBody>
       </p:sp>
@@ -2678,38 +2674,37 @@
           <a:p>
             <a:pPr lvl="0"/>
             <a:r>
-              <a:rPr lang="en-US" smtClean="0"/>
+              <a:rPr lang="en-US"/>
               <a:t>Click to edit Master text styles</a:t>
             </a:r>
           </a:p>
           <a:p>
             <a:pPr lvl="1"/>
             <a:r>
-              <a:rPr lang="en-US" smtClean="0"/>
+              <a:rPr lang="en-US"/>
               <a:t>Second level</a:t>
             </a:r>
           </a:p>
           <a:p>
             <a:pPr lvl="2"/>
             <a:r>
-              <a:rPr lang="en-US" smtClean="0"/>
+              <a:rPr lang="en-US"/>
               <a:t>Third level</a:t>
             </a:r>
           </a:p>
           <a:p>
             <a:pPr lvl="3"/>
             <a:r>
-              <a:rPr lang="en-US" smtClean="0"/>
+              <a:rPr lang="en-US"/>
               <a:t>Fourth level</a:t>
             </a:r>
           </a:p>
           <a:p>
             <a:pPr lvl="4"/>
             <a:r>
-              <a:rPr lang="en-US" smtClean="0"/>
+              <a:rPr lang="en-US"/>
               <a:t>Fifth level</a:t>
             </a:r>
-            <a:endParaRPr lang="en-US"/>
           </a:p>
         </p:txBody>
       </p:sp>
@@ -2748,7 +2743,7 @@
           <a:p>
             <a:fld id="{5BCAD085-E8A6-8845-BD4E-CB4CCA059FC4}" type="datetimeFigureOut">
               <a:rPr lang="en-US" smtClean="0"/>
-              <a:t>1/27/13</a:t>
+              <a:t>8/29/2026</a:t>
             </a:fld>
             <a:endParaRPr lang="en-US"/>
           </a:p>
@@ -3107,15 +3102,7 @@
 </file>
 
 <file path=ppt/slides/slide1.xml><?xml version="1.0" encoding="utf-8"?>
-<p:sld xmlns:a="http://schemas.openxmlformats.org/drawingml/2006/main" xmlns:p="http://schemas.openxmlformats.org/presentationml/2006/main" xmlns:r="http://schemas.openxmlformats.org/officeDocument/2006/relationships">
-  <p:bg>
-    <p:bgPr>
-      <a:solidFill>
-        <a:srgbClr val="0F2440"/>
-      </a:solidFill>
-      <a:effectLst/>
-    </p:bgPr>
-  </p:bg>
+<p:sld xmlns:a="http://schemas.openxmlformats.org/drawingml/2006/main" xmlns:r="http://schemas.openxmlformats.org/officeDocument/2006/relationships" xmlns:p="http://schemas.openxmlformats.org/presentationml/2006/main">
   <p:cSld>
     <p:spTree>
       <p:nvGrpSpPr>
@@ -3123,7 +3110,14 @@
         <p:cNvGrpSpPr/>
         <p:nvPr/>
       </p:nvGrpSpPr>
-      <p:grpSpPr/>
+      <p:grpSpPr>
+        <a:xfrm>
+          <a:off x="0" y="0"/>
+          <a:ext cx="0" cy="0"/>
+          <a:chOff x="0" y="0"/>
+          <a:chExt cx="0" cy="0"/>
+        </a:xfrm>
+      </p:grpSpPr>
       <p:sp>
         <p:nvSpPr>
           <p:cNvPr id="2" name="Rounded Rectangle 1"/>
@@ -3167,6 +3161,7 @@
           <a:lstStyle/>
           <a:p>
             <a:pPr algn="ctr"/>
+            <a:endParaRPr/>
           </a:p>
         </p:txBody>
       </p:sp>
@@ -3213,6 +3208,7 @@
           <a:lstStyle/>
           <a:p>
             <a:pPr algn="ctr"/>
+            <a:endParaRPr/>
           </a:p>
         </p:txBody>
       </p:sp>
@@ -3259,6 +3255,7 @@
           <a:lstStyle/>
           <a:p>
             <a:pPr algn="ctr"/>
+            <a:endParaRPr/>
           </a:p>
         </p:txBody>
       </p:sp>
@@ -3279,7 +3276,7 @@
           <a:noFill/>
         </p:spPr>
         <p:txBody>
-          <a:bodyPr wrap="square" lIns="0" rIns="0" tIns="0" bIns="0">
+          <a:bodyPr wrap="square" lIns="0" tIns="0" rIns="0" bIns="0">
             <a:spAutoFit/>
           </a:bodyPr>
           <a:lstStyle/>
@@ -3314,7 +3311,7 @@
           <a:noFill/>
         </p:spPr>
         <p:txBody>
-          <a:bodyPr wrap="square" lIns="0" rIns="0" tIns="0" bIns="0">
+          <a:bodyPr wrap="square" lIns="0" tIns="0" rIns="0" bIns="0">
             <a:spAutoFit/>
           </a:bodyPr>
           <a:lstStyle/>
@@ -3349,7 +3346,7 @@
           <a:noFill/>
         </p:spPr>
         <p:txBody>
-          <a:bodyPr wrap="square" lIns="0" rIns="0" tIns="0" bIns="0">
+          <a:bodyPr wrap="square" lIns="0" tIns="0" rIns="0" bIns="0">
             <a:spAutoFit/>
           </a:bodyPr>
           <a:lstStyle/>
@@ -3384,7 +3381,7 @@
           <a:noFill/>
         </p:spPr>
         <p:txBody>
-          <a:bodyPr wrap="square" lIns="0" rIns="0" tIns="0" bIns="0">
+          <a:bodyPr wrap="square" lIns="0" tIns="0" rIns="0" bIns="0">
             <a:spAutoFit/>
           </a:bodyPr>
           <a:lstStyle/>
@@ -3420,15 +3417,7 @@
 </file>
 
 <file path=ppt/slides/slide10.xml><?xml version="1.0" encoding="utf-8"?>
-<p:sld xmlns:a="http://schemas.openxmlformats.org/drawingml/2006/main" xmlns:p="http://schemas.openxmlformats.org/presentationml/2006/main" xmlns:r="http://schemas.openxmlformats.org/officeDocument/2006/relationships">
-  <p:bg>
-    <p:bgPr>
-      <a:solidFill>
-        <a:srgbClr val="F4F6F9"/>
-      </a:solidFill>
-      <a:effectLst/>
-    </p:bgPr>
-  </p:bg>
+<p:sld xmlns:a="http://schemas.openxmlformats.org/drawingml/2006/main" xmlns:r="http://schemas.openxmlformats.org/officeDocument/2006/relationships" xmlns:p="http://schemas.openxmlformats.org/presentationml/2006/main">
   <p:cSld>
     <p:spTree>
       <p:nvGrpSpPr>
@@ -3436,7 +3425,14 @@
         <p:cNvGrpSpPr/>
         <p:nvPr/>
       </p:nvGrpSpPr>
-      <p:grpSpPr/>
+      <p:grpSpPr>
+        <a:xfrm>
+          <a:off x="0" y="0"/>
+          <a:ext cx="0" cy="0"/>
+          <a:chOff x="0" y="0"/>
+          <a:chExt cx="0" cy="0"/>
+        </a:xfrm>
+      </p:grpSpPr>
       <p:sp>
         <p:nvSpPr>
           <p:cNvPr id="2" name="TextBox 1"/>
@@ -3454,7 +3450,7 @@
           <a:noFill/>
         </p:spPr>
         <p:txBody>
-          <a:bodyPr wrap="square" lIns="0" rIns="0" tIns="0" bIns="0">
+          <a:bodyPr wrap="square" lIns="0" tIns="0" rIns="0" bIns="0">
             <a:spAutoFit/>
           </a:bodyPr>
           <a:lstStyle/>
@@ -3489,7 +3485,7 @@
           <a:noFill/>
         </p:spPr>
         <p:txBody>
-          <a:bodyPr wrap="square" lIns="0" rIns="0" tIns="0" bIns="0">
+          <a:bodyPr wrap="square" lIns="0" tIns="0" rIns="0" bIns="0">
             <a:spAutoFit/>
           </a:bodyPr>
           <a:lstStyle/>
@@ -3524,7 +3520,7 @@
           <a:noFill/>
         </p:spPr>
         <p:txBody>
-          <a:bodyPr wrap="square" lIns="0" rIns="0" tIns="0" bIns="0">
+          <a:bodyPr wrap="square" lIns="0" tIns="0" rIns="0" bIns="0">
             <a:spAutoFit/>
           </a:bodyPr>
           <a:lstStyle/>
@@ -3559,7 +3555,7 @@
           <a:noFill/>
         </p:spPr>
         <p:txBody>
-          <a:bodyPr wrap="square" lIns="0" rIns="0" tIns="0" bIns="0">
+          <a:bodyPr wrap="square" lIns="0" tIns="0" rIns="0" bIns="0">
             <a:spAutoFit/>
           </a:bodyPr>
           <a:lstStyle/>
@@ -3594,7 +3590,7 @@
           <a:noFill/>
         </p:spPr>
         <p:txBody>
-          <a:bodyPr wrap="square" lIns="0" rIns="0" tIns="0" bIns="0">
+          <a:bodyPr wrap="square" lIns="0" tIns="0" rIns="0" bIns="0">
             <a:spAutoFit/>
           </a:bodyPr>
           <a:lstStyle/>
@@ -3629,7 +3625,7 @@
           <a:noFill/>
         </p:spPr>
         <p:txBody>
-          <a:bodyPr wrap="square" lIns="0" rIns="0" tIns="0" bIns="0">
+          <a:bodyPr wrap="square" lIns="0" tIns="0" rIns="0" bIns="0">
             <a:spAutoFit/>
           </a:bodyPr>
           <a:lstStyle/>
@@ -3728,6 +3724,7 @@
           <a:lstStyle/>
           <a:p>
             <a:pPr algn="ctr"/>
+            <a:endParaRPr/>
           </a:p>
         </p:txBody>
       </p:sp>
@@ -3748,7 +3745,7 @@
           <a:noFill/>
         </p:spPr>
         <p:txBody>
-          <a:bodyPr wrap="square" lIns="0" rIns="0" tIns="0" bIns="0">
+          <a:bodyPr wrap="square" lIns="0" tIns="0" rIns="0" bIns="0">
             <a:spAutoFit/>
           </a:bodyPr>
           <a:lstStyle/>
@@ -3838,6 +3835,7 @@
           <a:lstStyle/>
           <a:p>
             <a:pPr algn="ctr"/>
+            <a:endParaRPr/>
           </a:p>
         </p:txBody>
       </p:sp>
@@ -3858,7 +3856,7 @@
           <a:noFill/>
         </p:spPr>
         <p:txBody>
-          <a:bodyPr wrap="square" lIns="0" rIns="0" tIns="0" bIns="0">
+          <a:bodyPr wrap="square" lIns="0" tIns="0" rIns="0" bIns="0">
             <a:spAutoFit/>
           </a:bodyPr>
           <a:lstStyle/>
@@ -3893,7 +3891,7 @@
           <a:noFill/>
         </p:spPr>
         <p:txBody>
-          <a:bodyPr wrap="square" lIns="0" rIns="0" tIns="0" bIns="0">
+          <a:bodyPr wrap="square" lIns="0" tIns="0" rIns="0" bIns="0">
             <a:spAutoFit/>
           </a:bodyPr>
           <a:lstStyle/>
@@ -3952,6 +3950,7 @@
           <a:lstStyle/>
           <a:p>
             <a:pPr algn="ctr"/>
+            <a:endParaRPr/>
           </a:p>
         </p:txBody>
       </p:sp>
@@ -3996,6 +3995,7 @@
           <a:lstStyle/>
           <a:p>
             <a:pPr algn="ctr"/>
+            <a:endParaRPr/>
           </a:p>
         </p:txBody>
       </p:sp>
@@ -4040,6 +4040,7 @@
           <a:lstStyle/>
           <a:p>
             <a:pPr algn="ctr"/>
+            <a:endParaRPr/>
           </a:p>
         </p:txBody>
       </p:sp>
@@ -4084,6 +4085,7 @@
           <a:lstStyle/>
           <a:p>
             <a:pPr algn="ctr"/>
+            <a:endParaRPr/>
           </a:p>
         </p:txBody>
       </p:sp>
@@ -4128,6 +4130,7 @@
           <a:lstStyle/>
           <a:p>
             <a:pPr algn="ctr"/>
+            <a:endParaRPr/>
           </a:p>
         </p:txBody>
       </p:sp>
@@ -4172,6 +4175,7 @@
           <a:lstStyle/>
           <a:p>
             <a:pPr algn="ctr"/>
+            <a:endParaRPr/>
           </a:p>
         </p:txBody>
       </p:sp>
@@ -4216,6 +4220,7 @@
           <a:lstStyle/>
           <a:p>
             <a:pPr algn="ctr"/>
+            <a:endParaRPr/>
           </a:p>
         </p:txBody>
       </p:sp>
@@ -4260,6 +4265,7 @@
           <a:lstStyle/>
           <a:p>
             <a:pPr algn="ctr"/>
+            <a:endParaRPr/>
           </a:p>
         </p:txBody>
       </p:sp>
@@ -4304,6 +4310,7 @@
           <a:lstStyle/>
           <a:p>
             <a:pPr algn="ctr"/>
+            <a:endParaRPr/>
           </a:p>
         </p:txBody>
       </p:sp>
@@ -4348,6 +4355,7 @@
           <a:lstStyle/>
           <a:p>
             <a:pPr algn="ctr"/>
+            <a:endParaRPr/>
           </a:p>
         </p:txBody>
       </p:sp>
@@ -4392,6 +4400,7 @@
           <a:lstStyle/>
           <a:p>
             <a:pPr algn="ctr"/>
+            <a:endParaRPr/>
           </a:p>
         </p:txBody>
       </p:sp>
@@ -4436,6 +4445,7 @@
           <a:lstStyle/>
           <a:p>
             <a:pPr algn="ctr"/>
+            <a:endParaRPr/>
           </a:p>
         </p:txBody>
       </p:sp>
@@ -4456,7 +4466,7 @@
           <a:noFill/>
         </p:spPr>
         <p:txBody>
-          <a:bodyPr wrap="square" lIns="0" rIns="0" tIns="0" bIns="0">
+          <a:bodyPr wrap="square" lIns="0" tIns="0" rIns="0" bIns="0">
             <a:spAutoFit/>
           </a:bodyPr>
           <a:lstStyle/>
@@ -4515,6 +4525,7 @@
           <a:lstStyle/>
           <a:p>
             <a:pPr algn="ctr"/>
+            <a:endParaRPr/>
           </a:p>
         </p:txBody>
       </p:sp>
@@ -4535,7 +4546,7 @@
           <a:noFill/>
         </p:spPr>
         <p:txBody>
-          <a:bodyPr wrap="square" lIns="0" rIns="0" tIns="0" bIns="0">
+          <a:bodyPr wrap="square" lIns="0" tIns="0" rIns="0" bIns="0">
             <a:spAutoFit/>
           </a:bodyPr>
           <a:lstStyle/>
@@ -4589,15 +4600,7 @@
 </file>
 
 <file path=ppt/slides/slide11.xml><?xml version="1.0" encoding="utf-8"?>
-<p:sld xmlns:a="http://schemas.openxmlformats.org/drawingml/2006/main" xmlns:p="http://schemas.openxmlformats.org/presentationml/2006/main" xmlns:r="http://schemas.openxmlformats.org/officeDocument/2006/relationships">
-  <p:bg>
-    <p:bgPr>
-      <a:solidFill>
-        <a:srgbClr val="FFFFFF"/>
-      </a:solidFill>
-      <a:effectLst/>
-    </p:bgPr>
-  </p:bg>
+<p:sld xmlns:a="http://schemas.openxmlformats.org/drawingml/2006/main" xmlns:r="http://schemas.openxmlformats.org/officeDocument/2006/relationships" xmlns:p="http://schemas.openxmlformats.org/presentationml/2006/main">
   <p:cSld>
     <p:spTree>
       <p:nvGrpSpPr>
@@ -4605,7 +4608,14 @@
         <p:cNvGrpSpPr/>
         <p:nvPr/>
       </p:nvGrpSpPr>
-      <p:grpSpPr/>
+      <p:grpSpPr>
+        <a:xfrm>
+          <a:off x="0" y="0"/>
+          <a:ext cx="0" cy="0"/>
+          <a:chOff x="0" y="0"/>
+          <a:chExt cx="0" cy="0"/>
+        </a:xfrm>
+      </p:grpSpPr>
       <p:sp>
         <p:nvSpPr>
           <p:cNvPr id="2" name="TextBox 1"/>
@@ -4623,7 +4633,7 @@
           <a:noFill/>
         </p:spPr>
         <p:txBody>
-          <a:bodyPr wrap="square" lIns="0" rIns="0" tIns="0" bIns="0">
+          <a:bodyPr wrap="square" lIns="0" tIns="0" rIns="0" bIns="0">
             <a:spAutoFit/>
           </a:bodyPr>
           <a:lstStyle/>
@@ -4658,7 +4668,7 @@
           <a:noFill/>
         </p:spPr>
         <p:txBody>
-          <a:bodyPr wrap="square" lIns="0" rIns="0" tIns="0" bIns="0">
+          <a:bodyPr wrap="square" lIns="0" tIns="0" rIns="0" bIns="0">
             <a:spAutoFit/>
           </a:bodyPr>
           <a:lstStyle/>
@@ -4693,7 +4703,7 @@
           <a:noFill/>
         </p:spPr>
         <p:txBody>
-          <a:bodyPr wrap="square" lIns="0" rIns="0" tIns="0" bIns="0">
+          <a:bodyPr wrap="square" lIns="0" tIns="0" rIns="0" bIns="0">
             <a:spAutoFit/>
           </a:bodyPr>
           <a:lstStyle/>
@@ -4728,7 +4738,7 @@
           <a:noFill/>
         </p:spPr>
         <p:txBody>
-          <a:bodyPr wrap="square" lIns="0" rIns="0" tIns="0" bIns="0">
+          <a:bodyPr wrap="square" lIns="0" tIns="0" rIns="0" bIns="0">
             <a:spAutoFit/>
           </a:bodyPr>
           <a:lstStyle/>
@@ -4763,7 +4773,7 @@
           <a:noFill/>
         </p:spPr>
         <p:txBody>
-          <a:bodyPr wrap="square" lIns="0" rIns="0" tIns="0" bIns="0">
+          <a:bodyPr wrap="square" lIns="0" tIns="0" rIns="0" bIns="0">
             <a:spAutoFit/>
           </a:bodyPr>
           <a:lstStyle/>
@@ -4826,6 +4836,7 @@
           <a:lstStyle/>
           <a:p>
             <a:pPr algn="ctr"/>
+            <a:endParaRPr/>
           </a:p>
         </p:txBody>
       </p:sp>
@@ -4872,6 +4883,7 @@
           <a:lstStyle/>
           <a:p>
             <a:pPr algn="ctr"/>
+            <a:endParaRPr/>
           </a:p>
         </p:txBody>
       </p:sp>
@@ -4892,7 +4904,7 @@
           <a:noFill/>
         </p:spPr>
         <p:txBody>
-          <a:bodyPr wrap="square" lIns="0" rIns="0" tIns="0" bIns="0">
+          <a:bodyPr wrap="square" lIns="0" tIns="0" rIns="0" bIns="0">
             <a:spAutoFit/>
           </a:bodyPr>
           <a:lstStyle/>
@@ -4927,7 +4939,7 @@
           <a:noFill/>
         </p:spPr>
         <p:txBody>
-          <a:bodyPr wrap="square" lIns="0" rIns="0" tIns="0" bIns="0">
+          <a:bodyPr wrap="square" lIns="0" tIns="0" rIns="0" bIns="0">
             <a:spAutoFit/>
           </a:bodyPr>
           <a:lstStyle/>
@@ -4990,6 +5002,7 @@
           <a:lstStyle/>
           <a:p>
             <a:pPr algn="ctr"/>
+            <a:endParaRPr/>
           </a:p>
         </p:txBody>
       </p:sp>
@@ -5036,6 +5049,7 @@
           <a:lstStyle/>
           <a:p>
             <a:pPr algn="ctr"/>
+            <a:endParaRPr/>
           </a:p>
         </p:txBody>
       </p:sp>
@@ -5056,7 +5070,7 @@
           <a:noFill/>
         </p:spPr>
         <p:txBody>
-          <a:bodyPr wrap="square" lIns="0" rIns="0" tIns="0" bIns="0">
+          <a:bodyPr wrap="square" lIns="0" tIns="0" rIns="0" bIns="0">
             <a:spAutoFit/>
           </a:bodyPr>
           <a:lstStyle/>
@@ -5091,7 +5105,7 @@
           <a:noFill/>
         </p:spPr>
         <p:txBody>
-          <a:bodyPr wrap="square" lIns="0" rIns="0" tIns="0" bIns="0">
+          <a:bodyPr wrap="square" lIns="0" tIns="0" rIns="0" bIns="0">
             <a:spAutoFit/>
           </a:bodyPr>
           <a:lstStyle/>
@@ -5118,15 +5132,7 @@
 </file>
 
 <file path=ppt/slides/slide12.xml><?xml version="1.0" encoding="utf-8"?>
-<p:sld xmlns:a="http://schemas.openxmlformats.org/drawingml/2006/main" xmlns:p="http://schemas.openxmlformats.org/presentationml/2006/main" xmlns:r="http://schemas.openxmlformats.org/officeDocument/2006/relationships">
-  <p:bg>
-    <p:bgPr>
-      <a:solidFill>
-        <a:srgbClr val="F4F6F9"/>
-      </a:solidFill>
-      <a:effectLst/>
-    </p:bgPr>
-  </p:bg>
+<p:sld xmlns:a="http://schemas.openxmlformats.org/drawingml/2006/main" xmlns:r="http://schemas.openxmlformats.org/officeDocument/2006/relationships" xmlns:p="http://schemas.openxmlformats.org/presentationml/2006/main">
   <p:cSld>
     <p:spTree>
       <p:nvGrpSpPr>
@@ -5134,7 +5140,14 @@
         <p:cNvGrpSpPr/>
         <p:nvPr/>
       </p:nvGrpSpPr>
-      <p:grpSpPr/>
+      <p:grpSpPr>
+        <a:xfrm>
+          <a:off x="0" y="0"/>
+          <a:ext cx="0" cy="0"/>
+          <a:chOff x="0" y="0"/>
+          <a:chExt cx="0" cy="0"/>
+        </a:xfrm>
+      </p:grpSpPr>
       <p:sp>
         <p:nvSpPr>
           <p:cNvPr id="2" name="TextBox 1"/>
@@ -5152,7 +5165,7 @@
           <a:noFill/>
         </p:spPr>
         <p:txBody>
-          <a:bodyPr wrap="square" lIns="0" rIns="0" tIns="0" bIns="0">
+          <a:bodyPr wrap="square" lIns="0" tIns="0" rIns="0" bIns="0">
             <a:spAutoFit/>
           </a:bodyPr>
           <a:lstStyle/>
@@ -5187,7 +5200,7 @@
           <a:noFill/>
         </p:spPr>
         <p:txBody>
-          <a:bodyPr wrap="square" lIns="0" rIns="0" tIns="0" bIns="0">
+          <a:bodyPr wrap="square" lIns="0" tIns="0" rIns="0" bIns="0">
             <a:spAutoFit/>
           </a:bodyPr>
           <a:lstStyle/>
@@ -5222,7 +5235,7 @@
           <a:noFill/>
         </p:spPr>
         <p:txBody>
-          <a:bodyPr wrap="square" lIns="0" rIns="0" tIns="0" bIns="0">
+          <a:bodyPr wrap="square" lIns="0" tIns="0" rIns="0" bIns="0">
             <a:spAutoFit/>
           </a:bodyPr>
           <a:lstStyle/>
@@ -5257,7 +5270,7 @@
           <a:noFill/>
         </p:spPr>
         <p:txBody>
-          <a:bodyPr wrap="square" lIns="0" rIns="0" tIns="0" bIns="0">
+          <a:bodyPr wrap="square" lIns="0" tIns="0" rIns="0" bIns="0">
             <a:spAutoFit/>
           </a:bodyPr>
           <a:lstStyle/>
@@ -5292,7 +5305,7 @@
           <a:noFill/>
         </p:spPr>
         <p:txBody>
-          <a:bodyPr wrap="square" lIns="0" rIns="0" tIns="0" bIns="0">
+          <a:bodyPr wrap="square" lIns="0" tIns="0" rIns="0" bIns="0">
             <a:spAutoFit/>
           </a:bodyPr>
           <a:lstStyle/>
@@ -5327,7 +5340,7 @@
           <a:noFill/>
         </p:spPr>
         <p:txBody>
-          <a:bodyPr wrap="square" lIns="0" rIns="0" tIns="0" bIns="0">
+          <a:bodyPr wrap="square" lIns="0" tIns="0" rIns="0" bIns="0">
             <a:spAutoFit/>
           </a:bodyPr>
           <a:lstStyle/>
@@ -5426,6 +5439,7 @@
           <a:lstStyle/>
           <a:p>
             <a:pPr algn="ctr"/>
+            <a:endParaRPr/>
           </a:p>
         </p:txBody>
       </p:sp>
@@ -5446,7 +5460,7 @@
           <a:noFill/>
         </p:spPr>
         <p:txBody>
-          <a:bodyPr wrap="square" lIns="0" rIns="0" tIns="0" bIns="0">
+          <a:bodyPr wrap="square" lIns="0" tIns="0" rIns="0" bIns="0">
             <a:spAutoFit/>
           </a:bodyPr>
           <a:lstStyle/>
@@ -5518,6 +5532,7 @@
           <a:lstStyle/>
           <a:p>
             <a:pPr algn="ctr"/>
+            <a:endParaRPr/>
           </a:p>
         </p:txBody>
       </p:sp>
@@ -5538,7 +5553,7 @@
           <a:noFill/>
         </p:spPr>
         <p:txBody>
-          <a:bodyPr wrap="square" lIns="0" rIns="0" tIns="0" bIns="0">
+          <a:bodyPr wrap="square" lIns="0" tIns="0" rIns="0" bIns="0">
             <a:spAutoFit/>
           </a:bodyPr>
           <a:lstStyle/>
@@ -5599,6 +5614,7 @@
           <a:lstStyle/>
           <a:p>
             <a:pPr algn="ctr"/>
+            <a:endParaRPr/>
           </a:p>
         </p:txBody>
       </p:sp>
@@ -5619,7 +5635,7 @@
           <a:noFill/>
         </p:spPr>
         <p:txBody>
-          <a:bodyPr wrap="square" lIns="0" rIns="0" tIns="0" bIns="0">
+          <a:bodyPr wrap="square" lIns="0" tIns="0" rIns="0" bIns="0">
             <a:spAutoFit/>
           </a:bodyPr>
           <a:lstStyle/>
@@ -5654,7 +5670,7 @@
           <a:noFill/>
         </p:spPr>
         <p:txBody>
-          <a:bodyPr wrap="square" lIns="0" rIns="0" tIns="0" bIns="0">
+          <a:bodyPr wrap="square" lIns="0" tIns="0" rIns="0" bIns="0">
             <a:spAutoFit/>
           </a:bodyPr>
           <a:lstStyle/>
@@ -5715,6 +5731,7 @@
           <a:lstStyle/>
           <a:p>
             <a:pPr algn="ctr"/>
+            <a:endParaRPr/>
           </a:p>
         </p:txBody>
       </p:sp>
@@ -5735,7 +5752,7 @@
           <a:noFill/>
         </p:spPr>
         <p:txBody>
-          <a:bodyPr wrap="square" lIns="0" rIns="0" tIns="0" bIns="0">
+          <a:bodyPr wrap="square" lIns="0" tIns="0" rIns="0" bIns="0">
             <a:spAutoFit/>
           </a:bodyPr>
           <a:lstStyle/>
@@ -5770,7 +5787,7 @@
           <a:noFill/>
         </p:spPr>
         <p:txBody>
-          <a:bodyPr wrap="square" lIns="0" rIns="0" tIns="0" bIns="0">
+          <a:bodyPr wrap="square" lIns="0" tIns="0" rIns="0" bIns="0">
             <a:spAutoFit/>
           </a:bodyPr>
           <a:lstStyle/>
@@ -5831,6 +5848,7 @@
           <a:lstStyle/>
           <a:p>
             <a:pPr algn="ctr"/>
+            <a:endParaRPr/>
           </a:p>
         </p:txBody>
       </p:sp>
@@ -5851,7 +5869,7 @@
           <a:noFill/>
         </p:spPr>
         <p:txBody>
-          <a:bodyPr wrap="square" lIns="0" rIns="0" tIns="0" bIns="0">
+          <a:bodyPr wrap="square" lIns="0" tIns="0" rIns="0" bIns="0">
             <a:spAutoFit/>
           </a:bodyPr>
           <a:lstStyle/>
@@ -5886,7 +5904,7 @@
           <a:noFill/>
         </p:spPr>
         <p:txBody>
-          <a:bodyPr wrap="square" lIns="0" rIns="0" tIns="0" bIns="0">
+          <a:bodyPr wrap="square" lIns="0" tIns="0" rIns="0" bIns="0">
             <a:spAutoFit/>
           </a:bodyPr>
           <a:lstStyle/>
@@ -5947,6 +5965,7 @@
           <a:lstStyle/>
           <a:p>
             <a:pPr algn="ctr"/>
+            <a:endParaRPr/>
           </a:p>
         </p:txBody>
       </p:sp>
@@ -5967,7 +5986,7 @@
           <a:noFill/>
         </p:spPr>
         <p:txBody>
-          <a:bodyPr wrap="square" lIns="0" rIns="0" tIns="0" bIns="0">
+          <a:bodyPr wrap="square" lIns="0" tIns="0" rIns="0" bIns="0">
             <a:spAutoFit/>
           </a:bodyPr>
           <a:lstStyle/>
@@ -6002,7 +6021,7 @@
           <a:noFill/>
         </p:spPr>
         <p:txBody>
-          <a:bodyPr wrap="square" lIns="0" rIns="0" tIns="0" bIns="0">
+          <a:bodyPr wrap="square" lIns="0" tIns="0" rIns="0" bIns="0">
             <a:spAutoFit/>
           </a:bodyPr>
           <a:lstStyle/>
@@ -6063,6 +6082,7 @@
           <a:lstStyle/>
           <a:p>
             <a:pPr algn="ctr"/>
+            <a:endParaRPr/>
           </a:p>
         </p:txBody>
       </p:sp>
@@ -6083,7 +6103,7 @@
           <a:noFill/>
         </p:spPr>
         <p:txBody>
-          <a:bodyPr wrap="square" lIns="0" rIns="0" tIns="0" bIns="0">
+          <a:bodyPr wrap="square" lIns="0" tIns="0" rIns="0" bIns="0">
             <a:spAutoFit/>
           </a:bodyPr>
           <a:lstStyle/>
@@ -6118,7 +6138,7 @@
           <a:noFill/>
         </p:spPr>
         <p:txBody>
-          <a:bodyPr wrap="square" lIns="0" rIns="0" tIns="0" bIns="0">
+          <a:bodyPr wrap="square" lIns="0" tIns="0" rIns="0" bIns="0">
             <a:spAutoFit/>
           </a:bodyPr>
           <a:lstStyle/>
@@ -6145,15 +6165,7 @@
 </file>
 
 <file path=ppt/slides/slide13.xml><?xml version="1.0" encoding="utf-8"?>
-<p:sld xmlns:a="http://schemas.openxmlformats.org/drawingml/2006/main" xmlns:p="http://schemas.openxmlformats.org/presentationml/2006/main" xmlns:r="http://schemas.openxmlformats.org/officeDocument/2006/relationships">
-  <p:bg>
-    <p:bgPr>
-      <a:solidFill>
-        <a:srgbClr val="FFFFFF"/>
-      </a:solidFill>
-      <a:effectLst/>
-    </p:bgPr>
-  </p:bg>
+<p:sld xmlns:a="http://schemas.openxmlformats.org/drawingml/2006/main" xmlns:r="http://schemas.openxmlformats.org/officeDocument/2006/relationships" xmlns:p="http://schemas.openxmlformats.org/presentationml/2006/main">
   <p:cSld>
     <p:spTree>
       <p:nvGrpSpPr>
@@ -6161,7 +6173,14 @@
         <p:cNvGrpSpPr/>
         <p:nvPr/>
       </p:nvGrpSpPr>
-      <p:grpSpPr/>
+      <p:grpSpPr>
+        <a:xfrm>
+          <a:off x="0" y="0"/>
+          <a:ext cx="0" cy="0"/>
+          <a:chOff x="0" y="0"/>
+          <a:chExt cx="0" cy="0"/>
+        </a:xfrm>
+      </p:grpSpPr>
       <p:sp>
         <p:nvSpPr>
           <p:cNvPr id="2" name="TextBox 1"/>
@@ -6179,7 +6198,7 @@
           <a:noFill/>
         </p:spPr>
         <p:txBody>
-          <a:bodyPr wrap="square" lIns="0" rIns="0" tIns="0" bIns="0">
+          <a:bodyPr wrap="square" lIns="0" tIns="0" rIns="0" bIns="0">
             <a:spAutoFit/>
           </a:bodyPr>
           <a:lstStyle/>
@@ -6214,7 +6233,7 @@
           <a:noFill/>
         </p:spPr>
         <p:txBody>
-          <a:bodyPr wrap="square" lIns="0" rIns="0" tIns="0" bIns="0">
+          <a:bodyPr wrap="square" lIns="0" tIns="0" rIns="0" bIns="0">
             <a:spAutoFit/>
           </a:bodyPr>
           <a:lstStyle/>
@@ -6249,7 +6268,7 @@
           <a:noFill/>
         </p:spPr>
         <p:txBody>
-          <a:bodyPr wrap="square" lIns="0" rIns="0" tIns="0" bIns="0">
+          <a:bodyPr wrap="square" lIns="0" tIns="0" rIns="0" bIns="0">
             <a:spAutoFit/>
           </a:bodyPr>
           <a:lstStyle/>
@@ -6284,7 +6303,7 @@
           <a:noFill/>
         </p:spPr>
         <p:txBody>
-          <a:bodyPr wrap="square" lIns="0" rIns="0" tIns="0" bIns="0">
+          <a:bodyPr wrap="square" lIns="0" tIns="0" rIns="0" bIns="0">
             <a:spAutoFit/>
           </a:bodyPr>
           <a:lstStyle/>
@@ -6319,7 +6338,7 @@
           <a:noFill/>
         </p:spPr>
         <p:txBody>
-          <a:bodyPr wrap="square" lIns="0" rIns="0" tIns="0" bIns="0">
+          <a:bodyPr wrap="square" lIns="0" tIns="0" rIns="0" bIns="0">
             <a:spAutoFit/>
           </a:bodyPr>
           <a:lstStyle/>
@@ -6354,7 +6373,7 @@
           <a:noFill/>
         </p:spPr>
         <p:txBody>
-          <a:bodyPr wrap="square" lIns="0" rIns="0" tIns="0" bIns="0">
+          <a:bodyPr wrap="square" lIns="0" tIns="0" rIns="0" bIns="0">
             <a:spAutoFit/>
           </a:bodyPr>
           <a:lstStyle/>
@@ -6453,6 +6472,7 @@
           <a:lstStyle/>
           <a:p>
             <a:pPr algn="ctr"/>
+            <a:endParaRPr/>
           </a:p>
         </p:txBody>
       </p:sp>
@@ -6473,7 +6493,7 @@
           <a:noFill/>
         </p:spPr>
         <p:txBody>
-          <a:bodyPr wrap="square" lIns="0" rIns="0" tIns="0" bIns="0">
+          <a:bodyPr wrap="square" lIns="0" tIns="0" rIns="0" bIns="0">
             <a:spAutoFit/>
           </a:bodyPr>
           <a:lstStyle/>
@@ -6545,6 +6565,7 @@
           <a:lstStyle/>
           <a:p>
             <a:pPr algn="ctr"/>
+            <a:endParaRPr/>
           </a:p>
         </p:txBody>
       </p:sp>
@@ -6565,7 +6586,7 @@
           <a:noFill/>
         </p:spPr>
         <p:txBody>
-          <a:bodyPr wrap="square" lIns="0" rIns="0" tIns="0" bIns="0">
+          <a:bodyPr wrap="square" lIns="0" tIns="0" rIns="0" bIns="0">
             <a:spAutoFit/>
           </a:bodyPr>
           <a:lstStyle/>
@@ -6624,6 +6645,7 @@
           <a:lstStyle/>
           <a:p>
             <a:pPr algn="ctr"/>
+            <a:endParaRPr/>
           </a:p>
         </p:txBody>
       </p:sp>
@@ -6668,6 +6690,7 @@
           <a:lstStyle/>
           <a:p>
             <a:pPr algn="ctr"/>
+            <a:endParaRPr/>
           </a:p>
         </p:txBody>
       </p:sp>
@@ -6712,6 +6735,7 @@
           <a:lstStyle/>
           <a:p>
             <a:pPr algn="ctr"/>
+            <a:endParaRPr/>
           </a:p>
         </p:txBody>
       </p:sp>
@@ -6756,6 +6780,7 @@
           <a:lstStyle/>
           <a:p>
             <a:pPr algn="ctr"/>
+            <a:endParaRPr/>
           </a:p>
         </p:txBody>
       </p:sp>
@@ -6800,6 +6825,7 @@
           <a:lstStyle/>
           <a:p>
             <a:pPr algn="ctr"/>
+            <a:endParaRPr/>
           </a:p>
         </p:txBody>
       </p:sp>
@@ -6844,6 +6870,7 @@
           <a:lstStyle/>
           <a:p>
             <a:pPr algn="ctr"/>
+            <a:endParaRPr/>
           </a:p>
         </p:txBody>
       </p:sp>
@@ -6888,6 +6915,7 @@
           <a:lstStyle/>
           <a:p>
             <a:pPr algn="ctr"/>
+            <a:endParaRPr/>
           </a:p>
         </p:txBody>
       </p:sp>
@@ -6932,6 +6960,7 @@
           <a:lstStyle/>
           <a:p>
             <a:pPr algn="ctr"/>
+            <a:endParaRPr/>
           </a:p>
         </p:txBody>
       </p:sp>
@@ -6976,6 +7005,7 @@
           <a:lstStyle/>
           <a:p>
             <a:pPr algn="ctr"/>
+            <a:endParaRPr/>
           </a:p>
         </p:txBody>
       </p:sp>
@@ -7020,6 +7050,7 @@
           <a:lstStyle/>
           <a:p>
             <a:pPr algn="ctr"/>
+            <a:endParaRPr/>
           </a:p>
         </p:txBody>
       </p:sp>
@@ -7064,6 +7095,7 @@
           <a:lstStyle/>
           <a:p>
             <a:pPr algn="ctr"/>
+            <a:endParaRPr/>
           </a:p>
         </p:txBody>
       </p:sp>
@@ -7108,6 +7140,7 @@
           <a:lstStyle/>
           <a:p>
             <a:pPr algn="ctr"/>
+            <a:endParaRPr/>
           </a:p>
         </p:txBody>
       </p:sp>
@@ -7152,6 +7185,7 @@
           <a:lstStyle/>
           <a:p>
             <a:pPr algn="ctr"/>
+            <a:endParaRPr/>
           </a:p>
         </p:txBody>
       </p:sp>
@@ -7196,6 +7230,7 @@
           <a:lstStyle/>
           <a:p>
             <a:pPr algn="ctr"/>
+            <a:endParaRPr/>
           </a:p>
         </p:txBody>
       </p:sp>
@@ -7240,6 +7275,7 @@
           <a:lstStyle/>
           <a:p>
             <a:pPr algn="ctr"/>
+            <a:endParaRPr/>
           </a:p>
         </p:txBody>
       </p:sp>
@@ -7284,6 +7320,7 @@
           <a:lstStyle/>
           <a:p>
             <a:pPr algn="ctr"/>
+            <a:endParaRPr/>
           </a:p>
         </p:txBody>
       </p:sp>
@@ -7328,6 +7365,7 @@
           <a:lstStyle/>
           <a:p>
             <a:pPr algn="ctr"/>
+            <a:endParaRPr/>
           </a:p>
         </p:txBody>
       </p:sp>
@@ -7372,6 +7410,7 @@
           <a:lstStyle/>
           <a:p>
             <a:pPr algn="ctr"/>
+            <a:endParaRPr/>
           </a:p>
         </p:txBody>
       </p:sp>
@@ -7416,6 +7455,7 @@
           <a:lstStyle/>
           <a:p>
             <a:pPr algn="ctr"/>
+            <a:endParaRPr/>
           </a:p>
         </p:txBody>
       </p:sp>
@@ -7460,6 +7500,7 @@
           <a:lstStyle/>
           <a:p>
             <a:pPr algn="ctr"/>
+            <a:endParaRPr/>
           </a:p>
         </p:txBody>
       </p:sp>
@@ -7504,6 +7545,7 @@
           <a:lstStyle/>
           <a:p>
             <a:pPr algn="ctr"/>
+            <a:endParaRPr/>
           </a:p>
         </p:txBody>
       </p:sp>
@@ -7548,6 +7590,7 @@
           <a:lstStyle/>
           <a:p>
             <a:pPr algn="ctr"/>
+            <a:endParaRPr/>
           </a:p>
         </p:txBody>
       </p:sp>
@@ -7592,6 +7635,7 @@
           <a:lstStyle/>
           <a:p>
             <a:pPr algn="ctr"/>
+            <a:endParaRPr/>
           </a:p>
         </p:txBody>
       </p:sp>
@@ -7636,6 +7680,7 @@
           <a:lstStyle/>
           <a:p>
             <a:pPr algn="ctr"/>
+            <a:endParaRPr/>
           </a:p>
         </p:txBody>
       </p:sp>
@@ -7680,6 +7725,7 @@
           <a:lstStyle/>
           <a:p>
             <a:pPr algn="ctr"/>
+            <a:endParaRPr/>
           </a:p>
         </p:txBody>
       </p:sp>
@@ -7724,6 +7770,7 @@
           <a:lstStyle/>
           <a:p>
             <a:pPr algn="ctr"/>
+            <a:endParaRPr/>
           </a:p>
         </p:txBody>
       </p:sp>
@@ -7768,6 +7815,7 @@
           <a:lstStyle/>
           <a:p>
             <a:pPr algn="ctr"/>
+            <a:endParaRPr/>
           </a:p>
         </p:txBody>
       </p:sp>
@@ -7812,6 +7860,7 @@
           <a:lstStyle/>
           <a:p>
             <a:pPr algn="ctr"/>
+            <a:endParaRPr/>
           </a:p>
         </p:txBody>
       </p:sp>
@@ -7856,6 +7905,7 @@
           <a:lstStyle/>
           <a:p>
             <a:pPr algn="ctr"/>
+            <a:endParaRPr/>
           </a:p>
         </p:txBody>
       </p:sp>
@@ -7900,6 +7950,7 @@
           <a:lstStyle/>
           <a:p>
             <a:pPr algn="ctr"/>
+            <a:endParaRPr/>
           </a:p>
         </p:txBody>
       </p:sp>
@@ -7944,6 +7995,7 @@
           <a:lstStyle/>
           <a:p>
             <a:pPr algn="ctr"/>
+            <a:endParaRPr/>
           </a:p>
         </p:txBody>
       </p:sp>
@@ -7988,6 +8040,7 @@
           <a:lstStyle/>
           <a:p>
             <a:pPr algn="ctr"/>
+            <a:endParaRPr/>
           </a:p>
         </p:txBody>
       </p:sp>
@@ -8032,6 +8085,7 @@
           <a:lstStyle/>
           <a:p>
             <a:pPr algn="ctr"/>
+            <a:endParaRPr/>
           </a:p>
         </p:txBody>
       </p:sp>
@@ -8076,6 +8130,7 @@
           <a:lstStyle/>
           <a:p>
             <a:pPr algn="ctr"/>
+            <a:endParaRPr/>
           </a:p>
         </p:txBody>
       </p:sp>
@@ -8120,6 +8175,7 @@
           <a:lstStyle/>
           <a:p>
             <a:pPr algn="ctr"/>
+            <a:endParaRPr/>
           </a:p>
         </p:txBody>
       </p:sp>
@@ -8164,6 +8220,7 @@
           <a:lstStyle/>
           <a:p>
             <a:pPr algn="ctr"/>
+            <a:endParaRPr/>
           </a:p>
         </p:txBody>
       </p:sp>
@@ -8208,6 +8265,7 @@
           <a:lstStyle/>
           <a:p>
             <a:pPr algn="ctr"/>
+            <a:endParaRPr/>
           </a:p>
         </p:txBody>
       </p:sp>
@@ -8252,6 +8310,7 @@
           <a:lstStyle/>
           <a:p>
             <a:pPr algn="ctr"/>
+            <a:endParaRPr/>
           </a:p>
         </p:txBody>
       </p:sp>
@@ -8296,6 +8355,7 @@
           <a:lstStyle/>
           <a:p>
             <a:pPr algn="ctr"/>
+            <a:endParaRPr/>
           </a:p>
         </p:txBody>
       </p:sp>
@@ -8340,6 +8400,7 @@
           <a:lstStyle/>
           <a:p>
             <a:pPr algn="ctr"/>
+            <a:endParaRPr/>
           </a:p>
         </p:txBody>
       </p:sp>
@@ -8384,6 +8445,7 @@
           <a:lstStyle/>
           <a:p>
             <a:pPr algn="ctr"/>
+            <a:endParaRPr/>
           </a:p>
         </p:txBody>
       </p:sp>
@@ -8428,6 +8490,7 @@
           <a:lstStyle/>
           <a:p>
             <a:pPr algn="ctr"/>
+            <a:endParaRPr/>
           </a:p>
         </p:txBody>
       </p:sp>
@@ -8448,7 +8511,7 @@
           <a:noFill/>
         </p:spPr>
         <p:txBody>
-          <a:bodyPr wrap="square" lIns="0" rIns="0" tIns="0" bIns="0">
+          <a:bodyPr wrap="square" lIns="0" tIns="0" rIns="0" bIns="0">
             <a:spAutoFit/>
           </a:bodyPr>
           <a:lstStyle/>
@@ -8475,15 +8538,7 @@
 </file>
 
 <file path=ppt/slides/slide14.xml><?xml version="1.0" encoding="utf-8"?>
-<p:sld xmlns:a="http://schemas.openxmlformats.org/drawingml/2006/main" xmlns:p="http://schemas.openxmlformats.org/presentationml/2006/main" xmlns:r="http://schemas.openxmlformats.org/officeDocument/2006/relationships">
-  <p:bg>
-    <p:bgPr>
-      <a:solidFill>
-        <a:srgbClr val="F4F6F9"/>
-      </a:solidFill>
-      <a:effectLst/>
-    </p:bgPr>
-  </p:bg>
+<p:sld xmlns:a="http://schemas.openxmlformats.org/drawingml/2006/main" xmlns:r="http://schemas.openxmlformats.org/officeDocument/2006/relationships" xmlns:p="http://schemas.openxmlformats.org/presentationml/2006/main">
   <p:cSld>
     <p:spTree>
       <p:nvGrpSpPr>
@@ -8491,7 +8546,14 @@
         <p:cNvGrpSpPr/>
         <p:nvPr/>
       </p:nvGrpSpPr>
-      <p:grpSpPr/>
+      <p:grpSpPr>
+        <a:xfrm>
+          <a:off x="0" y="0"/>
+          <a:ext cx="0" cy="0"/>
+          <a:chOff x="0" y="0"/>
+          <a:chExt cx="0" cy="0"/>
+        </a:xfrm>
+      </p:grpSpPr>
       <p:sp>
         <p:nvSpPr>
           <p:cNvPr id="2" name="TextBox 1"/>
@@ -8509,7 +8571,7 @@
           <a:noFill/>
         </p:spPr>
         <p:txBody>
-          <a:bodyPr wrap="square" lIns="0" rIns="0" tIns="0" bIns="0">
+          <a:bodyPr wrap="square" lIns="0" tIns="0" rIns="0" bIns="0">
             <a:spAutoFit/>
           </a:bodyPr>
           <a:lstStyle/>
@@ -8544,7 +8606,7 @@
           <a:noFill/>
         </p:spPr>
         <p:txBody>
-          <a:bodyPr wrap="square" lIns="0" rIns="0" tIns="0" bIns="0">
+          <a:bodyPr wrap="square" lIns="0" tIns="0" rIns="0" bIns="0">
             <a:spAutoFit/>
           </a:bodyPr>
           <a:lstStyle/>
@@ -8579,7 +8641,7 @@
           <a:noFill/>
         </p:spPr>
         <p:txBody>
-          <a:bodyPr wrap="square" lIns="0" rIns="0" tIns="0" bIns="0">
+          <a:bodyPr wrap="square" lIns="0" tIns="0" rIns="0" bIns="0">
             <a:spAutoFit/>
           </a:bodyPr>
           <a:lstStyle/>
@@ -8614,7 +8676,7 @@
           <a:noFill/>
         </p:spPr>
         <p:txBody>
-          <a:bodyPr wrap="square" lIns="0" rIns="0" tIns="0" bIns="0">
+          <a:bodyPr wrap="square" lIns="0" tIns="0" rIns="0" bIns="0">
             <a:spAutoFit/>
           </a:bodyPr>
           <a:lstStyle/>
@@ -8649,7 +8711,7 @@
           <a:noFill/>
         </p:spPr>
         <p:txBody>
-          <a:bodyPr wrap="square" lIns="0" rIns="0" tIns="0" bIns="0">
+          <a:bodyPr wrap="square" lIns="0" tIns="0" rIns="0" bIns="0">
             <a:spAutoFit/>
           </a:bodyPr>
           <a:lstStyle/>
@@ -8684,7 +8746,7 @@
           <a:noFill/>
         </p:spPr>
         <p:txBody>
-          <a:bodyPr wrap="square" lIns="0" rIns="0" tIns="0" bIns="0">
+          <a:bodyPr wrap="square" lIns="0" tIns="0" rIns="0" bIns="0">
             <a:spAutoFit/>
           </a:bodyPr>
           <a:lstStyle/>
@@ -8799,6 +8861,7 @@
           <a:lstStyle/>
           <a:p>
             <a:pPr algn="ctr"/>
+            <a:endParaRPr/>
           </a:p>
         </p:txBody>
       </p:sp>
@@ -8819,7 +8882,7 @@
           <a:noFill/>
         </p:spPr>
         <p:txBody>
-          <a:bodyPr wrap="square" lIns="0" rIns="0" tIns="0" bIns="0">
+          <a:bodyPr wrap="square" lIns="0" tIns="0" rIns="0" bIns="0">
             <a:spAutoFit/>
           </a:bodyPr>
           <a:lstStyle/>
@@ -8891,6 +8954,7 @@
           <a:lstStyle/>
           <a:p>
             <a:pPr algn="ctr"/>
+            <a:endParaRPr/>
           </a:p>
         </p:txBody>
       </p:sp>
@@ -8911,7 +8975,7 @@
           <a:noFill/>
         </p:spPr>
         <p:txBody>
-          <a:bodyPr wrap="square" lIns="0" rIns="0" tIns="0" bIns="0">
+          <a:bodyPr wrap="square" lIns="0" tIns="0" rIns="0" bIns="0">
             <a:spAutoFit/>
           </a:bodyPr>
           <a:lstStyle/>
@@ -8974,6 +9038,7 @@
           <a:lstStyle/>
           <a:p>
             <a:pPr algn="ctr"/>
+            <a:endParaRPr/>
           </a:p>
         </p:txBody>
       </p:sp>
@@ -8994,7 +9059,7 @@
           <a:noFill/>
         </p:spPr>
         <p:txBody>
-          <a:bodyPr wrap="square" lIns="0" rIns="0" tIns="0" bIns="0">
+          <a:bodyPr wrap="square" lIns="0" tIns="0" rIns="0" bIns="0">
             <a:spAutoFit/>
           </a:bodyPr>
           <a:lstStyle/>
@@ -9029,7 +9094,7 @@
           <a:noFill/>
         </p:spPr>
         <p:txBody>
-          <a:bodyPr wrap="square" lIns="0" rIns="0" tIns="0" bIns="0">
+          <a:bodyPr wrap="square" lIns="0" tIns="0" rIns="0" bIns="0">
             <a:spAutoFit/>
           </a:bodyPr>
           <a:lstStyle/>
@@ -9064,7 +9129,7 @@
           <a:noFill/>
         </p:spPr>
         <p:txBody>
-          <a:bodyPr wrap="square" lIns="0" rIns="0" tIns="0" bIns="0">
+          <a:bodyPr wrap="square" lIns="0" tIns="0" rIns="0" bIns="0">
             <a:spAutoFit/>
           </a:bodyPr>
           <a:lstStyle/>
@@ -9127,6 +9192,7 @@
           <a:lstStyle/>
           <a:p>
             <a:pPr algn="ctr"/>
+            <a:endParaRPr/>
           </a:p>
         </p:txBody>
       </p:sp>
@@ -9147,7 +9213,7 @@
           <a:noFill/>
         </p:spPr>
         <p:txBody>
-          <a:bodyPr wrap="square" lIns="0" rIns="0" tIns="0" bIns="0">
+          <a:bodyPr wrap="square" lIns="0" tIns="0" rIns="0" bIns="0">
             <a:spAutoFit/>
           </a:bodyPr>
           <a:lstStyle/>
@@ -9182,7 +9248,7 @@
           <a:noFill/>
         </p:spPr>
         <p:txBody>
-          <a:bodyPr wrap="square" lIns="0" rIns="0" tIns="0" bIns="0">
+          <a:bodyPr wrap="square" lIns="0" tIns="0" rIns="0" bIns="0">
             <a:spAutoFit/>
           </a:bodyPr>
           <a:lstStyle/>
@@ -9217,7 +9283,7 @@
           <a:noFill/>
         </p:spPr>
         <p:txBody>
-          <a:bodyPr wrap="square" lIns="0" rIns="0" tIns="0" bIns="0">
+          <a:bodyPr wrap="square" lIns="0" tIns="0" rIns="0" bIns="0">
             <a:spAutoFit/>
           </a:bodyPr>
           <a:lstStyle/>
@@ -9280,6 +9346,7 @@
           <a:lstStyle/>
           <a:p>
             <a:pPr algn="ctr"/>
+            <a:endParaRPr/>
           </a:p>
         </p:txBody>
       </p:sp>
@@ -9300,7 +9367,7 @@
           <a:noFill/>
         </p:spPr>
         <p:txBody>
-          <a:bodyPr wrap="square" lIns="0" rIns="0" tIns="0" bIns="0">
+          <a:bodyPr wrap="square" lIns="0" tIns="0" rIns="0" bIns="0">
             <a:spAutoFit/>
           </a:bodyPr>
           <a:lstStyle/>
@@ -9335,7 +9402,7 @@
           <a:noFill/>
         </p:spPr>
         <p:txBody>
-          <a:bodyPr wrap="square" lIns="0" rIns="0" tIns="0" bIns="0">
+          <a:bodyPr wrap="square" lIns="0" tIns="0" rIns="0" bIns="0">
             <a:spAutoFit/>
           </a:bodyPr>
           <a:lstStyle/>
@@ -9370,7 +9437,7 @@
           <a:noFill/>
         </p:spPr>
         <p:txBody>
-          <a:bodyPr wrap="square" lIns="0" rIns="0" tIns="0" bIns="0">
+          <a:bodyPr wrap="square" lIns="0" tIns="0" rIns="0" bIns="0">
             <a:spAutoFit/>
           </a:bodyPr>
           <a:lstStyle/>
@@ -9405,7 +9472,7 @@
           <a:noFill/>
         </p:spPr>
         <p:txBody>
-          <a:bodyPr wrap="square" lIns="0" rIns="0" tIns="0" bIns="0">
+          <a:bodyPr wrap="square" lIns="0" tIns="0" rIns="0" bIns="0">
             <a:spAutoFit/>
           </a:bodyPr>
           <a:lstStyle/>
@@ -9432,15 +9499,7 @@
 </file>
 
 <file path=ppt/slides/slide15.xml><?xml version="1.0" encoding="utf-8"?>
-<p:sld xmlns:a="http://schemas.openxmlformats.org/drawingml/2006/main" xmlns:p="http://schemas.openxmlformats.org/presentationml/2006/main" xmlns:r="http://schemas.openxmlformats.org/officeDocument/2006/relationships">
-  <p:bg>
-    <p:bgPr>
-      <a:solidFill>
-        <a:srgbClr val="FFFFFF"/>
-      </a:solidFill>
-      <a:effectLst/>
-    </p:bgPr>
-  </p:bg>
+<p:sld xmlns:a="http://schemas.openxmlformats.org/drawingml/2006/main" xmlns:r="http://schemas.openxmlformats.org/officeDocument/2006/relationships" xmlns:p="http://schemas.openxmlformats.org/presentationml/2006/main">
   <p:cSld>
     <p:spTree>
       <p:nvGrpSpPr>
@@ -9448,7 +9507,14 @@
         <p:cNvGrpSpPr/>
         <p:nvPr/>
       </p:nvGrpSpPr>
-      <p:grpSpPr/>
+      <p:grpSpPr>
+        <a:xfrm>
+          <a:off x="0" y="0"/>
+          <a:ext cx="0" cy="0"/>
+          <a:chOff x="0" y="0"/>
+          <a:chExt cx="0" cy="0"/>
+        </a:xfrm>
+      </p:grpSpPr>
       <p:sp>
         <p:nvSpPr>
           <p:cNvPr id="2" name="TextBox 1"/>
@@ -9466,7 +9532,7 @@
           <a:noFill/>
         </p:spPr>
         <p:txBody>
-          <a:bodyPr wrap="square" lIns="0" rIns="0" tIns="0" bIns="0">
+          <a:bodyPr wrap="square" lIns="0" tIns="0" rIns="0" bIns="0">
             <a:spAutoFit/>
           </a:bodyPr>
           <a:lstStyle/>
@@ -9501,7 +9567,7 @@
           <a:noFill/>
         </p:spPr>
         <p:txBody>
-          <a:bodyPr wrap="square" lIns="0" rIns="0" tIns="0" bIns="0">
+          <a:bodyPr wrap="square" lIns="0" tIns="0" rIns="0" bIns="0">
             <a:spAutoFit/>
           </a:bodyPr>
           <a:lstStyle/>
@@ -9536,7 +9602,7 @@
           <a:noFill/>
         </p:spPr>
         <p:txBody>
-          <a:bodyPr wrap="square" lIns="0" rIns="0" tIns="0" bIns="0">
+          <a:bodyPr wrap="square" lIns="0" tIns="0" rIns="0" bIns="0">
             <a:spAutoFit/>
           </a:bodyPr>
           <a:lstStyle/>
@@ -9571,7 +9637,7 @@
           <a:noFill/>
         </p:spPr>
         <p:txBody>
-          <a:bodyPr wrap="square" lIns="0" rIns="0" tIns="0" bIns="0">
+          <a:bodyPr wrap="square" lIns="0" tIns="0" rIns="0" bIns="0">
             <a:spAutoFit/>
           </a:bodyPr>
           <a:lstStyle/>
@@ -9606,7 +9672,7 @@
           <a:noFill/>
         </p:spPr>
         <p:txBody>
-          <a:bodyPr wrap="square" lIns="0" rIns="0" tIns="0" bIns="0">
+          <a:bodyPr wrap="square" lIns="0" tIns="0" rIns="0" bIns="0">
             <a:spAutoFit/>
           </a:bodyPr>
           <a:lstStyle/>
@@ -9641,7 +9707,7 @@
           <a:noFill/>
         </p:spPr>
         <p:txBody>
-          <a:bodyPr wrap="square" lIns="0" rIns="0" tIns="0" bIns="0">
+          <a:bodyPr wrap="square" lIns="0" tIns="0" rIns="0" bIns="0">
             <a:spAutoFit/>
           </a:bodyPr>
           <a:lstStyle/>
@@ -9740,6 +9806,7 @@
           <a:lstStyle/>
           <a:p>
             <a:pPr algn="ctr"/>
+            <a:endParaRPr/>
           </a:p>
         </p:txBody>
       </p:sp>
@@ -9760,7 +9827,7 @@
           <a:noFill/>
         </p:spPr>
         <p:txBody>
-          <a:bodyPr wrap="square" lIns="0" rIns="0" tIns="0" bIns="0">
+          <a:bodyPr wrap="square" lIns="0" tIns="0" rIns="0" bIns="0">
             <a:spAutoFit/>
           </a:bodyPr>
           <a:lstStyle/>
@@ -9832,6 +9899,7 @@
           <a:lstStyle/>
           <a:p>
             <a:pPr algn="ctr"/>
+            <a:endParaRPr/>
           </a:p>
         </p:txBody>
       </p:sp>
@@ -9852,7 +9920,7 @@
           <a:noFill/>
         </p:spPr>
         <p:txBody>
-          <a:bodyPr wrap="square" lIns="0" rIns="0" tIns="0" bIns="0">
+          <a:bodyPr wrap="square" lIns="0" tIns="0" rIns="0" bIns="0">
             <a:spAutoFit/>
           </a:bodyPr>
           <a:lstStyle/>
@@ -9887,7 +9955,7 @@
           <a:noFill/>
         </p:spPr>
         <p:txBody>
-          <a:bodyPr wrap="square" lIns="0" rIns="0" tIns="0" bIns="0">
+          <a:bodyPr wrap="square" lIns="0" tIns="0" rIns="0" bIns="0">
             <a:spAutoFit/>
           </a:bodyPr>
           <a:lstStyle/>
@@ -9946,6 +10014,7 @@
           <a:lstStyle/>
           <a:p>
             <a:pPr algn="ctr"/>
+            <a:endParaRPr/>
           </a:p>
         </p:txBody>
       </p:sp>
@@ -9966,7 +10035,7 @@
           <a:noFill/>
         </p:spPr>
         <p:txBody>
-          <a:bodyPr wrap="square" lIns="0" rIns="0" tIns="0" bIns="0">
+          <a:bodyPr wrap="square" lIns="0" tIns="0" rIns="0" bIns="0">
             <a:spAutoFit/>
           </a:bodyPr>
           <a:lstStyle/>
@@ -10001,7 +10070,7 @@
           <a:noFill/>
         </p:spPr>
         <p:txBody>
-          <a:bodyPr wrap="square" lIns="0" rIns="0" tIns="0" bIns="0">
+          <a:bodyPr wrap="square" lIns="0" tIns="0" rIns="0" bIns="0">
             <a:spAutoFit/>
           </a:bodyPr>
           <a:lstStyle/>
@@ -10060,6 +10129,7 @@
           <a:lstStyle/>
           <a:p>
             <a:pPr algn="ctr"/>
+            <a:endParaRPr/>
           </a:p>
         </p:txBody>
       </p:sp>
@@ -10104,6 +10174,7 @@
           <a:lstStyle/>
           <a:p>
             <a:pPr algn="ctr"/>
+            <a:endParaRPr/>
           </a:p>
         </p:txBody>
       </p:sp>
@@ -10124,7 +10195,7 @@
           <a:noFill/>
         </p:spPr>
         <p:txBody>
-          <a:bodyPr wrap="square" lIns="0" rIns="0" tIns="0" bIns="0">
+          <a:bodyPr wrap="square" lIns="0" tIns="0" rIns="0" bIns="0">
             <a:spAutoFit/>
           </a:bodyPr>
           <a:lstStyle/>
@@ -10159,7 +10230,7 @@
           <a:noFill/>
         </p:spPr>
         <p:txBody>
-          <a:bodyPr wrap="square" lIns="0" rIns="0" tIns="0" bIns="0">
+          <a:bodyPr wrap="square" lIns="0" tIns="0" rIns="0" bIns="0">
             <a:spAutoFit/>
           </a:bodyPr>
           <a:lstStyle/>
@@ -10218,6 +10289,7 @@
           <a:lstStyle/>
           <a:p>
             <a:pPr algn="ctr"/>
+            <a:endParaRPr/>
           </a:p>
         </p:txBody>
       </p:sp>
@@ -10262,6 +10334,7 @@
           <a:lstStyle/>
           <a:p>
             <a:pPr algn="ctr"/>
+            <a:endParaRPr/>
           </a:p>
         </p:txBody>
       </p:sp>
@@ -10282,7 +10355,7 @@
           <a:noFill/>
         </p:spPr>
         <p:txBody>
-          <a:bodyPr wrap="square" lIns="0" rIns="0" tIns="0" bIns="0">
+          <a:bodyPr wrap="square" lIns="0" tIns="0" rIns="0" bIns="0">
             <a:spAutoFit/>
           </a:bodyPr>
           <a:lstStyle/>
@@ -10317,7 +10390,7 @@
           <a:noFill/>
         </p:spPr>
         <p:txBody>
-          <a:bodyPr wrap="square" lIns="0" rIns="0" tIns="0" bIns="0">
+          <a:bodyPr wrap="square" lIns="0" tIns="0" rIns="0" bIns="0">
             <a:spAutoFit/>
           </a:bodyPr>
           <a:lstStyle/>
@@ -10376,6 +10449,7 @@
           <a:lstStyle/>
           <a:p>
             <a:pPr algn="ctr"/>
+            <a:endParaRPr/>
           </a:p>
         </p:txBody>
       </p:sp>
@@ -10396,7 +10470,7 @@
           <a:noFill/>
         </p:spPr>
         <p:txBody>
-          <a:bodyPr wrap="square" lIns="0" rIns="0" tIns="0" bIns="0">
+          <a:bodyPr wrap="square" lIns="0" tIns="0" rIns="0" bIns="0">
             <a:spAutoFit/>
           </a:bodyPr>
           <a:lstStyle/>
@@ -10431,7 +10505,7 @@
           <a:noFill/>
         </p:spPr>
         <p:txBody>
-          <a:bodyPr wrap="square" lIns="0" rIns="0" tIns="0" bIns="0">
+          <a:bodyPr wrap="square" lIns="0" tIns="0" rIns="0" bIns="0">
             <a:spAutoFit/>
           </a:bodyPr>
           <a:lstStyle/>
@@ -10490,6 +10564,7 @@
           <a:lstStyle/>
           <a:p>
             <a:pPr algn="ctr"/>
+            <a:endParaRPr/>
           </a:p>
         </p:txBody>
       </p:sp>
@@ -10534,6 +10609,7 @@
           <a:lstStyle/>
           <a:p>
             <a:pPr algn="ctr"/>
+            <a:endParaRPr/>
           </a:p>
         </p:txBody>
       </p:sp>
@@ -10554,7 +10630,7 @@
           <a:noFill/>
         </p:spPr>
         <p:txBody>
-          <a:bodyPr wrap="square" lIns="0" rIns="0" tIns="0" bIns="0">
+          <a:bodyPr wrap="square" lIns="0" tIns="0" rIns="0" bIns="0">
             <a:spAutoFit/>
           </a:bodyPr>
           <a:lstStyle/>
@@ -10589,7 +10665,7 @@
           <a:noFill/>
         </p:spPr>
         <p:txBody>
-          <a:bodyPr wrap="square" lIns="0" rIns="0" tIns="0" bIns="0">
+          <a:bodyPr wrap="square" lIns="0" tIns="0" rIns="0" bIns="0">
             <a:spAutoFit/>
           </a:bodyPr>
           <a:lstStyle/>
@@ -10616,15 +10692,7 @@
 </file>
 
 <file path=ppt/slides/slide16.xml><?xml version="1.0" encoding="utf-8"?>
-<p:sld xmlns:a="http://schemas.openxmlformats.org/drawingml/2006/main" xmlns:p="http://schemas.openxmlformats.org/presentationml/2006/main" xmlns:r="http://schemas.openxmlformats.org/officeDocument/2006/relationships">
-  <p:bg>
-    <p:bgPr>
-      <a:solidFill>
-        <a:srgbClr val="FFFFFF"/>
-      </a:solidFill>
-      <a:effectLst/>
-    </p:bgPr>
-  </p:bg>
+<p:sld xmlns:a="http://schemas.openxmlformats.org/drawingml/2006/main" xmlns:r="http://schemas.openxmlformats.org/officeDocument/2006/relationships" xmlns:p="http://schemas.openxmlformats.org/presentationml/2006/main">
   <p:cSld>
     <p:spTree>
       <p:nvGrpSpPr>
@@ -10632,7 +10700,14 @@
         <p:cNvGrpSpPr/>
         <p:nvPr/>
       </p:nvGrpSpPr>
-      <p:grpSpPr/>
+      <p:grpSpPr>
+        <a:xfrm>
+          <a:off x="0" y="0"/>
+          <a:ext cx="0" cy="0"/>
+          <a:chOff x="0" y="0"/>
+          <a:chExt cx="0" cy="0"/>
+        </a:xfrm>
+      </p:grpSpPr>
       <p:sp>
         <p:nvSpPr>
           <p:cNvPr id="2" name="TextBox 1"/>
@@ -10650,7 +10725,7 @@
           <a:noFill/>
         </p:spPr>
         <p:txBody>
-          <a:bodyPr wrap="square" lIns="0" rIns="0" tIns="0" bIns="0">
+          <a:bodyPr wrap="square" lIns="0" tIns="0" rIns="0" bIns="0">
             <a:spAutoFit/>
           </a:bodyPr>
           <a:lstStyle/>
@@ -10685,7 +10760,7 @@
           <a:noFill/>
         </p:spPr>
         <p:txBody>
-          <a:bodyPr wrap="square" lIns="0" rIns="0" tIns="0" bIns="0">
+          <a:bodyPr wrap="square" lIns="0" tIns="0" rIns="0" bIns="0">
             <a:spAutoFit/>
           </a:bodyPr>
           <a:lstStyle/>
@@ -10720,7 +10795,7 @@
           <a:noFill/>
         </p:spPr>
         <p:txBody>
-          <a:bodyPr wrap="square" lIns="0" rIns="0" tIns="0" bIns="0">
+          <a:bodyPr wrap="square" lIns="0" tIns="0" rIns="0" bIns="0">
             <a:spAutoFit/>
           </a:bodyPr>
           <a:lstStyle/>
@@ -10755,7 +10830,7 @@
           <a:noFill/>
         </p:spPr>
         <p:txBody>
-          <a:bodyPr wrap="square" lIns="0" rIns="0" tIns="0" bIns="0">
+          <a:bodyPr wrap="square" lIns="0" tIns="0" rIns="0" bIns="0">
             <a:spAutoFit/>
           </a:bodyPr>
           <a:lstStyle/>
@@ -10790,7 +10865,7 @@
           <a:noFill/>
         </p:spPr>
         <p:txBody>
-          <a:bodyPr wrap="square" lIns="0" rIns="0" tIns="0" bIns="0">
+          <a:bodyPr wrap="square" lIns="0" tIns="0" rIns="0" bIns="0">
             <a:spAutoFit/>
           </a:bodyPr>
           <a:lstStyle/>
@@ -10905,6 +10980,7 @@
           <a:lstStyle/>
           <a:p>
             <a:pPr algn="ctr"/>
+            <a:endParaRPr/>
           </a:p>
         </p:txBody>
       </p:sp>
@@ -10925,7 +11001,7 @@
           <a:noFill/>
         </p:spPr>
         <p:txBody>
-          <a:bodyPr wrap="square" lIns="0" rIns="0" tIns="0" bIns="0">
+          <a:bodyPr wrap="square" lIns="0" tIns="0" rIns="0" bIns="0">
             <a:spAutoFit/>
           </a:bodyPr>
           <a:lstStyle/>
@@ -10960,7 +11036,7 @@
           <a:noFill/>
         </p:spPr>
         <p:txBody>
-          <a:bodyPr wrap="square" lIns="0" rIns="0" tIns="0" bIns="0">
+          <a:bodyPr wrap="square" lIns="0" tIns="0" rIns="0" bIns="0">
             <a:spAutoFit/>
           </a:bodyPr>
           <a:lstStyle/>
@@ -10995,7 +11071,7 @@
           <a:noFill/>
         </p:spPr>
         <p:txBody>
-          <a:bodyPr wrap="square" lIns="0" rIns="0" tIns="0" bIns="0">
+          <a:bodyPr wrap="square" lIns="0" tIns="0" rIns="0" bIns="0">
             <a:spAutoFit/>
           </a:bodyPr>
           <a:lstStyle/>
@@ -11054,6 +11130,7 @@
           <a:lstStyle/>
           <a:p>
             <a:pPr algn="ctr"/>
+            <a:endParaRPr/>
           </a:p>
         </p:txBody>
       </p:sp>
@@ -11074,7 +11151,7 @@
           <a:noFill/>
         </p:spPr>
         <p:txBody>
-          <a:bodyPr wrap="square" lIns="0" rIns="0" tIns="0" bIns="0">
+          <a:bodyPr wrap="square" lIns="0" tIns="0" rIns="0" bIns="0">
             <a:spAutoFit/>
           </a:bodyPr>
           <a:lstStyle/>
@@ -11110,15 +11187,7 @@
 </file>
 
 <file path=ppt/slides/slide17.xml><?xml version="1.0" encoding="utf-8"?>
-<p:sld xmlns:a="http://schemas.openxmlformats.org/drawingml/2006/main" xmlns:p="http://schemas.openxmlformats.org/presentationml/2006/main" xmlns:r="http://schemas.openxmlformats.org/officeDocument/2006/relationships">
-  <p:bg>
-    <p:bgPr>
-      <a:solidFill>
-        <a:srgbClr val="F4F6F9"/>
-      </a:solidFill>
-      <a:effectLst/>
-    </p:bgPr>
-  </p:bg>
+<p:sld xmlns:a="http://schemas.openxmlformats.org/drawingml/2006/main" xmlns:r="http://schemas.openxmlformats.org/officeDocument/2006/relationships" xmlns:p="http://schemas.openxmlformats.org/presentationml/2006/main">
   <p:cSld>
     <p:spTree>
       <p:nvGrpSpPr>
@@ -11126,7 +11195,14 @@
         <p:cNvGrpSpPr/>
         <p:nvPr/>
       </p:nvGrpSpPr>
-      <p:grpSpPr/>
+      <p:grpSpPr>
+        <a:xfrm>
+          <a:off x="0" y="0"/>
+          <a:ext cx="0" cy="0"/>
+          <a:chOff x="0" y="0"/>
+          <a:chExt cx="0" cy="0"/>
+        </a:xfrm>
+      </p:grpSpPr>
       <p:sp>
         <p:nvSpPr>
           <p:cNvPr id="2" name="TextBox 1"/>
@@ -11144,7 +11220,7 @@
           <a:noFill/>
         </p:spPr>
         <p:txBody>
-          <a:bodyPr wrap="square" lIns="0" rIns="0" tIns="0" bIns="0">
+          <a:bodyPr wrap="square" lIns="0" tIns="0" rIns="0" bIns="0">
             <a:spAutoFit/>
           </a:bodyPr>
           <a:lstStyle/>
@@ -11179,7 +11255,7 @@
           <a:noFill/>
         </p:spPr>
         <p:txBody>
-          <a:bodyPr wrap="square" lIns="0" rIns="0" tIns="0" bIns="0">
+          <a:bodyPr wrap="square" lIns="0" tIns="0" rIns="0" bIns="0">
             <a:spAutoFit/>
           </a:bodyPr>
           <a:lstStyle/>
@@ -11214,7 +11290,7 @@
           <a:noFill/>
         </p:spPr>
         <p:txBody>
-          <a:bodyPr wrap="square" lIns="0" rIns="0" tIns="0" bIns="0">
+          <a:bodyPr wrap="square" lIns="0" tIns="0" rIns="0" bIns="0">
             <a:spAutoFit/>
           </a:bodyPr>
           <a:lstStyle/>
@@ -11249,7 +11325,7 @@
           <a:noFill/>
         </p:spPr>
         <p:txBody>
-          <a:bodyPr wrap="square" lIns="0" rIns="0" tIns="0" bIns="0">
+          <a:bodyPr wrap="square" lIns="0" tIns="0" rIns="0" bIns="0">
             <a:spAutoFit/>
           </a:bodyPr>
           <a:lstStyle/>
@@ -11284,7 +11360,7 @@
           <a:noFill/>
         </p:spPr>
         <p:txBody>
-          <a:bodyPr wrap="square" lIns="0" rIns="0" tIns="0" bIns="0">
+          <a:bodyPr wrap="square" lIns="0" tIns="0" rIns="0" bIns="0">
             <a:spAutoFit/>
           </a:bodyPr>
           <a:lstStyle/>
@@ -11371,15 +11447,7 @@
 </file>
 
 <file path=ppt/slides/slide18.xml><?xml version="1.0" encoding="utf-8"?>
-<p:sld xmlns:a="http://schemas.openxmlformats.org/drawingml/2006/main" xmlns:p="http://schemas.openxmlformats.org/presentationml/2006/main" xmlns:r="http://schemas.openxmlformats.org/officeDocument/2006/relationships">
-  <p:bg>
-    <p:bgPr>
-      <a:solidFill>
-        <a:srgbClr val="FFFFFF"/>
-      </a:solidFill>
-      <a:effectLst/>
-    </p:bgPr>
-  </p:bg>
+<p:sld xmlns:a="http://schemas.openxmlformats.org/drawingml/2006/main" xmlns:r="http://schemas.openxmlformats.org/officeDocument/2006/relationships" xmlns:p="http://schemas.openxmlformats.org/presentationml/2006/main">
   <p:cSld>
     <p:spTree>
       <p:nvGrpSpPr>
@@ -11387,7 +11455,14 @@
         <p:cNvGrpSpPr/>
         <p:nvPr/>
       </p:nvGrpSpPr>
-      <p:grpSpPr/>
+      <p:grpSpPr>
+        <a:xfrm>
+          <a:off x="0" y="0"/>
+          <a:ext cx="0" cy="0"/>
+          <a:chOff x="0" y="0"/>
+          <a:chExt cx="0" cy="0"/>
+        </a:xfrm>
+      </p:grpSpPr>
       <p:sp>
         <p:nvSpPr>
           <p:cNvPr id="2" name="TextBox 1"/>
@@ -11405,7 +11480,7 @@
           <a:noFill/>
         </p:spPr>
         <p:txBody>
-          <a:bodyPr wrap="square" lIns="0" rIns="0" tIns="0" bIns="0">
+          <a:bodyPr wrap="square" lIns="0" tIns="0" rIns="0" bIns="0">
             <a:spAutoFit/>
           </a:bodyPr>
           <a:lstStyle/>
@@ -11440,7 +11515,7 @@
           <a:noFill/>
         </p:spPr>
         <p:txBody>
-          <a:bodyPr wrap="square" lIns="0" rIns="0" tIns="0" bIns="0">
+          <a:bodyPr wrap="square" lIns="0" tIns="0" rIns="0" bIns="0">
             <a:spAutoFit/>
           </a:bodyPr>
           <a:lstStyle/>
@@ -11475,7 +11550,7 @@
           <a:noFill/>
         </p:spPr>
         <p:txBody>
-          <a:bodyPr wrap="square" lIns="0" rIns="0" tIns="0" bIns="0">
+          <a:bodyPr wrap="square" lIns="0" tIns="0" rIns="0" bIns="0">
             <a:spAutoFit/>
           </a:bodyPr>
           <a:lstStyle/>
@@ -11510,7 +11585,7 @@
           <a:noFill/>
         </p:spPr>
         <p:txBody>
-          <a:bodyPr wrap="square" lIns="0" rIns="0" tIns="0" bIns="0">
+          <a:bodyPr wrap="square" lIns="0" tIns="0" rIns="0" bIns="0">
             <a:spAutoFit/>
           </a:bodyPr>
           <a:lstStyle/>
@@ -11545,7 +11620,7 @@
           <a:noFill/>
         </p:spPr>
         <p:txBody>
-          <a:bodyPr wrap="square" lIns="0" rIns="0" tIns="0" bIns="0">
+          <a:bodyPr wrap="square" lIns="0" tIns="0" rIns="0" bIns="0">
             <a:spAutoFit/>
           </a:bodyPr>
           <a:lstStyle/>
@@ -11596,15 +11671,7 @@
 </file>
 
 <file path=ppt/slides/slide19.xml><?xml version="1.0" encoding="utf-8"?>
-<p:sld xmlns:a="http://schemas.openxmlformats.org/drawingml/2006/main" xmlns:p="http://schemas.openxmlformats.org/presentationml/2006/main" xmlns:r="http://schemas.openxmlformats.org/officeDocument/2006/relationships">
-  <p:bg>
-    <p:bgPr>
-      <a:solidFill>
-        <a:srgbClr val="F4F6F9"/>
-      </a:solidFill>
-      <a:effectLst/>
-    </p:bgPr>
-  </p:bg>
+<p:sld xmlns:a="http://schemas.openxmlformats.org/drawingml/2006/main" xmlns:r="http://schemas.openxmlformats.org/officeDocument/2006/relationships" xmlns:p="http://schemas.openxmlformats.org/presentationml/2006/main">
   <p:cSld>
     <p:spTree>
       <p:nvGrpSpPr>
@@ -11612,7 +11679,14 @@
         <p:cNvGrpSpPr/>
         <p:nvPr/>
       </p:nvGrpSpPr>
-      <p:grpSpPr/>
+      <p:grpSpPr>
+        <a:xfrm>
+          <a:off x="0" y="0"/>
+          <a:ext cx="0" cy="0"/>
+          <a:chOff x="0" y="0"/>
+          <a:chExt cx="0" cy="0"/>
+        </a:xfrm>
+      </p:grpSpPr>
       <p:sp>
         <p:nvSpPr>
           <p:cNvPr id="2" name="TextBox 1"/>
@@ -11630,7 +11704,7 @@
           <a:noFill/>
         </p:spPr>
         <p:txBody>
-          <a:bodyPr wrap="square" lIns="0" rIns="0" tIns="0" bIns="0">
+          <a:bodyPr wrap="square" lIns="0" tIns="0" rIns="0" bIns="0">
             <a:spAutoFit/>
           </a:bodyPr>
           <a:lstStyle/>
@@ -11665,7 +11739,7 @@
           <a:noFill/>
         </p:spPr>
         <p:txBody>
-          <a:bodyPr wrap="square" lIns="0" rIns="0" tIns="0" bIns="0">
+          <a:bodyPr wrap="square" lIns="0" tIns="0" rIns="0" bIns="0">
             <a:spAutoFit/>
           </a:bodyPr>
           <a:lstStyle/>
@@ -11700,7 +11774,7 @@
           <a:noFill/>
         </p:spPr>
         <p:txBody>
-          <a:bodyPr wrap="square" lIns="0" rIns="0" tIns="0" bIns="0">
+          <a:bodyPr wrap="square" lIns="0" tIns="0" rIns="0" bIns="0">
             <a:spAutoFit/>
           </a:bodyPr>
           <a:lstStyle/>
@@ -11735,7 +11809,7 @@
           <a:noFill/>
         </p:spPr>
         <p:txBody>
-          <a:bodyPr wrap="square" lIns="0" rIns="0" tIns="0" bIns="0">
+          <a:bodyPr wrap="square" lIns="0" tIns="0" rIns="0" bIns="0">
             <a:spAutoFit/>
           </a:bodyPr>
           <a:lstStyle/>
@@ -11798,6 +11872,7 @@
           <a:lstStyle/>
           <a:p>
             <a:pPr algn="ctr"/>
+            <a:endParaRPr/>
           </a:p>
         </p:txBody>
       </p:sp>
@@ -11844,6 +11919,7 @@
           <a:lstStyle/>
           <a:p>
             <a:pPr algn="ctr"/>
+            <a:endParaRPr/>
           </a:p>
         </p:txBody>
       </p:sp>
@@ -11864,7 +11940,7 @@
           <a:noFill/>
         </p:spPr>
         <p:txBody>
-          <a:bodyPr wrap="square" lIns="0" rIns="0" tIns="0" bIns="0">
+          <a:bodyPr wrap="square" lIns="0" tIns="0" rIns="0" bIns="0">
             <a:spAutoFit/>
           </a:bodyPr>
           <a:lstStyle/>
@@ -11899,7 +11975,7 @@
           <a:noFill/>
         </p:spPr>
         <p:txBody>
-          <a:bodyPr wrap="square" lIns="0" rIns="0" tIns="0" bIns="0">
+          <a:bodyPr wrap="square" lIns="0" tIns="0" rIns="0" bIns="0">
             <a:spAutoFit/>
           </a:bodyPr>
           <a:lstStyle/>
@@ -11962,6 +12038,7 @@
           <a:lstStyle/>
           <a:p>
             <a:pPr algn="ctr"/>
+            <a:endParaRPr/>
           </a:p>
         </p:txBody>
       </p:sp>
@@ -12008,6 +12085,7 @@
           <a:lstStyle/>
           <a:p>
             <a:pPr algn="ctr"/>
+            <a:endParaRPr/>
           </a:p>
         </p:txBody>
       </p:sp>
@@ -12028,7 +12106,7 @@
           <a:noFill/>
         </p:spPr>
         <p:txBody>
-          <a:bodyPr wrap="square" lIns="0" rIns="0" tIns="0" bIns="0">
+          <a:bodyPr wrap="square" lIns="0" tIns="0" rIns="0" bIns="0">
             <a:spAutoFit/>
           </a:bodyPr>
           <a:lstStyle/>
@@ -12063,7 +12141,7 @@
           <a:noFill/>
         </p:spPr>
         <p:txBody>
-          <a:bodyPr wrap="square" lIns="0" rIns="0" tIns="0" bIns="0">
+          <a:bodyPr wrap="square" lIns="0" tIns="0" rIns="0" bIns="0">
             <a:spAutoFit/>
           </a:bodyPr>
           <a:lstStyle/>
@@ -12126,6 +12204,7 @@
           <a:lstStyle/>
           <a:p>
             <a:pPr algn="ctr"/>
+            <a:endParaRPr/>
           </a:p>
         </p:txBody>
       </p:sp>
@@ -12172,6 +12251,7 @@
           <a:lstStyle/>
           <a:p>
             <a:pPr algn="ctr"/>
+            <a:endParaRPr/>
           </a:p>
         </p:txBody>
       </p:sp>
@@ -12192,7 +12272,7 @@
           <a:noFill/>
         </p:spPr>
         <p:txBody>
-          <a:bodyPr wrap="square" lIns="0" rIns="0" tIns="0" bIns="0">
+          <a:bodyPr wrap="square" lIns="0" tIns="0" rIns="0" bIns="0">
             <a:spAutoFit/>
           </a:bodyPr>
           <a:lstStyle/>
@@ -12227,7 +12307,7 @@
           <a:noFill/>
         </p:spPr>
         <p:txBody>
-          <a:bodyPr wrap="square" lIns="0" rIns="0" tIns="0" bIns="0">
+          <a:bodyPr wrap="square" lIns="0" tIns="0" rIns="0" bIns="0">
             <a:spAutoFit/>
           </a:bodyPr>
           <a:lstStyle/>
@@ -12254,15 +12334,7 @@
 </file>
 
 <file path=ppt/slides/slide2.xml><?xml version="1.0" encoding="utf-8"?>
-<p:sld xmlns:a="http://schemas.openxmlformats.org/drawingml/2006/main" xmlns:p="http://schemas.openxmlformats.org/presentationml/2006/main" xmlns:r="http://schemas.openxmlformats.org/officeDocument/2006/relationships">
-  <p:bg>
-    <p:bgPr>
-      <a:solidFill>
-        <a:srgbClr val="F4F6F9"/>
-      </a:solidFill>
-      <a:effectLst/>
-    </p:bgPr>
-  </p:bg>
+<p:sld xmlns:a="http://schemas.openxmlformats.org/drawingml/2006/main" xmlns:r="http://schemas.openxmlformats.org/officeDocument/2006/relationships" xmlns:p="http://schemas.openxmlformats.org/presentationml/2006/main">
   <p:cSld>
     <p:spTree>
       <p:nvGrpSpPr>
@@ -12270,7 +12342,14 @@
         <p:cNvGrpSpPr/>
         <p:nvPr/>
       </p:nvGrpSpPr>
-      <p:grpSpPr/>
+      <p:grpSpPr>
+        <a:xfrm>
+          <a:off x="0" y="0"/>
+          <a:ext cx="0" cy="0"/>
+          <a:chOff x="0" y="0"/>
+          <a:chExt cx="0" cy="0"/>
+        </a:xfrm>
+      </p:grpSpPr>
       <p:sp>
         <p:nvSpPr>
           <p:cNvPr id="2" name="TextBox 1"/>
@@ -12288,7 +12367,7 @@
           <a:noFill/>
         </p:spPr>
         <p:txBody>
-          <a:bodyPr wrap="square" lIns="0" rIns="0" tIns="0" bIns="0">
+          <a:bodyPr wrap="square" lIns="0" tIns="0" rIns="0" bIns="0">
             <a:spAutoFit/>
           </a:bodyPr>
           <a:lstStyle/>
@@ -12323,7 +12402,7 @@
           <a:noFill/>
         </p:spPr>
         <p:txBody>
-          <a:bodyPr wrap="square" lIns="0" rIns="0" tIns="0" bIns="0">
+          <a:bodyPr wrap="square" lIns="0" tIns="0" rIns="0" bIns="0">
             <a:spAutoFit/>
           </a:bodyPr>
           <a:lstStyle/>
@@ -12386,6 +12465,7 @@
           <a:lstStyle/>
           <a:p>
             <a:pPr algn="ctr"/>
+            <a:endParaRPr/>
           </a:p>
         </p:txBody>
       </p:sp>
@@ -12406,7 +12486,7 @@
           <a:noFill/>
         </p:spPr>
         <p:txBody>
-          <a:bodyPr wrap="square" lIns="0" rIns="0" tIns="0" bIns="0">
+          <a:bodyPr wrap="square" lIns="0" tIns="0" rIns="0" bIns="0">
             <a:spAutoFit/>
           </a:bodyPr>
           <a:lstStyle/>
@@ -12441,7 +12521,7 @@
           <a:noFill/>
         </p:spPr>
         <p:txBody>
-          <a:bodyPr wrap="square" lIns="0" rIns="0" tIns="0" bIns="0">
+          <a:bodyPr wrap="square" lIns="0" tIns="0" rIns="0" bIns="0">
             <a:spAutoFit/>
           </a:bodyPr>
           <a:lstStyle/>
@@ -12504,6 +12584,7 @@
           <a:lstStyle/>
           <a:p>
             <a:pPr algn="ctr"/>
+            <a:endParaRPr/>
           </a:p>
         </p:txBody>
       </p:sp>
@@ -12524,7 +12605,7 @@
           <a:noFill/>
         </p:spPr>
         <p:txBody>
-          <a:bodyPr wrap="square" lIns="0" rIns="0" tIns="0" bIns="0">
+          <a:bodyPr wrap="square" lIns="0" tIns="0" rIns="0" bIns="0">
             <a:spAutoFit/>
           </a:bodyPr>
           <a:lstStyle/>
@@ -12559,7 +12640,7 @@
           <a:noFill/>
         </p:spPr>
         <p:txBody>
-          <a:bodyPr wrap="square" lIns="0" rIns="0" tIns="0" bIns="0">
+          <a:bodyPr wrap="square" lIns="0" tIns="0" rIns="0" bIns="0">
             <a:spAutoFit/>
           </a:bodyPr>
           <a:lstStyle/>
@@ -12622,6 +12703,7 @@
           <a:lstStyle/>
           <a:p>
             <a:pPr algn="ctr"/>
+            <a:endParaRPr/>
           </a:p>
         </p:txBody>
       </p:sp>
@@ -12642,7 +12724,7 @@
           <a:noFill/>
         </p:spPr>
         <p:txBody>
-          <a:bodyPr wrap="square" lIns="0" rIns="0" tIns="0" bIns="0">
+          <a:bodyPr wrap="square" lIns="0" tIns="0" rIns="0" bIns="0">
             <a:spAutoFit/>
           </a:bodyPr>
           <a:lstStyle/>
@@ -12677,7 +12759,7 @@
           <a:noFill/>
         </p:spPr>
         <p:txBody>
-          <a:bodyPr wrap="square" lIns="0" rIns="0" tIns="0" bIns="0">
+          <a:bodyPr wrap="square" lIns="0" tIns="0" rIns="0" bIns="0">
             <a:spAutoFit/>
           </a:bodyPr>
           <a:lstStyle/>
@@ -12712,7 +12794,7 @@
           <a:noFill/>
         </p:spPr>
         <p:txBody>
-          <a:bodyPr wrap="square" lIns="0" rIns="0" tIns="0" bIns="0">
+          <a:bodyPr wrap="square" lIns="0" tIns="0" rIns="0" bIns="0">
             <a:spAutoFit/>
           </a:bodyPr>
           <a:lstStyle/>
@@ -12747,7 +12829,7 @@
           <a:noFill/>
         </p:spPr>
         <p:txBody>
-          <a:bodyPr wrap="square" lIns="0" rIns="0" tIns="0" bIns="0">
+          <a:bodyPr wrap="square" lIns="0" tIns="0" rIns="0" bIns="0">
             <a:spAutoFit/>
           </a:bodyPr>
           <a:lstStyle/>
@@ -12782,7 +12864,7 @@
           <a:noFill/>
         </p:spPr>
         <p:txBody>
-          <a:bodyPr wrap="square" lIns="0" rIns="0" tIns="0" bIns="0">
+          <a:bodyPr wrap="square" lIns="0" tIns="0" rIns="0" bIns="0">
             <a:spAutoFit/>
           </a:bodyPr>
           <a:lstStyle/>
@@ -12809,15 +12891,7 @@
 </file>
 
 <file path=ppt/slides/slide20.xml><?xml version="1.0" encoding="utf-8"?>
-<p:sld xmlns:a="http://schemas.openxmlformats.org/drawingml/2006/main" xmlns:p="http://schemas.openxmlformats.org/presentationml/2006/main" xmlns:r="http://schemas.openxmlformats.org/officeDocument/2006/relationships">
-  <p:bg>
-    <p:bgPr>
-      <a:solidFill>
-        <a:srgbClr val="FFFFFF"/>
-      </a:solidFill>
-      <a:effectLst/>
-    </p:bgPr>
-  </p:bg>
+<p:sld xmlns:a="http://schemas.openxmlformats.org/drawingml/2006/main" xmlns:r="http://schemas.openxmlformats.org/officeDocument/2006/relationships" xmlns:p="http://schemas.openxmlformats.org/presentationml/2006/main">
   <p:cSld>
     <p:spTree>
       <p:nvGrpSpPr>
@@ -12825,7 +12899,14 @@
         <p:cNvGrpSpPr/>
         <p:nvPr/>
       </p:nvGrpSpPr>
-      <p:grpSpPr/>
+      <p:grpSpPr>
+        <a:xfrm>
+          <a:off x="0" y="0"/>
+          <a:ext cx="0" cy="0"/>
+          <a:chOff x="0" y="0"/>
+          <a:chExt cx="0" cy="0"/>
+        </a:xfrm>
+      </p:grpSpPr>
       <p:sp>
         <p:nvSpPr>
           <p:cNvPr id="2" name="TextBox 1"/>
@@ -12843,7 +12924,7 @@
           <a:noFill/>
         </p:spPr>
         <p:txBody>
-          <a:bodyPr wrap="square" lIns="0" rIns="0" tIns="0" bIns="0">
+          <a:bodyPr wrap="square" lIns="0" tIns="0" rIns="0" bIns="0">
             <a:spAutoFit/>
           </a:bodyPr>
           <a:lstStyle/>
@@ -12878,7 +12959,7 @@
           <a:noFill/>
         </p:spPr>
         <p:txBody>
-          <a:bodyPr wrap="square" lIns="0" rIns="0" tIns="0" bIns="0">
+          <a:bodyPr wrap="square" lIns="0" tIns="0" rIns="0" bIns="0">
             <a:spAutoFit/>
           </a:bodyPr>
           <a:lstStyle/>
@@ -12913,7 +12994,7 @@
           <a:noFill/>
         </p:spPr>
         <p:txBody>
-          <a:bodyPr wrap="square" lIns="0" rIns="0" tIns="0" bIns="0">
+          <a:bodyPr wrap="square" lIns="0" tIns="0" rIns="0" bIns="0">
             <a:spAutoFit/>
           </a:bodyPr>
           <a:lstStyle/>
@@ -12948,7 +13029,7 @@
           <a:noFill/>
         </p:spPr>
         <p:txBody>
-          <a:bodyPr wrap="square" lIns="0" rIns="0" tIns="0" bIns="0">
+          <a:bodyPr wrap="square" lIns="0" tIns="0" rIns="0" bIns="0">
             <a:spAutoFit/>
           </a:bodyPr>
           <a:lstStyle/>
@@ -13011,6 +13092,7 @@
           <a:lstStyle/>
           <a:p>
             <a:pPr algn="ctr"/>
+            <a:endParaRPr/>
           </a:p>
         </p:txBody>
       </p:sp>
@@ -13057,6 +13139,7 @@
           <a:lstStyle/>
           <a:p>
             <a:pPr algn="ctr"/>
+            <a:endParaRPr/>
           </a:p>
         </p:txBody>
       </p:sp>
@@ -13077,7 +13160,7 @@
           <a:noFill/>
         </p:spPr>
         <p:txBody>
-          <a:bodyPr wrap="square" lIns="0" rIns="0" tIns="0" bIns="0">
+          <a:bodyPr wrap="square" lIns="0" tIns="0" rIns="0" bIns="0">
             <a:spAutoFit/>
           </a:bodyPr>
           <a:lstStyle/>
@@ -13112,7 +13195,7 @@
           <a:noFill/>
         </p:spPr>
         <p:txBody>
-          <a:bodyPr wrap="square" lIns="0" rIns="0" tIns="0" bIns="0">
+          <a:bodyPr wrap="square" lIns="0" tIns="0" rIns="0" bIns="0">
             <a:spAutoFit/>
           </a:bodyPr>
           <a:lstStyle/>
@@ -13175,6 +13258,7 @@
           <a:lstStyle/>
           <a:p>
             <a:pPr algn="ctr"/>
+            <a:endParaRPr/>
           </a:p>
         </p:txBody>
       </p:sp>
@@ -13221,6 +13305,7 @@
           <a:lstStyle/>
           <a:p>
             <a:pPr algn="ctr"/>
+            <a:endParaRPr/>
           </a:p>
         </p:txBody>
       </p:sp>
@@ -13241,7 +13326,7 @@
           <a:noFill/>
         </p:spPr>
         <p:txBody>
-          <a:bodyPr wrap="square" lIns="0" rIns="0" tIns="0" bIns="0">
+          <a:bodyPr wrap="square" lIns="0" tIns="0" rIns="0" bIns="0">
             <a:spAutoFit/>
           </a:bodyPr>
           <a:lstStyle/>
@@ -13276,7 +13361,7 @@
           <a:noFill/>
         </p:spPr>
         <p:txBody>
-          <a:bodyPr wrap="square" lIns="0" rIns="0" tIns="0" bIns="0">
+          <a:bodyPr wrap="square" lIns="0" tIns="0" rIns="0" bIns="0">
             <a:spAutoFit/>
           </a:bodyPr>
           <a:lstStyle/>
@@ -13303,15 +13388,7 @@
 </file>
 
 <file path=ppt/slides/slide21.xml><?xml version="1.0" encoding="utf-8"?>
-<p:sld xmlns:a="http://schemas.openxmlformats.org/drawingml/2006/main" xmlns:p="http://schemas.openxmlformats.org/presentationml/2006/main" xmlns:r="http://schemas.openxmlformats.org/officeDocument/2006/relationships">
-  <p:bg>
-    <p:bgPr>
-      <a:solidFill>
-        <a:srgbClr val="F4F6F9"/>
-      </a:solidFill>
-      <a:effectLst/>
-    </p:bgPr>
-  </p:bg>
+<p:sld xmlns:a="http://schemas.openxmlformats.org/drawingml/2006/main" xmlns:r="http://schemas.openxmlformats.org/officeDocument/2006/relationships" xmlns:p="http://schemas.openxmlformats.org/presentationml/2006/main">
   <p:cSld>
     <p:spTree>
       <p:nvGrpSpPr>
@@ -13319,7 +13396,14 @@
         <p:cNvGrpSpPr/>
         <p:nvPr/>
       </p:nvGrpSpPr>
-      <p:grpSpPr/>
+      <p:grpSpPr>
+        <a:xfrm>
+          <a:off x="0" y="0"/>
+          <a:ext cx="0" cy="0"/>
+          <a:chOff x="0" y="0"/>
+          <a:chExt cx="0" cy="0"/>
+        </a:xfrm>
+      </p:grpSpPr>
       <p:sp>
         <p:nvSpPr>
           <p:cNvPr id="2" name="TextBox 1"/>
@@ -13337,7 +13421,7 @@
           <a:noFill/>
         </p:spPr>
         <p:txBody>
-          <a:bodyPr wrap="square" lIns="0" rIns="0" tIns="0" bIns="0">
+          <a:bodyPr wrap="square" lIns="0" tIns="0" rIns="0" bIns="0">
             <a:spAutoFit/>
           </a:bodyPr>
           <a:lstStyle/>
@@ -13372,7 +13456,7 @@
           <a:noFill/>
         </p:spPr>
         <p:txBody>
-          <a:bodyPr wrap="square" lIns="0" rIns="0" tIns="0" bIns="0">
+          <a:bodyPr wrap="square" lIns="0" tIns="0" rIns="0" bIns="0">
             <a:spAutoFit/>
           </a:bodyPr>
           <a:lstStyle/>
@@ -13407,7 +13491,7 @@
           <a:noFill/>
         </p:spPr>
         <p:txBody>
-          <a:bodyPr wrap="square" lIns="0" rIns="0" tIns="0" bIns="0">
+          <a:bodyPr wrap="square" lIns="0" tIns="0" rIns="0" bIns="0">
             <a:spAutoFit/>
           </a:bodyPr>
           <a:lstStyle/>
@@ -13442,7 +13526,7 @@
           <a:noFill/>
         </p:spPr>
         <p:txBody>
-          <a:bodyPr wrap="square" lIns="0" rIns="0" tIns="0" bIns="0">
+          <a:bodyPr wrap="square" lIns="0" tIns="0" rIns="0" bIns="0">
             <a:spAutoFit/>
           </a:bodyPr>
           <a:lstStyle/>
@@ -13493,15 +13577,7 @@
 </file>
 
 <file path=ppt/slides/slide22.xml><?xml version="1.0" encoding="utf-8"?>
-<p:sld xmlns:a="http://schemas.openxmlformats.org/drawingml/2006/main" xmlns:p="http://schemas.openxmlformats.org/presentationml/2006/main" xmlns:r="http://schemas.openxmlformats.org/officeDocument/2006/relationships">
-  <p:bg>
-    <p:bgPr>
-      <a:solidFill>
-        <a:srgbClr val="FFFFFF"/>
-      </a:solidFill>
-      <a:effectLst/>
-    </p:bgPr>
-  </p:bg>
+<p:sld xmlns:a="http://schemas.openxmlformats.org/drawingml/2006/main" xmlns:r="http://schemas.openxmlformats.org/officeDocument/2006/relationships" xmlns:p="http://schemas.openxmlformats.org/presentationml/2006/main">
   <p:cSld>
     <p:spTree>
       <p:nvGrpSpPr>
@@ -13509,7 +13585,14 @@
         <p:cNvGrpSpPr/>
         <p:nvPr/>
       </p:nvGrpSpPr>
-      <p:grpSpPr/>
+      <p:grpSpPr>
+        <a:xfrm>
+          <a:off x="0" y="0"/>
+          <a:ext cx="0" cy="0"/>
+          <a:chOff x="0" y="0"/>
+          <a:chExt cx="0" cy="0"/>
+        </a:xfrm>
+      </p:grpSpPr>
       <p:sp>
         <p:nvSpPr>
           <p:cNvPr id="2" name="TextBox 1"/>
@@ -13527,7 +13610,7 @@
           <a:noFill/>
         </p:spPr>
         <p:txBody>
-          <a:bodyPr wrap="square" lIns="0" rIns="0" tIns="0" bIns="0">
+          <a:bodyPr wrap="square" lIns="0" tIns="0" rIns="0" bIns="0">
             <a:spAutoFit/>
           </a:bodyPr>
           <a:lstStyle/>
@@ -13562,7 +13645,7 @@
           <a:noFill/>
         </p:spPr>
         <p:txBody>
-          <a:bodyPr wrap="square" lIns="0" rIns="0" tIns="0" bIns="0">
+          <a:bodyPr wrap="square" lIns="0" tIns="0" rIns="0" bIns="0">
             <a:spAutoFit/>
           </a:bodyPr>
           <a:lstStyle/>
@@ -13597,7 +13680,7 @@
           <a:noFill/>
         </p:spPr>
         <p:txBody>
-          <a:bodyPr wrap="square" lIns="0" rIns="0" tIns="0" bIns="0">
+          <a:bodyPr wrap="square" lIns="0" tIns="0" rIns="0" bIns="0">
             <a:spAutoFit/>
           </a:bodyPr>
           <a:lstStyle/>
@@ -13632,7 +13715,7 @@
           <a:noFill/>
         </p:spPr>
         <p:txBody>
-          <a:bodyPr wrap="square" lIns="0" rIns="0" tIns="0" bIns="0">
+          <a:bodyPr wrap="square" lIns="0" tIns="0" rIns="0" bIns="0">
             <a:spAutoFit/>
           </a:bodyPr>
           <a:lstStyle/>
@@ -13695,6 +13778,7 @@
           <a:lstStyle/>
           <a:p>
             <a:pPr algn="ctr"/>
+            <a:endParaRPr/>
           </a:p>
         </p:txBody>
       </p:sp>
@@ -13741,6 +13825,7 @@
           <a:lstStyle/>
           <a:p>
             <a:pPr algn="ctr"/>
+            <a:endParaRPr/>
           </a:p>
         </p:txBody>
       </p:sp>
@@ -13761,7 +13846,7 @@
           <a:noFill/>
         </p:spPr>
         <p:txBody>
-          <a:bodyPr wrap="square" lIns="0" rIns="0" tIns="0" bIns="0">
+          <a:bodyPr wrap="square" lIns="0" tIns="0" rIns="0" bIns="0">
             <a:spAutoFit/>
           </a:bodyPr>
           <a:lstStyle/>
@@ -13796,7 +13881,7 @@
           <a:noFill/>
         </p:spPr>
         <p:txBody>
-          <a:bodyPr wrap="square" lIns="0" rIns="0" tIns="0" bIns="0">
+          <a:bodyPr wrap="square" lIns="0" tIns="0" rIns="0" bIns="0">
             <a:spAutoFit/>
           </a:bodyPr>
           <a:lstStyle/>
@@ -13859,6 +13944,7 @@
           <a:lstStyle/>
           <a:p>
             <a:pPr algn="ctr"/>
+            <a:endParaRPr/>
           </a:p>
         </p:txBody>
       </p:sp>
@@ -13905,6 +13991,7 @@
           <a:lstStyle/>
           <a:p>
             <a:pPr algn="ctr"/>
+            <a:endParaRPr/>
           </a:p>
         </p:txBody>
       </p:sp>
@@ -13925,7 +14012,7 @@
           <a:noFill/>
         </p:spPr>
         <p:txBody>
-          <a:bodyPr wrap="square" lIns="0" rIns="0" tIns="0" bIns="0">
+          <a:bodyPr wrap="square" lIns="0" tIns="0" rIns="0" bIns="0">
             <a:spAutoFit/>
           </a:bodyPr>
           <a:lstStyle/>
@@ -13960,7 +14047,7 @@
           <a:noFill/>
         </p:spPr>
         <p:txBody>
-          <a:bodyPr wrap="square" lIns="0" rIns="0" tIns="0" bIns="0">
+          <a:bodyPr wrap="square" lIns="0" tIns="0" rIns="0" bIns="0">
             <a:spAutoFit/>
           </a:bodyPr>
           <a:lstStyle/>
@@ -14023,6 +14110,7 @@
           <a:lstStyle/>
           <a:p>
             <a:pPr algn="ctr"/>
+            <a:endParaRPr/>
           </a:p>
         </p:txBody>
       </p:sp>
@@ -14069,6 +14157,7 @@
           <a:lstStyle/>
           <a:p>
             <a:pPr algn="ctr"/>
+            <a:endParaRPr/>
           </a:p>
         </p:txBody>
       </p:sp>
@@ -14089,7 +14178,7 @@
           <a:noFill/>
         </p:spPr>
         <p:txBody>
-          <a:bodyPr wrap="square" lIns="0" rIns="0" tIns="0" bIns="0">
+          <a:bodyPr wrap="square" lIns="0" tIns="0" rIns="0" bIns="0">
             <a:spAutoFit/>
           </a:bodyPr>
           <a:lstStyle/>
@@ -14124,7 +14213,7 @@
           <a:noFill/>
         </p:spPr>
         <p:txBody>
-          <a:bodyPr wrap="square" lIns="0" rIns="0" tIns="0" bIns="0">
+          <a:bodyPr wrap="square" lIns="0" tIns="0" rIns="0" bIns="0">
             <a:spAutoFit/>
           </a:bodyPr>
           <a:lstStyle/>
@@ -14187,6 +14276,7 @@
           <a:lstStyle/>
           <a:p>
             <a:pPr algn="ctr"/>
+            <a:endParaRPr/>
           </a:p>
         </p:txBody>
       </p:sp>
@@ -14233,6 +14323,7 @@
           <a:lstStyle/>
           <a:p>
             <a:pPr algn="ctr"/>
+            <a:endParaRPr/>
           </a:p>
         </p:txBody>
       </p:sp>
@@ -14253,7 +14344,7 @@
           <a:noFill/>
         </p:spPr>
         <p:txBody>
-          <a:bodyPr wrap="square" lIns="0" rIns="0" tIns="0" bIns="0">
+          <a:bodyPr wrap="square" lIns="0" tIns="0" rIns="0" bIns="0">
             <a:spAutoFit/>
           </a:bodyPr>
           <a:lstStyle/>
@@ -14288,7 +14379,7 @@
           <a:noFill/>
         </p:spPr>
         <p:txBody>
-          <a:bodyPr wrap="square" lIns="0" rIns="0" tIns="0" bIns="0">
+          <a:bodyPr wrap="square" lIns="0" tIns="0" rIns="0" bIns="0">
             <a:spAutoFit/>
           </a:bodyPr>
           <a:lstStyle/>
@@ -14315,15 +14406,7 @@
 </file>
 
 <file path=ppt/slides/slide23.xml><?xml version="1.0" encoding="utf-8"?>
-<p:sld xmlns:a="http://schemas.openxmlformats.org/drawingml/2006/main" xmlns:p="http://schemas.openxmlformats.org/presentationml/2006/main" xmlns:r="http://schemas.openxmlformats.org/officeDocument/2006/relationships">
-  <p:bg>
-    <p:bgPr>
-      <a:solidFill>
-        <a:srgbClr val="0F2440"/>
-      </a:solidFill>
-      <a:effectLst/>
-    </p:bgPr>
-  </p:bg>
+<p:sld xmlns:a="http://schemas.openxmlformats.org/drawingml/2006/main" xmlns:r="http://schemas.openxmlformats.org/officeDocument/2006/relationships" xmlns:p="http://schemas.openxmlformats.org/presentationml/2006/main">
   <p:cSld>
     <p:spTree>
       <p:nvGrpSpPr>
@@ -14331,7 +14414,14 @@
         <p:cNvGrpSpPr/>
         <p:nvPr/>
       </p:nvGrpSpPr>
-      <p:grpSpPr/>
+      <p:grpSpPr>
+        <a:xfrm>
+          <a:off x="0" y="0"/>
+          <a:ext cx="0" cy="0"/>
+          <a:chOff x="0" y="0"/>
+          <a:chExt cx="0" cy="0"/>
+        </a:xfrm>
+      </p:grpSpPr>
       <p:sp>
         <p:nvSpPr>
           <p:cNvPr id="2" name="TextBox 1"/>
@@ -14349,7 +14439,7 @@
           <a:noFill/>
         </p:spPr>
         <p:txBody>
-          <a:bodyPr wrap="square" lIns="0" rIns="0" tIns="0" bIns="0">
+          <a:bodyPr wrap="square" lIns="0" tIns="0" rIns="0" bIns="0">
             <a:spAutoFit/>
           </a:bodyPr>
           <a:lstStyle/>
@@ -14384,7 +14474,7 @@
           <a:noFill/>
         </p:spPr>
         <p:txBody>
-          <a:bodyPr wrap="square" lIns="0" rIns="0" tIns="0" bIns="0">
+          <a:bodyPr wrap="square" lIns="0" tIns="0" rIns="0" bIns="0">
             <a:spAutoFit/>
           </a:bodyPr>
           <a:lstStyle/>
@@ -14447,6 +14537,7 @@
           <a:lstStyle/>
           <a:p>
             <a:pPr algn="ctr"/>
+            <a:endParaRPr/>
           </a:p>
         </p:txBody>
       </p:sp>
@@ -14493,6 +14584,7 @@
           <a:lstStyle/>
           <a:p>
             <a:pPr algn="ctr"/>
+            <a:endParaRPr/>
           </a:p>
         </p:txBody>
       </p:sp>
@@ -14513,7 +14605,7 @@
           <a:noFill/>
         </p:spPr>
         <p:txBody>
-          <a:bodyPr wrap="square" lIns="0" rIns="0" tIns="0" bIns="0">
+          <a:bodyPr wrap="square" lIns="0" tIns="0" rIns="0" bIns="0">
             <a:spAutoFit/>
           </a:bodyPr>
           <a:lstStyle/>
@@ -14548,7 +14640,7 @@
           <a:noFill/>
         </p:spPr>
         <p:txBody>
-          <a:bodyPr wrap="square" lIns="0" rIns="0" tIns="0" bIns="0">
+          <a:bodyPr wrap="square" lIns="0" tIns="0" rIns="0" bIns="0">
             <a:spAutoFit/>
           </a:bodyPr>
           <a:lstStyle/>
@@ -14583,7 +14675,7 @@
           <a:noFill/>
         </p:spPr>
         <p:txBody>
-          <a:bodyPr wrap="square" lIns="0" rIns="0" tIns="0" bIns="0">
+          <a:bodyPr wrap="square" lIns="0" tIns="0" rIns="0" bIns="0">
             <a:spAutoFit/>
           </a:bodyPr>
           <a:lstStyle/>
@@ -14646,6 +14738,7 @@
           <a:lstStyle/>
           <a:p>
             <a:pPr algn="ctr"/>
+            <a:endParaRPr/>
           </a:p>
         </p:txBody>
       </p:sp>
@@ -14692,6 +14785,7 @@
           <a:lstStyle/>
           <a:p>
             <a:pPr algn="ctr"/>
+            <a:endParaRPr/>
           </a:p>
         </p:txBody>
       </p:sp>
@@ -14712,7 +14806,7 @@
           <a:noFill/>
         </p:spPr>
         <p:txBody>
-          <a:bodyPr wrap="square" lIns="0" rIns="0" tIns="0" bIns="0">
+          <a:bodyPr wrap="square" lIns="0" tIns="0" rIns="0" bIns="0">
             <a:spAutoFit/>
           </a:bodyPr>
           <a:lstStyle/>
@@ -14747,7 +14841,7 @@
           <a:noFill/>
         </p:spPr>
         <p:txBody>
-          <a:bodyPr wrap="square" lIns="0" rIns="0" tIns="0" bIns="0">
+          <a:bodyPr wrap="square" lIns="0" tIns="0" rIns="0" bIns="0">
             <a:spAutoFit/>
           </a:bodyPr>
           <a:lstStyle/>
@@ -14782,7 +14876,7 @@
           <a:noFill/>
         </p:spPr>
         <p:txBody>
-          <a:bodyPr wrap="square" lIns="0" rIns="0" tIns="0" bIns="0">
+          <a:bodyPr wrap="square" lIns="0" tIns="0" rIns="0" bIns="0">
             <a:spAutoFit/>
           </a:bodyPr>
           <a:lstStyle/>
@@ -14845,6 +14939,7 @@
           <a:lstStyle/>
           <a:p>
             <a:pPr algn="ctr"/>
+            <a:endParaRPr/>
           </a:p>
         </p:txBody>
       </p:sp>
@@ -14891,6 +14986,7 @@
           <a:lstStyle/>
           <a:p>
             <a:pPr algn="ctr"/>
+            <a:endParaRPr/>
           </a:p>
         </p:txBody>
       </p:sp>
@@ -14911,7 +15007,7 @@
           <a:noFill/>
         </p:spPr>
         <p:txBody>
-          <a:bodyPr wrap="square" lIns="0" rIns="0" tIns="0" bIns="0">
+          <a:bodyPr wrap="square" lIns="0" tIns="0" rIns="0" bIns="0">
             <a:spAutoFit/>
           </a:bodyPr>
           <a:lstStyle/>
@@ -14946,7 +15042,7 @@
           <a:noFill/>
         </p:spPr>
         <p:txBody>
-          <a:bodyPr wrap="square" lIns="0" rIns="0" tIns="0" bIns="0">
+          <a:bodyPr wrap="square" lIns="0" tIns="0" rIns="0" bIns="0">
             <a:spAutoFit/>
           </a:bodyPr>
           <a:lstStyle/>
@@ -14981,7 +15077,7 @@
           <a:noFill/>
         </p:spPr>
         <p:txBody>
-          <a:bodyPr wrap="square" lIns="0" rIns="0" tIns="0" bIns="0">
+          <a:bodyPr wrap="square" lIns="0" tIns="0" rIns="0" bIns="0">
             <a:spAutoFit/>
           </a:bodyPr>
           <a:lstStyle/>
@@ -15044,6 +15140,7 @@
           <a:lstStyle/>
           <a:p>
             <a:pPr algn="ctr"/>
+            <a:endParaRPr/>
           </a:p>
         </p:txBody>
       </p:sp>
@@ -15090,6 +15187,7 @@
           <a:lstStyle/>
           <a:p>
             <a:pPr algn="ctr"/>
+            <a:endParaRPr/>
           </a:p>
         </p:txBody>
       </p:sp>
@@ -15110,7 +15208,7 @@
           <a:noFill/>
         </p:spPr>
         <p:txBody>
-          <a:bodyPr wrap="square" lIns="0" rIns="0" tIns="0" bIns="0">
+          <a:bodyPr wrap="square" lIns="0" tIns="0" rIns="0" bIns="0">
             <a:spAutoFit/>
           </a:bodyPr>
           <a:lstStyle/>
@@ -15145,7 +15243,7 @@
           <a:noFill/>
         </p:spPr>
         <p:txBody>
-          <a:bodyPr wrap="square" lIns="0" rIns="0" tIns="0" bIns="0">
+          <a:bodyPr wrap="square" lIns="0" tIns="0" rIns="0" bIns="0">
             <a:spAutoFit/>
           </a:bodyPr>
           <a:lstStyle/>
@@ -15180,7 +15278,7 @@
           <a:noFill/>
         </p:spPr>
         <p:txBody>
-          <a:bodyPr wrap="square" lIns="0" rIns="0" tIns="0" bIns="0">
+          <a:bodyPr wrap="square" lIns="0" tIns="0" rIns="0" bIns="0">
             <a:spAutoFit/>
           </a:bodyPr>
           <a:lstStyle/>
@@ -15215,7 +15313,7 @@
           <a:noFill/>
         </p:spPr>
         <p:txBody>
-          <a:bodyPr wrap="square" lIns="0" rIns="0" tIns="0" bIns="0">
+          <a:bodyPr wrap="square" lIns="0" tIns="0" rIns="0" bIns="0">
             <a:spAutoFit/>
           </a:bodyPr>
           <a:lstStyle/>
@@ -15250,7 +15348,7 @@
           <a:noFill/>
         </p:spPr>
         <p:txBody>
-          <a:bodyPr wrap="square" lIns="0" rIns="0" tIns="0" bIns="0">
+          <a:bodyPr wrap="square" lIns="0" tIns="0" rIns="0" bIns="0">
             <a:spAutoFit/>
           </a:bodyPr>
           <a:lstStyle/>
@@ -15277,15 +15375,7 @@
 </file>
 
 <file path=ppt/slides/slide24.xml><?xml version="1.0" encoding="utf-8"?>
-<p:sld xmlns:a="http://schemas.openxmlformats.org/drawingml/2006/main" xmlns:p="http://schemas.openxmlformats.org/presentationml/2006/main" xmlns:r="http://schemas.openxmlformats.org/officeDocument/2006/relationships">
-  <p:bg>
-    <p:bgPr>
-      <a:solidFill>
-        <a:srgbClr val="FFFFFF"/>
-      </a:solidFill>
-      <a:effectLst/>
-    </p:bgPr>
-  </p:bg>
+<p:sld xmlns:a="http://schemas.openxmlformats.org/drawingml/2006/main" xmlns:r="http://schemas.openxmlformats.org/officeDocument/2006/relationships" xmlns:p="http://schemas.openxmlformats.org/presentationml/2006/main">
   <p:cSld>
     <p:spTree>
       <p:nvGrpSpPr>
@@ -15293,7 +15383,14 @@
         <p:cNvGrpSpPr/>
         <p:nvPr/>
       </p:nvGrpSpPr>
-      <p:grpSpPr/>
+      <p:grpSpPr>
+        <a:xfrm>
+          <a:off x="0" y="0"/>
+          <a:ext cx="0" cy="0"/>
+          <a:chOff x="0" y="0"/>
+          <a:chExt cx="0" cy="0"/>
+        </a:xfrm>
+      </p:grpSpPr>
       <p:sp>
         <p:nvSpPr>
           <p:cNvPr id="2" name="TextBox 1"/>
@@ -15311,7 +15408,7 @@
           <a:noFill/>
         </p:spPr>
         <p:txBody>
-          <a:bodyPr wrap="square" lIns="0" rIns="0" tIns="0" bIns="0">
+          <a:bodyPr wrap="square" lIns="0" tIns="0" rIns="0" bIns="0">
             <a:spAutoFit/>
           </a:bodyPr>
           <a:lstStyle/>
@@ -15346,7 +15443,7 @@
           <a:noFill/>
         </p:spPr>
         <p:txBody>
-          <a:bodyPr wrap="square" lIns="0" rIns="0" tIns="0" bIns="0">
+          <a:bodyPr wrap="square" lIns="0" tIns="0" rIns="0" bIns="0">
             <a:spAutoFit/>
           </a:bodyPr>
           <a:lstStyle/>
@@ -15381,7 +15478,7 @@
           <a:noFill/>
         </p:spPr>
         <p:txBody>
-          <a:bodyPr wrap="square" lIns="0" rIns="0" tIns="0" bIns="0">
+          <a:bodyPr wrap="square" lIns="0" tIns="0" rIns="0" bIns="0">
             <a:spAutoFit/>
           </a:bodyPr>
           <a:lstStyle/>
@@ -15416,7 +15513,7 @@
           <a:noFill/>
         </p:spPr>
         <p:txBody>
-          <a:bodyPr wrap="square" lIns="0" rIns="0" tIns="0" bIns="0">
+          <a:bodyPr wrap="square" lIns="0" tIns="0" rIns="0" bIns="0">
             <a:spAutoFit/>
           </a:bodyPr>
           <a:lstStyle/>
@@ -15477,6 +15574,7 @@
           <a:lstStyle/>
           <a:p>
             <a:pPr algn="ctr"/>
+            <a:endParaRPr/>
           </a:p>
         </p:txBody>
       </p:sp>
@@ -15523,6 +15621,7 @@
           <a:lstStyle/>
           <a:p>
             <a:pPr algn="ctr"/>
+            <a:endParaRPr/>
           </a:p>
         </p:txBody>
       </p:sp>
@@ -15543,7 +15642,7 @@
           <a:noFill/>
         </p:spPr>
         <p:txBody>
-          <a:bodyPr wrap="square" lIns="0" rIns="0" tIns="0" bIns="0">
+          <a:bodyPr wrap="square" lIns="0" tIns="0" rIns="0" bIns="0">
             <a:spAutoFit/>
           </a:bodyPr>
           <a:lstStyle/>
@@ -15578,7 +15677,7 @@
           <a:noFill/>
         </p:spPr>
         <p:txBody>
-          <a:bodyPr wrap="square" lIns="0" rIns="0" tIns="0" bIns="0">
+          <a:bodyPr wrap="square" lIns="0" tIns="0" rIns="0" bIns="0">
             <a:spAutoFit/>
           </a:bodyPr>
           <a:lstStyle/>
@@ -15613,7 +15712,7 @@
           <a:noFill/>
         </p:spPr>
         <p:txBody>
-          <a:bodyPr wrap="square" lIns="0" rIns="0" tIns="0" bIns="0">
+          <a:bodyPr wrap="square" lIns="0" tIns="0" rIns="0" bIns="0">
             <a:spAutoFit/>
           </a:bodyPr>
           <a:lstStyle/>
@@ -15674,6 +15773,7 @@
           <a:lstStyle/>
           <a:p>
             <a:pPr algn="ctr"/>
+            <a:endParaRPr/>
           </a:p>
         </p:txBody>
       </p:sp>
@@ -15694,7 +15794,7 @@
           <a:noFill/>
         </p:spPr>
         <p:txBody>
-          <a:bodyPr wrap="square" lIns="0" rIns="0" tIns="0" bIns="0">
+          <a:bodyPr wrap="square" lIns="0" tIns="0" rIns="0" bIns="0">
             <a:spAutoFit/>
           </a:bodyPr>
           <a:lstStyle/>
@@ -15729,7 +15829,7 @@
           <a:noFill/>
         </p:spPr>
         <p:txBody>
-          <a:bodyPr wrap="square" lIns="0" rIns="0" tIns="0" bIns="0">
+          <a:bodyPr wrap="square" lIns="0" tIns="0" rIns="0" bIns="0">
             <a:spAutoFit/>
           </a:bodyPr>
           <a:lstStyle/>
@@ -15764,7 +15864,7 @@
           <a:noFill/>
         </p:spPr>
         <p:txBody>
-          <a:bodyPr wrap="square" lIns="0" rIns="0" tIns="0" bIns="0">
+          <a:bodyPr wrap="square" lIns="0" tIns="0" rIns="0" bIns="0">
             <a:spAutoFit/>
           </a:bodyPr>
           <a:lstStyle/>
@@ -15791,15 +15891,7 @@
 </file>
 
 <file path=ppt/slides/slide25.xml><?xml version="1.0" encoding="utf-8"?>
-<p:sld xmlns:a="http://schemas.openxmlformats.org/drawingml/2006/main" xmlns:p="http://schemas.openxmlformats.org/presentationml/2006/main" xmlns:r="http://schemas.openxmlformats.org/officeDocument/2006/relationships">
-  <p:bg>
-    <p:bgPr>
-      <a:solidFill>
-        <a:srgbClr val="0F2440"/>
-      </a:solidFill>
-      <a:effectLst/>
-    </p:bgPr>
-  </p:bg>
+<p:sld xmlns:a="http://schemas.openxmlformats.org/drawingml/2006/main" xmlns:r="http://schemas.openxmlformats.org/officeDocument/2006/relationships" xmlns:p="http://schemas.openxmlformats.org/presentationml/2006/main">
   <p:cSld>
     <p:spTree>
       <p:nvGrpSpPr>
@@ -15807,7 +15899,14 @@
         <p:cNvGrpSpPr/>
         <p:nvPr/>
       </p:nvGrpSpPr>
-      <p:grpSpPr/>
+      <p:grpSpPr>
+        <a:xfrm>
+          <a:off x="0" y="0"/>
+          <a:ext cx="0" cy="0"/>
+          <a:chOff x="0" y="0"/>
+          <a:chExt cx="0" cy="0"/>
+        </a:xfrm>
+      </p:grpSpPr>
       <p:sp>
         <p:nvSpPr>
           <p:cNvPr id="2" name="TextBox 1"/>
@@ -15825,7 +15924,7 @@
           <a:noFill/>
         </p:spPr>
         <p:txBody>
-          <a:bodyPr wrap="square" lIns="0" rIns="0" tIns="0" bIns="0">
+          <a:bodyPr wrap="square" lIns="0" tIns="0" rIns="0" bIns="0">
             <a:spAutoFit/>
           </a:bodyPr>
           <a:lstStyle/>
@@ -15860,7 +15959,7 @@
           <a:noFill/>
         </p:spPr>
         <p:txBody>
-          <a:bodyPr wrap="square" lIns="0" rIns="0" tIns="0" bIns="0">
+          <a:bodyPr wrap="square" lIns="0" tIns="0" rIns="0" bIns="0">
             <a:spAutoFit/>
           </a:bodyPr>
           <a:lstStyle/>
@@ -15923,6 +16022,7 @@
           <a:lstStyle/>
           <a:p>
             <a:pPr algn="ctr"/>
+            <a:endParaRPr/>
           </a:p>
         </p:txBody>
       </p:sp>
@@ -15943,7 +16043,7 @@
           <a:noFill/>
         </p:spPr>
         <p:txBody>
-          <a:bodyPr wrap="square" lIns="0" rIns="0" tIns="0" bIns="0">
+          <a:bodyPr wrap="square" lIns="0" tIns="0" rIns="0" bIns="0">
             <a:spAutoFit/>
           </a:bodyPr>
           <a:lstStyle/>
@@ -15978,7 +16078,7 @@
           <a:noFill/>
         </p:spPr>
         <p:txBody>
-          <a:bodyPr wrap="square" lIns="0" rIns="0" tIns="0" bIns="0">
+          <a:bodyPr wrap="square" lIns="0" tIns="0" rIns="0" bIns="0">
             <a:spAutoFit/>
           </a:bodyPr>
           <a:lstStyle/>
@@ -16041,6 +16141,7 @@
           <a:lstStyle/>
           <a:p>
             <a:pPr algn="ctr"/>
+            <a:endParaRPr/>
           </a:p>
         </p:txBody>
       </p:sp>
@@ -16061,7 +16162,7 @@
           <a:noFill/>
         </p:spPr>
         <p:txBody>
-          <a:bodyPr wrap="square" lIns="0" rIns="0" tIns="0" bIns="0">
+          <a:bodyPr wrap="square" lIns="0" tIns="0" rIns="0" bIns="0">
             <a:spAutoFit/>
           </a:bodyPr>
           <a:lstStyle/>
@@ -16096,7 +16197,7 @@
           <a:noFill/>
         </p:spPr>
         <p:txBody>
-          <a:bodyPr wrap="square" lIns="0" rIns="0" tIns="0" bIns="0">
+          <a:bodyPr wrap="square" lIns="0" tIns="0" rIns="0" bIns="0">
             <a:spAutoFit/>
           </a:bodyPr>
           <a:lstStyle/>
@@ -16159,6 +16260,7 @@
           <a:lstStyle/>
           <a:p>
             <a:pPr algn="ctr"/>
+            <a:endParaRPr/>
           </a:p>
         </p:txBody>
       </p:sp>
@@ -16179,7 +16281,7 @@
           <a:noFill/>
         </p:spPr>
         <p:txBody>
-          <a:bodyPr wrap="square" lIns="0" rIns="0" tIns="0" bIns="0">
+          <a:bodyPr wrap="square" lIns="0" tIns="0" rIns="0" bIns="0">
             <a:spAutoFit/>
           </a:bodyPr>
           <a:lstStyle/>
@@ -16214,7 +16316,7 @@
           <a:noFill/>
         </p:spPr>
         <p:txBody>
-          <a:bodyPr wrap="square" lIns="0" rIns="0" tIns="0" bIns="0">
+          <a:bodyPr wrap="square" lIns="0" tIns="0" rIns="0" bIns="0">
             <a:spAutoFit/>
           </a:bodyPr>
           <a:lstStyle/>
@@ -16277,6 +16379,7 @@
           <a:lstStyle/>
           <a:p>
             <a:pPr algn="ctr"/>
+            <a:endParaRPr/>
           </a:p>
         </p:txBody>
       </p:sp>
@@ -16297,7 +16400,7 @@
           <a:noFill/>
         </p:spPr>
         <p:txBody>
-          <a:bodyPr wrap="square" lIns="0" rIns="0" tIns="0" bIns="0">
+          <a:bodyPr wrap="square" lIns="0" tIns="0" rIns="0" bIns="0">
             <a:spAutoFit/>
           </a:bodyPr>
           <a:lstStyle/>
@@ -16332,7 +16435,7 @@
           <a:noFill/>
         </p:spPr>
         <p:txBody>
-          <a:bodyPr wrap="square" lIns="0" rIns="0" tIns="0" bIns="0">
+          <a:bodyPr wrap="square" lIns="0" tIns="0" rIns="0" bIns="0">
             <a:spAutoFit/>
           </a:bodyPr>
           <a:lstStyle/>
@@ -16367,7 +16470,7 @@
           <a:noFill/>
         </p:spPr>
         <p:txBody>
-          <a:bodyPr wrap="square" lIns="0" rIns="0" tIns="0" bIns="0">
+          <a:bodyPr wrap="square" lIns="0" tIns="0" rIns="0" bIns="0">
             <a:spAutoFit/>
           </a:bodyPr>
           <a:lstStyle/>
@@ -16402,7 +16505,7 @@
           <a:noFill/>
         </p:spPr>
         <p:txBody>
-          <a:bodyPr wrap="square" lIns="0" rIns="0" tIns="0" bIns="0">
+          <a:bodyPr wrap="square" lIns="0" tIns="0" rIns="0" bIns="0">
             <a:spAutoFit/>
           </a:bodyPr>
           <a:lstStyle/>
@@ -16429,15 +16532,7 @@
 </file>
 
 <file path=ppt/slides/slide26.xml><?xml version="1.0" encoding="utf-8"?>
-<p:sld xmlns:a="http://schemas.openxmlformats.org/drawingml/2006/main" xmlns:p="http://schemas.openxmlformats.org/presentationml/2006/main" xmlns:r="http://schemas.openxmlformats.org/officeDocument/2006/relationships">
-  <p:bg>
-    <p:bgPr>
-      <a:solidFill>
-        <a:srgbClr val="F4F6F9"/>
-      </a:solidFill>
-      <a:effectLst/>
-    </p:bgPr>
-  </p:bg>
+<p:sld xmlns:a="http://schemas.openxmlformats.org/drawingml/2006/main" xmlns:r="http://schemas.openxmlformats.org/officeDocument/2006/relationships" xmlns:p="http://schemas.openxmlformats.org/presentationml/2006/main">
   <p:cSld>
     <p:spTree>
       <p:nvGrpSpPr>
@@ -16445,7 +16540,14 @@
         <p:cNvGrpSpPr/>
         <p:nvPr/>
       </p:nvGrpSpPr>
-      <p:grpSpPr/>
+      <p:grpSpPr>
+        <a:xfrm>
+          <a:off x="0" y="0"/>
+          <a:ext cx="0" cy="0"/>
+          <a:chOff x="0" y="0"/>
+          <a:chExt cx="0" cy="0"/>
+        </a:xfrm>
+      </p:grpSpPr>
       <p:sp>
         <p:nvSpPr>
           <p:cNvPr id="2" name="TextBox 1"/>
@@ -16463,7 +16565,7 @@
           <a:noFill/>
         </p:spPr>
         <p:txBody>
-          <a:bodyPr wrap="square" lIns="0" rIns="0" tIns="0" bIns="0">
+          <a:bodyPr wrap="square" lIns="0" tIns="0" rIns="0" bIns="0">
             <a:spAutoFit/>
           </a:bodyPr>
           <a:lstStyle/>
@@ -16498,7 +16600,7 @@
           <a:noFill/>
         </p:spPr>
         <p:txBody>
-          <a:bodyPr wrap="square" lIns="0" rIns="0" tIns="0" bIns="0">
+          <a:bodyPr wrap="square" lIns="0" tIns="0" rIns="0" bIns="0">
             <a:spAutoFit/>
           </a:bodyPr>
           <a:lstStyle/>
@@ -16533,7 +16635,7 @@
           <a:noFill/>
         </p:spPr>
         <p:txBody>
-          <a:bodyPr wrap="square" lIns="0" rIns="0" tIns="0" bIns="0">
+          <a:bodyPr wrap="square" lIns="0" tIns="0" rIns="0" bIns="0">
             <a:spAutoFit/>
           </a:bodyPr>
           <a:lstStyle/>
@@ -16568,7 +16670,7 @@
           <a:noFill/>
         </p:spPr>
         <p:txBody>
-          <a:bodyPr wrap="square" lIns="0" rIns="0" tIns="0" bIns="0">
+          <a:bodyPr wrap="square" lIns="0" tIns="0" rIns="0" bIns="0">
             <a:spAutoFit/>
           </a:bodyPr>
           <a:lstStyle/>
@@ -16631,6 +16733,7 @@
           <a:lstStyle/>
           <a:p>
             <a:pPr algn="ctr"/>
+            <a:endParaRPr/>
           </a:p>
         </p:txBody>
       </p:sp>
@@ -16677,6 +16780,7 @@
           <a:lstStyle/>
           <a:p>
             <a:pPr algn="ctr"/>
+            <a:endParaRPr/>
           </a:p>
         </p:txBody>
       </p:sp>
@@ -16697,7 +16801,7 @@
           <a:noFill/>
         </p:spPr>
         <p:txBody>
-          <a:bodyPr wrap="square" lIns="0" rIns="0" tIns="0" bIns="0">
+          <a:bodyPr wrap="square" lIns="0" tIns="0" rIns="0" bIns="0">
             <a:spAutoFit/>
           </a:bodyPr>
           <a:lstStyle/>
@@ -16732,7 +16836,7 @@
           <a:noFill/>
         </p:spPr>
         <p:txBody>
-          <a:bodyPr wrap="square" lIns="0" rIns="0" tIns="0" bIns="0">
+          <a:bodyPr wrap="square" lIns="0" tIns="0" rIns="0" bIns="0">
             <a:spAutoFit/>
           </a:bodyPr>
           <a:lstStyle/>
@@ -16795,6 +16899,7 @@
           <a:lstStyle/>
           <a:p>
             <a:pPr algn="ctr"/>
+            <a:endParaRPr/>
           </a:p>
         </p:txBody>
       </p:sp>
@@ -16841,6 +16946,7 @@
           <a:lstStyle/>
           <a:p>
             <a:pPr algn="ctr"/>
+            <a:endParaRPr/>
           </a:p>
         </p:txBody>
       </p:sp>
@@ -16861,7 +16967,7 @@
           <a:noFill/>
         </p:spPr>
         <p:txBody>
-          <a:bodyPr wrap="square" lIns="0" rIns="0" tIns="0" bIns="0">
+          <a:bodyPr wrap="square" lIns="0" tIns="0" rIns="0" bIns="0">
             <a:spAutoFit/>
           </a:bodyPr>
           <a:lstStyle/>
@@ -16896,7 +17002,7 @@
           <a:noFill/>
         </p:spPr>
         <p:txBody>
-          <a:bodyPr wrap="square" lIns="0" rIns="0" tIns="0" bIns="0">
+          <a:bodyPr wrap="square" lIns="0" tIns="0" rIns="0" bIns="0">
             <a:spAutoFit/>
           </a:bodyPr>
           <a:lstStyle/>
@@ -16959,6 +17065,7 @@
           <a:lstStyle/>
           <a:p>
             <a:pPr algn="ctr"/>
+            <a:endParaRPr/>
           </a:p>
         </p:txBody>
       </p:sp>
@@ -17005,6 +17112,7 @@
           <a:lstStyle/>
           <a:p>
             <a:pPr algn="ctr"/>
+            <a:endParaRPr/>
           </a:p>
         </p:txBody>
       </p:sp>
@@ -17025,7 +17133,7 @@
           <a:noFill/>
         </p:spPr>
         <p:txBody>
-          <a:bodyPr wrap="square" lIns="0" rIns="0" tIns="0" bIns="0">
+          <a:bodyPr wrap="square" lIns="0" tIns="0" rIns="0" bIns="0">
             <a:spAutoFit/>
           </a:bodyPr>
           <a:lstStyle/>
@@ -17060,7 +17168,7 @@
           <a:noFill/>
         </p:spPr>
         <p:txBody>
-          <a:bodyPr wrap="square" lIns="0" rIns="0" tIns="0" bIns="0">
+          <a:bodyPr wrap="square" lIns="0" tIns="0" rIns="0" bIns="0">
             <a:spAutoFit/>
           </a:bodyPr>
           <a:lstStyle/>
@@ -17123,6 +17231,7 @@
           <a:lstStyle/>
           <a:p>
             <a:pPr algn="ctr"/>
+            <a:endParaRPr/>
           </a:p>
         </p:txBody>
       </p:sp>
@@ -17169,6 +17278,7 @@
           <a:lstStyle/>
           <a:p>
             <a:pPr algn="ctr"/>
+            <a:endParaRPr/>
           </a:p>
         </p:txBody>
       </p:sp>
@@ -17189,7 +17299,7 @@
           <a:noFill/>
         </p:spPr>
         <p:txBody>
-          <a:bodyPr wrap="square" lIns="0" rIns="0" tIns="0" bIns="0">
+          <a:bodyPr wrap="square" lIns="0" tIns="0" rIns="0" bIns="0">
             <a:spAutoFit/>
           </a:bodyPr>
           <a:lstStyle/>
@@ -17224,7 +17334,7 @@
           <a:noFill/>
         </p:spPr>
         <p:txBody>
-          <a:bodyPr wrap="square" lIns="0" rIns="0" tIns="0" bIns="0">
+          <a:bodyPr wrap="square" lIns="0" tIns="0" rIns="0" bIns="0">
             <a:spAutoFit/>
           </a:bodyPr>
           <a:lstStyle/>
@@ -17251,15 +17361,7 @@
 </file>
 
 <file path=ppt/slides/slide27.xml><?xml version="1.0" encoding="utf-8"?>
-<p:sld xmlns:a="http://schemas.openxmlformats.org/drawingml/2006/main" xmlns:p="http://schemas.openxmlformats.org/presentationml/2006/main" xmlns:r="http://schemas.openxmlformats.org/officeDocument/2006/relationships">
-  <p:bg>
-    <p:bgPr>
-      <a:solidFill>
-        <a:srgbClr val="0F2440"/>
-      </a:solidFill>
-      <a:effectLst/>
-    </p:bgPr>
-  </p:bg>
+<p:sld xmlns:a="http://schemas.openxmlformats.org/drawingml/2006/main" xmlns:r="http://schemas.openxmlformats.org/officeDocument/2006/relationships" xmlns:p="http://schemas.openxmlformats.org/presentationml/2006/main">
   <p:cSld>
     <p:spTree>
       <p:nvGrpSpPr>
@@ -17267,7 +17369,14 @@
         <p:cNvGrpSpPr/>
         <p:nvPr/>
       </p:nvGrpSpPr>
-      <p:grpSpPr/>
+      <p:grpSpPr>
+        <a:xfrm>
+          <a:off x="0" y="0"/>
+          <a:ext cx="0" cy="0"/>
+          <a:chOff x="0" y="0"/>
+          <a:chExt cx="0" cy="0"/>
+        </a:xfrm>
+      </p:grpSpPr>
       <p:sp>
         <p:nvSpPr>
           <p:cNvPr id="2" name="TextBox 1"/>
@@ -17285,7 +17394,7 @@
           <a:noFill/>
         </p:spPr>
         <p:txBody>
-          <a:bodyPr wrap="square" lIns="0" rIns="0" tIns="0" bIns="0">
+          <a:bodyPr wrap="square" lIns="0" tIns="0" rIns="0" bIns="0">
             <a:spAutoFit/>
           </a:bodyPr>
           <a:lstStyle/>
@@ -17320,7 +17429,7 @@
           <a:noFill/>
         </p:spPr>
         <p:txBody>
-          <a:bodyPr wrap="square" lIns="0" rIns="0" tIns="0" bIns="0">
+          <a:bodyPr wrap="square" lIns="0" tIns="0" rIns="0" bIns="0">
             <a:spAutoFit/>
           </a:bodyPr>
           <a:lstStyle/>
@@ -17383,6 +17492,7 @@
           <a:lstStyle/>
           <a:p>
             <a:pPr algn="ctr"/>
+            <a:endParaRPr/>
           </a:p>
         </p:txBody>
       </p:sp>
@@ -17427,6 +17537,7 @@
           <a:lstStyle/>
           <a:p>
             <a:pPr algn="ctr"/>
+            <a:endParaRPr/>
           </a:p>
         </p:txBody>
       </p:sp>
@@ -17473,6 +17584,7 @@
           <a:lstStyle/>
           <a:p>
             <a:pPr algn="ctr"/>
+            <a:endParaRPr/>
           </a:p>
         </p:txBody>
       </p:sp>
@@ -17493,7 +17605,7 @@
           <a:noFill/>
         </p:spPr>
         <p:txBody>
-          <a:bodyPr wrap="square" lIns="0" rIns="0" tIns="0" bIns="0">
+          <a:bodyPr wrap="square" lIns="0" tIns="0" rIns="0" bIns="0">
             <a:spAutoFit/>
           </a:bodyPr>
           <a:lstStyle/>
@@ -17528,7 +17640,7 @@
           <a:noFill/>
         </p:spPr>
         <p:txBody>
-          <a:bodyPr wrap="square" lIns="0" rIns="0" tIns="0" bIns="0">
+          <a:bodyPr wrap="square" lIns="0" tIns="0" rIns="0" bIns="0">
             <a:spAutoFit/>
           </a:bodyPr>
           <a:lstStyle/>
@@ -17591,6 +17703,7 @@
           <a:lstStyle/>
           <a:p>
             <a:pPr algn="ctr"/>
+            <a:endParaRPr/>
           </a:p>
         </p:txBody>
       </p:sp>
@@ -17611,7 +17724,7 @@
           <a:noFill/>
         </p:spPr>
         <p:txBody>
-          <a:bodyPr wrap="square" lIns="0" rIns="0" tIns="0" bIns="0">
+          <a:bodyPr wrap="square" lIns="0" tIns="0" rIns="0" bIns="0">
             <a:spAutoFit/>
           </a:bodyPr>
           <a:lstStyle/>
@@ -17646,7 +17759,7 @@
           <a:noFill/>
         </p:spPr>
         <p:txBody>
-          <a:bodyPr wrap="square" lIns="0" rIns="0" tIns="0" bIns="0">
+          <a:bodyPr wrap="square" lIns="0" tIns="0" rIns="0" bIns="0">
             <a:spAutoFit/>
           </a:bodyPr>
           <a:lstStyle/>
@@ -17709,6 +17822,7 @@
           <a:lstStyle/>
           <a:p>
             <a:pPr algn="ctr"/>
+            <a:endParaRPr/>
           </a:p>
         </p:txBody>
       </p:sp>
@@ -17729,7 +17843,7 @@
           <a:noFill/>
         </p:spPr>
         <p:txBody>
-          <a:bodyPr wrap="square" lIns="0" rIns="0" tIns="0" bIns="0">
+          <a:bodyPr wrap="square" lIns="0" tIns="0" rIns="0" bIns="0">
             <a:spAutoFit/>
           </a:bodyPr>
           <a:lstStyle/>
@@ -17764,7 +17878,7 @@
           <a:noFill/>
         </p:spPr>
         <p:txBody>
-          <a:bodyPr wrap="square" lIns="0" rIns="0" tIns="0" bIns="0">
+          <a:bodyPr wrap="square" lIns="0" tIns="0" rIns="0" bIns="0">
             <a:spAutoFit/>
           </a:bodyPr>
           <a:lstStyle/>
@@ -17827,6 +17941,7 @@
           <a:lstStyle/>
           <a:p>
             <a:pPr algn="ctr"/>
+            <a:endParaRPr/>
           </a:p>
         </p:txBody>
       </p:sp>
@@ -17871,6 +17986,7 @@
           <a:lstStyle/>
           <a:p>
             <a:pPr algn="ctr"/>
+            <a:endParaRPr/>
           </a:p>
         </p:txBody>
       </p:sp>
@@ -17917,6 +18033,7 @@
           <a:lstStyle/>
           <a:p>
             <a:pPr algn="ctr"/>
+            <a:endParaRPr/>
           </a:p>
         </p:txBody>
       </p:sp>
@@ -17937,7 +18054,7 @@
           <a:noFill/>
         </p:spPr>
         <p:txBody>
-          <a:bodyPr wrap="square" lIns="0" rIns="0" tIns="0" bIns="0">
+          <a:bodyPr wrap="square" lIns="0" tIns="0" rIns="0" bIns="0">
             <a:spAutoFit/>
           </a:bodyPr>
           <a:lstStyle/>
@@ -17972,7 +18089,7 @@
           <a:noFill/>
         </p:spPr>
         <p:txBody>
-          <a:bodyPr wrap="square" lIns="0" rIns="0" tIns="0" bIns="0">
+          <a:bodyPr wrap="square" lIns="0" tIns="0" rIns="0" bIns="0">
             <a:spAutoFit/>
           </a:bodyPr>
           <a:lstStyle/>
@@ -18035,6 +18152,7 @@
           <a:lstStyle/>
           <a:p>
             <a:pPr algn="ctr"/>
+            <a:endParaRPr/>
           </a:p>
         </p:txBody>
       </p:sp>
@@ -18055,7 +18173,7 @@
           <a:noFill/>
         </p:spPr>
         <p:txBody>
-          <a:bodyPr wrap="square" lIns="0" rIns="0" tIns="0" bIns="0">
+          <a:bodyPr wrap="square" lIns="0" tIns="0" rIns="0" bIns="0">
             <a:spAutoFit/>
           </a:bodyPr>
           <a:lstStyle/>
@@ -18090,7 +18208,7 @@
           <a:noFill/>
         </p:spPr>
         <p:txBody>
-          <a:bodyPr wrap="square" lIns="0" rIns="0" tIns="0" bIns="0">
+          <a:bodyPr wrap="square" lIns="0" tIns="0" rIns="0" bIns="0">
             <a:spAutoFit/>
           </a:bodyPr>
           <a:lstStyle/>
@@ -18153,6 +18271,7 @@
           <a:lstStyle/>
           <a:p>
             <a:pPr algn="ctr"/>
+            <a:endParaRPr/>
           </a:p>
         </p:txBody>
       </p:sp>
@@ -18173,7 +18292,7 @@
           <a:noFill/>
         </p:spPr>
         <p:txBody>
-          <a:bodyPr wrap="square" lIns="0" rIns="0" tIns="0" bIns="0">
+          <a:bodyPr wrap="square" lIns="0" tIns="0" rIns="0" bIns="0">
             <a:spAutoFit/>
           </a:bodyPr>
           <a:lstStyle/>
@@ -18208,7 +18327,7 @@
           <a:noFill/>
         </p:spPr>
         <p:txBody>
-          <a:bodyPr wrap="square" lIns="0" rIns="0" tIns="0" bIns="0">
+          <a:bodyPr wrap="square" lIns="0" tIns="0" rIns="0" bIns="0">
             <a:spAutoFit/>
           </a:bodyPr>
           <a:lstStyle/>
@@ -18271,6 +18390,7 @@
           <a:lstStyle/>
           <a:p>
             <a:pPr algn="ctr"/>
+            <a:endParaRPr/>
           </a:p>
         </p:txBody>
       </p:sp>
@@ -18315,6 +18435,7 @@
           <a:lstStyle/>
           <a:p>
             <a:pPr algn="ctr"/>
+            <a:endParaRPr/>
           </a:p>
         </p:txBody>
       </p:sp>
@@ -18361,6 +18482,7 @@
           <a:lstStyle/>
           <a:p>
             <a:pPr algn="ctr"/>
+            <a:endParaRPr/>
           </a:p>
         </p:txBody>
       </p:sp>
@@ -18381,7 +18503,7 @@
           <a:noFill/>
         </p:spPr>
         <p:txBody>
-          <a:bodyPr wrap="square" lIns="0" rIns="0" tIns="0" bIns="0">
+          <a:bodyPr wrap="square" lIns="0" tIns="0" rIns="0" bIns="0">
             <a:spAutoFit/>
           </a:bodyPr>
           <a:lstStyle/>
@@ -18416,7 +18538,7 @@
           <a:noFill/>
         </p:spPr>
         <p:txBody>
-          <a:bodyPr wrap="square" lIns="0" rIns="0" tIns="0" bIns="0">
+          <a:bodyPr wrap="square" lIns="0" tIns="0" rIns="0" bIns="0">
             <a:spAutoFit/>
           </a:bodyPr>
           <a:lstStyle/>
@@ -18479,6 +18601,7 @@
           <a:lstStyle/>
           <a:p>
             <a:pPr algn="ctr"/>
+            <a:endParaRPr/>
           </a:p>
         </p:txBody>
       </p:sp>
@@ -18499,7 +18622,7 @@
           <a:noFill/>
         </p:spPr>
         <p:txBody>
-          <a:bodyPr wrap="square" lIns="0" rIns="0" tIns="0" bIns="0">
+          <a:bodyPr wrap="square" lIns="0" tIns="0" rIns="0" bIns="0">
             <a:spAutoFit/>
           </a:bodyPr>
           <a:lstStyle/>
@@ -18534,7 +18657,7 @@
           <a:noFill/>
         </p:spPr>
         <p:txBody>
-          <a:bodyPr wrap="square" lIns="0" rIns="0" tIns="0" bIns="0">
+          <a:bodyPr wrap="square" lIns="0" tIns="0" rIns="0" bIns="0">
             <a:spAutoFit/>
           </a:bodyPr>
           <a:lstStyle/>
@@ -18597,6 +18720,7 @@
           <a:lstStyle/>
           <a:p>
             <a:pPr algn="ctr"/>
+            <a:endParaRPr/>
           </a:p>
         </p:txBody>
       </p:sp>
@@ -18617,7 +18741,7 @@
           <a:noFill/>
         </p:spPr>
         <p:txBody>
-          <a:bodyPr wrap="square" lIns="0" rIns="0" tIns="0" bIns="0">
+          <a:bodyPr wrap="square" lIns="0" tIns="0" rIns="0" bIns="0">
             <a:spAutoFit/>
           </a:bodyPr>
           <a:lstStyle/>
@@ -18652,7 +18776,7 @@
           <a:noFill/>
         </p:spPr>
         <p:txBody>
-          <a:bodyPr wrap="square" lIns="0" rIns="0" tIns="0" bIns="0">
+          <a:bodyPr wrap="square" lIns="0" tIns="0" rIns="0" bIns="0">
             <a:spAutoFit/>
           </a:bodyPr>
           <a:lstStyle/>
@@ -18687,7 +18811,7 @@
           <a:noFill/>
         </p:spPr>
         <p:txBody>
-          <a:bodyPr wrap="square" lIns="0" rIns="0" tIns="0" bIns="0">
+          <a:bodyPr wrap="square" lIns="0" tIns="0" rIns="0" bIns="0">
             <a:spAutoFit/>
           </a:bodyPr>
           <a:lstStyle/>
@@ -18722,7 +18846,7 @@
           <a:noFill/>
         </p:spPr>
         <p:txBody>
-          <a:bodyPr wrap="square" lIns="0" rIns="0" tIns="0" bIns="0">
+          <a:bodyPr wrap="square" lIns="0" tIns="0" rIns="0" bIns="0">
             <a:spAutoFit/>
           </a:bodyPr>
           <a:lstStyle/>
@@ -18749,15 +18873,7 @@
 </file>
 
 <file path=ppt/slides/slide28.xml><?xml version="1.0" encoding="utf-8"?>
-<p:sld xmlns:a="http://schemas.openxmlformats.org/drawingml/2006/main" xmlns:p="http://schemas.openxmlformats.org/presentationml/2006/main" xmlns:r="http://schemas.openxmlformats.org/officeDocument/2006/relationships">
-  <p:bg>
-    <p:bgPr>
-      <a:solidFill>
-        <a:srgbClr val="F4F6F9"/>
-      </a:solidFill>
-      <a:effectLst/>
-    </p:bgPr>
-  </p:bg>
+<p:sld xmlns:a="http://schemas.openxmlformats.org/drawingml/2006/main" xmlns:r="http://schemas.openxmlformats.org/officeDocument/2006/relationships" xmlns:p="http://schemas.openxmlformats.org/presentationml/2006/main">
   <p:cSld>
     <p:spTree>
       <p:nvGrpSpPr>
@@ -18765,7 +18881,14 @@
         <p:cNvGrpSpPr/>
         <p:nvPr/>
       </p:nvGrpSpPr>
-      <p:grpSpPr/>
+      <p:grpSpPr>
+        <a:xfrm>
+          <a:off x="0" y="0"/>
+          <a:ext cx="0" cy="0"/>
+          <a:chOff x="0" y="0"/>
+          <a:chExt cx="0" cy="0"/>
+        </a:xfrm>
+      </p:grpSpPr>
       <p:sp>
         <p:nvSpPr>
           <p:cNvPr id="2" name="TextBox 1"/>
@@ -18783,7 +18906,7 @@
           <a:noFill/>
         </p:spPr>
         <p:txBody>
-          <a:bodyPr wrap="square" lIns="0" rIns="0" tIns="0" bIns="0">
+          <a:bodyPr wrap="square" lIns="0" tIns="0" rIns="0" bIns="0">
             <a:spAutoFit/>
           </a:bodyPr>
           <a:lstStyle/>
@@ -18818,7 +18941,7 @@
           <a:noFill/>
         </p:spPr>
         <p:txBody>
-          <a:bodyPr wrap="square" lIns="0" rIns="0" tIns="0" bIns="0">
+          <a:bodyPr wrap="square" lIns="0" tIns="0" rIns="0" bIns="0">
             <a:spAutoFit/>
           </a:bodyPr>
           <a:lstStyle/>
@@ -18853,7 +18976,7 @@
           <a:noFill/>
         </p:spPr>
         <p:txBody>
-          <a:bodyPr wrap="square" lIns="0" rIns="0" tIns="0" bIns="0">
+          <a:bodyPr wrap="square" lIns="0" tIns="0" rIns="0" bIns="0">
             <a:spAutoFit/>
           </a:bodyPr>
           <a:lstStyle/>
@@ -18888,7 +19011,7 @@
           <a:noFill/>
         </p:spPr>
         <p:txBody>
-          <a:bodyPr wrap="square" lIns="0" rIns="0" tIns="0" bIns="0">
+          <a:bodyPr wrap="square" lIns="0" tIns="0" rIns="0" bIns="0">
             <a:spAutoFit/>
           </a:bodyPr>
           <a:lstStyle/>
@@ -18923,7 +19046,7 @@
           <a:noFill/>
         </p:spPr>
         <p:txBody>
-          <a:bodyPr wrap="square" lIns="0" rIns="0" tIns="0" bIns="0">
+          <a:bodyPr wrap="square" lIns="0" tIns="0" rIns="0" bIns="0">
             <a:spAutoFit/>
           </a:bodyPr>
           <a:lstStyle/>
@@ -18958,7 +19081,7 @@
           <a:noFill/>
         </p:spPr>
         <p:txBody>
-          <a:bodyPr wrap="square" lIns="0" rIns="0" tIns="0" bIns="0">
+          <a:bodyPr wrap="square" lIns="0" tIns="0" rIns="0" bIns="0">
             <a:spAutoFit/>
           </a:bodyPr>
           <a:lstStyle/>
@@ -19073,6 +19196,7 @@
           <a:lstStyle/>
           <a:p>
             <a:pPr algn="ctr"/>
+            <a:endParaRPr/>
           </a:p>
         </p:txBody>
       </p:sp>
@@ -19117,6 +19241,7 @@
           <a:lstStyle/>
           <a:p>
             <a:pPr algn="ctr"/>
+            <a:endParaRPr/>
           </a:p>
         </p:txBody>
       </p:sp>
@@ -19137,7 +19262,7 @@
           <a:noFill/>
         </p:spPr>
         <p:txBody>
-          <a:bodyPr wrap="square" lIns="0" rIns="0" tIns="0" bIns="0">
+          <a:bodyPr wrap="square" lIns="0" tIns="0" rIns="0" bIns="0">
             <a:spAutoFit/>
           </a:bodyPr>
           <a:lstStyle/>
@@ -19172,7 +19297,7 @@
           <a:noFill/>
         </p:spPr>
         <p:txBody>
-          <a:bodyPr wrap="square" lIns="0" rIns="0" tIns="0" bIns="0">
+          <a:bodyPr wrap="square" lIns="0" tIns="0" rIns="0" bIns="0">
             <a:spAutoFit/>
           </a:bodyPr>
           <a:lstStyle/>
@@ -19207,7 +19332,7 @@
           <a:noFill/>
         </p:spPr>
         <p:txBody>
-          <a:bodyPr wrap="square" lIns="0" rIns="0" tIns="0" bIns="0">
+          <a:bodyPr wrap="square" lIns="0" tIns="0" rIns="0" bIns="0">
             <a:spAutoFit/>
           </a:bodyPr>
           <a:lstStyle/>
@@ -19242,7 +19367,7 @@
           <a:noFill/>
         </p:spPr>
         <p:txBody>
-          <a:bodyPr wrap="square" lIns="0" rIns="0" tIns="0" bIns="0">
+          <a:bodyPr wrap="square" lIns="0" tIns="0" rIns="0" bIns="0">
             <a:spAutoFit/>
           </a:bodyPr>
           <a:lstStyle/>
@@ -19277,7 +19402,7 @@
           <a:noFill/>
         </p:spPr>
         <p:txBody>
-          <a:bodyPr wrap="square" lIns="0" rIns="0" tIns="0" bIns="0">
+          <a:bodyPr wrap="square" lIns="0" tIns="0" rIns="0" bIns="0">
             <a:spAutoFit/>
           </a:bodyPr>
           <a:lstStyle/>
@@ -19312,7 +19437,7 @@
           <a:noFill/>
         </p:spPr>
         <p:txBody>
-          <a:bodyPr wrap="square" lIns="0" rIns="0" tIns="0" bIns="0">
+          <a:bodyPr wrap="square" lIns="0" tIns="0" rIns="0" bIns="0">
             <a:spAutoFit/>
           </a:bodyPr>
           <a:lstStyle/>
@@ -19347,7 +19472,7 @@
           <a:noFill/>
         </p:spPr>
         <p:txBody>
-          <a:bodyPr wrap="square" lIns="0" rIns="0" tIns="0" bIns="0">
+          <a:bodyPr wrap="square" lIns="0" tIns="0" rIns="0" bIns="0">
             <a:spAutoFit/>
           </a:bodyPr>
           <a:lstStyle/>
@@ -19382,7 +19507,7 @@
           <a:noFill/>
         </p:spPr>
         <p:txBody>
-          <a:bodyPr wrap="square" lIns="0" rIns="0" tIns="0" bIns="0">
+          <a:bodyPr wrap="square" lIns="0" tIns="0" rIns="0" bIns="0">
             <a:spAutoFit/>
           </a:bodyPr>
           <a:lstStyle/>
@@ -19417,7 +19542,7 @@
           <a:noFill/>
         </p:spPr>
         <p:txBody>
-          <a:bodyPr wrap="square" lIns="0" rIns="0" tIns="0" bIns="0">
+          <a:bodyPr wrap="square" lIns="0" tIns="0" rIns="0" bIns="0">
             <a:spAutoFit/>
           </a:bodyPr>
           <a:lstStyle/>
@@ -19480,6 +19605,7 @@
           <a:lstStyle/>
           <a:p>
             <a:pPr algn="ctr"/>
+            <a:endParaRPr/>
           </a:p>
         </p:txBody>
       </p:sp>
@@ -19524,6 +19650,7 @@
           <a:lstStyle/>
           <a:p>
             <a:pPr algn="ctr"/>
+            <a:endParaRPr/>
           </a:p>
         </p:txBody>
       </p:sp>
@@ -19544,7 +19671,7 @@
           <a:noFill/>
         </p:spPr>
         <p:txBody>
-          <a:bodyPr wrap="square" lIns="0" rIns="0" tIns="0" bIns="0">
+          <a:bodyPr wrap="square" lIns="0" tIns="0" rIns="0" bIns="0">
             <a:spAutoFit/>
           </a:bodyPr>
           <a:lstStyle/>
@@ -19579,7 +19706,7 @@
           <a:noFill/>
         </p:spPr>
         <p:txBody>
-          <a:bodyPr wrap="square" lIns="0" rIns="0" tIns="0" bIns="0">
+          <a:bodyPr wrap="square" lIns="0" tIns="0" rIns="0" bIns="0">
             <a:spAutoFit/>
           </a:bodyPr>
           <a:lstStyle/>
@@ -19614,7 +19741,7 @@
           <a:noFill/>
         </p:spPr>
         <p:txBody>
-          <a:bodyPr wrap="square" lIns="0" rIns="0" tIns="0" bIns="0">
+          <a:bodyPr wrap="square" lIns="0" tIns="0" rIns="0" bIns="0">
             <a:spAutoFit/>
           </a:bodyPr>
           <a:lstStyle/>
@@ -19649,7 +19776,7 @@
           <a:noFill/>
         </p:spPr>
         <p:txBody>
-          <a:bodyPr wrap="square" lIns="0" rIns="0" tIns="0" bIns="0">
+          <a:bodyPr wrap="square" lIns="0" tIns="0" rIns="0" bIns="0">
             <a:spAutoFit/>
           </a:bodyPr>
           <a:lstStyle/>
@@ -19684,7 +19811,7 @@
           <a:noFill/>
         </p:spPr>
         <p:txBody>
-          <a:bodyPr wrap="square" lIns="0" rIns="0" tIns="0" bIns="0">
+          <a:bodyPr wrap="square" lIns="0" tIns="0" rIns="0" bIns="0">
             <a:spAutoFit/>
           </a:bodyPr>
           <a:lstStyle/>
@@ -19719,7 +19846,7 @@
           <a:noFill/>
         </p:spPr>
         <p:txBody>
-          <a:bodyPr wrap="square" lIns="0" rIns="0" tIns="0" bIns="0">
+          <a:bodyPr wrap="square" lIns="0" tIns="0" rIns="0" bIns="0">
             <a:spAutoFit/>
           </a:bodyPr>
           <a:lstStyle/>
@@ -19754,7 +19881,7 @@
           <a:noFill/>
         </p:spPr>
         <p:txBody>
-          <a:bodyPr wrap="square" lIns="0" rIns="0" tIns="0" bIns="0">
+          <a:bodyPr wrap="square" lIns="0" tIns="0" rIns="0" bIns="0">
             <a:spAutoFit/>
           </a:bodyPr>
           <a:lstStyle/>
@@ -19789,7 +19916,7 @@
           <a:noFill/>
         </p:spPr>
         <p:txBody>
-          <a:bodyPr wrap="square" lIns="0" rIns="0" tIns="0" bIns="0">
+          <a:bodyPr wrap="square" lIns="0" tIns="0" rIns="0" bIns="0">
             <a:spAutoFit/>
           </a:bodyPr>
           <a:lstStyle/>
@@ -19824,7 +19951,7 @@
           <a:noFill/>
         </p:spPr>
         <p:txBody>
-          <a:bodyPr wrap="square" lIns="0" rIns="0" tIns="0" bIns="0">
+          <a:bodyPr wrap="square" lIns="0" tIns="0" rIns="0" bIns="0">
             <a:spAutoFit/>
           </a:bodyPr>
           <a:lstStyle/>
@@ -19851,15 +19978,7 @@
 </file>
 
 <file path=ppt/slides/slide29.xml><?xml version="1.0" encoding="utf-8"?>
-<p:sld xmlns:a="http://schemas.openxmlformats.org/drawingml/2006/main" xmlns:p="http://schemas.openxmlformats.org/presentationml/2006/main" xmlns:r="http://schemas.openxmlformats.org/officeDocument/2006/relationships">
-  <p:bg>
-    <p:bgPr>
-      <a:solidFill>
-        <a:srgbClr val="0F2440"/>
-      </a:solidFill>
-      <a:effectLst/>
-    </p:bgPr>
-  </p:bg>
+<p:sld xmlns:a="http://schemas.openxmlformats.org/drawingml/2006/main" xmlns:r="http://schemas.openxmlformats.org/officeDocument/2006/relationships" xmlns:p="http://schemas.openxmlformats.org/presentationml/2006/main">
   <p:cSld>
     <p:spTree>
       <p:nvGrpSpPr>
@@ -19867,7 +19986,14 @@
         <p:cNvGrpSpPr/>
         <p:nvPr/>
       </p:nvGrpSpPr>
-      <p:grpSpPr/>
+      <p:grpSpPr>
+        <a:xfrm>
+          <a:off x="0" y="0"/>
+          <a:ext cx="0" cy="0"/>
+          <a:chOff x="0" y="0"/>
+          <a:chExt cx="0" cy="0"/>
+        </a:xfrm>
+      </p:grpSpPr>
       <p:sp>
         <p:nvSpPr>
           <p:cNvPr id="2" name="Rounded Rectangle 1"/>
@@ -19911,6 +20037,7 @@
           <a:lstStyle/>
           <a:p>
             <a:pPr algn="ctr"/>
+            <a:endParaRPr/>
           </a:p>
         </p:txBody>
       </p:sp>
@@ -19957,6 +20084,7 @@
           <a:lstStyle/>
           <a:p>
             <a:pPr algn="ctr"/>
+            <a:endParaRPr/>
           </a:p>
         </p:txBody>
       </p:sp>
@@ -20003,6 +20131,7 @@
           <a:lstStyle/>
           <a:p>
             <a:pPr algn="ctr"/>
+            <a:endParaRPr/>
           </a:p>
         </p:txBody>
       </p:sp>
@@ -20023,7 +20152,7 @@
           <a:noFill/>
         </p:spPr>
         <p:txBody>
-          <a:bodyPr wrap="square" lIns="0" rIns="0" tIns="0" bIns="0">
+          <a:bodyPr wrap="square" lIns="0" tIns="0" rIns="0" bIns="0">
             <a:spAutoFit/>
           </a:bodyPr>
           <a:lstStyle/>
@@ -20058,7 +20187,7 @@
           <a:noFill/>
         </p:spPr>
         <p:txBody>
-          <a:bodyPr wrap="square" lIns="0" rIns="0" tIns="0" bIns="0">
+          <a:bodyPr wrap="square" lIns="0" tIns="0" rIns="0" bIns="0">
             <a:spAutoFit/>
           </a:bodyPr>
           <a:lstStyle/>
@@ -20093,7 +20222,7 @@
           <a:noFill/>
         </p:spPr>
         <p:txBody>
-          <a:bodyPr wrap="square" lIns="0" rIns="0" tIns="0" bIns="0">
+          <a:bodyPr wrap="square" lIns="0" tIns="0" rIns="0" bIns="0">
             <a:spAutoFit/>
           </a:bodyPr>
           <a:lstStyle/>
@@ -20120,15 +20249,7 @@
 </file>
 
 <file path=ppt/slides/slide3.xml><?xml version="1.0" encoding="utf-8"?>
-<p:sld xmlns:a="http://schemas.openxmlformats.org/drawingml/2006/main" xmlns:p="http://schemas.openxmlformats.org/presentationml/2006/main" xmlns:r="http://schemas.openxmlformats.org/officeDocument/2006/relationships">
-  <p:bg>
-    <p:bgPr>
-      <a:solidFill>
-        <a:srgbClr val="FFFFFF"/>
-      </a:solidFill>
-      <a:effectLst/>
-    </p:bgPr>
-  </p:bg>
+<p:sld xmlns:a="http://schemas.openxmlformats.org/drawingml/2006/main" xmlns:r="http://schemas.openxmlformats.org/officeDocument/2006/relationships" xmlns:p="http://schemas.openxmlformats.org/presentationml/2006/main">
   <p:cSld>
     <p:spTree>
       <p:nvGrpSpPr>
@@ -20136,7 +20257,14 @@
         <p:cNvGrpSpPr/>
         <p:nvPr/>
       </p:nvGrpSpPr>
-      <p:grpSpPr/>
+      <p:grpSpPr>
+        <a:xfrm>
+          <a:off x="0" y="0"/>
+          <a:ext cx="0" cy="0"/>
+          <a:chOff x="0" y="0"/>
+          <a:chExt cx="0" cy="0"/>
+        </a:xfrm>
+      </p:grpSpPr>
       <p:sp>
         <p:nvSpPr>
           <p:cNvPr id="2" name="TextBox 1"/>
@@ -20154,7 +20282,7 @@
           <a:noFill/>
         </p:spPr>
         <p:txBody>
-          <a:bodyPr wrap="square" lIns="0" rIns="0" tIns="0" bIns="0">
+          <a:bodyPr wrap="square" lIns="0" tIns="0" rIns="0" bIns="0">
             <a:spAutoFit/>
           </a:bodyPr>
           <a:lstStyle/>
@@ -20189,7 +20317,7 @@
           <a:noFill/>
         </p:spPr>
         <p:txBody>
-          <a:bodyPr wrap="square" lIns="0" rIns="0" tIns="0" bIns="0">
+          <a:bodyPr wrap="square" lIns="0" tIns="0" rIns="0" bIns="0">
             <a:spAutoFit/>
           </a:bodyPr>
           <a:lstStyle/>
@@ -20224,7 +20352,7 @@
           <a:noFill/>
         </p:spPr>
         <p:txBody>
-          <a:bodyPr wrap="square" lIns="0" rIns="0" tIns="0" bIns="0">
+          <a:bodyPr wrap="square" lIns="0" tIns="0" rIns="0" bIns="0">
             <a:spAutoFit/>
           </a:bodyPr>
           <a:lstStyle/>
@@ -20259,7 +20387,7 @@
           <a:noFill/>
         </p:spPr>
         <p:txBody>
-          <a:bodyPr wrap="square" lIns="0" rIns="0" tIns="0" bIns="0">
+          <a:bodyPr wrap="square" lIns="0" tIns="0" rIns="0" bIns="0">
             <a:spAutoFit/>
           </a:bodyPr>
           <a:lstStyle/>
@@ -20322,6 +20450,7 @@
           <a:lstStyle/>
           <a:p>
             <a:pPr algn="ctr"/>
+            <a:endParaRPr/>
           </a:p>
         </p:txBody>
       </p:sp>
@@ -20368,6 +20497,7 @@
           <a:lstStyle/>
           <a:p>
             <a:pPr algn="ctr"/>
+            <a:endParaRPr/>
           </a:p>
         </p:txBody>
       </p:sp>
@@ -20388,7 +20518,7 @@
           <a:noFill/>
         </p:spPr>
         <p:txBody>
-          <a:bodyPr wrap="square" lIns="0" rIns="0" tIns="0" bIns="0">
+          <a:bodyPr wrap="square" lIns="0" tIns="0" rIns="0" bIns="0">
             <a:spAutoFit/>
           </a:bodyPr>
           <a:lstStyle/>
@@ -20423,7 +20553,7 @@
           <a:noFill/>
         </p:spPr>
         <p:txBody>
-          <a:bodyPr wrap="square" lIns="0" rIns="0" tIns="0" bIns="0">
+          <a:bodyPr wrap="square" lIns="0" tIns="0" rIns="0" bIns="0">
             <a:spAutoFit/>
           </a:bodyPr>
           <a:lstStyle/>
@@ -20486,6 +20616,7 @@
           <a:lstStyle/>
           <a:p>
             <a:pPr algn="ctr"/>
+            <a:endParaRPr/>
           </a:p>
         </p:txBody>
       </p:sp>
@@ -20532,6 +20663,7 @@
           <a:lstStyle/>
           <a:p>
             <a:pPr algn="ctr"/>
+            <a:endParaRPr/>
           </a:p>
         </p:txBody>
       </p:sp>
@@ -20552,7 +20684,7 @@
           <a:noFill/>
         </p:spPr>
         <p:txBody>
-          <a:bodyPr wrap="square" lIns="0" rIns="0" tIns="0" bIns="0">
+          <a:bodyPr wrap="square" lIns="0" tIns="0" rIns="0" bIns="0">
             <a:spAutoFit/>
           </a:bodyPr>
           <a:lstStyle/>
@@ -20587,7 +20719,7 @@
           <a:noFill/>
         </p:spPr>
         <p:txBody>
-          <a:bodyPr wrap="square" lIns="0" rIns="0" tIns="0" bIns="0">
+          <a:bodyPr wrap="square" lIns="0" tIns="0" rIns="0" bIns="0">
             <a:spAutoFit/>
           </a:bodyPr>
           <a:lstStyle/>
@@ -20650,6 +20782,7 @@
           <a:lstStyle/>
           <a:p>
             <a:pPr algn="ctr"/>
+            <a:endParaRPr/>
           </a:p>
         </p:txBody>
       </p:sp>
@@ -20696,6 +20829,7 @@
           <a:lstStyle/>
           <a:p>
             <a:pPr algn="ctr"/>
+            <a:endParaRPr/>
           </a:p>
         </p:txBody>
       </p:sp>
@@ -20716,7 +20850,7 @@
           <a:noFill/>
         </p:spPr>
         <p:txBody>
-          <a:bodyPr wrap="square" lIns="0" rIns="0" tIns="0" bIns="0">
+          <a:bodyPr wrap="square" lIns="0" tIns="0" rIns="0" bIns="0">
             <a:spAutoFit/>
           </a:bodyPr>
           <a:lstStyle/>
@@ -20751,7 +20885,7 @@
           <a:noFill/>
         </p:spPr>
         <p:txBody>
-          <a:bodyPr wrap="square" lIns="0" rIns="0" tIns="0" bIns="0">
+          <a:bodyPr wrap="square" lIns="0" tIns="0" rIns="0" bIns="0">
             <a:spAutoFit/>
           </a:bodyPr>
           <a:lstStyle/>
@@ -20786,7 +20920,7 @@
           <a:noFill/>
         </p:spPr>
         <p:txBody>
-          <a:bodyPr wrap="square" lIns="0" rIns="0" tIns="0" bIns="0">
+          <a:bodyPr wrap="square" lIns="0" tIns="0" rIns="0" bIns="0">
             <a:spAutoFit/>
           </a:bodyPr>
           <a:lstStyle/>
@@ -20833,7 +20967,7 @@
           <a:noFill/>
         </p:spPr>
         <p:txBody>
-          <a:bodyPr wrap="square" lIns="0" rIns="0" tIns="0" bIns="0">
+          <a:bodyPr wrap="square" lIns="0" tIns="0" rIns="0" bIns="0">
             <a:spAutoFit/>
           </a:bodyPr>
           <a:lstStyle/>
@@ -20860,15 +20994,7 @@
 </file>
 
 <file path=ppt/slides/slide4.xml><?xml version="1.0" encoding="utf-8"?>
-<p:sld xmlns:a="http://schemas.openxmlformats.org/drawingml/2006/main" xmlns:p="http://schemas.openxmlformats.org/presentationml/2006/main" xmlns:r="http://schemas.openxmlformats.org/officeDocument/2006/relationships">
-  <p:bg>
-    <p:bgPr>
-      <a:solidFill>
-        <a:srgbClr val="F4F6F9"/>
-      </a:solidFill>
-      <a:effectLst/>
-    </p:bgPr>
-  </p:bg>
+<p:sld xmlns:a="http://schemas.openxmlformats.org/drawingml/2006/main" xmlns:r="http://schemas.openxmlformats.org/officeDocument/2006/relationships" xmlns:p="http://schemas.openxmlformats.org/presentationml/2006/main">
   <p:cSld>
     <p:spTree>
       <p:nvGrpSpPr>
@@ -20876,7 +21002,14 @@
         <p:cNvGrpSpPr/>
         <p:nvPr/>
       </p:nvGrpSpPr>
-      <p:grpSpPr/>
+      <p:grpSpPr>
+        <a:xfrm>
+          <a:off x="0" y="0"/>
+          <a:ext cx="0" cy="0"/>
+          <a:chOff x="0" y="0"/>
+          <a:chExt cx="0" cy="0"/>
+        </a:xfrm>
+      </p:grpSpPr>
       <p:sp>
         <p:nvSpPr>
           <p:cNvPr id="2" name="TextBox 1"/>
@@ -20894,7 +21027,7 @@
           <a:noFill/>
         </p:spPr>
         <p:txBody>
-          <a:bodyPr wrap="square" lIns="0" rIns="0" tIns="0" bIns="0">
+          <a:bodyPr wrap="square" lIns="0" tIns="0" rIns="0" bIns="0">
             <a:spAutoFit/>
           </a:bodyPr>
           <a:lstStyle/>
@@ -20929,7 +21062,7 @@
           <a:noFill/>
         </p:spPr>
         <p:txBody>
-          <a:bodyPr wrap="square" lIns="0" rIns="0" tIns="0" bIns="0">
+          <a:bodyPr wrap="square" lIns="0" tIns="0" rIns="0" bIns="0">
             <a:spAutoFit/>
           </a:bodyPr>
           <a:lstStyle/>
@@ -20964,7 +21097,7 @@
           <a:noFill/>
         </p:spPr>
         <p:txBody>
-          <a:bodyPr wrap="square" lIns="0" rIns="0" tIns="0" bIns="0">
+          <a:bodyPr wrap="square" lIns="0" tIns="0" rIns="0" bIns="0">
             <a:spAutoFit/>
           </a:bodyPr>
           <a:lstStyle/>
@@ -20999,7 +21132,7 @@
           <a:noFill/>
         </p:spPr>
         <p:txBody>
-          <a:bodyPr wrap="square" lIns="0" rIns="0" tIns="0" bIns="0">
+          <a:bodyPr wrap="square" lIns="0" tIns="0" rIns="0" bIns="0">
             <a:spAutoFit/>
           </a:bodyPr>
           <a:lstStyle/>
@@ -21034,7 +21167,7 @@
           <a:noFill/>
         </p:spPr>
         <p:txBody>
-          <a:bodyPr wrap="square" lIns="0" rIns="0" tIns="0" bIns="0">
+          <a:bodyPr wrap="square" lIns="0" tIns="0" rIns="0" bIns="0">
             <a:spAutoFit/>
           </a:bodyPr>
           <a:lstStyle/>
@@ -21165,6 +21298,7 @@
           <a:lstStyle/>
           <a:p>
             <a:pPr algn="ctr"/>
+            <a:endParaRPr/>
           </a:p>
         </p:txBody>
       </p:sp>
@@ -21211,6 +21345,7 @@
           <a:lstStyle/>
           <a:p>
             <a:pPr algn="ctr"/>
+            <a:endParaRPr/>
           </a:p>
         </p:txBody>
       </p:sp>
@@ -21231,7 +21366,7 @@
           <a:noFill/>
         </p:spPr>
         <p:txBody>
-          <a:bodyPr wrap="square" lIns="0" rIns="0" tIns="0" bIns="0">
+          <a:bodyPr wrap="square" lIns="0" tIns="0" rIns="0" bIns="0">
             <a:spAutoFit/>
           </a:bodyPr>
           <a:lstStyle/>
@@ -21294,6 +21429,7 @@
           <a:lstStyle/>
           <a:p>
             <a:pPr algn="ctr"/>
+            <a:endParaRPr/>
           </a:p>
         </p:txBody>
       </p:sp>
@@ -21340,6 +21476,7 @@
           <a:lstStyle/>
           <a:p>
             <a:pPr algn="ctr"/>
+            <a:endParaRPr/>
           </a:p>
         </p:txBody>
       </p:sp>
@@ -21360,7 +21497,7 @@
           <a:noFill/>
         </p:spPr>
         <p:txBody>
-          <a:bodyPr wrap="square" lIns="0" rIns="0" tIns="0" bIns="0">
+          <a:bodyPr wrap="square" lIns="0" tIns="0" rIns="0" bIns="0">
             <a:spAutoFit/>
           </a:bodyPr>
           <a:lstStyle/>
@@ -21423,6 +21560,7 @@
           <a:lstStyle/>
           <a:p>
             <a:pPr algn="ctr"/>
+            <a:endParaRPr/>
           </a:p>
         </p:txBody>
       </p:sp>
@@ -21469,6 +21607,7 @@
           <a:lstStyle/>
           <a:p>
             <a:pPr algn="ctr"/>
+            <a:endParaRPr/>
           </a:p>
         </p:txBody>
       </p:sp>
@@ -21489,7 +21628,7 @@
           <a:noFill/>
         </p:spPr>
         <p:txBody>
-          <a:bodyPr wrap="square" lIns="0" rIns="0" tIns="0" bIns="0">
+          <a:bodyPr wrap="square" lIns="0" tIns="0" rIns="0" bIns="0">
             <a:spAutoFit/>
           </a:bodyPr>
           <a:lstStyle/>
@@ -21552,6 +21691,7 @@
           <a:lstStyle/>
           <a:p>
             <a:pPr algn="ctr"/>
+            <a:endParaRPr/>
           </a:p>
         </p:txBody>
       </p:sp>
@@ -21598,6 +21738,7 @@
           <a:lstStyle/>
           <a:p>
             <a:pPr algn="ctr"/>
+            <a:endParaRPr/>
           </a:p>
         </p:txBody>
       </p:sp>
@@ -21618,7 +21759,7 @@
           <a:noFill/>
         </p:spPr>
         <p:txBody>
-          <a:bodyPr wrap="square" lIns="0" rIns="0" tIns="0" bIns="0">
+          <a:bodyPr wrap="square" lIns="0" tIns="0" rIns="0" bIns="0">
             <a:spAutoFit/>
           </a:bodyPr>
           <a:lstStyle/>
@@ -21645,15 +21786,7 @@
 </file>
 
 <file path=ppt/slides/slide5.xml><?xml version="1.0" encoding="utf-8"?>
-<p:sld xmlns:a="http://schemas.openxmlformats.org/drawingml/2006/main" xmlns:p="http://schemas.openxmlformats.org/presentationml/2006/main" xmlns:r="http://schemas.openxmlformats.org/officeDocument/2006/relationships">
-  <p:bg>
-    <p:bgPr>
-      <a:solidFill>
-        <a:srgbClr val="FFFFFF"/>
-      </a:solidFill>
-      <a:effectLst/>
-    </p:bgPr>
-  </p:bg>
+<p:sld xmlns:a="http://schemas.openxmlformats.org/drawingml/2006/main" xmlns:r="http://schemas.openxmlformats.org/officeDocument/2006/relationships" xmlns:p="http://schemas.openxmlformats.org/presentationml/2006/main">
   <p:cSld>
     <p:spTree>
       <p:nvGrpSpPr>
@@ -21661,7 +21794,14 @@
         <p:cNvGrpSpPr/>
         <p:nvPr/>
       </p:nvGrpSpPr>
-      <p:grpSpPr/>
+      <p:grpSpPr>
+        <a:xfrm>
+          <a:off x="0" y="0"/>
+          <a:ext cx="0" cy="0"/>
+          <a:chOff x="0" y="0"/>
+          <a:chExt cx="0" cy="0"/>
+        </a:xfrm>
+      </p:grpSpPr>
       <p:sp>
         <p:nvSpPr>
           <p:cNvPr id="2" name="TextBox 1"/>
@@ -21679,7 +21819,7 @@
           <a:noFill/>
         </p:spPr>
         <p:txBody>
-          <a:bodyPr wrap="square" lIns="0" rIns="0" tIns="0" bIns="0">
+          <a:bodyPr wrap="square" lIns="0" tIns="0" rIns="0" bIns="0">
             <a:spAutoFit/>
           </a:bodyPr>
           <a:lstStyle/>
@@ -21714,7 +21854,7 @@
           <a:noFill/>
         </p:spPr>
         <p:txBody>
-          <a:bodyPr wrap="square" lIns="0" rIns="0" tIns="0" bIns="0">
+          <a:bodyPr wrap="square" lIns="0" tIns="0" rIns="0" bIns="0">
             <a:spAutoFit/>
           </a:bodyPr>
           <a:lstStyle/>
@@ -21749,7 +21889,7 @@
           <a:noFill/>
         </p:spPr>
         <p:txBody>
-          <a:bodyPr wrap="square" lIns="0" rIns="0" tIns="0" bIns="0">
+          <a:bodyPr wrap="square" lIns="0" tIns="0" rIns="0" bIns="0">
             <a:spAutoFit/>
           </a:bodyPr>
           <a:lstStyle/>
@@ -21784,7 +21924,7 @@
           <a:noFill/>
         </p:spPr>
         <p:txBody>
-          <a:bodyPr wrap="square" lIns="0" rIns="0" tIns="0" bIns="0">
+          <a:bodyPr wrap="square" lIns="0" tIns="0" rIns="0" bIns="0">
             <a:spAutoFit/>
           </a:bodyPr>
           <a:lstStyle/>
@@ -21845,6 +21985,7 @@
           <a:lstStyle/>
           <a:p>
             <a:pPr algn="ctr"/>
+            <a:endParaRPr/>
           </a:p>
         </p:txBody>
       </p:sp>
@@ -21891,6 +22032,7 @@
           <a:lstStyle/>
           <a:p>
             <a:pPr algn="ctr"/>
+            <a:endParaRPr/>
           </a:p>
         </p:txBody>
       </p:sp>
@@ -21937,6 +22079,7 @@
           <a:lstStyle/>
           <a:p>
             <a:pPr algn="ctr"/>
+            <a:endParaRPr/>
           </a:p>
         </p:txBody>
       </p:sp>
@@ -21983,6 +22126,7 @@
           <a:lstStyle/>
           <a:p>
             <a:pPr algn="ctr"/>
+            <a:endParaRPr/>
           </a:p>
         </p:txBody>
       </p:sp>
@@ -22003,7 +22147,7 @@
           <a:noFill/>
         </p:spPr>
         <p:txBody>
-          <a:bodyPr wrap="square" lIns="0" rIns="0" tIns="0" bIns="0">
+          <a:bodyPr wrap="square" lIns="0" tIns="0" rIns="0" bIns="0">
             <a:spAutoFit/>
           </a:bodyPr>
           <a:lstStyle/>
@@ -22038,7 +22182,7 @@
           <a:noFill/>
         </p:spPr>
         <p:txBody>
-          <a:bodyPr wrap="square" lIns="0" rIns="0" tIns="0" bIns="0">
+          <a:bodyPr wrap="square" lIns="0" tIns="0" rIns="0" bIns="0">
             <a:spAutoFit/>
           </a:bodyPr>
           <a:lstStyle/>
@@ -22073,7 +22217,7 @@
           <a:noFill/>
         </p:spPr>
         <p:txBody>
-          <a:bodyPr wrap="square" lIns="0" rIns="0" tIns="0" bIns="0">
+          <a:bodyPr wrap="square" lIns="0" tIns="0" rIns="0" bIns="0">
             <a:spAutoFit/>
           </a:bodyPr>
           <a:lstStyle/>
@@ -22108,7 +22252,7 @@
           <a:noFill/>
         </p:spPr>
         <p:txBody>
-          <a:bodyPr wrap="square" lIns="0" rIns="0" tIns="0" bIns="0">
+          <a:bodyPr wrap="square" lIns="0" tIns="0" rIns="0" bIns="0">
             <a:spAutoFit/>
           </a:bodyPr>
           <a:lstStyle/>
@@ -22143,7 +22287,7 @@
           <a:noFill/>
         </p:spPr>
         <p:txBody>
-          <a:bodyPr wrap="square" lIns="0" rIns="0" tIns="0" bIns="0">
+          <a:bodyPr wrap="square" lIns="0" tIns="0" rIns="0" bIns="0">
             <a:spAutoFit/>
           </a:bodyPr>
           <a:lstStyle/>
@@ -22178,7 +22322,7 @@
           <a:noFill/>
         </p:spPr>
         <p:txBody>
-          <a:bodyPr wrap="square" lIns="0" rIns="0" tIns="0" bIns="0">
+          <a:bodyPr wrap="square" lIns="0" tIns="0" rIns="0" bIns="0">
             <a:spAutoFit/>
           </a:bodyPr>
           <a:lstStyle/>
@@ -22213,7 +22357,7 @@
           <a:noFill/>
         </p:spPr>
         <p:txBody>
-          <a:bodyPr wrap="square" lIns="0" rIns="0" tIns="0" bIns="0">
+          <a:bodyPr wrap="square" lIns="0" tIns="0" rIns="0" bIns="0">
             <a:spAutoFit/>
           </a:bodyPr>
           <a:lstStyle/>
@@ -22248,7 +22392,7 @@
           <a:noFill/>
         </p:spPr>
         <p:txBody>
-          <a:bodyPr wrap="square" lIns="0" rIns="0" tIns="0" bIns="0">
+          <a:bodyPr wrap="square" lIns="0" tIns="0" rIns="0" bIns="0">
             <a:spAutoFit/>
           </a:bodyPr>
           <a:lstStyle/>
@@ -22283,7 +22427,7 @@
           <a:noFill/>
         </p:spPr>
         <p:txBody>
-          <a:bodyPr wrap="square" lIns="0" rIns="0" tIns="0" bIns="0">
+          <a:bodyPr wrap="square" lIns="0" tIns="0" rIns="0" bIns="0">
             <a:spAutoFit/>
           </a:bodyPr>
           <a:lstStyle/>
@@ -22318,7 +22462,7 @@
           <a:noFill/>
         </p:spPr>
         <p:txBody>
-          <a:bodyPr wrap="square" lIns="0" rIns="0" tIns="0" bIns="0">
+          <a:bodyPr wrap="square" lIns="0" tIns="0" rIns="0" bIns="0">
             <a:spAutoFit/>
           </a:bodyPr>
           <a:lstStyle/>
@@ -22353,7 +22497,7 @@
           <a:noFill/>
         </p:spPr>
         <p:txBody>
-          <a:bodyPr wrap="square" lIns="0" rIns="0" tIns="0" bIns="0">
+          <a:bodyPr wrap="square" lIns="0" tIns="0" rIns="0" bIns="0">
             <a:spAutoFit/>
           </a:bodyPr>
           <a:lstStyle/>
@@ -22388,7 +22532,7 @@
           <a:noFill/>
         </p:spPr>
         <p:txBody>
-          <a:bodyPr wrap="square" lIns="0" rIns="0" tIns="0" bIns="0">
+          <a:bodyPr wrap="square" lIns="0" tIns="0" rIns="0" bIns="0">
             <a:spAutoFit/>
           </a:bodyPr>
           <a:lstStyle/>
@@ -22423,7 +22567,7 @@
           <a:noFill/>
         </p:spPr>
         <p:txBody>
-          <a:bodyPr wrap="square" lIns="0" rIns="0" tIns="0" bIns="0">
+          <a:bodyPr wrap="square" lIns="0" tIns="0" rIns="0" bIns="0">
             <a:spAutoFit/>
           </a:bodyPr>
           <a:lstStyle/>
@@ -22458,7 +22602,7 @@
           <a:noFill/>
         </p:spPr>
         <p:txBody>
-          <a:bodyPr wrap="square" lIns="0" rIns="0" tIns="0" bIns="0">
+          <a:bodyPr wrap="square" lIns="0" tIns="0" rIns="0" bIns="0">
             <a:spAutoFit/>
           </a:bodyPr>
           <a:lstStyle/>
@@ -22485,15 +22629,7 @@
 </file>
 
 <file path=ppt/slides/slide6.xml><?xml version="1.0" encoding="utf-8"?>
-<p:sld xmlns:a="http://schemas.openxmlformats.org/drawingml/2006/main" xmlns:p="http://schemas.openxmlformats.org/presentationml/2006/main" xmlns:r="http://schemas.openxmlformats.org/officeDocument/2006/relationships">
-  <p:bg>
-    <p:bgPr>
-      <a:solidFill>
-        <a:srgbClr val="F4F6F9"/>
-      </a:solidFill>
-      <a:effectLst/>
-    </p:bgPr>
-  </p:bg>
+<p:sld xmlns:a="http://schemas.openxmlformats.org/drawingml/2006/main" xmlns:r="http://schemas.openxmlformats.org/officeDocument/2006/relationships" xmlns:p="http://schemas.openxmlformats.org/presentationml/2006/main">
   <p:cSld>
     <p:spTree>
       <p:nvGrpSpPr>
@@ -22501,7 +22637,14 @@
         <p:cNvGrpSpPr/>
         <p:nvPr/>
       </p:nvGrpSpPr>
-      <p:grpSpPr/>
+      <p:grpSpPr>
+        <a:xfrm>
+          <a:off x="0" y="0"/>
+          <a:ext cx="0" cy="0"/>
+          <a:chOff x="0" y="0"/>
+          <a:chExt cx="0" cy="0"/>
+        </a:xfrm>
+      </p:grpSpPr>
       <p:sp>
         <p:nvSpPr>
           <p:cNvPr id="2" name="TextBox 1"/>
@@ -22519,7 +22662,7 @@
           <a:noFill/>
         </p:spPr>
         <p:txBody>
-          <a:bodyPr wrap="square" lIns="0" rIns="0" tIns="0" bIns="0">
+          <a:bodyPr wrap="square" lIns="0" tIns="0" rIns="0" bIns="0">
             <a:spAutoFit/>
           </a:bodyPr>
           <a:lstStyle/>
@@ -22554,7 +22697,7 @@
           <a:noFill/>
         </p:spPr>
         <p:txBody>
-          <a:bodyPr wrap="square" lIns="0" rIns="0" tIns="0" bIns="0">
+          <a:bodyPr wrap="square" lIns="0" tIns="0" rIns="0" bIns="0">
             <a:spAutoFit/>
           </a:bodyPr>
           <a:lstStyle/>
@@ -22589,7 +22732,7 @@
           <a:noFill/>
         </p:spPr>
         <p:txBody>
-          <a:bodyPr wrap="square" lIns="0" rIns="0" tIns="0" bIns="0">
+          <a:bodyPr wrap="square" lIns="0" tIns="0" rIns="0" bIns="0">
             <a:spAutoFit/>
           </a:bodyPr>
           <a:lstStyle/>
@@ -22624,7 +22767,7 @@
           <a:noFill/>
         </p:spPr>
         <p:txBody>
-          <a:bodyPr wrap="square" lIns="0" rIns="0" tIns="0" bIns="0">
+          <a:bodyPr wrap="square" lIns="0" tIns="0" rIns="0" bIns="0">
             <a:spAutoFit/>
           </a:bodyPr>
           <a:lstStyle/>
@@ -22659,7 +22802,7 @@
           <a:noFill/>
         </p:spPr>
         <p:txBody>
-          <a:bodyPr wrap="square" lIns="0" rIns="0" tIns="0" bIns="0">
+          <a:bodyPr wrap="square" lIns="0" tIns="0" rIns="0" bIns="0">
             <a:spAutoFit/>
           </a:bodyPr>
           <a:lstStyle/>
@@ -22722,6 +22865,7 @@
           <a:lstStyle/>
           <a:p>
             <a:pPr algn="ctr"/>
+            <a:endParaRPr/>
           </a:p>
         </p:txBody>
       </p:sp>
@@ -22766,6 +22910,7 @@
           <a:lstStyle/>
           <a:p>
             <a:pPr algn="ctr"/>
+            <a:endParaRPr/>
           </a:p>
         </p:txBody>
       </p:sp>
@@ -22786,7 +22931,7 @@
           <a:noFill/>
         </p:spPr>
         <p:txBody>
-          <a:bodyPr wrap="square" lIns="0" rIns="0" tIns="0" bIns="0">
+          <a:bodyPr wrap="square" lIns="0" tIns="0" rIns="0" bIns="0">
             <a:spAutoFit/>
           </a:bodyPr>
           <a:lstStyle/>
@@ -22821,7 +22966,7 @@
           <a:noFill/>
         </p:spPr>
         <p:txBody>
-          <a:bodyPr wrap="square" lIns="0" rIns="0" tIns="0" bIns="0">
+          <a:bodyPr wrap="square" lIns="0" tIns="0" rIns="0" bIns="0">
             <a:spAutoFit/>
           </a:bodyPr>
           <a:lstStyle/>
@@ -22856,7 +23001,7 @@
           <a:noFill/>
         </p:spPr>
         <p:txBody>
-          <a:bodyPr wrap="square" lIns="0" rIns="0" tIns="0" bIns="0">
+          <a:bodyPr wrap="square" lIns="0" tIns="0" rIns="0" bIns="0">
             <a:spAutoFit/>
           </a:bodyPr>
           <a:lstStyle/>
@@ -22915,6 +23060,7 @@
           <a:lstStyle/>
           <a:p>
             <a:pPr algn="ctr"/>
+            <a:endParaRPr/>
           </a:p>
         </p:txBody>
       </p:sp>
@@ -22935,7 +23081,7 @@
           <a:noFill/>
         </p:spPr>
         <p:txBody>
-          <a:bodyPr wrap="square" lIns="0" rIns="0" tIns="0" bIns="0">
+          <a:bodyPr wrap="square" lIns="0" tIns="0" rIns="0" bIns="0">
             <a:spAutoFit/>
           </a:bodyPr>
           <a:lstStyle/>
@@ -22970,7 +23116,7 @@
           <a:noFill/>
         </p:spPr>
         <p:txBody>
-          <a:bodyPr wrap="square" lIns="0" rIns="0" tIns="0" bIns="0">
+          <a:bodyPr wrap="square" lIns="0" tIns="0" rIns="0" bIns="0">
             <a:spAutoFit/>
           </a:bodyPr>
           <a:lstStyle/>
@@ -23029,6 +23175,7 @@
           <a:lstStyle/>
           <a:p>
             <a:pPr algn="ctr"/>
+            <a:endParaRPr/>
           </a:p>
         </p:txBody>
       </p:sp>
@@ -23049,7 +23196,7 @@
           <a:noFill/>
         </p:spPr>
         <p:txBody>
-          <a:bodyPr wrap="square" lIns="0" rIns="0" tIns="0" bIns="0">
+          <a:bodyPr wrap="square" lIns="0" tIns="0" rIns="0" bIns="0">
             <a:spAutoFit/>
           </a:bodyPr>
           <a:lstStyle/>
@@ -23084,7 +23231,7 @@
           <a:noFill/>
         </p:spPr>
         <p:txBody>
-          <a:bodyPr wrap="square" lIns="0" rIns="0" tIns="0" bIns="0">
+          <a:bodyPr wrap="square" lIns="0" tIns="0" rIns="0" bIns="0">
             <a:spAutoFit/>
           </a:bodyPr>
           <a:lstStyle/>
@@ -23143,6 +23290,7 @@
           <a:lstStyle/>
           <a:p>
             <a:pPr algn="ctr"/>
+            <a:endParaRPr/>
           </a:p>
         </p:txBody>
       </p:sp>
@@ -23163,7 +23311,7 @@
           <a:noFill/>
         </p:spPr>
         <p:txBody>
-          <a:bodyPr wrap="square" lIns="0" rIns="0" tIns="0" bIns="0">
+          <a:bodyPr wrap="square" lIns="0" tIns="0" rIns="0" bIns="0">
             <a:spAutoFit/>
           </a:bodyPr>
           <a:lstStyle/>
@@ -23226,6 +23374,7 @@
           <a:lstStyle/>
           <a:p>
             <a:pPr algn="ctr"/>
+            <a:endParaRPr/>
           </a:p>
         </p:txBody>
       </p:sp>
@@ -23270,6 +23419,7 @@
           <a:lstStyle/>
           <a:p>
             <a:pPr algn="ctr"/>
+            <a:endParaRPr/>
           </a:p>
         </p:txBody>
       </p:sp>
@@ -23290,7 +23440,7 @@
           <a:noFill/>
         </p:spPr>
         <p:txBody>
-          <a:bodyPr wrap="square" lIns="0" rIns="0" tIns="0" bIns="0">
+          <a:bodyPr wrap="square" lIns="0" tIns="0" rIns="0" bIns="0">
             <a:spAutoFit/>
           </a:bodyPr>
           <a:lstStyle/>
@@ -23325,7 +23475,7 @@
           <a:noFill/>
         </p:spPr>
         <p:txBody>
-          <a:bodyPr wrap="square" lIns="0" rIns="0" tIns="0" bIns="0">
+          <a:bodyPr wrap="square" lIns="0" tIns="0" rIns="0" bIns="0">
             <a:spAutoFit/>
           </a:bodyPr>
           <a:lstStyle/>
@@ -23360,7 +23510,7 @@
           <a:noFill/>
         </p:spPr>
         <p:txBody>
-          <a:bodyPr wrap="square" lIns="0" rIns="0" tIns="0" bIns="0">
+          <a:bodyPr wrap="square" lIns="0" tIns="0" rIns="0" bIns="0">
             <a:spAutoFit/>
           </a:bodyPr>
           <a:lstStyle/>
@@ -23419,6 +23569,7 @@
           <a:lstStyle/>
           <a:p>
             <a:pPr algn="ctr"/>
+            <a:endParaRPr/>
           </a:p>
         </p:txBody>
       </p:sp>
@@ -23439,7 +23590,7 @@
           <a:noFill/>
         </p:spPr>
         <p:txBody>
-          <a:bodyPr wrap="square" lIns="0" rIns="0" tIns="0" bIns="0">
+          <a:bodyPr wrap="square" lIns="0" tIns="0" rIns="0" bIns="0">
             <a:spAutoFit/>
           </a:bodyPr>
           <a:lstStyle/>
@@ -23474,7 +23625,7 @@
           <a:noFill/>
         </p:spPr>
         <p:txBody>
-          <a:bodyPr wrap="square" lIns="0" rIns="0" tIns="0" bIns="0">
+          <a:bodyPr wrap="square" lIns="0" tIns="0" rIns="0" bIns="0">
             <a:spAutoFit/>
           </a:bodyPr>
           <a:lstStyle/>
@@ -23533,6 +23684,7 @@
           <a:lstStyle/>
           <a:p>
             <a:pPr algn="ctr"/>
+            <a:endParaRPr/>
           </a:p>
         </p:txBody>
       </p:sp>
@@ -23553,7 +23705,7 @@
           <a:noFill/>
         </p:spPr>
         <p:txBody>
-          <a:bodyPr wrap="square" lIns="0" rIns="0" tIns="0" bIns="0">
+          <a:bodyPr wrap="square" lIns="0" tIns="0" rIns="0" bIns="0">
             <a:spAutoFit/>
           </a:bodyPr>
           <a:lstStyle/>
@@ -23588,7 +23740,7 @@
           <a:noFill/>
         </p:spPr>
         <p:txBody>
-          <a:bodyPr wrap="square" lIns="0" rIns="0" tIns="0" bIns="0">
+          <a:bodyPr wrap="square" lIns="0" tIns="0" rIns="0" bIns="0">
             <a:spAutoFit/>
           </a:bodyPr>
           <a:lstStyle/>
@@ -23647,6 +23799,7 @@
           <a:lstStyle/>
           <a:p>
             <a:pPr algn="ctr"/>
+            <a:endParaRPr/>
           </a:p>
         </p:txBody>
       </p:sp>
@@ -23667,7 +23820,7 @@
           <a:noFill/>
         </p:spPr>
         <p:txBody>
-          <a:bodyPr wrap="square" lIns="0" rIns="0" tIns="0" bIns="0">
+          <a:bodyPr wrap="square" lIns="0" tIns="0" rIns="0" bIns="0">
             <a:spAutoFit/>
           </a:bodyPr>
           <a:lstStyle/>
@@ -23730,6 +23883,7 @@
           <a:lstStyle/>
           <a:p>
             <a:pPr algn="ctr"/>
+            <a:endParaRPr/>
           </a:p>
         </p:txBody>
       </p:sp>
@@ -23774,6 +23928,7 @@
           <a:lstStyle/>
           <a:p>
             <a:pPr algn="ctr"/>
+            <a:endParaRPr/>
           </a:p>
         </p:txBody>
       </p:sp>
@@ -23794,7 +23949,7 @@
           <a:noFill/>
         </p:spPr>
         <p:txBody>
-          <a:bodyPr wrap="square" lIns="0" rIns="0" tIns="0" bIns="0">
+          <a:bodyPr wrap="square" lIns="0" tIns="0" rIns="0" bIns="0">
             <a:spAutoFit/>
           </a:bodyPr>
           <a:lstStyle/>
@@ -23829,7 +23984,7 @@
           <a:noFill/>
         </p:spPr>
         <p:txBody>
-          <a:bodyPr wrap="square" lIns="0" rIns="0" tIns="0" bIns="0">
+          <a:bodyPr wrap="square" lIns="0" tIns="0" rIns="0" bIns="0">
             <a:spAutoFit/>
           </a:bodyPr>
           <a:lstStyle/>
@@ -23864,7 +24019,7 @@
           <a:noFill/>
         </p:spPr>
         <p:txBody>
-          <a:bodyPr wrap="square" lIns="0" rIns="0" tIns="0" bIns="0">
+          <a:bodyPr wrap="square" lIns="0" tIns="0" rIns="0" bIns="0">
             <a:spAutoFit/>
           </a:bodyPr>
           <a:lstStyle/>
@@ -23923,6 +24078,7 @@
           <a:lstStyle/>
           <a:p>
             <a:pPr algn="ctr"/>
+            <a:endParaRPr/>
           </a:p>
         </p:txBody>
       </p:sp>
@@ -23943,7 +24099,7 @@
           <a:noFill/>
         </p:spPr>
         <p:txBody>
-          <a:bodyPr wrap="square" lIns="0" rIns="0" tIns="0" bIns="0">
+          <a:bodyPr wrap="square" lIns="0" tIns="0" rIns="0" bIns="0">
             <a:spAutoFit/>
           </a:bodyPr>
           <a:lstStyle/>
@@ -23978,7 +24134,7 @@
           <a:noFill/>
         </p:spPr>
         <p:txBody>
-          <a:bodyPr wrap="square" lIns="0" rIns="0" tIns="0" bIns="0">
+          <a:bodyPr wrap="square" lIns="0" tIns="0" rIns="0" bIns="0">
             <a:spAutoFit/>
           </a:bodyPr>
           <a:lstStyle/>
@@ -24037,6 +24193,7 @@
           <a:lstStyle/>
           <a:p>
             <a:pPr algn="ctr"/>
+            <a:endParaRPr/>
           </a:p>
         </p:txBody>
       </p:sp>
@@ -24057,7 +24214,7 @@
           <a:noFill/>
         </p:spPr>
         <p:txBody>
-          <a:bodyPr wrap="square" lIns="0" rIns="0" tIns="0" bIns="0">
+          <a:bodyPr wrap="square" lIns="0" tIns="0" rIns="0" bIns="0">
             <a:spAutoFit/>
           </a:bodyPr>
           <a:lstStyle/>
@@ -24092,7 +24249,7 @@
           <a:noFill/>
         </p:spPr>
         <p:txBody>
-          <a:bodyPr wrap="square" lIns="0" rIns="0" tIns="0" bIns="0">
+          <a:bodyPr wrap="square" lIns="0" tIns="0" rIns="0" bIns="0">
             <a:spAutoFit/>
           </a:bodyPr>
           <a:lstStyle/>
@@ -24151,6 +24308,7 @@
           <a:lstStyle/>
           <a:p>
             <a:pPr algn="ctr"/>
+            <a:endParaRPr/>
           </a:p>
         </p:txBody>
       </p:sp>
@@ -24171,7 +24329,7 @@
           <a:noFill/>
         </p:spPr>
         <p:txBody>
-          <a:bodyPr wrap="square" lIns="0" rIns="0" tIns="0" bIns="0">
+          <a:bodyPr wrap="square" lIns="0" tIns="0" rIns="0" bIns="0">
             <a:spAutoFit/>
           </a:bodyPr>
           <a:lstStyle/>
@@ -24198,15 +24356,7 @@
 </file>
 
 <file path=ppt/slides/slide7.xml><?xml version="1.0" encoding="utf-8"?>
-<p:sld xmlns:a="http://schemas.openxmlformats.org/drawingml/2006/main" xmlns:p="http://schemas.openxmlformats.org/presentationml/2006/main" xmlns:r="http://schemas.openxmlformats.org/officeDocument/2006/relationships">
-  <p:bg>
-    <p:bgPr>
-      <a:solidFill>
-        <a:srgbClr val="FFFFFF"/>
-      </a:solidFill>
-      <a:effectLst/>
-    </p:bgPr>
-  </p:bg>
+<p:sld xmlns:a="http://schemas.openxmlformats.org/drawingml/2006/main" xmlns:r="http://schemas.openxmlformats.org/officeDocument/2006/relationships" xmlns:p="http://schemas.openxmlformats.org/presentationml/2006/main">
   <p:cSld>
     <p:spTree>
       <p:nvGrpSpPr>
@@ -24214,7 +24364,14 @@
         <p:cNvGrpSpPr/>
         <p:nvPr/>
       </p:nvGrpSpPr>
-      <p:grpSpPr/>
+      <p:grpSpPr>
+        <a:xfrm>
+          <a:off x="0" y="0"/>
+          <a:ext cx="0" cy="0"/>
+          <a:chOff x="0" y="0"/>
+          <a:chExt cx="0" cy="0"/>
+        </a:xfrm>
+      </p:grpSpPr>
       <p:sp>
         <p:nvSpPr>
           <p:cNvPr id="2" name="TextBox 1"/>
@@ -24232,7 +24389,7 @@
           <a:noFill/>
         </p:spPr>
         <p:txBody>
-          <a:bodyPr wrap="square" lIns="0" rIns="0" tIns="0" bIns="0">
+          <a:bodyPr wrap="square" lIns="0" tIns="0" rIns="0" bIns="0">
             <a:spAutoFit/>
           </a:bodyPr>
           <a:lstStyle/>
@@ -24267,7 +24424,7 @@
           <a:noFill/>
         </p:spPr>
         <p:txBody>
-          <a:bodyPr wrap="square" lIns="0" rIns="0" tIns="0" bIns="0">
+          <a:bodyPr wrap="square" lIns="0" tIns="0" rIns="0" bIns="0">
             <a:spAutoFit/>
           </a:bodyPr>
           <a:lstStyle/>
@@ -24302,7 +24459,7 @@
           <a:noFill/>
         </p:spPr>
         <p:txBody>
-          <a:bodyPr wrap="square" lIns="0" rIns="0" tIns="0" bIns="0">
+          <a:bodyPr wrap="square" lIns="0" tIns="0" rIns="0" bIns="0">
             <a:spAutoFit/>
           </a:bodyPr>
           <a:lstStyle/>
@@ -24337,7 +24494,7 @@
           <a:noFill/>
         </p:spPr>
         <p:txBody>
-          <a:bodyPr wrap="square" lIns="0" rIns="0" tIns="0" bIns="0">
+          <a:bodyPr wrap="square" lIns="0" tIns="0" rIns="0" bIns="0">
             <a:spAutoFit/>
           </a:bodyPr>
           <a:lstStyle/>
@@ -24400,6 +24557,7 @@
           <a:lstStyle/>
           <a:p>
             <a:pPr algn="ctr"/>
+            <a:endParaRPr/>
           </a:p>
         </p:txBody>
       </p:sp>
@@ -24446,6 +24604,7 @@
           <a:lstStyle/>
           <a:p>
             <a:pPr algn="ctr"/>
+            <a:endParaRPr/>
           </a:p>
         </p:txBody>
       </p:sp>
@@ -24466,7 +24625,7 @@
           <a:noFill/>
         </p:spPr>
         <p:txBody>
-          <a:bodyPr wrap="square" lIns="0" rIns="0" tIns="0" bIns="0">
+          <a:bodyPr wrap="square" lIns="0" tIns="0" rIns="0" bIns="0">
             <a:spAutoFit/>
           </a:bodyPr>
           <a:lstStyle/>
@@ -24501,7 +24660,7 @@
           <a:noFill/>
         </p:spPr>
         <p:txBody>
-          <a:bodyPr wrap="square" lIns="0" rIns="0" tIns="0" bIns="0">
+          <a:bodyPr wrap="square" lIns="0" tIns="0" rIns="0" bIns="0">
             <a:spAutoFit/>
           </a:bodyPr>
           <a:lstStyle/>
@@ -24564,6 +24723,7 @@
           <a:lstStyle/>
           <a:p>
             <a:pPr algn="ctr"/>
+            <a:endParaRPr/>
           </a:p>
         </p:txBody>
       </p:sp>
@@ -24610,6 +24770,7 @@
           <a:lstStyle/>
           <a:p>
             <a:pPr algn="ctr"/>
+            <a:endParaRPr/>
           </a:p>
         </p:txBody>
       </p:sp>
@@ -24630,7 +24791,7 @@
           <a:noFill/>
         </p:spPr>
         <p:txBody>
-          <a:bodyPr wrap="square" lIns="0" rIns="0" tIns="0" bIns="0">
+          <a:bodyPr wrap="square" lIns="0" tIns="0" rIns="0" bIns="0">
             <a:spAutoFit/>
           </a:bodyPr>
           <a:lstStyle/>
@@ -24665,7 +24826,7 @@
           <a:noFill/>
         </p:spPr>
         <p:txBody>
-          <a:bodyPr wrap="square" lIns="0" rIns="0" tIns="0" bIns="0">
+          <a:bodyPr wrap="square" lIns="0" tIns="0" rIns="0" bIns="0">
             <a:spAutoFit/>
           </a:bodyPr>
           <a:lstStyle/>
@@ -24692,15 +24853,7 @@
 </file>
 
 <file path=ppt/slides/slide8.xml><?xml version="1.0" encoding="utf-8"?>
-<p:sld xmlns:a="http://schemas.openxmlformats.org/drawingml/2006/main" xmlns:p="http://schemas.openxmlformats.org/presentationml/2006/main" xmlns:r="http://schemas.openxmlformats.org/officeDocument/2006/relationships">
-  <p:bg>
-    <p:bgPr>
-      <a:solidFill>
-        <a:srgbClr val="F4F6F9"/>
-      </a:solidFill>
-      <a:effectLst/>
-    </p:bgPr>
-  </p:bg>
+<p:sld xmlns:a="http://schemas.openxmlformats.org/drawingml/2006/main" xmlns:r="http://schemas.openxmlformats.org/officeDocument/2006/relationships" xmlns:p="http://schemas.openxmlformats.org/presentationml/2006/main">
   <p:cSld>
     <p:spTree>
       <p:nvGrpSpPr>
@@ -24708,7 +24861,14 @@
         <p:cNvGrpSpPr/>
         <p:nvPr/>
       </p:nvGrpSpPr>
-      <p:grpSpPr/>
+      <p:grpSpPr>
+        <a:xfrm>
+          <a:off x="0" y="0"/>
+          <a:ext cx="0" cy="0"/>
+          <a:chOff x="0" y="0"/>
+          <a:chExt cx="0" cy="0"/>
+        </a:xfrm>
+      </p:grpSpPr>
       <p:sp>
         <p:nvSpPr>
           <p:cNvPr id="2" name="TextBox 1"/>
@@ -24726,7 +24886,7 @@
           <a:noFill/>
         </p:spPr>
         <p:txBody>
-          <a:bodyPr wrap="square" lIns="0" rIns="0" tIns="0" bIns="0">
+          <a:bodyPr wrap="square" lIns="0" tIns="0" rIns="0" bIns="0">
             <a:spAutoFit/>
           </a:bodyPr>
           <a:lstStyle/>
@@ -24761,7 +24921,7 @@
           <a:noFill/>
         </p:spPr>
         <p:txBody>
-          <a:bodyPr wrap="square" lIns="0" rIns="0" tIns="0" bIns="0">
+          <a:bodyPr wrap="square" lIns="0" tIns="0" rIns="0" bIns="0">
             <a:spAutoFit/>
           </a:bodyPr>
           <a:lstStyle/>
@@ -24796,7 +24956,7 @@
           <a:noFill/>
         </p:spPr>
         <p:txBody>
-          <a:bodyPr wrap="square" lIns="0" rIns="0" tIns="0" bIns="0">
+          <a:bodyPr wrap="square" lIns="0" tIns="0" rIns="0" bIns="0">
             <a:spAutoFit/>
           </a:bodyPr>
           <a:lstStyle/>
@@ -24831,7 +24991,7 @@
           <a:noFill/>
         </p:spPr>
         <p:txBody>
-          <a:bodyPr wrap="square" lIns="0" rIns="0" tIns="0" bIns="0">
+          <a:bodyPr wrap="square" lIns="0" tIns="0" rIns="0" bIns="0">
             <a:spAutoFit/>
           </a:bodyPr>
           <a:lstStyle/>
@@ -24866,7 +25026,7 @@
           <a:noFill/>
         </p:spPr>
         <p:txBody>
-          <a:bodyPr wrap="square" lIns="0" rIns="0" tIns="0" bIns="0">
+          <a:bodyPr wrap="square" lIns="0" tIns="0" rIns="0" bIns="0">
             <a:spAutoFit/>
           </a:bodyPr>
           <a:lstStyle/>
@@ -24981,6 +25141,7 @@
           <a:lstStyle/>
           <a:p>
             <a:pPr algn="ctr"/>
+            <a:endParaRPr/>
           </a:p>
         </p:txBody>
       </p:sp>
@@ -25027,6 +25188,7 @@
           <a:lstStyle/>
           <a:p>
             <a:pPr algn="ctr"/>
+            <a:endParaRPr/>
           </a:p>
         </p:txBody>
       </p:sp>
@@ -25047,7 +25209,7 @@
           <a:noFill/>
         </p:spPr>
         <p:txBody>
-          <a:bodyPr wrap="square" lIns="0" rIns="0" tIns="0" bIns="0">
+          <a:bodyPr wrap="square" lIns="0" tIns="0" rIns="0" bIns="0">
             <a:spAutoFit/>
           </a:bodyPr>
           <a:lstStyle/>
@@ -25082,7 +25244,7 @@
           <a:noFill/>
         </p:spPr>
         <p:txBody>
-          <a:bodyPr wrap="square" lIns="0" rIns="0" tIns="0" bIns="0">
+          <a:bodyPr wrap="square" lIns="0" tIns="0" rIns="0" bIns="0">
             <a:spAutoFit/>
           </a:bodyPr>
           <a:lstStyle/>
@@ -25109,15 +25271,7 @@
 </file>
 
 <file path=ppt/slides/slide9.xml><?xml version="1.0" encoding="utf-8"?>
-<p:sld xmlns:a="http://schemas.openxmlformats.org/drawingml/2006/main" xmlns:p="http://schemas.openxmlformats.org/presentationml/2006/main" xmlns:r="http://schemas.openxmlformats.org/officeDocument/2006/relationships">
-  <p:bg>
-    <p:bgPr>
-      <a:solidFill>
-        <a:srgbClr val="FFFFFF"/>
-      </a:solidFill>
-      <a:effectLst/>
-    </p:bgPr>
-  </p:bg>
+<p:sld xmlns:a="http://schemas.openxmlformats.org/drawingml/2006/main" xmlns:r="http://schemas.openxmlformats.org/officeDocument/2006/relationships" xmlns:p="http://schemas.openxmlformats.org/presentationml/2006/main">
   <p:cSld>
     <p:spTree>
       <p:nvGrpSpPr>
@@ -25125,7 +25279,14 @@
         <p:cNvGrpSpPr/>
         <p:nvPr/>
       </p:nvGrpSpPr>
-      <p:grpSpPr/>
+      <p:grpSpPr>
+        <a:xfrm>
+          <a:off x="0" y="0"/>
+          <a:ext cx="0" cy="0"/>
+          <a:chOff x="0" y="0"/>
+          <a:chExt cx="0" cy="0"/>
+        </a:xfrm>
+      </p:grpSpPr>
       <p:sp>
         <p:nvSpPr>
           <p:cNvPr id="2" name="TextBox 1"/>
@@ -25143,7 +25304,7 @@
           <a:noFill/>
         </p:spPr>
         <p:txBody>
-          <a:bodyPr wrap="square" lIns="0" rIns="0" tIns="0" bIns="0">
+          <a:bodyPr wrap="square" lIns="0" tIns="0" rIns="0" bIns="0">
             <a:spAutoFit/>
           </a:bodyPr>
           <a:lstStyle/>
@@ -25178,7 +25339,7 @@
           <a:noFill/>
         </p:spPr>
         <p:txBody>
-          <a:bodyPr wrap="square" lIns="0" rIns="0" tIns="0" bIns="0">
+          <a:bodyPr wrap="square" lIns="0" tIns="0" rIns="0" bIns="0">
             <a:spAutoFit/>
           </a:bodyPr>
           <a:lstStyle/>
@@ -25213,7 +25374,7 @@
           <a:noFill/>
         </p:spPr>
         <p:txBody>
-          <a:bodyPr wrap="square" lIns="0" rIns="0" tIns="0" bIns="0">
+          <a:bodyPr wrap="square" lIns="0" tIns="0" rIns="0" bIns="0">
             <a:spAutoFit/>
           </a:bodyPr>
           <a:lstStyle/>
@@ -25248,7 +25409,7 @@
           <a:noFill/>
         </p:spPr>
         <p:txBody>
-          <a:bodyPr wrap="square" lIns="0" rIns="0" tIns="0" bIns="0">
+          <a:bodyPr wrap="square" lIns="0" tIns="0" rIns="0" bIns="0">
             <a:spAutoFit/>
           </a:bodyPr>
           <a:lstStyle/>
@@ -25311,6 +25472,7 @@
           <a:lstStyle/>
           <a:p>
             <a:pPr algn="ctr"/>
+            <a:endParaRPr/>
           </a:p>
         </p:txBody>
       </p:sp>
@@ -25357,6 +25519,7 @@
           <a:lstStyle/>
           <a:p>
             <a:pPr algn="ctr"/>
+            <a:endParaRPr/>
           </a:p>
         </p:txBody>
       </p:sp>
@@ -25377,7 +25540,7 @@
           <a:noFill/>
         </p:spPr>
         <p:txBody>
-          <a:bodyPr wrap="square" lIns="0" rIns="0" tIns="0" bIns="0">
+          <a:bodyPr wrap="square" lIns="0" tIns="0" rIns="0" bIns="0">
             <a:spAutoFit/>
           </a:bodyPr>
           <a:lstStyle/>
@@ -25412,7 +25575,7 @@
           <a:noFill/>
         </p:spPr>
         <p:txBody>
-          <a:bodyPr wrap="square" lIns="0" rIns="0" tIns="0" bIns="0">
+          <a:bodyPr wrap="square" lIns="0" tIns="0" rIns="0" bIns="0">
             <a:spAutoFit/>
           </a:bodyPr>
           <a:lstStyle/>
@@ -25475,6 +25638,7 @@
           <a:lstStyle/>
           <a:p>
             <a:pPr algn="ctr"/>
+            <a:endParaRPr/>
           </a:p>
         </p:txBody>
       </p:sp>
@@ -25521,6 +25685,7 @@
           <a:lstStyle/>
           <a:p>
             <a:pPr algn="ctr"/>
+            <a:endParaRPr/>
           </a:p>
         </p:txBody>
       </p:sp>
@@ -25541,7 +25706,7 @@
           <a:noFill/>
         </p:spPr>
         <p:txBody>
-          <a:bodyPr wrap="square" lIns="0" rIns="0" tIns="0" bIns="0">
+          <a:bodyPr wrap="square" lIns="0" tIns="0" rIns="0" bIns="0">
             <a:spAutoFit/>
           </a:bodyPr>
           <a:lstStyle/>
@@ -25576,7 +25741,7 @@
           <a:noFill/>
         </p:spPr>
         <p:txBody>
-          <a:bodyPr wrap="square" lIns="0" rIns="0" tIns="0" bIns="0">
+          <a:bodyPr wrap="square" lIns="0" tIns="0" rIns="0" bIns="0">
             <a:spAutoFit/>
           </a:bodyPr>
           <a:lstStyle/>
@@ -25639,6 +25804,7 @@
           <a:lstStyle/>
           <a:p>
             <a:pPr algn="ctr"/>
+            <a:endParaRPr/>
           </a:p>
         </p:txBody>
       </p:sp>
@@ -25685,6 +25851,7 @@
           <a:lstStyle/>
           <a:p>
             <a:pPr algn="ctr"/>
+            <a:endParaRPr/>
           </a:p>
         </p:txBody>
       </p:sp>
@@ -25705,7 +25872,7 @@
           <a:noFill/>
         </p:spPr>
         <p:txBody>
-          <a:bodyPr wrap="square" lIns="0" rIns="0" tIns="0" bIns="0">
+          <a:bodyPr wrap="square" lIns="0" tIns="0" rIns="0" bIns="0">
             <a:spAutoFit/>
           </a:bodyPr>
           <a:lstStyle/>
@@ -25740,7 +25907,7 @@
           <a:noFill/>
         </p:spPr>
         <p:txBody>
-          <a:bodyPr wrap="square" lIns="0" rIns="0" tIns="0" bIns="0">
+          <a:bodyPr wrap="square" lIns="0" tIns="0" rIns="0" bIns="0">
             <a:spAutoFit/>
           </a:bodyPr>
           <a:lstStyle/>
@@ -26084,4 +26251,779 @@
   </a:objectDefaults>
   <a:extraClrSchemeLst/>
 </a:theme>
+</file>
+
+<file path=_xmlsignatures/sig1.xml><?xml version="1.0" encoding="utf-8"?>
+<Signature xmlns="http://www.w3.org/2000/09/xmldsig#" Id="idPackageSignature">
+  <SignedInfo>
+    <CanonicalizationMethod Algorithm="http://www.w3.org/TR/2001/REC-xml-c14n-20010315"/>
+    <SignatureMethod Algorithm="http://www.w3.org/2001/04/xmldsig-more#ecdsa-sha384"/>
+    <Reference Type="http://www.w3.org/2000/09/xmldsig#Object" URI="#idPackageObject">
+      <DigestMethod Algorithm="http://www.w3.org/2001/04/xmldsig-more#sha384"/>
+      <DigestValue>/iLlDwc2/U2eD483Tq4olmKiKKTx7u485KcPHhVW+uFRJm6uh0k6uNV21ifBu6F+</DigestValue>
+    </Reference>
+    <Reference Type="http://www.w3.org/2000/09/xmldsig#Object" URI="#idOfficeObject">
+      <DigestMethod Algorithm="http://www.w3.org/2001/04/xmldsig-more#sha384"/>
+      <DigestValue>ORcsTLKsx8LxZq1FMwEVW+QjMiBfiBt5W9EinNcL+oxUWAHi/Epc+paZ0+XlkjeG</DigestValue>
+    </Reference>
+    <Reference Type="http://uri.etsi.org/01903#SignedProperties" URI="#idSignedProperties">
+      <Transforms>
+        <Transform Algorithm="http://www.w3.org/TR/2001/REC-xml-c14n-20010315"/>
+      </Transforms>
+      <DigestMethod Algorithm="http://www.w3.org/2001/04/xmldsig-more#sha384"/>
+      <DigestValue>IwVcCE+ygHrFEdcae0lpKB2V0IxZdfh8A0Los2Opel1Qr47zWRG+6WKKV8xn940F</DigestValue>
+    </Reference>
+  </SignedInfo>
+  <SignatureValue>YlotBwny0Fy1acj/4oitzWcTZdlX79LmV7sUhx3M2HyyU+TmyN3IrJ2of57ro+sBH+inPlMWWPFi
+USy/Ncei07fmbyl9KXdylBwkzcTSq64oRQ5Z0qf6Lr1rTLMvxtgL</SignatureValue>
+  <KeyInfo>
+    <X509Data>
+      <X509Certificate>MIIBkTCCARagAwIBAgIJAPdIHSGNfZuUMAoGCCqGSM49BAMDMC8xLTArBgNVBAMTJGNhYTIyY2YxLWMxM2YtNDM3Yy1iYWZkLWFhNjM5MjU5MDkzMTAeFw0yNjAzMDgwMTU2MzlaFw0yNzAzMDgxMzU2MzlaMC8xLTArBgNVBAMTJGNhYTIyY2YxLWMxM2YtNDM3Yy1iYWZkLWFhNjM5MjU5MDkzMTB2MBAGByqGSM49AgEGBSuBBAAiA2IABNp6f9pfSrQcXKO+mGODiKCBvrFCgM6z6svOeFdn85eIZkMNYGiGy4qv372dsw6lUyYdMetE51bq0gc2taRfqpv74xATA8+srJCgSRF8wKRuy54sgtL8WciTs1VhOPHsaTAKBggqhkjOPQQDAwNpADBmAjEA5hZTKtauY9KNCFdXK5ZSsXmnIrEb3vm1m+GkTPdKWTDFsKMxe03DPvyHL6v5vvpnAjEAsDyuNkP5luWjdar8Nfd6yIN8WevzfJxqjLpxnT0OFiseNRTv1Xfsu9jmilU9jePZ</X509Certificate>
+    </X509Data>
+  </KeyInfo>
+  <Object Id="idPackageObject">
+    <Manifest>
+      <Reference URI="/_rels/.rels?ContentType=application/vnd.openxmlformats-package.relationships+xml">
+        <Transforms>
+          <Transform Algorithm="http://schemas.openxmlformats.org/package/2006/RelationshipTransform">
+            <mdssi:RelationshipReference xmlns:mdssi="http://schemas.openxmlformats.org/package/2006/digital-signature" SourceId="rId1"/>
+          </Transform>
+          <Transform Algorithm="http://www.w3.org/TR/2001/REC-xml-c14n-20010315"/>
+        </Transforms>
+        <DigestMethod Algorithm="http://www.w3.org/2001/04/xmldsig-more#sha384"/>
+        <DigestValue>LqXyoR7Obg/4ueBgP4vHEvDgJw1Of/31pxr5yH6uWCIENB5OwyEPinwaaq2GV2LQ</DigestValue>
+      </Reference>
+      <Reference URI="/ppt/_rels/presentation.xml.rels?ContentType=application/vnd.openxmlformats-package.relationships+xml">
+        <Transforms>
+          <Transform Algorithm="http://schemas.openxmlformats.org/package/2006/RelationshipTransform">
+            <mdssi:RelationshipReference xmlns:mdssi="http://schemas.openxmlformats.org/package/2006/digital-signature" SourceId="rId21"/>
+            <mdssi:RelationshipReference xmlns:mdssi="http://schemas.openxmlformats.org/package/2006/digital-signature" SourceId="rId34"/>
+            <mdssi:RelationshipReference xmlns:mdssi="http://schemas.openxmlformats.org/package/2006/digital-signature" SourceId="rId7"/>
+            <mdssi:RelationshipReference xmlns:mdssi="http://schemas.openxmlformats.org/package/2006/digital-signature" SourceId="rId12"/>
+            <mdssi:RelationshipReference xmlns:mdssi="http://schemas.openxmlformats.org/package/2006/digital-signature" SourceId="rId17"/>
+            <mdssi:RelationshipReference xmlns:mdssi="http://schemas.openxmlformats.org/package/2006/digital-signature" SourceId="rId25"/>
+            <mdssi:RelationshipReference xmlns:mdssi="http://schemas.openxmlformats.org/package/2006/digital-signature" SourceId="rId33"/>
+            <mdssi:RelationshipReference xmlns:mdssi="http://schemas.openxmlformats.org/package/2006/digital-signature" SourceId="rId2"/>
+            <mdssi:RelationshipReference xmlns:mdssi="http://schemas.openxmlformats.org/package/2006/digital-signature" SourceId="rId16"/>
+            <mdssi:RelationshipReference xmlns:mdssi="http://schemas.openxmlformats.org/package/2006/digital-signature" SourceId="rId20"/>
+            <mdssi:RelationshipReference xmlns:mdssi="http://schemas.openxmlformats.org/package/2006/digital-signature" SourceId="rId29"/>
+            <mdssi:RelationshipReference xmlns:mdssi="http://schemas.openxmlformats.org/package/2006/digital-signature" SourceId="rId1"/>
+            <mdssi:RelationshipReference xmlns:mdssi="http://schemas.openxmlformats.org/package/2006/digital-signature" SourceId="rId6"/>
+            <mdssi:RelationshipReference xmlns:mdssi="http://schemas.openxmlformats.org/package/2006/digital-signature" SourceId="rId11"/>
+            <mdssi:RelationshipReference xmlns:mdssi="http://schemas.openxmlformats.org/package/2006/digital-signature" SourceId="rId24"/>
+            <mdssi:RelationshipReference xmlns:mdssi="http://schemas.openxmlformats.org/package/2006/digital-signature" SourceId="rId32"/>
+            <mdssi:RelationshipReference xmlns:mdssi="http://schemas.openxmlformats.org/package/2006/digital-signature" SourceId="rId5"/>
+            <mdssi:RelationshipReference xmlns:mdssi="http://schemas.openxmlformats.org/package/2006/digital-signature" SourceId="rId15"/>
+            <mdssi:RelationshipReference xmlns:mdssi="http://schemas.openxmlformats.org/package/2006/digital-signature" SourceId="rId23"/>
+            <mdssi:RelationshipReference xmlns:mdssi="http://schemas.openxmlformats.org/package/2006/digital-signature" SourceId="rId28"/>
+            <mdssi:RelationshipReference xmlns:mdssi="http://schemas.openxmlformats.org/package/2006/digital-signature" SourceId="rId10"/>
+            <mdssi:RelationshipReference xmlns:mdssi="http://schemas.openxmlformats.org/package/2006/digital-signature" SourceId="rId19"/>
+            <mdssi:RelationshipReference xmlns:mdssi="http://schemas.openxmlformats.org/package/2006/digital-signature" SourceId="rId31"/>
+            <mdssi:RelationshipReference xmlns:mdssi="http://schemas.openxmlformats.org/package/2006/digital-signature" SourceId="rId4"/>
+            <mdssi:RelationshipReference xmlns:mdssi="http://schemas.openxmlformats.org/package/2006/digital-signature" SourceId="rId9"/>
+            <mdssi:RelationshipReference xmlns:mdssi="http://schemas.openxmlformats.org/package/2006/digital-signature" SourceId="rId14"/>
+            <mdssi:RelationshipReference xmlns:mdssi="http://schemas.openxmlformats.org/package/2006/digital-signature" SourceId="rId22"/>
+            <mdssi:RelationshipReference xmlns:mdssi="http://schemas.openxmlformats.org/package/2006/digital-signature" SourceId="rId27"/>
+            <mdssi:RelationshipReference xmlns:mdssi="http://schemas.openxmlformats.org/package/2006/digital-signature" SourceId="rId30"/>
+            <mdssi:RelationshipReference xmlns:mdssi="http://schemas.openxmlformats.org/package/2006/digital-signature" SourceId="rId8"/>
+            <mdssi:RelationshipReference xmlns:mdssi="http://schemas.openxmlformats.org/package/2006/digital-signature" SourceId="rId13"/>
+            <mdssi:RelationshipReference xmlns:mdssi="http://schemas.openxmlformats.org/package/2006/digital-signature" SourceId="rId18"/>
+            <mdssi:RelationshipReference xmlns:mdssi="http://schemas.openxmlformats.org/package/2006/digital-signature" SourceId="rId26"/>
+            <mdssi:RelationshipReference xmlns:mdssi="http://schemas.openxmlformats.org/package/2006/digital-signature" SourceId="rId3"/>
+          </Transform>
+          <Transform Algorithm="http://www.w3.org/TR/2001/REC-xml-c14n-20010315"/>
+        </Transforms>
+        <DigestMethod Algorithm="http://www.w3.org/2001/04/xmldsig-more#sha384"/>
+        <DigestValue>IdxJBnVA9NuhP8Iwdf10cyw/nA28jo7Iop3bU0JvebJ6fdoo3/nk0nb4NbHwR8gV</DigestValue>
+      </Reference>
+      <Reference URI="/ppt/media/image1.png?ContentType=image/png">
+        <DigestMethod Algorithm="http://www.w3.org/2001/04/xmldsig-more#sha384"/>
+        <DigestValue>3w/gWVnOS1nurR07w04xlpELRj8iHLgK8+h5sd6MnGtCjN8tquZZRoPIrHQmFx6g</DigestValue>
+      </Reference>
+      <Reference URI="/ppt/media/image2.png?ContentType=image/png">
+        <DigestMethod Algorithm="http://www.w3.org/2001/04/xmldsig-more#sha384"/>
+        <DigestValue>CMbo4qr/vPxYFEbUsVwA9gyicP2bTDWL8qfYlpowfAP9CmrQPXD0iQm1H+dR/2aq</DigestValue>
+      </Reference>
+      <Reference URI="/ppt/media/image3.png?ContentType=image/png">
+        <DigestMethod Algorithm="http://www.w3.org/2001/04/xmldsig-more#sha384"/>
+        <DigestValue>fkw1w+nXtaYVxIp+vO+RUShVLgmuZ2Rcfz/bL4BoUHsGK2zZypYN/iDySVOJp9tS</DigestValue>
+      </Reference>
+      <Reference URI="/ppt/presentation.xml?ContentType=application/vnd.openxmlformats-officedocument.presentationml.presentation.main+xml">
+        <DigestMethod Algorithm="http://www.w3.org/2001/04/xmldsig-more#sha384"/>
+        <DigestValue>o072Ubw+oLd8cOLHgixjJyMXJcfbnc3PR6mnX+/bs710PIbZjCiy0JBDVQt67Hdb</DigestValue>
+      </Reference>
+      <Reference URI="/ppt/presProps.xml?ContentType=application/vnd.openxmlformats-officedocument.presentationml.presProps+xml">
+        <DigestMethod Algorithm="http://www.w3.org/2001/04/xmldsig-more#sha384"/>
+        <DigestValue>lIgd1ZmXMAEqE5xDCbCLumNPNLMuIKcNshK2tbTUXynCHR8U6Gg9mf6/CmcNVoci</DigestValue>
+      </Reference>
+      <Reference URI="/ppt/slideLayouts/_rels/slideLayout1.xml.rels?ContentType=application/vnd.openxmlformats-package.relationships+xml">
+        <Transforms>
+          <Transform Algorithm="http://schemas.openxmlformats.org/package/2006/RelationshipTransform">
+            <mdssi:RelationshipReference xmlns:mdssi="http://schemas.openxmlformats.org/package/2006/digital-signature" SourceId="rId1"/>
+          </Transform>
+          <Transform Algorithm="http://www.w3.org/TR/2001/REC-xml-c14n-20010315"/>
+        </Transforms>
+        <DigestMethod Algorithm="http://www.w3.org/2001/04/xmldsig-more#sha384"/>
+        <DigestValue>vXKY0l3kETR8Vc6sgq2XNne1/lKbiPCcvpVE+FibNlzcd0qcGOU3VnRHzlPx0D37</DigestValue>
+      </Reference>
+      <Reference URI="/ppt/slideLayouts/_rels/slideLayout10.xml.rels?ContentType=application/vnd.openxmlformats-package.relationships+xml">
+        <Transforms>
+          <Transform Algorithm="http://schemas.openxmlformats.org/package/2006/RelationshipTransform">
+            <mdssi:RelationshipReference xmlns:mdssi="http://schemas.openxmlformats.org/package/2006/digital-signature" SourceId="rId1"/>
+          </Transform>
+          <Transform Algorithm="http://www.w3.org/TR/2001/REC-xml-c14n-20010315"/>
+        </Transforms>
+        <DigestMethod Algorithm="http://www.w3.org/2001/04/xmldsig-more#sha384"/>
+        <DigestValue>vXKY0l3kETR8Vc6sgq2XNne1/lKbiPCcvpVE+FibNlzcd0qcGOU3VnRHzlPx0D37</DigestValue>
+      </Reference>
+      <Reference URI="/ppt/slideLayouts/_rels/slideLayout11.xml.rels?ContentType=application/vnd.openxmlformats-package.relationships+xml">
+        <Transforms>
+          <Transform Algorithm="http://schemas.openxmlformats.org/package/2006/RelationshipTransform">
+            <mdssi:RelationshipReference xmlns:mdssi="http://schemas.openxmlformats.org/package/2006/digital-signature" SourceId="rId1"/>
+          </Transform>
+          <Transform Algorithm="http://www.w3.org/TR/2001/REC-xml-c14n-20010315"/>
+        </Transforms>
+        <DigestMethod Algorithm="http://www.w3.org/2001/04/xmldsig-more#sha384"/>
+        <DigestValue>vXKY0l3kETR8Vc6sgq2XNne1/lKbiPCcvpVE+FibNlzcd0qcGOU3VnRHzlPx0D37</DigestValue>
+      </Reference>
+      <Reference URI="/ppt/slideLayouts/_rels/slideLayout2.xml.rels?ContentType=application/vnd.openxmlformats-package.relationships+xml">
+        <Transforms>
+          <Transform Algorithm="http://schemas.openxmlformats.org/package/2006/RelationshipTransform">
+            <mdssi:RelationshipReference xmlns:mdssi="http://schemas.openxmlformats.org/package/2006/digital-signature" SourceId="rId1"/>
+          </Transform>
+          <Transform Algorithm="http://www.w3.org/TR/2001/REC-xml-c14n-20010315"/>
+        </Transforms>
+        <DigestMethod Algorithm="http://www.w3.org/2001/04/xmldsig-more#sha384"/>
+        <DigestValue>vXKY0l3kETR8Vc6sgq2XNne1/lKbiPCcvpVE+FibNlzcd0qcGOU3VnRHzlPx0D37</DigestValue>
+      </Reference>
+      <Reference URI="/ppt/slideLayouts/_rels/slideLayout3.xml.rels?ContentType=application/vnd.openxmlformats-package.relationships+xml">
+        <Transforms>
+          <Transform Algorithm="http://schemas.openxmlformats.org/package/2006/RelationshipTransform">
+            <mdssi:RelationshipReference xmlns:mdssi="http://schemas.openxmlformats.org/package/2006/digital-signature" SourceId="rId1"/>
+          </Transform>
+          <Transform Algorithm="http://www.w3.org/TR/2001/REC-xml-c14n-20010315"/>
+        </Transforms>
+        <DigestMethod Algorithm="http://www.w3.org/2001/04/xmldsig-more#sha384"/>
+        <DigestValue>vXKY0l3kETR8Vc6sgq2XNne1/lKbiPCcvpVE+FibNlzcd0qcGOU3VnRHzlPx0D37</DigestValue>
+      </Reference>
+      <Reference URI="/ppt/slideLayouts/_rels/slideLayout4.xml.rels?ContentType=application/vnd.openxmlformats-package.relationships+xml">
+        <Transforms>
+          <Transform Algorithm="http://schemas.openxmlformats.org/package/2006/RelationshipTransform">
+            <mdssi:RelationshipReference xmlns:mdssi="http://schemas.openxmlformats.org/package/2006/digital-signature" SourceId="rId1"/>
+          </Transform>
+          <Transform Algorithm="http://www.w3.org/TR/2001/REC-xml-c14n-20010315"/>
+        </Transforms>
+        <DigestMethod Algorithm="http://www.w3.org/2001/04/xmldsig-more#sha384"/>
+        <DigestValue>vXKY0l3kETR8Vc6sgq2XNne1/lKbiPCcvpVE+FibNlzcd0qcGOU3VnRHzlPx0D37</DigestValue>
+      </Reference>
+      <Reference URI="/ppt/slideLayouts/_rels/slideLayout5.xml.rels?ContentType=application/vnd.openxmlformats-package.relationships+xml">
+        <Transforms>
+          <Transform Algorithm="http://schemas.openxmlformats.org/package/2006/RelationshipTransform">
+            <mdssi:RelationshipReference xmlns:mdssi="http://schemas.openxmlformats.org/package/2006/digital-signature" SourceId="rId1"/>
+          </Transform>
+          <Transform Algorithm="http://www.w3.org/TR/2001/REC-xml-c14n-20010315"/>
+        </Transforms>
+        <DigestMethod Algorithm="http://www.w3.org/2001/04/xmldsig-more#sha384"/>
+        <DigestValue>vXKY0l3kETR8Vc6sgq2XNne1/lKbiPCcvpVE+FibNlzcd0qcGOU3VnRHzlPx0D37</DigestValue>
+      </Reference>
+      <Reference URI="/ppt/slideLayouts/_rels/slideLayout6.xml.rels?ContentType=application/vnd.openxmlformats-package.relationships+xml">
+        <Transforms>
+          <Transform Algorithm="http://schemas.openxmlformats.org/package/2006/RelationshipTransform">
+            <mdssi:RelationshipReference xmlns:mdssi="http://schemas.openxmlformats.org/package/2006/digital-signature" SourceId="rId1"/>
+          </Transform>
+          <Transform Algorithm="http://www.w3.org/TR/2001/REC-xml-c14n-20010315"/>
+        </Transforms>
+        <DigestMethod Algorithm="http://www.w3.org/2001/04/xmldsig-more#sha384"/>
+        <DigestValue>vXKY0l3kETR8Vc6sgq2XNne1/lKbiPCcvpVE+FibNlzcd0qcGOU3VnRHzlPx0D37</DigestValue>
+      </Reference>
+      <Reference URI="/ppt/slideLayouts/_rels/slideLayout7.xml.rels?ContentType=application/vnd.openxmlformats-package.relationships+xml">
+        <Transforms>
+          <Transform Algorithm="http://schemas.openxmlformats.org/package/2006/RelationshipTransform">
+            <mdssi:RelationshipReference xmlns:mdssi="http://schemas.openxmlformats.org/package/2006/digital-signature" SourceId="rId1"/>
+          </Transform>
+          <Transform Algorithm="http://www.w3.org/TR/2001/REC-xml-c14n-20010315"/>
+        </Transforms>
+        <DigestMethod Algorithm="http://www.w3.org/2001/04/xmldsig-more#sha384"/>
+        <DigestValue>vXKY0l3kETR8Vc6sgq2XNne1/lKbiPCcvpVE+FibNlzcd0qcGOU3VnRHzlPx0D37</DigestValue>
+      </Reference>
+      <Reference URI="/ppt/slideLayouts/_rels/slideLayout8.xml.rels?ContentType=application/vnd.openxmlformats-package.relationships+xml">
+        <Transforms>
+          <Transform Algorithm="http://schemas.openxmlformats.org/package/2006/RelationshipTransform">
+            <mdssi:RelationshipReference xmlns:mdssi="http://schemas.openxmlformats.org/package/2006/digital-signature" SourceId="rId1"/>
+          </Transform>
+          <Transform Algorithm="http://www.w3.org/TR/2001/REC-xml-c14n-20010315"/>
+        </Transforms>
+        <DigestMethod Algorithm="http://www.w3.org/2001/04/xmldsig-more#sha384"/>
+        <DigestValue>vXKY0l3kETR8Vc6sgq2XNne1/lKbiPCcvpVE+FibNlzcd0qcGOU3VnRHzlPx0D37</DigestValue>
+      </Reference>
+      <Reference URI="/ppt/slideLayouts/_rels/slideLayout9.xml.rels?ContentType=application/vnd.openxmlformats-package.relationships+xml">
+        <Transforms>
+          <Transform Algorithm="http://schemas.openxmlformats.org/package/2006/RelationshipTransform">
+            <mdssi:RelationshipReference xmlns:mdssi="http://schemas.openxmlformats.org/package/2006/digital-signature" SourceId="rId1"/>
+          </Transform>
+          <Transform Algorithm="http://www.w3.org/TR/2001/REC-xml-c14n-20010315"/>
+        </Transforms>
+        <DigestMethod Algorithm="http://www.w3.org/2001/04/xmldsig-more#sha384"/>
+        <DigestValue>vXKY0l3kETR8Vc6sgq2XNne1/lKbiPCcvpVE+FibNlzcd0qcGOU3VnRHzlPx0D37</DigestValue>
+      </Reference>
+      <Reference URI="/ppt/slideLayouts/slideLayout1.xml?ContentType=application/vnd.openxmlformats-officedocument.presentationml.slideLayout+xml">
+        <DigestMethod Algorithm="http://www.w3.org/2001/04/xmldsig-more#sha384"/>
+        <DigestValue>4fFByoDqxc+w/+6DmM0VjyvZ96+/rJq3b6VhsYPmkKdkOjeD9KX5OAQBzFCmyHb2</DigestValue>
+      </Reference>
+      <Reference URI="/ppt/slideLayouts/slideLayout10.xml?ContentType=application/vnd.openxmlformats-officedocument.presentationml.slideLayout+xml">
+        <DigestMethod Algorithm="http://www.w3.org/2001/04/xmldsig-more#sha384"/>
+        <DigestValue>rXypJMms/kWbzXIM446KykzOmFGyNLT5m/xqQNrCiaHIO9rQrnePSvoj/JSvcAes</DigestValue>
+      </Reference>
+      <Reference URI="/ppt/slideLayouts/slideLayout11.xml?ContentType=application/vnd.openxmlformats-officedocument.presentationml.slideLayout+xml">
+        <DigestMethod Algorithm="http://www.w3.org/2001/04/xmldsig-more#sha384"/>
+        <DigestValue>nBDmApEQxQzO4PR9LbzcRIJ1r/dqcBE9hihYJyF6n1qgW530AL74STupR8gpPhKs</DigestValue>
+      </Reference>
+      <Reference URI="/ppt/slideLayouts/slideLayout2.xml?ContentType=application/vnd.openxmlformats-officedocument.presentationml.slideLayout+xml">
+        <DigestMethod Algorithm="http://www.w3.org/2001/04/xmldsig-more#sha384"/>
+        <DigestValue>4PhyZYc6/aXsapdv2ThEj9/ApTQQxdGbGhcZnH4oK8SMYnTftJdChGX0Z4Wpxuax</DigestValue>
+      </Reference>
+      <Reference URI="/ppt/slideLayouts/slideLayout3.xml?ContentType=application/vnd.openxmlformats-officedocument.presentationml.slideLayout+xml">
+        <DigestMethod Algorithm="http://www.w3.org/2001/04/xmldsig-more#sha384"/>
+        <DigestValue>bWpN3/46+TYwKcE/6C7L6EbSA6X7r3lGNiAxsK1QYM3ZSS/gYM3iVQcqK4CO3Hu3</DigestValue>
+      </Reference>
+      <Reference URI="/ppt/slideLayouts/slideLayout4.xml?ContentType=application/vnd.openxmlformats-officedocument.presentationml.slideLayout+xml">
+        <DigestMethod Algorithm="http://www.w3.org/2001/04/xmldsig-more#sha384"/>
+        <DigestValue>EzrMJSCmTf0LukBs2a5zOLQl+4K+11i6Zl7vU3BpNpmvkjpv5/X2jo6iv7yPI65O</DigestValue>
+      </Reference>
+      <Reference URI="/ppt/slideLayouts/slideLayout5.xml?ContentType=application/vnd.openxmlformats-officedocument.presentationml.slideLayout+xml">
+        <DigestMethod Algorithm="http://www.w3.org/2001/04/xmldsig-more#sha384"/>
+        <DigestValue>1LL9AJaYsIPhaBoitZp2Z90q7b7MA4koha9Srk9ER5ES40/n1AHsh57Fqm6XU/79</DigestValue>
+      </Reference>
+      <Reference URI="/ppt/slideLayouts/slideLayout6.xml?ContentType=application/vnd.openxmlformats-officedocument.presentationml.slideLayout+xml">
+        <DigestMethod Algorithm="http://www.w3.org/2001/04/xmldsig-more#sha384"/>
+        <DigestValue>wMXAc/3+MvNcQWRPWKnmC6hqEWO6tvSbC22/Fu5Ck5z+haV/JSEtznXLOh0pOBLy</DigestValue>
+      </Reference>
+      <Reference URI="/ppt/slideLayouts/slideLayout7.xml?ContentType=application/vnd.openxmlformats-officedocument.presentationml.slideLayout+xml">
+        <DigestMethod Algorithm="http://www.w3.org/2001/04/xmldsig-more#sha384"/>
+        <DigestValue>MkGftPYDMAsIAmZgnfL4JfkRGTBtMnBaN8GiZp98oqiybqRHzyhc9BDziwGcVSrH</DigestValue>
+      </Reference>
+      <Reference URI="/ppt/slideLayouts/slideLayout8.xml?ContentType=application/vnd.openxmlformats-officedocument.presentationml.slideLayout+xml">
+        <DigestMethod Algorithm="http://www.w3.org/2001/04/xmldsig-more#sha384"/>
+        <DigestValue>ZzUTvD7B2cgF0n+kwIpVvDK4/wQ0IZw3b+K5U5tIHvzeYst3P6MhWXwC0BxNFxMI</DigestValue>
+      </Reference>
+      <Reference URI="/ppt/slideLayouts/slideLayout9.xml?ContentType=application/vnd.openxmlformats-officedocument.presentationml.slideLayout+xml">
+        <DigestMethod Algorithm="http://www.w3.org/2001/04/xmldsig-more#sha384"/>
+        <DigestValue>9mrYYFCJw5qlhdh/HoXgLFxMgSv4GNC8K/VvHqb8UL6g8dLD22SIs1o4MJEXBago</DigestValue>
+      </Reference>
+      <Reference URI="/ppt/slideMasters/_rels/slideMaster1.xml.rels?ContentType=application/vnd.openxmlformats-package.relationships+xml">
+        <Transforms>
+          <Transform Algorithm="http://schemas.openxmlformats.org/package/2006/RelationshipTransform">
+            <mdssi:RelationshipReference xmlns:mdssi="http://schemas.openxmlformats.org/package/2006/digital-signature" SourceId="rId6"/>
+            <mdssi:RelationshipReference xmlns:mdssi="http://schemas.openxmlformats.org/package/2006/digital-signature" SourceId="rId11"/>
+            <mdssi:RelationshipReference xmlns:mdssi="http://schemas.openxmlformats.org/package/2006/digital-signature" SourceId="rId5"/>
+            <mdssi:RelationshipReference xmlns:mdssi="http://schemas.openxmlformats.org/package/2006/digital-signature" SourceId="rId10"/>
+            <mdssi:RelationshipReference xmlns:mdssi="http://schemas.openxmlformats.org/package/2006/digital-signature" SourceId="rId4"/>
+            <mdssi:RelationshipReference xmlns:mdssi="http://schemas.openxmlformats.org/package/2006/digital-signature" SourceId="rId9"/>
+            <mdssi:RelationshipReference xmlns:mdssi="http://schemas.openxmlformats.org/package/2006/digital-signature" SourceId="rId8"/>
+            <mdssi:RelationshipReference xmlns:mdssi="http://schemas.openxmlformats.org/package/2006/digital-signature" SourceId="rId3"/>
+            <mdssi:RelationshipReference xmlns:mdssi="http://schemas.openxmlformats.org/package/2006/digital-signature" SourceId="rId7"/>
+            <mdssi:RelationshipReference xmlns:mdssi="http://schemas.openxmlformats.org/package/2006/digital-signature" SourceId="rId12"/>
+            <mdssi:RelationshipReference xmlns:mdssi="http://schemas.openxmlformats.org/package/2006/digital-signature" SourceId="rId2"/>
+            <mdssi:RelationshipReference xmlns:mdssi="http://schemas.openxmlformats.org/package/2006/digital-signature" SourceId="rId1"/>
+          </Transform>
+          <Transform Algorithm="http://www.w3.org/TR/2001/REC-xml-c14n-20010315"/>
+        </Transforms>
+        <DigestMethod Algorithm="http://www.w3.org/2001/04/xmldsig-more#sha384"/>
+        <DigestValue>47ZJuK8ikC1eoQBhAP2kn50k7c4+/v2BvYxSahNLv8Kg5z7ff8LPtrVHaVAuIS5G</DigestValue>
+      </Reference>
+      <Reference URI="/ppt/slideMasters/slideMaster1.xml?ContentType=application/vnd.openxmlformats-officedocument.presentationml.slideMaster+xml">
+        <DigestMethod Algorithm="http://www.w3.org/2001/04/xmldsig-more#sha384"/>
+        <DigestValue>M7koemMndxX6WMMVef1j8kLToY/zkeY73EG1JzT0DEHD90YE2M21ccdBehRdd19E</DigestValue>
+      </Reference>
+      <Reference URI="/ppt/slides/_rels/slide1.xml.rels?ContentType=application/vnd.openxmlformats-package.relationships+xml">
+        <Transforms>
+          <Transform Algorithm="http://schemas.openxmlformats.org/package/2006/RelationshipTransform">
+            <mdssi:RelationshipReference xmlns:mdssi="http://schemas.openxmlformats.org/package/2006/digital-signature" SourceId="rId1"/>
+          </Transform>
+          <Transform Algorithm="http://www.w3.org/TR/2001/REC-xml-c14n-20010315"/>
+        </Transforms>
+        <DigestMethod Algorithm="http://www.w3.org/2001/04/xmldsig-more#sha384"/>
+        <DigestValue>ZKjue2dCKZIZjWOn0IfZysBt96pOFXWf7VjMEZgKIqpRM7gWuxBQpYFKH3oGljHV</DigestValue>
+      </Reference>
+      <Reference URI="/ppt/slides/_rels/slide10.xml.rels?ContentType=application/vnd.openxmlformats-package.relationships+xml">
+        <Transforms>
+          <Transform Algorithm="http://schemas.openxmlformats.org/package/2006/RelationshipTransform">
+            <mdssi:RelationshipReference xmlns:mdssi="http://schemas.openxmlformats.org/package/2006/digital-signature" SourceId="rId1"/>
+          </Transform>
+          <Transform Algorithm="http://www.w3.org/TR/2001/REC-xml-c14n-20010315"/>
+        </Transforms>
+        <DigestMethod Algorithm="http://www.w3.org/2001/04/xmldsig-more#sha384"/>
+        <DigestValue>ZKjue2dCKZIZjWOn0IfZysBt96pOFXWf7VjMEZgKIqpRM7gWuxBQpYFKH3oGljHV</DigestValue>
+      </Reference>
+      <Reference URI="/ppt/slides/_rels/slide11.xml.rels?ContentType=application/vnd.openxmlformats-package.relationships+xml">
+        <Transforms>
+          <Transform Algorithm="http://schemas.openxmlformats.org/package/2006/RelationshipTransform">
+            <mdssi:RelationshipReference xmlns:mdssi="http://schemas.openxmlformats.org/package/2006/digital-signature" SourceId="rId1"/>
+          </Transform>
+          <Transform Algorithm="http://www.w3.org/TR/2001/REC-xml-c14n-20010315"/>
+        </Transforms>
+        <DigestMethod Algorithm="http://www.w3.org/2001/04/xmldsig-more#sha384"/>
+        <DigestValue>ZKjue2dCKZIZjWOn0IfZysBt96pOFXWf7VjMEZgKIqpRM7gWuxBQpYFKH3oGljHV</DigestValue>
+      </Reference>
+      <Reference URI="/ppt/slides/_rels/slide12.xml.rels?ContentType=application/vnd.openxmlformats-package.relationships+xml">
+        <Transforms>
+          <Transform Algorithm="http://schemas.openxmlformats.org/package/2006/RelationshipTransform">
+            <mdssi:RelationshipReference xmlns:mdssi="http://schemas.openxmlformats.org/package/2006/digital-signature" SourceId="rId1"/>
+          </Transform>
+          <Transform Algorithm="http://www.w3.org/TR/2001/REC-xml-c14n-20010315"/>
+        </Transforms>
+        <DigestMethod Algorithm="http://www.w3.org/2001/04/xmldsig-more#sha384"/>
+        <DigestValue>ZKjue2dCKZIZjWOn0IfZysBt96pOFXWf7VjMEZgKIqpRM7gWuxBQpYFKH3oGljHV</DigestValue>
+      </Reference>
+      <Reference URI="/ppt/slides/_rels/slide13.xml.rels?ContentType=application/vnd.openxmlformats-package.relationships+xml">
+        <Transforms>
+          <Transform Algorithm="http://schemas.openxmlformats.org/package/2006/RelationshipTransform">
+            <mdssi:RelationshipReference xmlns:mdssi="http://schemas.openxmlformats.org/package/2006/digital-signature" SourceId="rId1"/>
+          </Transform>
+          <Transform Algorithm="http://www.w3.org/TR/2001/REC-xml-c14n-20010315"/>
+        </Transforms>
+        <DigestMethod Algorithm="http://www.w3.org/2001/04/xmldsig-more#sha384"/>
+        <DigestValue>ZKjue2dCKZIZjWOn0IfZysBt96pOFXWf7VjMEZgKIqpRM7gWuxBQpYFKH3oGljHV</DigestValue>
+      </Reference>
+      <Reference URI="/ppt/slides/_rels/slide14.xml.rels?ContentType=application/vnd.openxmlformats-package.relationships+xml">
+        <Transforms>
+          <Transform Algorithm="http://schemas.openxmlformats.org/package/2006/RelationshipTransform">
+            <mdssi:RelationshipReference xmlns:mdssi="http://schemas.openxmlformats.org/package/2006/digital-signature" SourceId="rId1"/>
+          </Transform>
+          <Transform Algorithm="http://www.w3.org/TR/2001/REC-xml-c14n-20010315"/>
+        </Transforms>
+        <DigestMethod Algorithm="http://www.w3.org/2001/04/xmldsig-more#sha384"/>
+        <DigestValue>ZKjue2dCKZIZjWOn0IfZysBt96pOFXWf7VjMEZgKIqpRM7gWuxBQpYFKH3oGljHV</DigestValue>
+      </Reference>
+      <Reference URI="/ppt/slides/_rels/slide15.xml.rels?ContentType=application/vnd.openxmlformats-package.relationships+xml">
+        <Transforms>
+          <Transform Algorithm="http://schemas.openxmlformats.org/package/2006/RelationshipTransform">
+            <mdssi:RelationshipReference xmlns:mdssi="http://schemas.openxmlformats.org/package/2006/digital-signature" SourceId="rId1"/>
+          </Transform>
+          <Transform Algorithm="http://www.w3.org/TR/2001/REC-xml-c14n-20010315"/>
+        </Transforms>
+        <DigestMethod Algorithm="http://www.w3.org/2001/04/xmldsig-more#sha384"/>
+        <DigestValue>ZKjue2dCKZIZjWOn0IfZysBt96pOFXWf7VjMEZgKIqpRM7gWuxBQpYFKH3oGljHV</DigestValue>
+      </Reference>
+      <Reference URI="/ppt/slides/_rels/slide16.xml.rels?ContentType=application/vnd.openxmlformats-package.relationships+xml">
+        <Transforms>
+          <Transform Algorithm="http://schemas.openxmlformats.org/package/2006/RelationshipTransform">
+            <mdssi:RelationshipReference xmlns:mdssi="http://schemas.openxmlformats.org/package/2006/digital-signature" SourceId="rId1"/>
+          </Transform>
+          <Transform Algorithm="http://www.w3.org/TR/2001/REC-xml-c14n-20010315"/>
+        </Transforms>
+        <DigestMethod Algorithm="http://www.w3.org/2001/04/xmldsig-more#sha384"/>
+        <DigestValue>ZKjue2dCKZIZjWOn0IfZysBt96pOFXWf7VjMEZgKIqpRM7gWuxBQpYFKH3oGljHV</DigestValue>
+      </Reference>
+      <Reference URI="/ppt/slides/_rels/slide17.xml.rels?ContentType=application/vnd.openxmlformats-package.relationships+xml">
+        <Transforms>
+          <Transform Algorithm="http://schemas.openxmlformats.org/package/2006/RelationshipTransform">
+            <mdssi:RelationshipReference xmlns:mdssi="http://schemas.openxmlformats.org/package/2006/digital-signature" SourceId="rId1"/>
+            <mdssi:RelationshipReference xmlns:mdssi="http://schemas.openxmlformats.org/package/2006/digital-signature" SourceId="rId2"/>
+          </Transform>
+          <Transform Algorithm="http://www.w3.org/TR/2001/REC-xml-c14n-20010315"/>
+        </Transforms>
+        <DigestMethod Algorithm="http://www.w3.org/2001/04/xmldsig-more#sha384"/>
+        <DigestValue>AvoK3ALLBATAyd8EweU13U8GWZ9UZW5S8F3BV4eCsX2b0lg880WQgIJgmsY+bKN9</DigestValue>
+      </Reference>
+      <Reference URI="/ppt/slides/_rels/slide18.xml.rels?ContentType=application/vnd.openxmlformats-package.relationships+xml">
+        <Transforms>
+          <Transform Algorithm="http://schemas.openxmlformats.org/package/2006/RelationshipTransform">
+            <mdssi:RelationshipReference xmlns:mdssi="http://schemas.openxmlformats.org/package/2006/digital-signature" SourceId="rId2"/>
+            <mdssi:RelationshipReference xmlns:mdssi="http://schemas.openxmlformats.org/package/2006/digital-signature" SourceId="rId1"/>
+          </Transform>
+          <Transform Algorithm="http://www.w3.org/TR/2001/REC-xml-c14n-20010315"/>
+        </Transforms>
+        <DigestMethod Algorithm="http://www.w3.org/2001/04/xmldsig-more#sha384"/>
+        <DigestValue>bi9vKcZUEtt4FcvM4PERZ7EXdkYcAno4r+hITMZ8cn31Hrp5mrG78nGAQglM5pSP</DigestValue>
+      </Reference>
+      <Reference URI="/ppt/slides/_rels/slide19.xml.rels?ContentType=application/vnd.openxmlformats-package.relationships+xml">
+        <Transforms>
+          <Transform Algorithm="http://schemas.openxmlformats.org/package/2006/RelationshipTransform">
+            <mdssi:RelationshipReference xmlns:mdssi="http://schemas.openxmlformats.org/package/2006/digital-signature" SourceId="rId1"/>
+          </Transform>
+          <Transform Algorithm="http://www.w3.org/TR/2001/REC-xml-c14n-20010315"/>
+        </Transforms>
+        <DigestMethod Algorithm="http://www.w3.org/2001/04/xmldsig-more#sha384"/>
+        <DigestValue>ZKjue2dCKZIZjWOn0IfZysBt96pOFXWf7VjMEZgKIqpRM7gWuxBQpYFKH3oGljHV</DigestValue>
+      </Reference>
+      <Reference URI="/ppt/slides/_rels/slide2.xml.rels?ContentType=application/vnd.openxmlformats-package.relationships+xml">
+        <Transforms>
+          <Transform Algorithm="http://schemas.openxmlformats.org/package/2006/RelationshipTransform">
+            <mdssi:RelationshipReference xmlns:mdssi="http://schemas.openxmlformats.org/package/2006/digital-signature" SourceId="rId1"/>
+          </Transform>
+          <Transform Algorithm="http://www.w3.org/TR/2001/REC-xml-c14n-20010315"/>
+        </Transforms>
+        <DigestMethod Algorithm="http://www.w3.org/2001/04/xmldsig-more#sha384"/>
+        <DigestValue>ZKjue2dCKZIZjWOn0IfZysBt96pOFXWf7VjMEZgKIqpRM7gWuxBQpYFKH3oGljHV</DigestValue>
+      </Reference>
+      <Reference URI="/ppt/slides/_rels/slide20.xml.rels?ContentType=application/vnd.openxmlformats-package.relationships+xml">
+        <Transforms>
+          <Transform Algorithm="http://schemas.openxmlformats.org/package/2006/RelationshipTransform">
+            <mdssi:RelationshipReference xmlns:mdssi="http://schemas.openxmlformats.org/package/2006/digital-signature" SourceId="rId1"/>
+          </Transform>
+          <Transform Algorithm="http://www.w3.org/TR/2001/REC-xml-c14n-20010315"/>
+        </Transforms>
+        <DigestMethod Algorithm="http://www.w3.org/2001/04/xmldsig-more#sha384"/>
+        <DigestValue>ZKjue2dCKZIZjWOn0IfZysBt96pOFXWf7VjMEZgKIqpRM7gWuxBQpYFKH3oGljHV</DigestValue>
+      </Reference>
+      <Reference URI="/ppt/slides/_rels/slide21.xml.rels?ContentType=application/vnd.openxmlformats-package.relationships+xml">
+        <Transforms>
+          <Transform Algorithm="http://schemas.openxmlformats.org/package/2006/RelationshipTransform">
+            <mdssi:RelationshipReference xmlns:mdssi="http://schemas.openxmlformats.org/package/2006/digital-signature" SourceId="rId1"/>
+            <mdssi:RelationshipReference xmlns:mdssi="http://schemas.openxmlformats.org/package/2006/digital-signature" SourceId="rId2"/>
+          </Transform>
+          <Transform Algorithm="http://www.w3.org/TR/2001/REC-xml-c14n-20010315"/>
+        </Transforms>
+        <DigestMethod Algorithm="http://www.w3.org/2001/04/xmldsig-more#sha384"/>
+        <DigestValue>3PCBd/7D21+U+BoLQJmtUpgiN14LtjTvnkbhOaAo+EgiN4H7ESArlancsZSSVrRv</DigestValue>
+      </Reference>
+      <Reference URI="/ppt/slides/_rels/slide22.xml.rels?ContentType=application/vnd.openxmlformats-package.relationships+xml">
+        <Transforms>
+          <Transform Algorithm="http://schemas.openxmlformats.org/package/2006/RelationshipTransform">
+            <mdssi:RelationshipReference xmlns:mdssi="http://schemas.openxmlformats.org/package/2006/digital-signature" SourceId="rId1"/>
+          </Transform>
+          <Transform Algorithm="http://www.w3.org/TR/2001/REC-xml-c14n-20010315"/>
+        </Transforms>
+        <DigestMethod Algorithm="http://www.w3.org/2001/04/xmldsig-more#sha384"/>
+        <DigestValue>ZKjue2dCKZIZjWOn0IfZysBt96pOFXWf7VjMEZgKIqpRM7gWuxBQpYFKH3oGljHV</DigestValue>
+      </Reference>
+      <Reference URI="/ppt/slides/_rels/slide23.xml.rels?ContentType=application/vnd.openxmlformats-package.relationships+xml">
+        <Transforms>
+          <Transform Algorithm="http://schemas.openxmlformats.org/package/2006/RelationshipTransform">
+            <mdssi:RelationshipReference xmlns:mdssi="http://schemas.openxmlformats.org/package/2006/digital-signature" SourceId="rId1"/>
+          </Transform>
+          <Transform Algorithm="http://www.w3.org/TR/2001/REC-xml-c14n-20010315"/>
+        </Transforms>
+        <DigestMethod Algorithm="http://www.w3.org/2001/04/xmldsig-more#sha384"/>
+        <DigestValue>ZKjue2dCKZIZjWOn0IfZysBt96pOFXWf7VjMEZgKIqpRM7gWuxBQpYFKH3oGljHV</DigestValue>
+      </Reference>
+      <Reference URI="/ppt/slides/_rels/slide24.xml.rels?ContentType=application/vnd.openxmlformats-package.relationships+xml">
+        <Transforms>
+          <Transform Algorithm="http://schemas.openxmlformats.org/package/2006/RelationshipTransform">
+            <mdssi:RelationshipReference xmlns:mdssi="http://schemas.openxmlformats.org/package/2006/digital-signature" SourceId="rId1"/>
+          </Transform>
+          <Transform Algorithm="http://www.w3.org/TR/2001/REC-xml-c14n-20010315"/>
+        </Transforms>
+        <DigestMethod Algorithm="http://www.w3.org/2001/04/xmldsig-more#sha384"/>
+        <DigestValue>ZKjue2dCKZIZjWOn0IfZysBt96pOFXWf7VjMEZgKIqpRM7gWuxBQpYFKH3oGljHV</DigestValue>
+      </Reference>
+      <Reference URI="/ppt/slides/_rels/slide25.xml.rels?ContentType=application/vnd.openxmlformats-package.relationships+xml">
+        <Transforms>
+          <Transform Algorithm="http://schemas.openxmlformats.org/package/2006/RelationshipTransform">
+            <mdssi:RelationshipReference xmlns:mdssi="http://schemas.openxmlformats.org/package/2006/digital-signature" SourceId="rId1"/>
+          </Transform>
+          <Transform Algorithm="http://www.w3.org/TR/2001/REC-xml-c14n-20010315"/>
+        </Transforms>
+        <DigestMethod Algorithm="http://www.w3.org/2001/04/xmldsig-more#sha384"/>
+        <DigestValue>ZKjue2dCKZIZjWOn0IfZysBt96pOFXWf7VjMEZgKIqpRM7gWuxBQpYFKH3oGljHV</DigestValue>
+      </Reference>
+      <Reference URI="/ppt/slides/_rels/slide26.xml.rels?ContentType=application/vnd.openxmlformats-package.relationships+xml">
+        <Transforms>
+          <Transform Algorithm="http://schemas.openxmlformats.org/package/2006/RelationshipTransform">
+            <mdssi:RelationshipReference xmlns:mdssi="http://schemas.openxmlformats.org/package/2006/digital-signature" SourceId="rId1"/>
+          </Transform>
+          <Transform Algorithm="http://www.w3.org/TR/2001/REC-xml-c14n-20010315"/>
+        </Transforms>
+        <DigestMethod Algorithm="http://www.w3.org/2001/04/xmldsig-more#sha384"/>
+        <DigestValue>ZKjue2dCKZIZjWOn0IfZysBt96pOFXWf7VjMEZgKIqpRM7gWuxBQpYFKH3oGljHV</DigestValue>
+      </Reference>
+      <Reference URI="/ppt/slides/_rels/slide27.xml.rels?ContentType=application/vnd.openxmlformats-package.relationships+xml">
+        <Transforms>
+          <Transform Algorithm="http://schemas.openxmlformats.org/package/2006/RelationshipTransform">
+            <mdssi:RelationshipReference xmlns:mdssi="http://schemas.openxmlformats.org/package/2006/digital-signature" SourceId="rId1"/>
+          </Transform>
+          <Transform Algorithm="http://www.w3.org/TR/2001/REC-xml-c14n-20010315"/>
+        </Transforms>
+        <DigestMethod Algorithm="http://www.w3.org/2001/04/xmldsig-more#sha384"/>
+        <DigestValue>ZKjue2dCKZIZjWOn0IfZysBt96pOFXWf7VjMEZgKIqpRM7gWuxBQpYFKH3oGljHV</DigestValue>
+      </Reference>
+      <Reference URI="/ppt/slides/_rels/slide28.xml.rels?ContentType=application/vnd.openxmlformats-package.relationships+xml">
+        <Transforms>
+          <Transform Algorithm="http://schemas.openxmlformats.org/package/2006/RelationshipTransform">
+            <mdssi:RelationshipReference xmlns:mdssi="http://schemas.openxmlformats.org/package/2006/digital-signature" SourceId="rId1"/>
+          </Transform>
+          <Transform Algorithm="http://www.w3.org/TR/2001/REC-xml-c14n-20010315"/>
+        </Transforms>
+        <DigestMethod Algorithm="http://www.w3.org/2001/04/xmldsig-more#sha384"/>
+        <DigestValue>ZKjue2dCKZIZjWOn0IfZysBt96pOFXWf7VjMEZgKIqpRM7gWuxBQpYFKH3oGljHV</DigestValue>
+      </Reference>
+      <Reference URI="/ppt/slides/_rels/slide29.xml.rels?ContentType=application/vnd.openxmlformats-package.relationships+xml">
+        <Transforms>
+          <Transform Algorithm="http://schemas.openxmlformats.org/package/2006/RelationshipTransform">
+            <mdssi:RelationshipReference xmlns:mdssi="http://schemas.openxmlformats.org/package/2006/digital-signature" SourceId="rId1"/>
+          </Transform>
+          <Transform Algorithm="http://www.w3.org/TR/2001/REC-xml-c14n-20010315"/>
+        </Transforms>
+        <DigestMethod Algorithm="http://www.w3.org/2001/04/xmldsig-more#sha384"/>
+        <DigestValue>ZKjue2dCKZIZjWOn0IfZysBt96pOFXWf7VjMEZgKIqpRM7gWuxBQpYFKH3oGljHV</DigestValue>
+      </Reference>
+      <Reference URI="/ppt/slides/_rels/slide3.xml.rels?ContentType=application/vnd.openxmlformats-package.relationships+xml">
+        <Transforms>
+          <Transform Algorithm="http://schemas.openxmlformats.org/package/2006/RelationshipTransform">
+            <mdssi:RelationshipReference xmlns:mdssi="http://schemas.openxmlformats.org/package/2006/digital-signature" SourceId="rId1"/>
+          </Transform>
+          <Transform Algorithm="http://www.w3.org/TR/2001/REC-xml-c14n-20010315"/>
+        </Transforms>
+        <DigestMethod Algorithm="http://www.w3.org/2001/04/xmldsig-more#sha384"/>
+        <DigestValue>ZKjue2dCKZIZjWOn0IfZysBt96pOFXWf7VjMEZgKIqpRM7gWuxBQpYFKH3oGljHV</DigestValue>
+      </Reference>
+      <Reference URI="/ppt/slides/_rels/slide4.xml.rels?ContentType=application/vnd.openxmlformats-package.relationships+xml">
+        <Transforms>
+          <Transform Algorithm="http://schemas.openxmlformats.org/package/2006/RelationshipTransform">
+            <mdssi:RelationshipReference xmlns:mdssi="http://schemas.openxmlformats.org/package/2006/digital-signature" SourceId="rId1"/>
+          </Transform>
+          <Transform Algorithm="http://www.w3.org/TR/2001/REC-xml-c14n-20010315"/>
+        </Transforms>
+        <DigestMethod Algorithm="http://www.w3.org/2001/04/xmldsig-more#sha384"/>
+        <DigestValue>ZKjue2dCKZIZjWOn0IfZysBt96pOFXWf7VjMEZgKIqpRM7gWuxBQpYFKH3oGljHV</DigestValue>
+      </Reference>
+      <Reference URI="/ppt/slides/_rels/slide5.xml.rels?ContentType=application/vnd.openxmlformats-package.relationships+xml">
+        <Transforms>
+          <Transform Algorithm="http://schemas.openxmlformats.org/package/2006/RelationshipTransform">
+            <mdssi:RelationshipReference xmlns:mdssi="http://schemas.openxmlformats.org/package/2006/digital-signature" SourceId="rId1"/>
+          </Transform>
+          <Transform Algorithm="http://www.w3.org/TR/2001/REC-xml-c14n-20010315"/>
+        </Transforms>
+        <DigestMethod Algorithm="http://www.w3.org/2001/04/xmldsig-more#sha384"/>
+        <DigestValue>ZKjue2dCKZIZjWOn0IfZysBt96pOFXWf7VjMEZgKIqpRM7gWuxBQpYFKH3oGljHV</DigestValue>
+      </Reference>
+      <Reference URI="/ppt/slides/_rels/slide6.xml.rels?ContentType=application/vnd.openxmlformats-package.relationships+xml">
+        <Transforms>
+          <Transform Algorithm="http://schemas.openxmlformats.org/package/2006/RelationshipTransform">
+            <mdssi:RelationshipReference xmlns:mdssi="http://schemas.openxmlformats.org/package/2006/digital-signature" SourceId="rId1"/>
+          </Transform>
+          <Transform Algorithm="http://www.w3.org/TR/2001/REC-xml-c14n-20010315"/>
+        </Transforms>
+        <DigestMethod Algorithm="http://www.w3.org/2001/04/xmldsig-more#sha384"/>
+        <DigestValue>ZKjue2dCKZIZjWOn0IfZysBt96pOFXWf7VjMEZgKIqpRM7gWuxBQpYFKH3oGljHV</DigestValue>
+      </Reference>
+      <Reference URI="/ppt/slides/_rels/slide7.xml.rels?ContentType=application/vnd.openxmlformats-package.relationships+xml">
+        <Transforms>
+          <Transform Algorithm="http://schemas.openxmlformats.org/package/2006/RelationshipTransform">
+            <mdssi:RelationshipReference xmlns:mdssi="http://schemas.openxmlformats.org/package/2006/digital-signature" SourceId="rId1"/>
+          </Transform>
+          <Transform Algorithm="http://www.w3.org/TR/2001/REC-xml-c14n-20010315"/>
+        </Transforms>
+        <DigestMethod Algorithm="http://www.w3.org/2001/04/xmldsig-more#sha384"/>
+        <DigestValue>ZKjue2dCKZIZjWOn0IfZysBt96pOFXWf7VjMEZgKIqpRM7gWuxBQpYFKH3oGljHV</DigestValue>
+      </Reference>
+      <Reference URI="/ppt/slides/_rels/slide8.xml.rels?ContentType=application/vnd.openxmlformats-package.relationships+xml">
+        <Transforms>
+          <Transform Algorithm="http://schemas.openxmlformats.org/package/2006/RelationshipTransform">
+            <mdssi:RelationshipReference xmlns:mdssi="http://schemas.openxmlformats.org/package/2006/digital-signature" SourceId="rId1"/>
+          </Transform>
+          <Transform Algorithm="http://www.w3.org/TR/2001/REC-xml-c14n-20010315"/>
+        </Transforms>
+        <DigestMethod Algorithm="http://www.w3.org/2001/04/xmldsig-more#sha384"/>
+        <DigestValue>ZKjue2dCKZIZjWOn0IfZysBt96pOFXWf7VjMEZgKIqpRM7gWuxBQpYFKH3oGljHV</DigestValue>
+      </Reference>
+      <Reference URI="/ppt/slides/_rels/slide9.xml.rels?ContentType=application/vnd.openxmlformats-package.relationships+xml">
+        <Transforms>
+          <Transform Algorithm="http://schemas.openxmlformats.org/package/2006/RelationshipTransform">
+            <mdssi:RelationshipReference xmlns:mdssi="http://schemas.openxmlformats.org/package/2006/digital-signature" SourceId="rId1"/>
+          </Transform>
+          <Transform Algorithm="http://www.w3.org/TR/2001/REC-xml-c14n-20010315"/>
+        </Transforms>
+        <DigestMethod Algorithm="http://www.w3.org/2001/04/xmldsig-more#sha384"/>
+        <DigestValue>ZKjue2dCKZIZjWOn0IfZysBt96pOFXWf7VjMEZgKIqpRM7gWuxBQpYFKH3oGljHV</DigestValue>
+      </Reference>
+      <Reference URI="/ppt/slides/slide1.xml?ContentType=application/vnd.openxmlformats-officedocument.presentationml.slide+xml">
+        <DigestMethod Algorithm="http://www.w3.org/2001/04/xmldsig-more#sha384"/>
+        <DigestValue>6Q3h4pKLOVEfH/rfcs02chaYW4R0bywvpTRGpgDpwmLiulskGzpPxP4z3C2EbXrs</DigestValue>
+      </Reference>
+      <Reference URI="/ppt/slides/slide10.xml?ContentType=application/vnd.openxmlformats-officedocument.presentationml.slide+xml">
+        <DigestMethod Algorithm="http://www.w3.org/2001/04/xmldsig-more#sha384"/>
+        <DigestValue>XrrjYDcSxJFdfutQNhFSp+nkmVlgC+zW2OSYr/RjOT/3syiF7NlYB03BtoBbVK4Z</DigestValue>
+      </Reference>
+      <Reference URI="/ppt/slides/slide11.xml?ContentType=application/vnd.openxmlformats-officedocument.presentationml.slide+xml">
+        <DigestMethod Algorithm="http://www.w3.org/2001/04/xmldsig-more#sha384"/>
+        <DigestValue>VgGfxt6dbWwEIKkZkyNkAtvfoh4XNI41E+urGRjcOsqh3MOAwkFMIw6FunM1+8ot</DigestValue>
+      </Reference>
+      <Reference URI="/ppt/slides/slide12.xml?ContentType=application/vnd.openxmlformats-officedocument.presentationml.slide+xml">
+        <DigestMethod Algorithm="http://www.w3.org/2001/04/xmldsig-more#sha384"/>
+        <DigestValue>bGEDoZyGqlPeXz2Ud9rf7u0ptb3eIu7NDLwR6PEjzbLUGYvV6RyTiVWe3NGKQ8eX</DigestValue>
+      </Reference>
+      <Reference URI="/ppt/slides/slide13.xml?ContentType=application/vnd.openxmlformats-officedocument.presentationml.slide+xml">
+        <DigestMethod Algorithm="http://www.w3.org/2001/04/xmldsig-more#sha384"/>
+        <DigestValue>3kTNRK9AZk48w5NYyvW7yR/1AFt6wSrWsZ5dSEXcYyoGLxDDCTBMtn/0RjAnnTKz</DigestValue>
+      </Reference>
+      <Reference URI="/ppt/slides/slide14.xml?ContentType=application/vnd.openxmlformats-officedocument.presentationml.slide+xml">
+        <DigestMethod Algorithm="http://www.w3.org/2001/04/xmldsig-more#sha384"/>
+        <DigestValue>z8ZdBGf7KX/cDGoGbmLmq7LS5tkOtelJo0CPe5qlQxmYcnKkxpXNiL7IFwq4rH51</DigestValue>
+      </Reference>
+      <Reference URI="/ppt/slides/slide15.xml?ContentType=application/vnd.openxmlformats-officedocument.presentationml.slide+xml">
+        <DigestMethod Algorithm="http://www.w3.org/2001/04/xmldsig-more#sha384"/>
+        <DigestValue>iyOhGRQ/8U5Xav1be5wT5x+OevadUR2lcBSso+0RtCPUh4Ffy7uNgjpLZX2OlxrN</DigestValue>
+      </Reference>
+      <Reference URI="/ppt/slides/slide16.xml?ContentType=application/vnd.openxmlformats-officedocument.presentationml.slide+xml">
+        <DigestMethod Algorithm="http://www.w3.org/2001/04/xmldsig-more#sha384"/>
+        <DigestValue>muP/T3AMvwkb4B4+OXRyOXPslmvV0VF/oQshvXvrW7mqRnFfOpmrYrG3jb0OsKr1</DigestValue>
+      </Reference>
+      <Reference URI="/ppt/slides/slide17.xml?ContentType=application/vnd.openxmlformats-officedocument.presentationml.slide+xml">
+        <DigestMethod Algorithm="http://www.w3.org/2001/04/xmldsig-more#sha384"/>
+        <DigestValue>S4BDmCraHB3lu++MKPuNWp8PbTqOr/+hYR0KWFv6IW6SaT2JCTGjKnE7wgV3sZA8</DigestValue>
+      </Reference>
+      <Reference URI="/ppt/slides/slide18.xml?ContentType=application/vnd.openxmlformats-officedocument.presentationml.slide+xml">
+        <DigestMethod Algorithm="http://www.w3.org/2001/04/xmldsig-more#sha384"/>
+        <DigestValue>drYBYXAW0VnmX4Ny8zjvvSre5sxKoMg/O5t3XSqfzyluLU5oc5Co7XrzwovlpRtx</DigestValue>
+      </Reference>
+      <Reference URI="/ppt/slides/slide19.xml?ContentType=application/vnd.openxmlformats-officedocument.presentationml.slide+xml">
+        <DigestMethod Algorithm="http://www.w3.org/2001/04/xmldsig-more#sha384"/>
+        <DigestValue>NlUlzGQN5TUhCO7ZFE7Zg/3aX5mH36F+mpFaX1mWWybSbEQgwi1X+zA8KvFiJz9E</DigestValue>
+      </Reference>
+      <Reference URI="/ppt/slides/slide2.xml?ContentType=application/vnd.openxmlformats-officedocument.presentationml.slide+xml">
+        <DigestMethod Algorithm="http://www.w3.org/2001/04/xmldsig-more#sha384"/>
+        <DigestValue>WUvplUnsZPrSrMMLsmxAc5yqh2592K71VBsec1BiTSvxdp68g8y40voWjY1U9X7T</DigestValue>
+      </Reference>
+      <Reference URI="/ppt/slides/slide20.xml?ContentType=application/vnd.openxmlformats-officedocument.presentationml.slide+xml">
+        <DigestMethod Algorithm="http://www.w3.org/2001/04/xmldsig-more#sha384"/>
+        <DigestValue>2iG4+INuSGwHz1fXCfj2yf5Rdxoos9WseVIZm7bZh/Lai/k4jWUS57bCaGMhyb35</DigestValue>
+      </Reference>
+      <Reference URI="/ppt/slides/slide21.xml?ContentType=application/vnd.openxmlformats-officedocument.presentationml.slide+xml">
+        <DigestMethod Algorithm="http://www.w3.org/2001/04/xmldsig-more#sha384"/>
+        <DigestValue>rHO3i21/d3OlnoxJDETP7Qw5RnNlHD7YPwY+l2iRxl3jzTbjgWRX6eD5dQDfQKcv</DigestValue>
+      </Reference>
+      <Reference URI="/ppt/slides/slide22.xml?ContentType=application/vnd.openxmlformats-officedocument.presentationml.slide+xml">
+        <DigestMethod Algorithm="http://www.w3.org/2001/04/xmldsig-more#sha384"/>
+        <DigestValue>ibnbikWa45AJJXRqikApUBQhw/gcwrd3m9aqcqDlUsNHQV+W7hy/CidWQkoWAtDK</DigestValue>
+      </Reference>
+      <Reference URI="/ppt/slides/slide23.xml?ContentType=application/vnd.openxmlformats-officedocument.presentationml.slide+xml">
+        <DigestMethod Algorithm="http://www.w3.org/2001/04/xmldsig-more#sha384"/>
+        <DigestValue>DujLMzuY4gLHy9I4yRtzp/SqHR6m0KSGhBD4BNamu6K6rXWWWUpr/fA/6Tgp2kUG</DigestValue>
+      </Reference>
+      <Reference URI="/ppt/slides/slide24.xml?ContentType=application/vnd.openxmlformats-officedocument.presentationml.slide+xml">
+        <DigestMethod Algorithm="http://www.w3.org/2001/04/xmldsig-more#sha384"/>
+        <DigestValue>fkaixQBzoFk206dnxa43jl3ESc+2H8Nc4+PfG4P18UlIb/WiBtt2TlLp4wk3OhKt</DigestValue>
+      </Reference>
+      <Reference URI="/ppt/slides/slide25.xml?ContentType=application/vnd.openxmlformats-officedocument.presentationml.slide+xml">
+        <DigestMethod Algorithm="http://www.w3.org/2001/04/xmldsig-more#sha384"/>
+        <DigestValue>fFvpLzqz7IPH1gxSRB94MZk/cSwnySRJ2I5DugBGjd4SdNEftG7XWTpdo3jXWlvn</DigestValue>
+      </Reference>
+      <Reference URI="/ppt/slides/slide26.xml?ContentType=application/vnd.openxmlformats-officedocument.presentationml.slide+xml">
+        <DigestMethod Algorithm="http://www.w3.org/2001/04/xmldsig-more#sha384"/>
+        <DigestValue>Lj3DF3HS/9IIe2URYvI7QAchAIaayknMzDMNcl0t4Ulp2eJkH3bpZe3DOPFcxjT3</DigestValue>
+      </Reference>
+      <Reference URI="/ppt/slides/slide27.xml?ContentType=application/vnd.openxmlformats-officedocument.presentationml.slide+xml">
+        <DigestMethod Algorithm="http://www.w3.org/2001/04/xmldsig-more#sha384"/>
+        <DigestValue>CKcOmNmtJrhQ8IQGFkXAbq0rEgh+qtUieCusvsrNRP3e7drtCDCz20HYgL9nEhQw</DigestValue>
+      </Reference>
+      <Reference URI="/ppt/slides/slide28.xml?ContentType=application/vnd.openxmlformats-officedocument.presentationml.slide+xml">
+        <DigestMethod Algorithm="http://www.w3.org/2001/04/xmldsig-more#sha384"/>
+        <DigestValue>l0bo9clfbbRA0rnB5DxNy1BSxHMtGV9l7EmvvbRaLqZiq6C3QxCcT7QC1x+rDmez</DigestValue>
+      </Reference>
+      <Reference URI="/ppt/slides/slide29.xml?ContentType=application/vnd.openxmlformats-officedocument.presentationml.slide+xml">
+        <DigestMethod Algorithm="http://www.w3.org/2001/04/xmldsig-more#sha384"/>
+        <DigestValue>qQWnF3d6eraVfRjqZi81eCzbNefqx69sQfAyjxBYoZ99uiDEQPmyXxdcDBQCvW7k</DigestValue>
+      </Reference>
+      <Reference URI="/ppt/slides/slide3.xml?ContentType=application/vnd.openxmlformats-officedocument.presentationml.slide+xml">
+        <DigestMethod Algorithm="http://www.w3.org/2001/04/xmldsig-more#sha384"/>
+        <DigestValue>OqwGhwEo76mCV63uzq820gQTSIWHqca9LyF1tEp/2dkbhztwQ8vIiq5J5Xd8hJTN</DigestValue>
+      </Reference>
+      <Reference URI="/ppt/slides/slide4.xml?ContentType=application/vnd.openxmlformats-officedocument.presentationml.slide+xml">
+        <DigestMethod Algorithm="http://www.w3.org/2001/04/xmldsig-more#sha384"/>
+        <DigestValue>5Tvh9ENQBqxwNq244ZAYktvP1da8C1vIHigqdaHMhycbf/VZK5vV473Y4kMYrMwM</DigestValue>
+      </Reference>
+      <Reference URI="/ppt/slides/slide5.xml?ContentType=application/vnd.openxmlformats-officedocument.presentationml.slide+xml">
+        <DigestMethod Algorithm="http://www.w3.org/2001/04/xmldsig-more#sha384"/>
+        <DigestValue>ratUv4f/rvXkl2WuL3E78AFyjkvjTkfHoL0h1iL6lKfRjUAwHmAONN0MITRACOSW</DigestValue>
+      </Reference>
+      <Reference URI="/ppt/slides/slide6.xml?ContentType=application/vnd.openxmlformats-officedocument.presentationml.slide+xml">
+        <DigestMethod Algorithm="http://www.w3.org/2001/04/xmldsig-more#sha384"/>
+        <DigestValue>2Lj0yFcIviSzPlSVbLKxeIwwjvKYTsaKOPxgv5batGCwm1jT44I9+lVGxd/uiAZc</DigestValue>
+      </Reference>
+      <Reference URI="/ppt/slides/slide7.xml?ContentType=application/vnd.openxmlformats-officedocument.presentationml.slide+xml">
+        <DigestMethod Algorithm="http://www.w3.org/2001/04/xmldsig-more#sha384"/>
+        <DigestValue>o+XhfBRnyzO2PDWuV1P53rhw6kp9QFvzVOXtPKevjqTiGXsHeXXTYHccnL2QgO5x</DigestValue>
+      </Reference>
+      <Reference URI="/ppt/slides/slide8.xml?ContentType=application/vnd.openxmlformats-officedocument.presentationml.slide+xml">
+        <DigestMethod Algorithm="http://www.w3.org/2001/04/xmldsig-more#sha384"/>
+        <DigestValue>VJ6ochJuEy+DVJfjA6vReib8iLrX7iMpHvUpiQjFxfTsVG6ODCG6Ra61x5+1ILEG</DigestValue>
+      </Reference>
+      <Reference URI="/ppt/slides/slide9.xml?ContentType=application/vnd.openxmlformats-officedocument.presentationml.slide+xml">
+        <DigestMethod Algorithm="http://www.w3.org/2001/04/xmldsig-more#sha384"/>
+        <DigestValue>EaVia3qlt4PO+12jPoG6ur2iHtYjwPL26G/g7SuD+QG2tyjozjT+2YEj7cBcOH0L</DigestValue>
+      </Reference>
+      <Reference URI="/ppt/tableStyles.xml?ContentType=application/vnd.openxmlformats-officedocument.presentationml.tableStyles+xml">
+        <DigestMethod Algorithm="http://www.w3.org/2001/04/xmldsig-more#sha384"/>
+        <DigestValue>gDZ57DxKyqzyv51VHoPJqpRfqFtS6zxVbdP98+ujY8s0/T3nOgXPpG6TB4aQ3KFc</DigestValue>
+      </Reference>
+      <Reference URI="/ppt/theme/theme1.xml?ContentType=application/vnd.openxmlformats-officedocument.theme+xml">
+        <DigestMethod Algorithm="http://www.w3.org/2001/04/xmldsig-more#sha384"/>
+        <DigestValue>qs3oy3MjnXw7dJlojn7tAmLu2V67n/z/Im76qfeMTBFuoWTCsUe4I771fXWZ3G5U</DigestValue>
+      </Reference>
+      <Reference URI="/ppt/viewProps.xml?ContentType=application/vnd.openxmlformats-officedocument.presentationml.viewProps+xml">
+        <DigestMethod Algorithm="http://www.w3.org/2001/04/xmldsig-more#sha384"/>
+        <DigestValue>D9J8ziXFzRd/fiuJdj9hFF7cO/q1HuP3BL3JlGLSAG9fQ0c9vC2Y+fW7Vp9bTdZE</DigestValue>
+      </Reference>
+    </Manifest>
+    <SignatureProperties>
+      <SignatureProperty Id="idSignatureTime" Target="#idPackageSignature">
+        <mdssi:SignatureTime xmlns:mdssi="http://schemas.openxmlformats.org/package/2006/digital-signature">
+          <mdssi:Format>YYYY-MM-DDThh:mm:ssTZD</mdssi:Format>
+          <mdssi:Value>2026-08-29T16:54:09Z</mdssi:Value>
+        </mdssi:SignatureTime>
+      </SignatureProperty>
+    </SignatureProperties>
+  </Object>
+  <Object Id="idOfficeObject">
+    <SignatureProperties>
+      <SignatureProperty Id="idOfficeV1Details" Target="#idPackageSignature">
+        <SignatureInfoV1 xmlns="http://schemas.microsoft.com/office/2006/digsig">
+          <SetupID/>
+          <SignatureText/>
+          <SignatureImage/>
+          <SignatureComments>Submission for IBM review</SignatureComments>
+          <WindowsVersion>10.0</WindowsVersion>
+          <OfficeVersion>16.0.20326/27</OfficeVersion>
+          <ApplicationVersion>16.0.20326</ApplicationVersion>
+          <Monitors>1</Monitors>
+          <HorizontalResolution>1920</HorizontalResolution>
+          <VerticalResolution>1080</VerticalResolution>
+          <ColorDepth>32</ColorDepth>
+          <SignatureProviderId>{00000000-0000-0000-0000-000000000000}</SignatureProviderId>
+          <SignatureProviderUrl/>
+          <SignatureProviderDetails>9</SignatureProviderDetails>
+          <SignatureType>1</SignatureType>
+        </SignatureInfoV1>
+      </SignatureProperty>
+    </SignatureProperties>
+  </Object>
+  <Object>
+    <xd:QualifyingProperties xmlns:xd="http://uri.etsi.org/01903/v1.3.2#" Target="#idPackageSignature">
+      <xd:SignedProperties Id="idSignedProperties">
+        <xd:SignedSignatureProperties>
+          <xd:SigningTime>2026-08-29T16:54:09Z</xd:SigningTime>
+          <xd:SigningCertificate>
+            <xd:Cert>
+              <xd:CertDigest>
+                <DigestMethod Algorithm="http://www.w3.org/2001/04/xmldsig-more#sha384"/>
+                <DigestValue>AAGwLZ0Mju8BR7lCmJFzSejv/Gfu6+ToSzLGusuNTd9Nzga1YrQDdyDar9Vdx84e</DigestValue>
+              </xd:CertDigest>
+              <xd:IssuerSerial>
+                <X509IssuerName>CN=caa22cf1-c13f-437c-bafd-aa6392590931</X509IssuerName>
+                <X509SerialNumber>17818523955636312980</X509SerialNumber>
+              </xd:IssuerSerial>
+            </xd:Cert>
+          </xd:SigningCertificate>
+          <xd:SignaturePolicyIdentifier>
+            <xd:SignaturePolicyImplied/>
+          </xd:SignaturePolicyIdentifier>
+        </xd:SignedSignatureProperties>
+        <xd:SignedDataObjectProperties>
+          <xd:CommitmentTypeIndication>
+            <xd:CommitmentTypeId>
+              <xd:Identifier>http://uri.etsi.org/01903/v1.2.2#ProofOfOrigin</xd:Identifier>
+              <xd:Description>Created and approved this document</xd:Description>
+            </xd:CommitmentTypeId>
+            <xd:AllSignedDataObjects/>
+            <xd:CommitmentTypeQualifiers>
+              <xd:CommitmentTypeQualifier>Submission for IBM review</xd:CommitmentTypeQualifier>
+            </xd:CommitmentTypeQualifiers>
+          </xd:CommitmentTypeIndication>
+        </xd:SignedDataObjectProperties>
+      </xd:SignedProperties>
+    </xd:QualifyingProperties>
+  </Object>
+</Signature>
 </file>
--- a/docs/Tech_Drawdown_Executive_Showcase.pptx
+++ b/docs/Tech_Drawdown_Executive_Showcase.pptx
@@ -3,37 +3,38 @@
 <p:presentation xmlns:a="http://schemas.openxmlformats.org/drawingml/2006/main" xmlns:r="http://schemas.openxmlformats.org/officeDocument/2006/relationships" xmlns:p="http://schemas.openxmlformats.org/presentationml/2006/main" removePersonalInfoOnSave="1" saveSubsetFonts="1" autoCompressPictures="0">
   <p:sldMasterIdLst>
     <p:sldMasterId id="2147483648" r:id="rId1"/>
+    <p:sldMasterId id="2147483660" r:id="rId2"/>
   </p:sldMasterIdLst>
   <p:sldIdLst>
-    <p:sldId id="256" r:id="rId2"/>
-    <p:sldId id="257" r:id="rId3"/>
-    <p:sldId id="258" r:id="rId4"/>
-    <p:sldId id="259" r:id="rId5"/>
-    <p:sldId id="260" r:id="rId6"/>
-    <p:sldId id="261" r:id="rId7"/>
-    <p:sldId id="262" r:id="rId8"/>
-    <p:sldId id="263" r:id="rId9"/>
-    <p:sldId id="264" r:id="rId10"/>
-    <p:sldId id="265" r:id="rId11"/>
-    <p:sldId id="266" r:id="rId12"/>
-    <p:sldId id="267" r:id="rId13"/>
-    <p:sldId id="268" r:id="rId14"/>
-    <p:sldId id="269" r:id="rId15"/>
-    <p:sldId id="270" r:id="rId16"/>
-    <p:sldId id="271" r:id="rId17"/>
-    <p:sldId id="272" r:id="rId18"/>
-    <p:sldId id="273" r:id="rId19"/>
-    <p:sldId id="274" r:id="rId20"/>
-    <p:sldId id="275" r:id="rId21"/>
-    <p:sldId id="276" r:id="rId22"/>
-    <p:sldId id="277" r:id="rId23"/>
-    <p:sldId id="278" r:id="rId24"/>
-    <p:sldId id="279" r:id="rId25"/>
-    <p:sldId id="280" r:id="rId26"/>
-    <p:sldId id="281" r:id="rId27"/>
-    <p:sldId id="282" r:id="rId28"/>
-    <p:sldId id="283" r:id="rId29"/>
-    <p:sldId id="284" r:id="rId30"/>
+    <p:sldId id="285" r:id="rId3"/>
+    <p:sldId id="257" r:id="rId4"/>
+    <p:sldId id="258" r:id="rId5"/>
+    <p:sldId id="259" r:id="rId6"/>
+    <p:sldId id="260" r:id="rId7"/>
+    <p:sldId id="261" r:id="rId8"/>
+    <p:sldId id="262" r:id="rId9"/>
+    <p:sldId id="263" r:id="rId10"/>
+    <p:sldId id="264" r:id="rId11"/>
+    <p:sldId id="265" r:id="rId12"/>
+    <p:sldId id="266" r:id="rId13"/>
+    <p:sldId id="267" r:id="rId14"/>
+    <p:sldId id="268" r:id="rId15"/>
+    <p:sldId id="269" r:id="rId16"/>
+    <p:sldId id="270" r:id="rId17"/>
+    <p:sldId id="271" r:id="rId18"/>
+    <p:sldId id="272" r:id="rId19"/>
+    <p:sldId id="273" r:id="rId20"/>
+    <p:sldId id="274" r:id="rId21"/>
+    <p:sldId id="275" r:id="rId22"/>
+    <p:sldId id="276" r:id="rId23"/>
+    <p:sldId id="277" r:id="rId24"/>
+    <p:sldId id="278" r:id="rId25"/>
+    <p:sldId id="279" r:id="rId26"/>
+    <p:sldId id="280" r:id="rId27"/>
+    <p:sldId id="281" r:id="rId28"/>
+    <p:sldId id="282" r:id="rId29"/>
+    <p:sldId id="283" r:id="rId30"/>
+    <p:sldId id="284" r:id="rId31"/>
   </p:sldIdLst>
   <p:sldSz cx="12188825" cy="6858000"/>
   <p:notesSz cx="6858000" cy="9144000"/>
@@ -737,6 +738,1850 @@
 </p:sldLayout>
 </file>
 
+<file path=ppt/slideLayouts/slideLayout12.xml><?xml version="1.0" encoding="utf-8"?>
+<p:sldLayout xmlns:a="http://schemas.openxmlformats.org/drawingml/2006/main" xmlns:r="http://schemas.openxmlformats.org/officeDocument/2006/relationships" xmlns:p="http://schemas.openxmlformats.org/presentationml/2006/main" type="title" preserve="1">
+  <p:cSld name="Title Slide">
+    <p:spTree>
+      <p:nvGrpSpPr>
+        <p:cNvPr id="1" name=""/>
+        <p:cNvGrpSpPr/>
+        <p:nvPr/>
+      </p:nvGrpSpPr>
+      <p:grpSpPr>
+        <a:xfrm>
+          <a:off x="0" y="0"/>
+          <a:ext cx="0" cy="0"/>
+          <a:chOff x="0" y="0"/>
+          <a:chExt cx="0" cy="0"/>
+        </a:xfrm>
+      </p:grpSpPr>
+      <p:sp>
+        <p:nvSpPr>
+          <p:cNvPr id="2" name="Title 1"/>
+          <p:cNvSpPr>
+            <a:spLocks noGrp="1"/>
+          </p:cNvSpPr>
+          <p:nvPr>
+            <p:ph type="ctrTitle"/>
+          </p:nvPr>
+        </p:nvSpPr>
+        <p:spPr>
+          <a:xfrm>
+            <a:off x="685621" y="2130426"/>
+            <a:ext cx="7770376" cy="1470025"/>
+          </a:xfrm>
+        </p:spPr>
+        <p:txBody>
+          <a:bodyPr/>
+          <a:lstStyle/>
+          <a:p>
+            <a:r>
+              <a:rPr lang="en-US"/>
+              <a:t>Click to edit Master title style</a:t>
+            </a:r>
+          </a:p>
+        </p:txBody>
+      </p:sp>
+      <p:sp>
+        <p:nvSpPr>
+          <p:cNvPr id="3" name="Subtitle 2"/>
+          <p:cNvSpPr>
+            <a:spLocks noGrp="1"/>
+          </p:cNvSpPr>
+          <p:nvPr>
+            <p:ph type="subTitle" idx="1"/>
+          </p:nvPr>
+        </p:nvSpPr>
+        <p:spPr>
+          <a:xfrm>
+            <a:off x="1371243" y="3886200"/>
+            <a:ext cx="6399133" cy="1752600"/>
+          </a:xfrm>
+        </p:spPr>
+        <p:txBody>
+          <a:bodyPr/>
+          <a:lstStyle>
+            <a:lvl1pPr marL="0" indent="0" algn="ctr">
+              <a:buNone/>
+              <a:defRPr>
+                <a:solidFill>
+                  <a:schemeClr val="tx1">
+                    <a:tint val="75000"/>
+                  </a:schemeClr>
+                </a:solidFill>
+              </a:defRPr>
+            </a:lvl1pPr>
+            <a:lvl2pPr marL="457063" indent="0" algn="ctr">
+              <a:buNone/>
+              <a:defRPr>
+                <a:solidFill>
+                  <a:schemeClr val="tx1">
+                    <a:tint val="75000"/>
+                  </a:schemeClr>
+                </a:solidFill>
+              </a:defRPr>
+            </a:lvl2pPr>
+            <a:lvl3pPr marL="914126" indent="0" algn="ctr">
+              <a:buNone/>
+              <a:defRPr>
+                <a:solidFill>
+                  <a:schemeClr val="tx1">
+                    <a:tint val="75000"/>
+                  </a:schemeClr>
+                </a:solidFill>
+              </a:defRPr>
+            </a:lvl3pPr>
+            <a:lvl4pPr marL="1371189" indent="0" algn="ctr">
+              <a:buNone/>
+              <a:defRPr>
+                <a:solidFill>
+                  <a:schemeClr val="tx1">
+                    <a:tint val="75000"/>
+                  </a:schemeClr>
+                </a:solidFill>
+              </a:defRPr>
+            </a:lvl4pPr>
+            <a:lvl5pPr marL="1828251" indent="0" algn="ctr">
+              <a:buNone/>
+              <a:defRPr>
+                <a:solidFill>
+                  <a:schemeClr val="tx1">
+                    <a:tint val="75000"/>
+                  </a:schemeClr>
+                </a:solidFill>
+              </a:defRPr>
+            </a:lvl5pPr>
+            <a:lvl6pPr marL="2285314" indent="0" algn="ctr">
+              <a:buNone/>
+              <a:defRPr>
+                <a:solidFill>
+                  <a:schemeClr val="tx1">
+                    <a:tint val="75000"/>
+                  </a:schemeClr>
+                </a:solidFill>
+              </a:defRPr>
+            </a:lvl6pPr>
+            <a:lvl7pPr marL="2742377" indent="0" algn="ctr">
+              <a:buNone/>
+              <a:defRPr>
+                <a:solidFill>
+                  <a:schemeClr val="tx1">
+                    <a:tint val="75000"/>
+                  </a:schemeClr>
+                </a:solidFill>
+              </a:defRPr>
+            </a:lvl7pPr>
+            <a:lvl8pPr marL="3199440" indent="0" algn="ctr">
+              <a:buNone/>
+              <a:defRPr>
+                <a:solidFill>
+                  <a:schemeClr val="tx1">
+                    <a:tint val="75000"/>
+                  </a:schemeClr>
+                </a:solidFill>
+              </a:defRPr>
+            </a:lvl8pPr>
+            <a:lvl9pPr marL="3656503" indent="0" algn="ctr">
+              <a:buNone/>
+              <a:defRPr>
+                <a:solidFill>
+                  <a:schemeClr val="tx1">
+                    <a:tint val="75000"/>
+                  </a:schemeClr>
+                </a:solidFill>
+              </a:defRPr>
+            </a:lvl9pPr>
+          </a:lstStyle>
+          <a:p>
+            <a:r>
+              <a:rPr lang="en-US"/>
+              <a:t>Click to edit Master subtitle style</a:t>
+            </a:r>
+          </a:p>
+        </p:txBody>
+      </p:sp>
+      <p:sp>
+        <p:nvSpPr>
+          <p:cNvPr id="4" name="Date Placeholder 3"/>
+          <p:cNvSpPr>
+            <a:spLocks noGrp="1"/>
+          </p:cNvSpPr>
+          <p:nvPr>
+            <p:ph type="dt" sz="half" idx="10"/>
+          </p:nvPr>
+        </p:nvSpPr>
+        <p:spPr/>
+        <p:txBody>
+          <a:bodyPr/>
+          <a:lstStyle/>
+          <a:p>
+            <a:fld id="{5BCAD085-E8A6-8845-BD4E-CB4CCA059FC4}" type="datetimeFigureOut">
+              <a:rPr lang="en-US" smtClean="0"/>
+              <a:t>8/29/2026</a:t>
+            </a:fld>
+            <a:endParaRPr lang="en-US"/>
+          </a:p>
+        </p:txBody>
+      </p:sp>
+      <p:sp>
+        <p:nvSpPr>
+          <p:cNvPr id="5" name="Footer Placeholder 4"/>
+          <p:cNvSpPr>
+            <a:spLocks noGrp="1"/>
+          </p:cNvSpPr>
+          <p:nvPr>
+            <p:ph type="ftr" sz="quarter" idx="11"/>
+          </p:nvPr>
+        </p:nvSpPr>
+        <p:spPr/>
+        <p:txBody>
+          <a:bodyPr/>
+          <a:lstStyle/>
+          <a:p>
+            <a:endParaRPr lang="en-US"/>
+          </a:p>
+        </p:txBody>
+      </p:sp>
+      <p:sp>
+        <p:nvSpPr>
+          <p:cNvPr id="6" name="Slide Number Placeholder 5"/>
+          <p:cNvSpPr>
+            <a:spLocks noGrp="1"/>
+          </p:cNvSpPr>
+          <p:nvPr>
+            <p:ph type="sldNum" sz="quarter" idx="12"/>
+          </p:nvPr>
+        </p:nvSpPr>
+        <p:spPr/>
+        <p:txBody>
+          <a:bodyPr/>
+          <a:lstStyle/>
+          <a:p>
+            <a:fld id="{C1FF6DA9-008F-8B48-92A6-B652298478BF}" type="slidenum">
+              <a:rPr lang="en-US" smtClean="0"/>
+              <a:t>‹#›</a:t>
+            </a:fld>
+            <a:endParaRPr lang="en-US"/>
+          </a:p>
+        </p:txBody>
+      </p:sp>
+    </p:spTree>
+    <p:extLst>
+      <p:ext uri="{BB962C8B-B14F-4D97-AF65-F5344CB8AC3E}">
+        <p14:creationId xmlns:p14="http://schemas.microsoft.com/office/powerpoint/2010/main" val="2775111069"/>
+      </p:ext>
+    </p:extLst>
+  </p:cSld>
+  <p:clrMapOvr>
+    <a:masterClrMapping/>
+  </p:clrMapOvr>
+</p:sldLayout>
+</file>
+
+<file path=ppt/slideLayouts/slideLayout13.xml><?xml version="1.0" encoding="utf-8"?>
+<p:sldLayout xmlns:a="http://schemas.openxmlformats.org/drawingml/2006/main" xmlns:r="http://schemas.openxmlformats.org/officeDocument/2006/relationships" xmlns:p="http://schemas.openxmlformats.org/presentationml/2006/main" type="obj" preserve="1">
+  <p:cSld name="Title and Content">
+    <p:spTree>
+      <p:nvGrpSpPr>
+        <p:cNvPr id="1" name=""/>
+        <p:cNvGrpSpPr/>
+        <p:nvPr/>
+      </p:nvGrpSpPr>
+      <p:grpSpPr>
+        <a:xfrm>
+          <a:off x="0" y="0"/>
+          <a:ext cx="0" cy="0"/>
+          <a:chOff x="0" y="0"/>
+          <a:chExt cx="0" cy="0"/>
+        </a:xfrm>
+      </p:grpSpPr>
+      <p:sp>
+        <p:nvSpPr>
+          <p:cNvPr id="2" name="Title 1"/>
+          <p:cNvSpPr>
+            <a:spLocks noGrp="1"/>
+          </p:cNvSpPr>
+          <p:nvPr>
+            <p:ph type="title"/>
+          </p:nvPr>
+        </p:nvSpPr>
+        <p:spPr/>
+        <p:txBody>
+          <a:bodyPr/>
+          <a:lstStyle/>
+          <a:p>
+            <a:r>
+              <a:rPr lang="en-US"/>
+              <a:t>Click to edit Master title style</a:t>
+            </a:r>
+          </a:p>
+        </p:txBody>
+      </p:sp>
+      <p:sp>
+        <p:nvSpPr>
+          <p:cNvPr id="3" name="Content Placeholder 2"/>
+          <p:cNvSpPr>
+            <a:spLocks noGrp="1"/>
+          </p:cNvSpPr>
+          <p:nvPr>
+            <p:ph idx="1"/>
+          </p:nvPr>
+        </p:nvSpPr>
+        <p:spPr/>
+        <p:txBody>
+          <a:bodyPr/>
+          <a:lstStyle/>
+          <a:p>
+            <a:pPr lvl="0"/>
+            <a:r>
+              <a:rPr lang="en-US"/>
+              <a:t>Click to edit Master text styles</a:t>
+            </a:r>
+          </a:p>
+          <a:p>
+            <a:pPr lvl="1"/>
+            <a:r>
+              <a:rPr lang="en-US"/>
+              <a:t>Second level</a:t>
+            </a:r>
+          </a:p>
+          <a:p>
+            <a:pPr lvl="2"/>
+            <a:r>
+              <a:rPr lang="en-US"/>
+              <a:t>Third level</a:t>
+            </a:r>
+          </a:p>
+          <a:p>
+            <a:pPr lvl="3"/>
+            <a:r>
+              <a:rPr lang="en-US"/>
+              <a:t>Fourth level</a:t>
+            </a:r>
+          </a:p>
+          <a:p>
+            <a:pPr lvl="4"/>
+            <a:r>
+              <a:rPr lang="en-US"/>
+              <a:t>Fifth level</a:t>
+            </a:r>
+          </a:p>
+        </p:txBody>
+      </p:sp>
+      <p:sp>
+        <p:nvSpPr>
+          <p:cNvPr id="4" name="Date Placeholder 3"/>
+          <p:cNvSpPr>
+            <a:spLocks noGrp="1"/>
+          </p:cNvSpPr>
+          <p:nvPr>
+            <p:ph type="dt" sz="half" idx="10"/>
+          </p:nvPr>
+        </p:nvSpPr>
+        <p:spPr/>
+        <p:txBody>
+          <a:bodyPr/>
+          <a:lstStyle/>
+          <a:p>
+            <a:fld id="{5BCAD085-E8A6-8845-BD4E-CB4CCA059FC4}" type="datetimeFigureOut">
+              <a:rPr lang="en-US" smtClean="0"/>
+              <a:t>8/29/2026</a:t>
+            </a:fld>
+            <a:endParaRPr lang="en-US"/>
+          </a:p>
+        </p:txBody>
+      </p:sp>
+      <p:sp>
+        <p:nvSpPr>
+          <p:cNvPr id="5" name="Footer Placeholder 4"/>
+          <p:cNvSpPr>
+            <a:spLocks noGrp="1"/>
+          </p:cNvSpPr>
+          <p:nvPr>
+            <p:ph type="ftr" sz="quarter" idx="11"/>
+          </p:nvPr>
+        </p:nvSpPr>
+        <p:spPr/>
+        <p:txBody>
+          <a:bodyPr/>
+          <a:lstStyle/>
+          <a:p>
+            <a:endParaRPr lang="en-US"/>
+          </a:p>
+        </p:txBody>
+      </p:sp>
+      <p:sp>
+        <p:nvSpPr>
+          <p:cNvPr id="6" name="Slide Number Placeholder 5"/>
+          <p:cNvSpPr>
+            <a:spLocks noGrp="1"/>
+          </p:cNvSpPr>
+          <p:nvPr>
+            <p:ph type="sldNum" sz="quarter" idx="12"/>
+          </p:nvPr>
+        </p:nvSpPr>
+        <p:spPr/>
+        <p:txBody>
+          <a:bodyPr/>
+          <a:lstStyle/>
+          <a:p>
+            <a:fld id="{C1FF6DA9-008F-8B48-92A6-B652298478BF}" type="slidenum">
+              <a:rPr lang="en-US" smtClean="0"/>
+              <a:t>‹#›</a:t>
+            </a:fld>
+            <a:endParaRPr lang="en-US"/>
+          </a:p>
+        </p:txBody>
+      </p:sp>
+    </p:spTree>
+    <p:extLst>
+      <p:ext uri="{BB962C8B-B14F-4D97-AF65-F5344CB8AC3E}">
+        <p14:creationId xmlns:p14="http://schemas.microsoft.com/office/powerpoint/2010/main" val="4127720771"/>
+      </p:ext>
+    </p:extLst>
+  </p:cSld>
+  <p:clrMapOvr>
+    <a:masterClrMapping/>
+  </p:clrMapOvr>
+</p:sldLayout>
+</file>
+
+<file path=ppt/slideLayouts/slideLayout14.xml><?xml version="1.0" encoding="utf-8"?>
+<p:sldLayout xmlns:a="http://schemas.openxmlformats.org/drawingml/2006/main" xmlns:r="http://schemas.openxmlformats.org/officeDocument/2006/relationships" xmlns:p="http://schemas.openxmlformats.org/presentationml/2006/main" type="secHead" preserve="1">
+  <p:cSld name="Section Header">
+    <p:spTree>
+      <p:nvGrpSpPr>
+        <p:cNvPr id="1" name=""/>
+        <p:cNvGrpSpPr/>
+        <p:nvPr/>
+      </p:nvGrpSpPr>
+      <p:grpSpPr>
+        <a:xfrm>
+          <a:off x="0" y="0"/>
+          <a:ext cx="0" cy="0"/>
+          <a:chOff x="0" y="0"/>
+          <a:chExt cx="0" cy="0"/>
+        </a:xfrm>
+      </p:grpSpPr>
+      <p:sp>
+        <p:nvSpPr>
+          <p:cNvPr id="2" name="Title 1"/>
+          <p:cNvSpPr>
+            <a:spLocks noGrp="1"/>
+          </p:cNvSpPr>
+          <p:nvPr>
+            <p:ph type="title"/>
+          </p:nvPr>
+        </p:nvSpPr>
+        <p:spPr>
+          <a:xfrm>
+            <a:off x="722125" y="4406901"/>
+            <a:ext cx="7770376" cy="1362075"/>
+          </a:xfrm>
+        </p:spPr>
+        <p:txBody>
+          <a:bodyPr anchor="t"/>
+          <a:lstStyle>
+            <a:lvl1pPr algn="l">
+              <a:defRPr sz="3999" b="1" cap="all"/>
+            </a:lvl1pPr>
+          </a:lstStyle>
+          <a:p>
+            <a:r>
+              <a:rPr lang="en-US"/>
+              <a:t>Click to edit Master title style</a:t>
+            </a:r>
+          </a:p>
+        </p:txBody>
+      </p:sp>
+      <p:sp>
+        <p:nvSpPr>
+          <p:cNvPr id="3" name="Text Placeholder 2"/>
+          <p:cNvSpPr>
+            <a:spLocks noGrp="1"/>
+          </p:cNvSpPr>
+          <p:nvPr>
+            <p:ph type="body" idx="1"/>
+          </p:nvPr>
+        </p:nvSpPr>
+        <p:spPr>
+          <a:xfrm>
+            <a:off x="722125" y="2906713"/>
+            <a:ext cx="7770376" cy="1500187"/>
+          </a:xfrm>
+        </p:spPr>
+        <p:txBody>
+          <a:bodyPr anchor="b"/>
+          <a:lstStyle>
+            <a:lvl1pPr marL="0" indent="0">
+              <a:buNone/>
+              <a:defRPr sz="1999">
+                <a:solidFill>
+                  <a:schemeClr val="tx1">
+                    <a:tint val="75000"/>
+                  </a:schemeClr>
+                </a:solidFill>
+              </a:defRPr>
+            </a:lvl1pPr>
+            <a:lvl2pPr marL="457063" indent="0">
+              <a:buNone/>
+              <a:defRPr sz="1799">
+                <a:solidFill>
+                  <a:schemeClr val="tx1">
+                    <a:tint val="75000"/>
+                  </a:schemeClr>
+                </a:solidFill>
+              </a:defRPr>
+            </a:lvl2pPr>
+            <a:lvl3pPr marL="914126" indent="0">
+              <a:buNone/>
+              <a:defRPr sz="1600">
+                <a:solidFill>
+                  <a:schemeClr val="tx1">
+                    <a:tint val="75000"/>
+                  </a:schemeClr>
+                </a:solidFill>
+              </a:defRPr>
+            </a:lvl3pPr>
+            <a:lvl4pPr marL="1371189" indent="0">
+              <a:buNone/>
+              <a:defRPr sz="1400">
+                <a:solidFill>
+                  <a:schemeClr val="tx1">
+                    <a:tint val="75000"/>
+                  </a:schemeClr>
+                </a:solidFill>
+              </a:defRPr>
+            </a:lvl4pPr>
+            <a:lvl5pPr marL="1828251" indent="0">
+              <a:buNone/>
+              <a:defRPr sz="1400">
+                <a:solidFill>
+                  <a:schemeClr val="tx1">
+                    <a:tint val="75000"/>
+                  </a:schemeClr>
+                </a:solidFill>
+              </a:defRPr>
+            </a:lvl5pPr>
+            <a:lvl6pPr marL="2285314" indent="0">
+              <a:buNone/>
+              <a:defRPr sz="1400">
+                <a:solidFill>
+                  <a:schemeClr val="tx1">
+                    <a:tint val="75000"/>
+                  </a:schemeClr>
+                </a:solidFill>
+              </a:defRPr>
+            </a:lvl6pPr>
+            <a:lvl7pPr marL="2742377" indent="0">
+              <a:buNone/>
+              <a:defRPr sz="1400">
+                <a:solidFill>
+                  <a:schemeClr val="tx1">
+                    <a:tint val="75000"/>
+                  </a:schemeClr>
+                </a:solidFill>
+              </a:defRPr>
+            </a:lvl7pPr>
+            <a:lvl8pPr marL="3199440" indent="0">
+              <a:buNone/>
+              <a:defRPr sz="1400">
+                <a:solidFill>
+                  <a:schemeClr val="tx1">
+                    <a:tint val="75000"/>
+                  </a:schemeClr>
+                </a:solidFill>
+              </a:defRPr>
+            </a:lvl8pPr>
+            <a:lvl9pPr marL="3656503" indent="0">
+              <a:buNone/>
+              <a:defRPr sz="1400">
+                <a:solidFill>
+                  <a:schemeClr val="tx1">
+                    <a:tint val="75000"/>
+                  </a:schemeClr>
+                </a:solidFill>
+              </a:defRPr>
+            </a:lvl9pPr>
+          </a:lstStyle>
+          <a:p>
+            <a:pPr lvl="0"/>
+            <a:r>
+              <a:rPr lang="en-US"/>
+              <a:t>Click to edit Master text styles</a:t>
+            </a:r>
+          </a:p>
+        </p:txBody>
+      </p:sp>
+      <p:sp>
+        <p:nvSpPr>
+          <p:cNvPr id="4" name="Date Placeholder 3"/>
+          <p:cNvSpPr>
+            <a:spLocks noGrp="1"/>
+          </p:cNvSpPr>
+          <p:nvPr>
+            <p:ph type="dt" sz="half" idx="10"/>
+          </p:nvPr>
+        </p:nvSpPr>
+        <p:spPr/>
+        <p:txBody>
+          <a:bodyPr/>
+          <a:lstStyle/>
+          <a:p>
+            <a:fld id="{5BCAD085-E8A6-8845-BD4E-CB4CCA059FC4}" type="datetimeFigureOut">
+              <a:rPr lang="en-US" smtClean="0"/>
+              <a:t>8/29/2026</a:t>
+            </a:fld>
+            <a:endParaRPr lang="en-US"/>
+          </a:p>
+        </p:txBody>
+      </p:sp>
+      <p:sp>
+        <p:nvSpPr>
+          <p:cNvPr id="5" name="Footer Placeholder 4"/>
+          <p:cNvSpPr>
+            <a:spLocks noGrp="1"/>
+          </p:cNvSpPr>
+          <p:nvPr>
+            <p:ph type="ftr" sz="quarter" idx="11"/>
+          </p:nvPr>
+        </p:nvSpPr>
+        <p:spPr/>
+        <p:txBody>
+          <a:bodyPr/>
+          <a:lstStyle/>
+          <a:p>
+            <a:endParaRPr lang="en-US"/>
+          </a:p>
+        </p:txBody>
+      </p:sp>
+      <p:sp>
+        <p:nvSpPr>
+          <p:cNvPr id="6" name="Slide Number Placeholder 5"/>
+          <p:cNvSpPr>
+            <a:spLocks noGrp="1"/>
+          </p:cNvSpPr>
+          <p:nvPr>
+            <p:ph type="sldNum" sz="quarter" idx="12"/>
+          </p:nvPr>
+        </p:nvSpPr>
+        <p:spPr/>
+        <p:txBody>
+          <a:bodyPr/>
+          <a:lstStyle/>
+          <a:p>
+            <a:fld id="{C1FF6DA9-008F-8B48-92A6-B652298478BF}" type="slidenum">
+              <a:rPr lang="en-US" smtClean="0"/>
+              <a:t>‹#›</a:t>
+            </a:fld>
+            <a:endParaRPr lang="en-US"/>
+          </a:p>
+        </p:txBody>
+      </p:sp>
+    </p:spTree>
+    <p:extLst>
+      <p:ext uri="{BB962C8B-B14F-4D97-AF65-F5344CB8AC3E}">
+        <p14:creationId xmlns:p14="http://schemas.microsoft.com/office/powerpoint/2010/main" val="2778715790"/>
+      </p:ext>
+    </p:extLst>
+  </p:cSld>
+  <p:clrMapOvr>
+    <a:masterClrMapping/>
+  </p:clrMapOvr>
+</p:sldLayout>
+</file>
+
+<file path=ppt/slideLayouts/slideLayout15.xml><?xml version="1.0" encoding="utf-8"?>
+<p:sldLayout xmlns:a="http://schemas.openxmlformats.org/drawingml/2006/main" xmlns:r="http://schemas.openxmlformats.org/officeDocument/2006/relationships" xmlns:p="http://schemas.openxmlformats.org/presentationml/2006/main" type="twoObj" preserve="1">
+  <p:cSld name="Two Content">
+    <p:spTree>
+      <p:nvGrpSpPr>
+        <p:cNvPr id="1" name=""/>
+        <p:cNvGrpSpPr/>
+        <p:nvPr/>
+      </p:nvGrpSpPr>
+      <p:grpSpPr>
+        <a:xfrm>
+          <a:off x="0" y="0"/>
+          <a:ext cx="0" cy="0"/>
+          <a:chOff x="0" y="0"/>
+          <a:chExt cx="0" cy="0"/>
+        </a:xfrm>
+      </p:grpSpPr>
+      <p:sp>
+        <p:nvSpPr>
+          <p:cNvPr id="2" name="Title 1"/>
+          <p:cNvSpPr>
+            <a:spLocks noGrp="1"/>
+          </p:cNvSpPr>
+          <p:nvPr>
+            <p:ph type="title"/>
+          </p:nvPr>
+        </p:nvSpPr>
+        <p:spPr/>
+        <p:txBody>
+          <a:bodyPr/>
+          <a:lstStyle/>
+          <a:p>
+            <a:r>
+              <a:rPr lang="en-US"/>
+              <a:t>Click to edit Master title style</a:t>
+            </a:r>
+          </a:p>
+        </p:txBody>
+      </p:sp>
+      <p:sp>
+        <p:nvSpPr>
+          <p:cNvPr id="3" name="Content Placeholder 2"/>
+          <p:cNvSpPr>
+            <a:spLocks noGrp="1"/>
+          </p:cNvSpPr>
+          <p:nvPr>
+            <p:ph sz="half" idx="1"/>
+          </p:nvPr>
+        </p:nvSpPr>
+        <p:spPr>
+          <a:xfrm>
+            <a:off x="457081" y="1600201"/>
+            <a:ext cx="4037548" cy="4525963"/>
+          </a:xfrm>
+        </p:spPr>
+        <p:txBody>
+          <a:bodyPr/>
+          <a:lstStyle>
+            <a:lvl1pPr>
+              <a:defRPr sz="2799"/>
+            </a:lvl1pPr>
+            <a:lvl2pPr>
+              <a:defRPr sz="2399"/>
+            </a:lvl2pPr>
+            <a:lvl3pPr>
+              <a:defRPr sz="1999"/>
+            </a:lvl3pPr>
+            <a:lvl4pPr>
+              <a:defRPr sz="1799"/>
+            </a:lvl4pPr>
+            <a:lvl5pPr>
+              <a:defRPr sz="1799"/>
+            </a:lvl5pPr>
+            <a:lvl6pPr>
+              <a:defRPr sz="1799"/>
+            </a:lvl6pPr>
+            <a:lvl7pPr>
+              <a:defRPr sz="1799"/>
+            </a:lvl7pPr>
+            <a:lvl8pPr>
+              <a:defRPr sz="1799"/>
+            </a:lvl8pPr>
+            <a:lvl9pPr>
+              <a:defRPr sz="1799"/>
+            </a:lvl9pPr>
+          </a:lstStyle>
+          <a:p>
+            <a:pPr lvl="0"/>
+            <a:r>
+              <a:rPr lang="en-US"/>
+              <a:t>Click to edit Master text styles</a:t>
+            </a:r>
+          </a:p>
+          <a:p>
+            <a:pPr lvl="1"/>
+            <a:r>
+              <a:rPr lang="en-US"/>
+              <a:t>Second level</a:t>
+            </a:r>
+          </a:p>
+          <a:p>
+            <a:pPr lvl="2"/>
+            <a:r>
+              <a:rPr lang="en-US"/>
+              <a:t>Third level</a:t>
+            </a:r>
+          </a:p>
+          <a:p>
+            <a:pPr lvl="3"/>
+            <a:r>
+              <a:rPr lang="en-US"/>
+              <a:t>Fourth level</a:t>
+            </a:r>
+          </a:p>
+          <a:p>
+            <a:pPr lvl="4"/>
+            <a:r>
+              <a:rPr lang="en-US"/>
+              <a:t>Fifth level</a:t>
+            </a:r>
+          </a:p>
+        </p:txBody>
+      </p:sp>
+      <p:sp>
+        <p:nvSpPr>
+          <p:cNvPr id="4" name="Content Placeholder 3"/>
+          <p:cNvSpPr>
+            <a:spLocks noGrp="1"/>
+          </p:cNvSpPr>
+          <p:nvPr>
+            <p:ph sz="half" idx="2"/>
+          </p:nvPr>
+        </p:nvSpPr>
+        <p:spPr>
+          <a:xfrm>
+            <a:off x="4646990" y="1600201"/>
+            <a:ext cx="4037548" cy="4525963"/>
+          </a:xfrm>
+        </p:spPr>
+        <p:txBody>
+          <a:bodyPr/>
+          <a:lstStyle>
+            <a:lvl1pPr>
+              <a:defRPr sz="2799"/>
+            </a:lvl1pPr>
+            <a:lvl2pPr>
+              <a:defRPr sz="2399"/>
+            </a:lvl2pPr>
+            <a:lvl3pPr>
+              <a:defRPr sz="1999"/>
+            </a:lvl3pPr>
+            <a:lvl4pPr>
+              <a:defRPr sz="1799"/>
+            </a:lvl4pPr>
+            <a:lvl5pPr>
+              <a:defRPr sz="1799"/>
+            </a:lvl5pPr>
+            <a:lvl6pPr>
+              <a:defRPr sz="1799"/>
+            </a:lvl6pPr>
+            <a:lvl7pPr>
+              <a:defRPr sz="1799"/>
+            </a:lvl7pPr>
+            <a:lvl8pPr>
+              <a:defRPr sz="1799"/>
+            </a:lvl8pPr>
+            <a:lvl9pPr>
+              <a:defRPr sz="1799"/>
+            </a:lvl9pPr>
+          </a:lstStyle>
+          <a:p>
+            <a:pPr lvl="0"/>
+            <a:r>
+              <a:rPr lang="en-US"/>
+              <a:t>Click to edit Master text styles</a:t>
+            </a:r>
+          </a:p>
+          <a:p>
+            <a:pPr lvl="1"/>
+            <a:r>
+              <a:rPr lang="en-US"/>
+              <a:t>Second level</a:t>
+            </a:r>
+          </a:p>
+          <a:p>
+            <a:pPr lvl="2"/>
+            <a:r>
+              <a:rPr lang="en-US"/>
+              <a:t>Third level</a:t>
+            </a:r>
+          </a:p>
+          <a:p>
+            <a:pPr lvl="3"/>
+            <a:r>
+              <a:rPr lang="en-US"/>
+              <a:t>Fourth level</a:t>
+            </a:r>
+          </a:p>
+          <a:p>
+            <a:pPr lvl="4"/>
+            <a:r>
+              <a:rPr lang="en-US"/>
+              <a:t>Fifth level</a:t>
+            </a:r>
+          </a:p>
+        </p:txBody>
+      </p:sp>
+      <p:sp>
+        <p:nvSpPr>
+          <p:cNvPr id="5" name="Date Placeholder 4"/>
+          <p:cNvSpPr>
+            <a:spLocks noGrp="1"/>
+          </p:cNvSpPr>
+          <p:nvPr>
+            <p:ph type="dt" sz="half" idx="10"/>
+          </p:nvPr>
+        </p:nvSpPr>
+        <p:spPr/>
+        <p:txBody>
+          <a:bodyPr/>
+          <a:lstStyle/>
+          <a:p>
+            <a:fld id="{5BCAD085-E8A6-8845-BD4E-CB4CCA059FC4}" type="datetimeFigureOut">
+              <a:rPr lang="en-US" smtClean="0"/>
+              <a:t>8/29/2026</a:t>
+            </a:fld>
+            <a:endParaRPr lang="en-US"/>
+          </a:p>
+        </p:txBody>
+      </p:sp>
+      <p:sp>
+        <p:nvSpPr>
+          <p:cNvPr id="6" name="Footer Placeholder 5"/>
+          <p:cNvSpPr>
+            <a:spLocks noGrp="1"/>
+          </p:cNvSpPr>
+          <p:nvPr>
+            <p:ph type="ftr" sz="quarter" idx="11"/>
+          </p:nvPr>
+        </p:nvSpPr>
+        <p:spPr/>
+        <p:txBody>
+          <a:bodyPr/>
+          <a:lstStyle/>
+          <a:p>
+            <a:endParaRPr lang="en-US"/>
+          </a:p>
+        </p:txBody>
+      </p:sp>
+      <p:sp>
+        <p:nvSpPr>
+          <p:cNvPr id="7" name="Slide Number Placeholder 6"/>
+          <p:cNvSpPr>
+            <a:spLocks noGrp="1"/>
+          </p:cNvSpPr>
+          <p:nvPr>
+            <p:ph type="sldNum" sz="quarter" idx="12"/>
+          </p:nvPr>
+        </p:nvSpPr>
+        <p:spPr/>
+        <p:txBody>
+          <a:bodyPr/>
+          <a:lstStyle/>
+          <a:p>
+            <a:fld id="{C1FF6DA9-008F-8B48-92A6-B652298478BF}" type="slidenum">
+              <a:rPr lang="en-US" smtClean="0"/>
+              <a:t>‹#›</a:t>
+            </a:fld>
+            <a:endParaRPr lang="en-US"/>
+          </a:p>
+        </p:txBody>
+      </p:sp>
+    </p:spTree>
+    <p:extLst>
+      <p:ext uri="{BB962C8B-B14F-4D97-AF65-F5344CB8AC3E}">
+        <p14:creationId xmlns:p14="http://schemas.microsoft.com/office/powerpoint/2010/main" val="3636937073"/>
+      </p:ext>
+    </p:extLst>
+  </p:cSld>
+  <p:clrMapOvr>
+    <a:masterClrMapping/>
+  </p:clrMapOvr>
+</p:sldLayout>
+</file>
+
+<file path=ppt/slideLayouts/slideLayout16.xml><?xml version="1.0" encoding="utf-8"?>
+<p:sldLayout xmlns:a="http://schemas.openxmlformats.org/drawingml/2006/main" xmlns:r="http://schemas.openxmlformats.org/officeDocument/2006/relationships" xmlns:p="http://schemas.openxmlformats.org/presentationml/2006/main" type="twoTxTwoObj" preserve="1">
+  <p:cSld name="Comparison">
+    <p:spTree>
+      <p:nvGrpSpPr>
+        <p:cNvPr id="1" name=""/>
+        <p:cNvGrpSpPr/>
+        <p:nvPr/>
+      </p:nvGrpSpPr>
+      <p:grpSpPr>
+        <a:xfrm>
+          <a:off x="0" y="0"/>
+          <a:ext cx="0" cy="0"/>
+          <a:chOff x="0" y="0"/>
+          <a:chExt cx="0" cy="0"/>
+        </a:xfrm>
+      </p:grpSpPr>
+      <p:sp>
+        <p:nvSpPr>
+          <p:cNvPr id="2" name="Title 1"/>
+          <p:cNvSpPr>
+            <a:spLocks noGrp="1"/>
+          </p:cNvSpPr>
+          <p:nvPr>
+            <p:ph type="title"/>
+          </p:nvPr>
+        </p:nvSpPr>
+        <p:spPr/>
+        <p:txBody>
+          <a:bodyPr/>
+          <a:lstStyle>
+            <a:lvl1pPr>
+              <a:defRPr/>
+            </a:lvl1pPr>
+          </a:lstStyle>
+          <a:p>
+            <a:r>
+              <a:rPr lang="en-US"/>
+              <a:t>Click to edit Master title style</a:t>
+            </a:r>
+          </a:p>
+        </p:txBody>
+      </p:sp>
+      <p:sp>
+        <p:nvSpPr>
+          <p:cNvPr id="3" name="Text Placeholder 2"/>
+          <p:cNvSpPr>
+            <a:spLocks noGrp="1"/>
+          </p:cNvSpPr>
+          <p:nvPr>
+            <p:ph type="body" idx="1"/>
+          </p:nvPr>
+        </p:nvSpPr>
+        <p:spPr>
+          <a:xfrm>
+            <a:off x="457081" y="1535113"/>
+            <a:ext cx="4039136" cy="639762"/>
+          </a:xfrm>
+        </p:spPr>
+        <p:txBody>
+          <a:bodyPr anchor="b"/>
+          <a:lstStyle>
+            <a:lvl1pPr marL="0" indent="0">
+              <a:buNone/>
+              <a:defRPr sz="2399" b="1"/>
+            </a:lvl1pPr>
+            <a:lvl2pPr marL="457063" indent="0">
+              <a:buNone/>
+              <a:defRPr sz="1999" b="1"/>
+            </a:lvl2pPr>
+            <a:lvl3pPr marL="914126" indent="0">
+              <a:buNone/>
+              <a:defRPr sz="1799" b="1"/>
+            </a:lvl3pPr>
+            <a:lvl4pPr marL="1371189" indent="0">
+              <a:buNone/>
+              <a:defRPr sz="1600" b="1"/>
+            </a:lvl4pPr>
+            <a:lvl5pPr marL="1828251" indent="0">
+              <a:buNone/>
+              <a:defRPr sz="1600" b="1"/>
+            </a:lvl5pPr>
+            <a:lvl6pPr marL="2285314" indent="0">
+              <a:buNone/>
+              <a:defRPr sz="1600" b="1"/>
+            </a:lvl6pPr>
+            <a:lvl7pPr marL="2742377" indent="0">
+              <a:buNone/>
+              <a:defRPr sz="1600" b="1"/>
+            </a:lvl7pPr>
+            <a:lvl8pPr marL="3199440" indent="0">
+              <a:buNone/>
+              <a:defRPr sz="1600" b="1"/>
+            </a:lvl8pPr>
+            <a:lvl9pPr marL="3656503" indent="0">
+              <a:buNone/>
+              <a:defRPr sz="1600" b="1"/>
+            </a:lvl9pPr>
+          </a:lstStyle>
+          <a:p>
+            <a:pPr lvl="0"/>
+            <a:r>
+              <a:rPr lang="en-US"/>
+              <a:t>Click to edit Master text styles</a:t>
+            </a:r>
+          </a:p>
+        </p:txBody>
+      </p:sp>
+      <p:sp>
+        <p:nvSpPr>
+          <p:cNvPr id="4" name="Content Placeholder 3"/>
+          <p:cNvSpPr>
+            <a:spLocks noGrp="1"/>
+          </p:cNvSpPr>
+          <p:nvPr>
+            <p:ph sz="half" idx="2"/>
+          </p:nvPr>
+        </p:nvSpPr>
+        <p:spPr>
+          <a:xfrm>
+            <a:off x="457081" y="2174875"/>
+            <a:ext cx="4039136" cy="3951288"/>
+          </a:xfrm>
+        </p:spPr>
+        <p:txBody>
+          <a:bodyPr/>
+          <a:lstStyle>
+            <a:lvl1pPr>
+              <a:defRPr sz="2399"/>
+            </a:lvl1pPr>
+            <a:lvl2pPr>
+              <a:defRPr sz="1999"/>
+            </a:lvl2pPr>
+            <a:lvl3pPr>
+              <a:defRPr sz="1799"/>
+            </a:lvl3pPr>
+            <a:lvl4pPr>
+              <a:defRPr sz="1600"/>
+            </a:lvl4pPr>
+            <a:lvl5pPr>
+              <a:defRPr sz="1600"/>
+            </a:lvl5pPr>
+            <a:lvl6pPr>
+              <a:defRPr sz="1600"/>
+            </a:lvl6pPr>
+            <a:lvl7pPr>
+              <a:defRPr sz="1600"/>
+            </a:lvl7pPr>
+            <a:lvl8pPr>
+              <a:defRPr sz="1600"/>
+            </a:lvl8pPr>
+            <a:lvl9pPr>
+              <a:defRPr sz="1600"/>
+            </a:lvl9pPr>
+          </a:lstStyle>
+          <a:p>
+            <a:pPr lvl="0"/>
+            <a:r>
+              <a:rPr lang="en-US"/>
+              <a:t>Click to edit Master text styles</a:t>
+            </a:r>
+          </a:p>
+          <a:p>
+            <a:pPr lvl="1"/>
+            <a:r>
+              <a:rPr lang="en-US"/>
+              <a:t>Second level</a:t>
+            </a:r>
+          </a:p>
+          <a:p>
+            <a:pPr lvl="2"/>
+            <a:r>
+              <a:rPr lang="en-US"/>
+              <a:t>Third level</a:t>
+            </a:r>
+          </a:p>
+          <a:p>
+            <a:pPr lvl="3"/>
+            <a:r>
+              <a:rPr lang="en-US"/>
+              <a:t>Fourth level</a:t>
+            </a:r>
+          </a:p>
+          <a:p>
+            <a:pPr lvl="4"/>
+            <a:r>
+              <a:rPr lang="en-US"/>
+              <a:t>Fifth level</a:t>
+            </a:r>
+          </a:p>
+        </p:txBody>
+      </p:sp>
+      <p:sp>
+        <p:nvSpPr>
+          <p:cNvPr id="5" name="Text Placeholder 4"/>
+          <p:cNvSpPr>
+            <a:spLocks noGrp="1"/>
+          </p:cNvSpPr>
+          <p:nvPr>
+            <p:ph type="body" sz="quarter" idx="3"/>
+          </p:nvPr>
+        </p:nvSpPr>
+        <p:spPr>
+          <a:xfrm>
+            <a:off x="4643816" y="1535113"/>
+            <a:ext cx="4040722" cy="639762"/>
+          </a:xfrm>
+        </p:spPr>
+        <p:txBody>
+          <a:bodyPr anchor="b"/>
+          <a:lstStyle>
+            <a:lvl1pPr marL="0" indent="0">
+              <a:buNone/>
+              <a:defRPr sz="2399" b="1"/>
+            </a:lvl1pPr>
+            <a:lvl2pPr marL="457063" indent="0">
+              <a:buNone/>
+              <a:defRPr sz="1999" b="1"/>
+            </a:lvl2pPr>
+            <a:lvl3pPr marL="914126" indent="0">
+              <a:buNone/>
+              <a:defRPr sz="1799" b="1"/>
+            </a:lvl3pPr>
+            <a:lvl4pPr marL="1371189" indent="0">
+              <a:buNone/>
+              <a:defRPr sz="1600" b="1"/>
+            </a:lvl4pPr>
+            <a:lvl5pPr marL="1828251" indent="0">
+              <a:buNone/>
+              <a:defRPr sz="1600" b="1"/>
+            </a:lvl5pPr>
+            <a:lvl6pPr marL="2285314" indent="0">
+              <a:buNone/>
+              <a:defRPr sz="1600" b="1"/>
+            </a:lvl6pPr>
+            <a:lvl7pPr marL="2742377" indent="0">
+              <a:buNone/>
+              <a:defRPr sz="1600" b="1"/>
+            </a:lvl7pPr>
+            <a:lvl8pPr marL="3199440" indent="0">
+              <a:buNone/>
+              <a:defRPr sz="1600" b="1"/>
+            </a:lvl8pPr>
+            <a:lvl9pPr marL="3656503" indent="0">
+              <a:buNone/>
+              <a:defRPr sz="1600" b="1"/>
+            </a:lvl9pPr>
+          </a:lstStyle>
+          <a:p>
+            <a:pPr lvl="0"/>
+            <a:r>
+              <a:rPr lang="en-US"/>
+              <a:t>Click to edit Master text styles</a:t>
+            </a:r>
+          </a:p>
+        </p:txBody>
+      </p:sp>
+      <p:sp>
+        <p:nvSpPr>
+          <p:cNvPr id="6" name="Content Placeholder 5"/>
+          <p:cNvSpPr>
+            <a:spLocks noGrp="1"/>
+          </p:cNvSpPr>
+          <p:nvPr>
+            <p:ph sz="quarter" idx="4"/>
+          </p:nvPr>
+        </p:nvSpPr>
+        <p:spPr>
+          <a:xfrm>
+            <a:off x="4643816" y="2174875"/>
+            <a:ext cx="4040722" cy="3951288"/>
+          </a:xfrm>
+        </p:spPr>
+        <p:txBody>
+          <a:bodyPr/>
+          <a:lstStyle>
+            <a:lvl1pPr>
+              <a:defRPr sz="2399"/>
+            </a:lvl1pPr>
+            <a:lvl2pPr>
+              <a:defRPr sz="1999"/>
+            </a:lvl2pPr>
+            <a:lvl3pPr>
+              <a:defRPr sz="1799"/>
+            </a:lvl3pPr>
+            <a:lvl4pPr>
+              <a:defRPr sz="1600"/>
+            </a:lvl4pPr>
+            <a:lvl5pPr>
+              <a:defRPr sz="1600"/>
+            </a:lvl5pPr>
+            <a:lvl6pPr>
+              <a:defRPr sz="1600"/>
+            </a:lvl6pPr>
+            <a:lvl7pPr>
+              <a:defRPr sz="1600"/>
+            </a:lvl7pPr>
+            <a:lvl8pPr>
+              <a:defRPr sz="1600"/>
+            </a:lvl8pPr>
+            <a:lvl9pPr>
+              <a:defRPr sz="1600"/>
+            </a:lvl9pPr>
+          </a:lstStyle>
+          <a:p>
+            <a:pPr lvl="0"/>
+            <a:r>
+              <a:rPr lang="en-US"/>
+              <a:t>Click to edit Master text styles</a:t>
+            </a:r>
+          </a:p>
+          <a:p>
+            <a:pPr lvl="1"/>
+            <a:r>
+              <a:rPr lang="en-US"/>
+              <a:t>Second level</a:t>
+            </a:r>
+          </a:p>
+          <a:p>
+            <a:pPr lvl="2"/>
+            <a:r>
+              <a:rPr lang="en-US"/>
+              <a:t>Third level</a:t>
+            </a:r>
+          </a:p>
+          <a:p>
+            <a:pPr lvl="3"/>
+            <a:r>
+              <a:rPr lang="en-US"/>
+              <a:t>Fourth level</a:t>
+            </a:r>
+          </a:p>
+          <a:p>
+            <a:pPr lvl="4"/>
+            <a:r>
+              <a:rPr lang="en-US"/>
+              <a:t>Fifth level</a:t>
+            </a:r>
+          </a:p>
+        </p:txBody>
+      </p:sp>
+      <p:sp>
+        <p:nvSpPr>
+          <p:cNvPr id="7" name="Date Placeholder 6"/>
+          <p:cNvSpPr>
+            <a:spLocks noGrp="1"/>
+          </p:cNvSpPr>
+          <p:nvPr>
+            <p:ph type="dt" sz="half" idx="10"/>
+          </p:nvPr>
+        </p:nvSpPr>
+        <p:spPr/>
+        <p:txBody>
+          <a:bodyPr/>
+          <a:lstStyle/>
+          <a:p>
+            <a:fld id="{5BCAD085-E8A6-8845-BD4E-CB4CCA059FC4}" type="datetimeFigureOut">
+              <a:rPr lang="en-US" smtClean="0"/>
+              <a:t>8/29/2026</a:t>
+            </a:fld>
+            <a:endParaRPr lang="en-US"/>
+          </a:p>
+        </p:txBody>
+      </p:sp>
+      <p:sp>
+        <p:nvSpPr>
+          <p:cNvPr id="8" name="Footer Placeholder 7"/>
+          <p:cNvSpPr>
+            <a:spLocks noGrp="1"/>
+          </p:cNvSpPr>
+          <p:nvPr>
+            <p:ph type="ftr" sz="quarter" idx="11"/>
+          </p:nvPr>
+        </p:nvSpPr>
+        <p:spPr/>
+        <p:txBody>
+          <a:bodyPr/>
+          <a:lstStyle/>
+          <a:p>
+            <a:endParaRPr lang="en-US"/>
+          </a:p>
+        </p:txBody>
+      </p:sp>
+      <p:sp>
+        <p:nvSpPr>
+          <p:cNvPr id="9" name="Slide Number Placeholder 8"/>
+          <p:cNvSpPr>
+            <a:spLocks noGrp="1"/>
+          </p:cNvSpPr>
+          <p:nvPr>
+            <p:ph type="sldNum" sz="quarter" idx="12"/>
+          </p:nvPr>
+        </p:nvSpPr>
+        <p:spPr/>
+        <p:txBody>
+          <a:bodyPr/>
+          <a:lstStyle/>
+          <a:p>
+            <a:fld id="{C1FF6DA9-008F-8B48-92A6-B652298478BF}" type="slidenum">
+              <a:rPr lang="en-US" smtClean="0"/>
+              <a:t>‹#›</a:t>
+            </a:fld>
+            <a:endParaRPr lang="en-US"/>
+          </a:p>
+        </p:txBody>
+      </p:sp>
+    </p:spTree>
+    <p:extLst>
+      <p:ext uri="{BB962C8B-B14F-4D97-AF65-F5344CB8AC3E}">
+        <p14:creationId xmlns:p14="http://schemas.microsoft.com/office/powerpoint/2010/main" val="1592175012"/>
+      </p:ext>
+    </p:extLst>
+  </p:cSld>
+  <p:clrMapOvr>
+    <a:masterClrMapping/>
+  </p:clrMapOvr>
+</p:sldLayout>
+</file>
+
+<file path=ppt/slideLayouts/slideLayout17.xml><?xml version="1.0" encoding="utf-8"?>
+<p:sldLayout xmlns:a="http://schemas.openxmlformats.org/drawingml/2006/main" xmlns:r="http://schemas.openxmlformats.org/officeDocument/2006/relationships" xmlns:p="http://schemas.openxmlformats.org/presentationml/2006/main" type="titleOnly" preserve="1">
+  <p:cSld name="Title Only">
+    <p:spTree>
+      <p:nvGrpSpPr>
+        <p:cNvPr id="1" name=""/>
+        <p:cNvGrpSpPr/>
+        <p:nvPr/>
+      </p:nvGrpSpPr>
+      <p:grpSpPr>
+        <a:xfrm>
+          <a:off x="0" y="0"/>
+          <a:ext cx="0" cy="0"/>
+          <a:chOff x="0" y="0"/>
+          <a:chExt cx="0" cy="0"/>
+        </a:xfrm>
+      </p:grpSpPr>
+      <p:sp>
+        <p:nvSpPr>
+          <p:cNvPr id="2" name="Title 1"/>
+          <p:cNvSpPr>
+            <a:spLocks noGrp="1"/>
+          </p:cNvSpPr>
+          <p:nvPr>
+            <p:ph type="title"/>
+          </p:nvPr>
+        </p:nvSpPr>
+        <p:spPr/>
+        <p:txBody>
+          <a:bodyPr/>
+          <a:lstStyle/>
+          <a:p>
+            <a:r>
+              <a:rPr lang="en-US"/>
+              <a:t>Click to edit Master title style</a:t>
+            </a:r>
+          </a:p>
+        </p:txBody>
+      </p:sp>
+      <p:sp>
+        <p:nvSpPr>
+          <p:cNvPr id="3" name="Date Placeholder 2"/>
+          <p:cNvSpPr>
+            <a:spLocks noGrp="1"/>
+          </p:cNvSpPr>
+          <p:nvPr>
+            <p:ph type="dt" sz="half" idx="10"/>
+          </p:nvPr>
+        </p:nvSpPr>
+        <p:spPr/>
+        <p:txBody>
+          <a:bodyPr/>
+          <a:lstStyle/>
+          <a:p>
+            <a:fld id="{5BCAD085-E8A6-8845-BD4E-CB4CCA059FC4}" type="datetimeFigureOut">
+              <a:rPr lang="en-US" smtClean="0"/>
+              <a:t>8/29/2026</a:t>
+            </a:fld>
+            <a:endParaRPr lang="en-US"/>
+          </a:p>
+        </p:txBody>
+      </p:sp>
+      <p:sp>
+        <p:nvSpPr>
+          <p:cNvPr id="4" name="Footer Placeholder 3"/>
+          <p:cNvSpPr>
+            <a:spLocks noGrp="1"/>
+          </p:cNvSpPr>
+          <p:nvPr>
+            <p:ph type="ftr" sz="quarter" idx="11"/>
+          </p:nvPr>
+        </p:nvSpPr>
+        <p:spPr/>
+        <p:txBody>
+          <a:bodyPr/>
+          <a:lstStyle/>
+          <a:p>
+            <a:endParaRPr lang="en-US"/>
+          </a:p>
+        </p:txBody>
+      </p:sp>
+      <p:sp>
+        <p:nvSpPr>
+          <p:cNvPr id="5" name="Slide Number Placeholder 4"/>
+          <p:cNvSpPr>
+            <a:spLocks noGrp="1"/>
+          </p:cNvSpPr>
+          <p:nvPr>
+            <p:ph type="sldNum" sz="quarter" idx="12"/>
+          </p:nvPr>
+        </p:nvSpPr>
+        <p:spPr/>
+        <p:txBody>
+          <a:bodyPr/>
+          <a:lstStyle/>
+          <a:p>
+            <a:fld id="{C1FF6DA9-008F-8B48-92A6-B652298478BF}" type="slidenum">
+              <a:rPr lang="en-US" smtClean="0"/>
+              <a:t>‹#›</a:t>
+            </a:fld>
+            <a:endParaRPr lang="en-US"/>
+          </a:p>
+        </p:txBody>
+      </p:sp>
+    </p:spTree>
+    <p:extLst>
+      <p:ext uri="{BB962C8B-B14F-4D97-AF65-F5344CB8AC3E}">
+        <p14:creationId xmlns:p14="http://schemas.microsoft.com/office/powerpoint/2010/main" val="1444313187"/>
+      </p:ext>
+    </p:extLst>
+  </p:cSld>
+  <p:clrMapOvr>
+    <a:masterClrMapping/>
+  </p:clrMapOvr>
+</p:sldLayout>
+</file>
+
+<file path=ppt/slideLayouts/slideLayout18.xml><?xml version="1.0" encoding="utf-8"?>
+<p:sldLayout xmlns:a="http://schemas.openxmlformats.org/drawingml/2006/main" xmlns:r="http://schemas.openxmlformats.org/officeDocument/2006/relationships" xmlns:p="http://schemas.openxmlformats.org/presentationml/2006/main" type="blank" preserve="1">
+  <p:cSld name="Blank">
+    <p:spTree>
+      <p:nvGrpSpPr>
+        <p:cNvPr id="1" name=""/>
+        <p:cNvGrpSpPr/>
+        <p:nvPr/>
+      </p:nvGrpSpPr>
+      <p:grpSpPr>
+        <a:xfrm>
+          <a:off x="0" y="0"/>
+          <a:ext cx="0" cy="0"/>
+          <a:chOff x="0" y="0"/>
+          <a:chExt cx="0" cy="0"/>
+        </a:xfrm>
+      </p:grpSpPr>
+      <p:sp>
+        <p:nvSpPr>
+          <p:cNvPr id="2" name="Date Placeholder 1"/>
+          <p:cNvSpPr>
+            <a:spLocks noGrp="1"/>
+          </p:cNvSpPr>
+          <p:nvPr>
+            <p:ph type="dt" sz="half" idx="10"/>
+          </p:nvPr>
+        </p:nvSpPr>
+        <p:spPr/>
+        <p:txBody>
+          <a:bodyPr/>
+          <a:lstStyle/>
+          <a:p>
+            <a:fld id="{5BCAD085-E8A6-8845-BD4E-CB4CCA059FC4}" type="datetimeFigureOut">
+              <a:rPr lang="en-US" smtClean="0"/>
+              <a:t>8/29/2026</a:t>
+            </a:fld>
+            <a:endParaRPr lang="en-US"/>
+          </a:p>
+        </p:txBody>
+      </p:sp>
+      <p:sp>
+        <p:nvSpPr>
+          <p:cNvPr id="3" name="Footer Placeholder 2"/>
+          <p:cNvSpPr>
+            <a:spLocks noGrp="1"/>
+          </p:cNvSpPr>
+          <p:nvPr>
+            <p:ph type="ftr" sz="quarter" idx="11"/>
+          </p:nvPr>
+        </p:nvSpPr>
+        <p:spPr/>
+        <p:txBody>
+          <a:bodyPr/>
+          <a:lstStyle/>
+          <a:p>
+            <a:endParaRPr lang="en-US"/>
+          </a:p>
+        </p:txBody>
+      </p:sp>
+      <p:sp>
+        <p:nvSpPr>
+          <p:cNvPr id="4" name="Slide Number Placeholder 3"/>
+          <p:cNvSpPr>
+            <a:spLocks noGrp="1"/>
+          </p:cNvSpPr>
+          <p:nvPr>
+            <p:ph type="sldNum" sz="quarter" idx="12"/>
+          </p:nvPr>
+        </p:nvSpPr>
+        <p:spPr/>
+        <p:txBody>
+          <a:bodyPr/>
+          <a:lstStyle/>
+          <a:p>
+            <a:fld id="{C1FF6DA9-008F-8B48-92A6-B652298478BF}" type="slidenum">
+              <a:rPr lang="en-US" smtClean="0"/>
+              <a:t>‹#›</a:t>
+            </a:fld>
+            <a:endParaRPr lang="en-US"/>
+          </a:p>
+        </p:txBody>
+      </p:sp>
+    </p:spTree>
+    <p:extLst>
+      <p:ext uri="{BB962C8B-B14F-4D97-AF65-F5344CB8AC3E}">
+        <p14:creationId xmlns:p14="http://schemas.microsoft.com/office/powerpoint/2010/main" val="578355928"/>
+      </p:ext>
+    </p:extLst>
+  </p:cSld>
+  <p:clrMapOvr>
+    <a:masterClrMapping/>
+  </p:clrMapOvr>
+</p:sldLayout>
+</file>
+
+<file path=ppt/slideLayouts/slideLayout19.xml><?xml version="1.0" encoding="utf-8"?>
+<p:sldLayout xmlns:a="http://schemas.openxmlformats.org/drawingml/2006/main" xmlns:r="http://schemas.openxmlformats.org/officeDocument/2006/relationships" xmlns:p="http://schemas.openxmlformats.org/presentationml/2006/main" type="objTx" preserve="1">
+  <p:cSld name="Content with Caption">
+    <p:spTree>
+      <p:nvGrpSpPr>
+        <p:cNvPr id="1" name=""/>
+        <p:cNvGrpSpPr/>
+        <p:nvPr/>
+      </p:nvGrpSpPr>
+      <p:grpSpPr>
+        <a:xfrm>
+          <a:off x="0" y="0"/>
+          <a:ext cx="0" cy="0"/>
+          <a:chOff x="0" y="0"/>
+          <a:chExt cx="0" cy="0"/>
+        </a:xfrm>
+      </p:grpSpPr>
+      <p:sp>
+        <p:nvSpPr>
+          <p:cNvPr id="2" name="Title 1"/>
+          <p:cNvSpPr>
+            <a:spLocks noGrp="1"/>
+          </p:cNvSpPr>
+          <p:nvPr>
+            <p:ph type="title"/>
+          </p:nvPr>
+        </p:nvSpPr>
+        <p:spPr>
+          <a:xfrm>
+            <a:off x="457081" y="273050"/>
+            <a:ext cx="3007530" cy="1162050"/>
+          </a:xfrm>
+        </p:spPr>
+        <p:txBody>
+          <a:bodyPr anchor="b"/>
+          <a:lstStyle>
+            <a:lvl1pPr algn="l">
+              <a:defRPr sz="1999" b="1"/>
+            </a:lvl1pPr>
+          </a:lstStyle>
+          <a:p>
+            <a:r>
+              <a:rPr lang="en-US"/>
+              <a:t>Click to edit Master title style</a:t>
+            </a:r>
+          </a:p>
+        </p:txBody>
+      </p:sp>
+      <p:sp>
+        <p:nvSpPr>
+          <p:cNvPr id="3" name="Content Placeholder 2"/>
+          <p:cNvSpPr>
+            <a:spLocks noGrp="1"/>
+          </p:cNvSpPr>
+          <p:nvPr>
+            <p:ph idx="1"/>
+          </p:nvPr>
+        </p:nvSpPr>
+        <p:spPr>
+          <a:xfrm>
+            <a:off x="3574119" y="273051"/>
+            <a:ext cx="5110419" cy="5853113"/>
+          </a:xfrm>
+        </p:spPr>
+        <p:txBody>
+          <a:bodyPr/>
+          <a:lstStyle>
+            <a:lvl1pPr>
+              <a:defRPr sz="3199"/>
+            </a:lvl1pPr>
+            <a:lvl2pPr>
+              <a:defRPr sz="2799"/>
+            </a:lvl2pPr>
+            <a:lvl3pPr>
+              <a:defRPr sz="2399"/>
+            </a:lvl3pPr>
+            <a:lvl4pPr>
+              <a:defRPr sz="1999"/>
+            </a:lvl4pPr>
+            <a:lvl5pPr>
+              <a:defRPr sz="1999"/>
+            </a:lvl5pPr>
+            <a:lvl6pPr>
+              <a:defRPr sz="1999"/>
+            </a:lvl6pPr>
+            <a:lvl7pPr>
+              <a:defRPr sz="1999"/>
+            </a:lvl7pPr>
+            <a:lvl8pPr>
+              <a:defRPr sz="1999"/>
+            </a:lvl8pPr>
+            <a:lvl9pPr>
+              <a:defRPr sz="1999"/>
+            </a:lvl9pPr>
+          </a:lstStyle>
+          <a:p>
+            <a:pPr lvl="0"/>
+            <a:r>
+              <a:rPr lang="en-US"/>
+              <a:t>Click to edit Master text styles</a:t>
+            </a:r>
+          </a:p>
+          <a:p>
+            <a:pPr lvl="1"/>
+            <a:r>
+              <a:rPr lang="en-US"/>
+              <a:t>Second level</a:t>
+            </a:r>
+          </a:p>
+          <a:p>
+            <a:pPr lvl="2"/>
+            <a:r>
+              <a:rPr lang="en-US"/>
+              <a:t>Third level</a:t>
+            </a:r>
+          </a:p>
+          <a:p>
+            <a:pPr lvl="3"/>
+            <a:r>
+              <a:rPr lang="en-US"/>
+              <a:t>Fourth level</a:t>
+            </a:r>
+          </a:p>
+          <a:p>
+            <a:pPr lvl="4"/>
+            <a:r>
+              <a:rPr lang="en-US"/>
+              <a:t>Fifth level</a:t>
+            </a:r>
+          </a:p>
+        </p:txBody>
+      </p:sp>
+      <p:sp>
+        <p:nvSpPr>
+          <p:cNvPr id="4" name="Text Placeholder 3"/>
+          <p:cNvSpPr>
+            <a:spLocks noGrp="1"/>
+          </p:cNvSpPr>
+          <p:nvPr>
+            <p:ph type="body" sz="half" idx="2"/>
+          </p:nvPr>
+        </p:nvSpPr>
+        <p:spPr>
+          <a:xfrm>
+            <a:off x="457081" y="1435101"/>
+            <a:ext cx="3007530" cy="4691063"/>
+          </a:xfrm>
+        </p:spPr>
+        <p:txBody>
+          <a:bodyPr/>
+          <a:lstStyle>
+            <a:lvl1pPr marL="0" indent="0">
+              <a:buNone/>
+              <a:defRPr sz="1400"/>
+            </a:lvl1pPr>
+            <a:lvl2pPr marL="457063" indent="0">
+              <a:buNone/>
+              <a:defRPr sz="1200"/>
+            </a:lvl2pPr>
+            <a:lvl3pPr marL="914126" indent="0">
+              <a:buNone/>
+              <a:defRPr sz="1000"/>
+            </a:lvl3pPr>
+            <a:lvl4pPr marL="1371189" indent="0">
+              <a:buNone/>
+              <a:defRPr sz="900"/>
+            </a:lvl4pPr>
+            <a:lvl5pPr marL="1828251" indent="0">
+              <a:buNone/>
+              <a:defRPr sz="900"/>
+            </a:lvl5pPr>
+            <a:lvl6pPr marL="2285314" indent="0">
+              <a:buNone/>
+              <a:defRPr sz="900"/>
+            </a:lvl6pPr>
+            <a:lvl7pPr marL="2742377" indent="0">
+              <a:buNone/>
+              <a:defRPr sz="900"/>
+            </a:lvl7pPr>
+            <a:lvl8pPr marL="3199440" indent="0">
+              <a:buNone/>
+              <a:defRPr sz="900"/>
+            </a:lvl8pPr>
+            <a:lvl9pPr marL="3656503" indent="0">
+              <a:buNone/>
+              <a:defRPr sz="900"/>
+            </a:lvl9pPr>
+          </a:lstStyle>
+          <a:p>
+            <a:pPr lvl="0"/>
+            <a:r>
+              <a:rPr lang="en-US"/>
+              <a:t>Click to edit Master text styles</a:t>
+            </a:r>
+          </a:p>
+        </p:txBody>
+      </p:sp>
+      <p:sp>
+        <p:nvSpPr>
+          <p:cNvPr id="5" name="Date Placeholder 4"/>
+          <p:cNvSpPr>
+            <a:spLocks noGrp="1"/>
+          </p:cNvSpPr>
+          <p:nvPr>
+            <p:ph type="dt" sz="half" idx="10"/>
+          </p:nvPr>
+        </p:nvSpPr>
+        <p:spPr/>
+        <p:txBody>
+          <a:bodyPr/>
+          <a:lstStyle/>
+          <a:p>
+            <a:fld id="{5BCAD085-E8A6-8845-BD4E-CB4CCA059FC4}" type="datetimeFigureOut">
+              <a:rPr lang="en-US" smtClean="0"/>
+              <a:t>8/29/2026</a:t>
+            </a:fld>
+            <a:endParaRPr lang="en-US"/>
+          </a:p>
+        </p:txBody>
+      </p:sp>
+      <p:sp>
+        <p:nvSpPr>
+          <p:cNvPr id="6" name="Footer Placeholder 5"/>
+          <p:cNvSpPr>
+            <a:spLocks noGrp="1"/>
+          </p:cNvSpPr>
+          <p:nvPr>
+            <p:ph type="ftr" sz="quarter" idx="11"/>
+          </p:nvPr>
+        </p:nvSpPr>
+        <p:spPr/>
+        <p:txBody>
+          <a:bodyPr/>
+          <a:lstStyle/>
+          <a:p>
+            <a:endParaRPr lang="en-US"/>
+          </a:p>
+        </p:txBody>
+      </p:sp>
+      <p:sp>
+        <p:nvSpPr>
+          <p:cNvPr id="7" name="Slide Number Placeholder 6"/>
+          <p:cNvSpPr>
+            <a:spLocks noGrp="1"/>
+          </p:cNvSpPr>
+          <p:nvPr>
+            <p:ph type="sldNum" sz="quarter" idx="12"/>
+          </p:nvPr>
+        </p:nvSpPr>
+        <p:spPr/>
+        <p:txBody>
+          <a:bodyPr/>
+          <a:lstStyle/>
+          <a:p>
+            <a:fld id="{C1FF6DA9-008F-8B48-92A6-B652298478BF}" type="slidenum">
+              <a:rPr lang="en-US" smtClean="0"/>
+              <a:t>‹#›</a:t>
+            </a:fld>
+            <a:endParaRPr lang="en-US"/>
+          </a:p>
+        </p:txBody>
+      </p:sp>
+    </p:spTree>
+    <p:extLst>
+      <p:ext uri="{BB962C8B-B14F-4D97-AF65-F5344CB8AC3E}">
+        <p14:creationId xmlns:p14="http://schemas.microsoft.com/office/powerpoint/2010/main" val="3919614138"/>
+      </p:ext>
+    </p:extLst>
+  </p:cSld>
+  <p:clrMapOvr>
+    <a:masterClrMapping/>
+  </p:clrMapOvr>
+</p:sldLayout>
+</file>
+
 <file path=ppt/slideLayouts/slideLayout2.xml><?xml version="1.0" encoding="utf-8"?>
 <p:sldLayout xmlns:a="http://schemas.openxmlformats.org/drawingml/2006/main" xmlns:r="http://schemas.openxmlformats.org/officeDocument/2006/relationships" xmlns:p="http://schemas.openxmlformats.org/presentationml/2006/main" type="obj" preserve="1">
   <p:cSld name="Title and Content">
@@ -896,6 +2741,604 @@
     <p:extLst>
       <p:ext uri="{BB962C8B-B14F-4D97-AF65-F5344CB8AC3E}">
         <p14:creationId xmlns:p14="http://schemas.microsoft.com/office/powerpoint/2010/main" val="2614314258"/>
+      </p:ext>
+    </p:extLst>
+  </p:cSld>
+  <p:clrMapOvr>
+    <a:masterClrMapping/>
+  </p:clrMapOvr>
+</p:sldLayout>
+</file>
+
+<file path=ppt/slideLayouts/slideLayout20.xml><?xml version="1.0" encoding="utf-8"?>
+<p:sldLayout xmlns:a="http://schemas.openxmlformats.org/drawingml/2006/main" xmlns:r="http://schemas.openxmlformats.org/officeDocument/2006/relationships" xmlns:p="http://schemas.openxmlformats.org/presentationml/2006/main" type="picTx" preserve="1">
+  <p:cSld name="Picture with Caption">
+    <p:spTree>
+      <p:nvGrpSpPr>
+        <p:cNvPr id="1" name=""/>
+        <p:cNvGrpSpPr/>
+        <p:nvPr/>
+      </p:nvGrpSpPr>
+      <p:grpSpPr>
+        <a:xfrm>
+          <a:off x="0" y="0"/>
+          <a:ext cx="0" cy="0"/>
+          <a:chOff x="0" y="0"/>
+          <a:chExt cx="0" cy="0"/>
+        </a:xfrm>
+      </p:grpSpPr>
+      <p:sp>
+        <p:nvSpPr>
+          <p:cNvPr id="2" name="Title 1"/>
+          <p:cNvSpPr>
+            <a:spLocks noGrp="1"/>
+          </p:cNvSpPr>
+          <p:nvPr>
+            <p:ph type="title"/>
+          </p:nvPr>
+        </p:nvSpPr>
+        <p:spPr>
+          <a:xfrm>
+            <a:off x="1791821" y="4800600"/>
+            <a:ext cx="5484971" cy="566738"/>
+          </a:xfrm>
+        </p:spPr>
+        <p:txBody>
+          <a:bodyPr anchor="b"/>
+          <a:lstStyle>
+            <a:lvl1pPr algn="l">
+              <a:defRPr sz="1999" b="1"/>
+            </a:lvl1pPr>
+          </a:lstStyle>
+          <a:p>
+            <a:r>
+              <a:rPr lang="en-US"/>
+              <a:t>Click to edit Master title style</a:t>
+            </a:r>
+          </a:p>
+        </p:txBody>
+      </p:sp>
+      <p:sp>
+        <p:nvSpPr>
+          <p:cNvPr id="3" name="Picture Placeholder 2"/>
+          <p:cNvSpPr>
+            <a:spLocks noGrp="1"/>
+          </p:cNvSpPr>
+          <p:nvPr>
+            <p:ph type="pic" idx="1"/>
+          </p:nvPr>
+        </p:nvSpPr>
+        <p:spPr>
+          <a:xfrm>
+            <a:off x="1791821" y="612775"/>
+            <a:ext cx="5484971" cy="4114800"/>
+          </a:xfrm>
+        </p:spPr>
+        <p:txBody>
+          <a:bodyPr/>
+          <a:lstStyle>
+            <a:lvl1pPr marL="0" indent="0">
+              <a:buNone/>
+              <a:defRPr sz="3199"/>
+            </a:lvl1pPr>
+            <a:lvl2pPr marL="457063" indent="0">
+              <a:buNone/>
+              <a:defRPr sz="2799"/>
+            </a:lvl2pPr>
+            <a:lvl3pPr marL="914126" indent="0">
+              <a:buNone/>
+              <a:defRPr sz="2399"/>
+            </a:lvl3pPr>
+            <a:lvl4pPr marL="1371189" indent="0">
+              <a:buNone/>
+              <a:defRPr sz="1999"/>
+            </a:lvl4pPr>
+            <a:lvl5pPr marL="1828251" indent="0">
+              <a:buNone/>
+              <a:defRPr sz="1999"/>
+            </a:lvl5pPr>
+            <a:lvl6pPr marL="2285314" indent="0">
+              <a:buNone/>
+              <a:defRPr sz="1999"/>
+            </a:lvl6pPr>
+            <a:lvl7pPr marL="2742377" indent="0">
+              <a:buNone/>
+              <a:defRPr sz="1999"/>
+            </a:lvl7pPr>
+            <a:lvl8pPr marL="3199440" indent="0">
+              <a:buNone/>
+              <a:defRPr sz="1999"/>
+            </a:lvl8pPr>
+            <a:lvl9pPr marL="3656503" indent="0">
+              <a:buNone/>
+              <a:defRPr sz="1999"/>
+            </a:lvl9pPr>
+          </a:lstStyle>
+          <a:p>
+            <a:endParaRPr lang="en-US"/>
+          </a:p>
+        </p:txBody>
+      </p:sp>
+      <p:sp>
+        <p:nvSpPr>
+          <p:cNvPr id="4" name="Text Placeholder 3"/>
+          <p:cNvSpPr>
+            <a:spLocks noGrp="1"/>
+          </p:cNvSpPr>
+          <p:nvPr>
+            <p:ph type="body" sz="half" idx="2"/>
+          </p:nvPr>
+        </p:nvSpPr>
+        <p:spPr>
+          <a:xfrm>
+            <a:off x="1791821" y="5367338"/>
+            <a:ext cx="5484971" cy="804862"/>
+          </a:xfrm>
+        </p:spPr>
+        <p:txBody>
+          <a:bodyPr/>
+          <a:lstStyle>
+            <a:lvl1pPr marL="0" indent="0">
+              <a:buNone/>
+              <a:defRPr sz="1400"/>
+            </a:lvl1pPr>
+            <a:lvl2pPr marL="457063" indent="0">
+              <a:buNone/>
+              <a:defRPr sz="1200"/>
+            </a:lvl2pPr>
+            <a:lvl3pPr marL="914126" indent="0">
+              <a:buNone/>
+              <a:defRPr sz="1000"/>
+            </a:lvl3pPr>
+            <a:lvl4pPr marL="1371189" indent="0">
+              <a:buNone/>
+              <a:defRPr sz="900"/>
+            </a:lvl4pPr>
+            <a:lvl5pPr marL="1828251" indent="0">
+              <a:buNone/>
+              <a:defRPr sz="900"/>
+            </a:lvl5pPr>
+            <a:lvl6pPr marL="2285314" indent="0">
+              <a:buNone/>
+              <a:defRPr sz="900"/>
+            </a:lvl6pPr>
+            <a:lvl7pPr marL="2742377" indent="0">
+              <a:buNone/>
+              <a:defRPr sz="900"/>
+            </a:lvl7pPr>
+            <a:lvl8pPr marL="3199440" indent="0">
+              <a:buNone/>
+              <a:defRPr sz="900"/>
+            </a:lvl8pPr>
+            <a:lvl9pPr marL="3656503" indent="0">
+              <a:buNone/>
+              <a:defRPr sz="900"/>
+            </a:lvl9pPr>
+          </a:lstStyle>
+          <a:p>
+            <a:pPr lvl="0"/>
+            <a:r>
+              <a:rPr lang="en-US"/>
+              <a:t>Click to edit Master text styles</a:t>
+            </a:r>
+          </a:p>
+        </p:txBody>
+      </p:sp>
+      <p:sp>
+        <p:nvSpPr>
+          <p:cNvPr id="5" name="Date Placeholder 4"/>
+          <p:cNvSpPr>
+            <a:spLocks noGrp="1"/>
+          </p:cNvSpPr>
+          <p:nvPr>
+            <p:ph type="dt" sz="half" idx="10"/>
+          </p:nvPr>
+        </p:nvSpPr>
+        <p:spPr/>
+        <p:txBody>
+          <a:bodyPr/>
+          <a:lstStyle/>
+          <a:p>
+            <a:fld id="{5BCAD085-E8A6-8845-BD4E-CB4CCA059FC4}" type="datetimeFigureOut">
+              <a:rPr lang="en-US" smtClean="0"/>
+              <a:t>8/29/2026</a:t>
+            </a:fld>
+            <a:endParaRPr lang="en-US"/>
+          </a:p>
+        </p:txBody>
+      </p:sp>
+      <p:sp>
+        <p:nvSpPr>
+          <p:cNvPr id="6" name="Footer Placeholder 5"/>
+          <p:cNvSpPr>
+            <a:spLocks noGrp="1"/>
+          </p:cNvSpPr>
+          <p:nvPr>
+            <p:ph type="ftr" sz="quarter" idx="11"/>
+          </p:nvPr>
+        </p:nvSpPr>
+        <p:spPr/>
+        <p:txBody>
+          <a:bodyPr/>
+          <a:lstStyle/>
+          <a:p>
+            <a:endParaRPr lang="en-US"/>
+          </a:p>
+        </p:txBody>
+      </p:sp>
+      <p:sp>
+        <p:nvSpPr>
+          <p:cNvPr id="7" name="Slide Number Placeholder 6"/>
+          <p:cNvSpPr>
+            <a:spLocks noGrp="1"/>
+          </p:cNvSpPr>
+          <p:nvPr>
+            <p:ph type="sldNum" sz="quarter" idx="12"/>
+          </p:nvPr>
+        </p:nvSpPr>
+        <p:spPr/>
+        <p:txBody>
+          <a:bodyPr/>
+          <a:lstStyle/>
+          <a:p>
+            <a:fld id="{C1FF6DA9-008F-8B48-92A6-B652298478BF}" type="slidenum">
+              <a:rPr lang="en-US" smtClean="0"/>
+              <a:t>‹#›</a:t>
+            </a:fld>
+            <a:endParaRPr lang="en-US"/>
+          </a:p>
+        </p:txBody>
+      </p:sp>
+    </p:spTree>
+    <p:extLst>
+      <p:ext uri="{BB962C8B-B14F-4D97-AF65-F5344CB8AC3E}">
+        <p14:creationId xmlns:p14="http://schemas.microsoft.com/office/powerpoint/2010/main" val="1158014233"/>
+      </p:ext>
+    </p:extLst>
+  </p:cSld>
+  <p:clrMapOvr>
+    <a:masterClrMapping/>
+  </p:clrMapOvr>
+</p:sldLayout>
+</file>
+
+<file path=ppt/slideLayouts/slideLayout21.xml><?xml version="1.0" encoding="utf-8"?>
+<p:sldLayout xmlns:a="http://schemas.openxmlformats.org/drawingml/2006/main" xmlns:r="http://schemas.openxmlformats.org/officeDocument/2006/relationships" xmlns:p="http://schemas.openxmlformats.org/presentationml/2006/main" type="vertTx" preserve="1">
+  <p:cSld name="Title and Vertical Text">
+    <p:spTree>
+      <p:nvGrpSpPr>
+        <p:cNvPr id="1" name=""/>
+        <p:cNvGrpSpPr/>
+        <p:nvPr/>
+      </p:nvGrpSpPr>
+      <p:grpSpPr>
+        <a:xfrm>
+          <a:off x="0" y="0"/>
+          <a:ext cx="0" cy="0"/>
+          <a:chOff x="0" y="0"/>
+          <a:chExt cx="0" cy="0"/>
+        </a:xfrm>
+      </p:grpSpPr>
+      <p:sp>
+        <p:nvSpPr>
+          <p:cNvPr id="2" name="Title 1"/>
+          <p:cNvSpPr>
+            <a:spLocks noGrp="1"/>
+          </p:cNvSpPr>
+          <p:nvPr>
+            <p:ph type="title"/>
+          </p:nvPr>
+        </p:nvSpPr>
+        <p:spPr/>
+        <p:txBody>
+          <a:bodyPr/>
+          <a:lstStyle/>
+          <a:p>
+            <a:r>
+              <a:rPr lang="en-US"/>
+              <a:t>Click to edit Master title style</a:t>
+            </a:r>
+          </a:p>
+        </p:txBody>
+      </p:sp>
+      <p:sp>
+        <p:nvSpPr>
+          <p:cNvPr id="3" name="Vertical Text Placeholder 2"/>
+          <p:cNvSpPr>
+            <a:spLocks noGrp="1"/>
+          </p:cNvSpPr>
+          <p:nvPr>
+            <p:ph type="body" orient="vert" idx="1"/>
+          </p:nvPr>
+        </p:nvSpPr>
+        <p:spPr/>
+        <p:txBody>
+          <a:bodyPr vert="eaVert"/>
+          <a:lstStyle/>
+          <a:p>
+            <a:pPr lvl="0"/>
+            <a:r>
+              <a:rPr lang="en-US"/>
+              <a:t>Click to edit Master text styles</a:t>
+            </a:r>
+          </a:p>
+          <a:p>
+            <a:pPr lvl="1"/>
+            <a:r>
+              <a:rPr lang="en-US"/>
+              <a:t>Second level</a:t>
+            </a:r>
+          </a:p>
+          <a:p>
+            <a:pPr lvl="2"/>
+            <a:r>
+              <a:rPr lang="en-US"/>
+              <a:t>Third level</a:t>
+            </a:r>
+          </a:p>
+          <a:p>
+            <a:pPr lvl="3"/>
+            <a:r>
+              <a:rPr lang="en-US"/>
+              <a:t>Fourth level</a:t>
+            </a:r>
+          </a:p>
+          <a:p>
+            <a:pPr lvl="4"/>
+            <a:r>
+              <a:rPr lang="en-US"/>
+              <a:t>Fifth level</a:t>
+            </a:r>
+          </a:p>
+        </p:txBody>
+      </p:sp>
+      <p:sp>
+        <p:nvSpPr>
+          <p:cNvPr id="4" name="Date Placeholder 3"/>
+          <p:cNvSpPr>
+            <a:spLocks noGrp="1"/>
+          </p:cNvSpPr>
+          <p:nvPr>
+            <p:ph type="dt" sz="half" idx="10"/>
+          </p:nvPr>
+        </p:nvSpPr>
+        <p:spPr/>
+        <p:txBody>
+          <a:bodyPr/>
+          <a:lstStyle/>
+          <a:p>
+            <a:fld id="{5BCAD085-E8A6-8845-BD4E-CB4CCA059FC4}" type="datetimeFigureOut">
+              <a:rPr lang="en-US" smtClean="0"/>
+              <a:t>8/29/2026</a:t>
+            </a:fld>
+            <a:endParaRPr lang="en-US"/>
+          </a:p>
+        </p:txBody>
+      </p:sp>
+      <p:sp>
+        <p:nvSpPr>
+          <p:cNvPr id="5" name="Footer Placeholder 4"/>
+          <p:cNvSpPr>
+            <a:spLocks noGrp="1"/>
+          </p:cNvSpPr>
+          <p:nvPr>
+            <p:ph type="ftr" sz="quarter" idx="11"/>
+          </p:nvPr>
+        </p:nvSpPr>
+        <p:spPr/>
+        <p:txBody>
+          <a:bodyPr/>
+          <a:lstStyle/>
+          <a:p>
+            <a:endParaRPr lang="en-US"/>
+          </a:p>
+        </p:txBody>
+      </p:sp>
+      <p:sp>
+        <p:nvSpPr>
+          <p:cNvPr id="6" name="Slide Number Placeholder 5"/>
+          <p:cNvSpPr>
+            <a:spLocks noGrp="1"/>
+          </p:cNvSpPr>
+          <p:nvPr>
+            <p:ph type="sldNum" sz="quarter" idx="12"/>
+          </p:nvPr>
+        </p:nvSpPr>
+        <p:spPr/>
+        <p:txBody>
+          <a:bodyPr/>
+          <a:lstStyle/>
+          <a:p>
+            <a:fld id="{C1FF6DA9-008F-8B48-92A6-B652298478BF}" type="slidenum">
+              <a:rPr lang="en-US" smtClean="0"/>
+              <a:t>‹#›</a:t>
+            </a:fld>
+            <a:endParaRPr lang="en-US"/>
+          </a:p>
+        </p:txBody>
+      </p:sp>
+    </p:spTree>
+    <p:extLst>
+      <p:ext uri="{BB962C8B-B14F-4D97-AF65-F5344CB8AC3E}">
+        <p14:creationId xmlns:p14="http://schemas.microsoft.com/office/powerpoint/2010/main" val="3070540914"/>
+      </p:ext>
+    </p:extLst>
+  </p:cSld>
+  <p:clrMapOvr>
+    <a:masterClrMapping/>
+  </p:clrMapOvr>
+</p:sldLayout>
+</file>
+
+<file path=ppt/slideLayouts/slideLayout22.xml><?xml version="1.0" encoding="utf-8"?>
+<p:sldLayout xmlns:a="http://schemas.openxmlformats.org/drawingml/2006/main" xmlns:r="http://schemas.openxmlformats.org/officeDocument/2006/relationships" xmlns:p="http://schemas.openxmlformats.org/presentationml/2006/main" type="vertTitleAndTx" preserve="1">
+  <p:cSld name="Vertical Title and Text">
+    <p:spTree>
+      <p:nvGrpSpPr>
+        <p:cNvPr id="1" name=""/>
+        <p:cNvGrpSpPr/>
+        <p:nvPr/>
+      </p:nvGrpSpPr>
+      <p:grpSpPr>
+        <a:xfrm>
+          <a:off x="0" y="0"/>
+          <a:ext cx="0" cy="0"/>
+          <a:chOff x="0" y="0"/>
+          <a:chExt cx="0" cy="0"/>
+        </a:xfrm>
+      </p:grpSpPr>
+      <p:sp>
+        <p:nvSpPr>
+          <p:cNvPr id="2" name="Vertical Title 1"/>
+          <p:cNvSpPr>
+            <a:spLocks noGrp="1"/>
+          </p:cNvSpPr>
+          <p:nvPr>
+            <p:ph type="title" orient="vert"/>
+          </p:nvPr>
+        </p:nvSpPr>
+        <p:spPr>
+          <a:xfrm>
+            <a:off x="6627674" y="274639"/>
+            <a:ext cx="2056864" cy="5851525"/>
+          </a:xfrm>
+        </p:spPr>
+        <p:txBody>
+          <a:bodyPr vert="eaVert"/>
+          <a:lstStyle/>
+          <a:p>
+            <a:r>
+              <a:rPr lang="en-US"/>
+              <a:t>Click to edit Master title style</a:t>
+            </a:r>
+          </a:p>
+        </p:txBody>
+      </p:sp>
+      <p:sp>
+        <p:nvSpPr>
+          <p:cNvPr id="3" name="Vertical Text Placeholder 2"/>
+          <p:cNvSpPr>
+            <a:spLocks noGrp="1"/>
+          </p:cNvSpPr>
+          <p:nvPr>
+            <p:ph type="body" orient="vert" idx="1"/>
+          </p:nvPr>
+        </p:nvSpPr>
+        <p:spPr>
+          <a:xfrm>
+            <a:off x="457081" y="274639"/>
+            <a:ext cx="6018232" cy="5851525"/>
+          </a:xfrm>
+        </p:spPr>
+        <p:txBody>
+          <a:bodyPr vert="eaVert"/>
+          <a:lstStyle/>
+          <a:p>
+            <a:pPr lvl="0"/>
+            <a:r>
+              <a:rPr lang="en-US"/>
+              <a:t>Click to edit Master text styles</a:t>
+            </a:r>
+          </a:p>
+          <a:p>
+            <a:pPr lvl="1"/>
+            <a:r>
+              <a:rPr lang="en-US"/>
+              <a:t>Second level</a:t>
+            </a:r>
+          </a:p>
+          <a:p>
+            <a:pPr lvl="2"/>
+            <a:r>
+              <a:rPr lang="en-US"/>
+              <a:t>Third level</a:t>
+            </a:r>
+          </a:p>
+          <a:p>
+            <a:pPr lvl="3"/>
+            <a:r>
+              <a:rPr lang="en-US"/>
+              <a:t>Fourth level</a:t>
+            </a:r>
+          </a:p>
+          <a:p>
+            <a:pPr lvl="4"/>
+            <a:r>
+              <a:rPr lang="en-US"/>
+              <a:t>Fifth level</a:t>
+            </a:r>
+          </a:p>
+        </p:txBody>
+      </p:sp>
+      <p:sp>
+        <p:nvSpPr>
+          <p:cNvPr id="4" name="Date Placeholder 3"/>
+          <p:cNvSpPr>
+            <a:spLocks noGrp="1"/>
+          </p:cNvSpPr>
+          <p:nvPr>
+            <p:ph type="dt" sz="half" idx="10"/>
+          </p:nvPr>
+        </p:nvSpPr>
+        <p:spPr/>
+        <p:txBody>
+          <a:bodyPr/>
+          <a:lstStyle/>
+          <a:p>
+            <a:fld id="{5BCAD085-E8A6-8845-BD4E-CB4CCA059FC4}" type="datetimeFigureOut">
+              <a:rPr lang="en-US" smtClean="0"/>
+              <a:t>8/29/2026</a:t>
+            </a:fld>
+            <a:endParaRPr lang="en-US"/>
+          </a:p>
+        </p:txBody>
+      </p:sp>
+      <p:sp>
+        <p:nvSpPr>
+          <p:cNvPr id="5" name="Footer Placeholder 4"/>
+          <p:cNvSpPr>
+            <a:spLocks noGrp="1"/>
+          </p:cNvSpPr>
+          <p:nvPr>
+            <p:ph type="ftr" sz="quarter" idx="11"/>
+          </p:nvPr>
+        </p:nvSpPr>
+        <p:spPr/>
+        <p:txBody>
+          <a:bodyPr/>
+          <a:lstStyle/>
+          <a:p>
+            <a:endParaRPr lang="en-US"/>
+          </a:p>
+        </p:txBody>
+      </p:sp>
+      <p:sp>
+        <p:nvSpPr>
+          <p:cNvPr id="6" name="Slide Number Placeholder 5"/>
+          <p:cNvSpPr>
+            <a:spLocks noGrp="1"/>
+          </p:cNvSpPr>
+          <p:nvPr>
+            <p:ph type="sldNum" sz="quarter" idx="12"/>
+          </p:nvPr>
+        </p:nvSpPr>
+        <p:spPr/>
+        <p:txBody>
+          <a:bodyPr/>
+          <a:lstStyle/>
+          <a:p>
+            <a:fld id="{C1FF6DA9-008F-8B48-92A6-B652298478BF}" type="slidenum">
+              <a:rPr lang="en-US" smtClean="0"/>
+              <a:t>‹#›</a:t>
+            </a:fld>
+            <a:endParaRPr lang="en-US"/>
+          </a:p>
+        </p:txBody>
+      </p:sp>
+    </p:spTree>
+    <p:extLst>
+      <p:ext uri="{BB962C8B-B14F-4D97-AF65-F5344CB8AC3E}">
+        <p14:creationId xmlns:p14="http://schemas.microsoft.com/office/powerpoint/2010/main" val="3272049605"/>
       </p:ext>
     </p:extLst>
   </p:cSld>
@@ -3101,9 +5544,14 @@
 </p:sldMaster>
 </file>
 
-<file path=ppt/slides/slide1.xml><?xml version="1.0" encoding="utf-8"?>
-<p:sld xmlns:a="http://schemas.openxmlformats.org/drawingml/2006/main" xmlns:r="http://schemas.openxmlformats.org/officeDocument/2006/relationships" xmlns:p="http://schemas.openxmlformats.org/presentationml/2006/main">
+<file path=ppt/slideMasters/slideMaster2.xml><?xml version="1.0" encoding="utf-8"?>
+<p:sldMaster xmlns:a="http://schemas.openxmlformats.org/drawingml/2006/main" xmlns:r="http://schemas.openxmlformats.org/officeDocument/2006/relationships" xmlns:p="http://schemas.openxmlformats.org/presentationml/2006/main">
   <p:cSld>
+    <p:bg>
+      <p:bgRef idx="1001">
+        <a:schemeClr val="bg1"/>
+      </p:bgRef>
+    </p:bg>
     <p:spTree>
       <p:nvGrpSpPr>
         <p:cNvPr id="1" name=""/>
@@ -3120,14 +5568,560 @@
       </p:grpSpPr>
       <p:sp>
         <p:nvSpPr>
-          <p:cNvPr id="2" name="Rounded Rectangle 1"/>
+          <p:cNvPr id="2" name="Title Placeholder 1"/>
+          <p:cNvSpPr>
+            <a:spLocks noGrp="1"/>
+          </p:cNvSpPr>
+          <p:nvPr>
+            <p:ph type="title"/>
+          </p:nvPr>
+        </p:nvSpPr>
+        <p:spPr>
+          <a:xfrm>
+            <a:off x="457081" y="274638"/>
+            <a:ext cx="8227457" cy="1143000"/>
+          </a:xfrm>
+          <a:prstGeom prst="rect">
+            <a:avLst/>
+          </a:prstGeom>
+        </p:spPr>
+        <p:txBody>
+          <a:bodyPr vert="horz" lIns="91440" tIns="45720" rIns="91440" bIns="45720" rtlCol="0" anchor="ctr">
+            <a:normAutofit/>
+          </a:bodyPr>
+          <a:lstStyle/>
+          <a:p>
+            <a:r>
+              <a:rPr lang="en-US"/>
+              <a:t>Click to edit Master title style</a:t>
+            </a:r>
+          </a:p>
+        </p:txBody>
+      </p:sp>
+      <p:sp>
+        <p:nvSpPr>
+          <p:cNvPr id="3" name="Text Placeholder 2"/>
+          <p:cNvSpPr>
+            <a:spLocks noGrp="1"/>
+          </p:cNvSpPr>
+          <p:nvPr>
+            <p:ph type="body" idx="1"/>
+          </p:nvPr>
+        </p:nvSpPr>
+        <p:spPr>
+          <a:xfrm>
+            <a:off x="457081" y="1600201"/>
+            <a:ext cx="8227457" cy="4525963"/>
+          </a:xfrm>
+          <a:prstGeom prst="rect">
+            <a:avLst/>
+          </a:prstGeom>
+        </p:spPr>
+        <p:txBody>
+          <a:bodyPr vert="horz" lIns="91440" tIns="45720" rIns="91440" bIns="45720" rtlCol="0">
+            <a:normAutofit/>
+          </a:bodyPr>
+          <a:lstStyle/>
+          <a:p>
+            <a:pPr lvl="0"/>
+            <a:r>
+              <a:rPr lang="en-US"/>
+              <a:t>Click to edit Master text styles</a:t>
+            </a:r>
+          </a:p>
+          <a:p>
+            <a:pPr lvl="1"/>
+            <a:r>
+              <a:rPr lang="en-US"/>
+              <a:t>Second level</a:t>
+            </a:r>
+          </a:p>
+          <a:p>
+            <a:pPr lvl="2"/>
+            <a:r>
+              <a:rPr lang="en-US"/>
+              <a:t>Third level</a:t>
+            </a:r>
+          </a:p>
+          <a:p>
+            <a:pPr lvl="3"/>
+            <a:r>
+              <a:rPr lang="en-US"/>
+              <a:t>Fourth level</a:t>
+            </a:r>
+          </a:p>
+          <a:p>
+            <a:pPr lvl="4"/>
+            <a:r>
+              <a:rPr lang="en-US"/>
+              <a:t>Fifth level</a:t>
+            </a:r>
+          </a:p>
+        </p:txBody>
+      </p:sp>
+      <p:sp>
+        <p:nvSpPr>
+          <p:cNvPr id="4" name="Date Placeholder 3"/>
+          <p:cNvSpPr>
+            <a:spLocks noGrp="1"/>
+          </p:cNvSpPr>
+          <p:nvPr>
+            <p:ph type="dt" sz="half" idx="2"/>
+          </p:nvPr>
+        </p:nvSpPr>
+        <p:spPr>
+          <a:xfrm>
+            <a:off x="457081" y="6356351"/>
+            <a:ext cx="2133044" cy="365125"/>
+          </a:xfrm>
+          <a:prstGeom prst="rect">
+            <a:avLst/>
+          </a:prstGeom>
+        </p:spPr>
+        <p:txBody>
+          <a:bodyPr vert="horz" lIns="91440" tIns="45720" rIns="91440" bIns="45720" rtlCol="0" anchor="ctr"/>
+          <a:lstStyle>
+            <a:lvl1pPr algn="l">
+              <a:defRPr sz="1200">
+                <a:solidFill>
+                  <a:schemeClr val="tx1">
+                    <a:tint val="75000"/>
+                  </a:schemeClr>
+                </a:solidFill>
+              </a:defRPr>
+            </a:lvl1pPr>
+          </a:lstStyle>
+          <a:p>
+            <a:fld id="{5BCAD085-E8A6-8845-BD4E-CB4CCA059FC4}" type="datetimeFigureOut">
+              <a:rPr lang="en-US" smtClean="0"/>
+              <a:t>8/29/2026</a:t>
+            </a:fld>
+            <a:endParaRPr lang="en-US"/>
+          </a:p>
+        </p:txBody>
+      </p:sp>
+      <p:sp>
+        <p:nvSpPr>
+          <p:cNvPr id="5" name="Footer Placeholder 4"/>
+          <p:cNvSpPr>
+            <a:spLocks noGrp="1"/>
+          </p:cNvSpPr>
+          <p:nvPr>
+            <p:ph type="ftr" sz="quarter" idx="3"/>
+          </p:nvPr>
+        </p:nvSpPr>
+        <p:spPr>
+          <a:xfrm>
+            <a:off x="3123386" y="6356351"/>
+            <a:ext cx="2894846" cy="365125"/>
+          </a:xfrm>
+          <a:prstGeom prst="rect">
+            <a:avLst/>
+          </a:prstGeom>
+        </p:spPr>
+        <p:txBody>
+          <a:bodyPr vert="horz" lIns="91440" tIns="45720" rIns="91440" bIns="45720" rtlCol="0" anchor="ctr"/>
+          <a:lstStyle>
+            <a:lvl1pPr algn="ctr">
+              <a:defRPr sz="1200">
+                <a:solidFill>
+                  <a:schemeClr val="tx1">
+                    <a:tint val="75000"/>
+                  </a:schemeClr>
+                </a:solidFill>
+              </a:defRPr>
+            </a:lvl1pPr>
+          </a:lstStyle>
+          <a:p>
+            <a:endParaRPr lang="en-US"/>
+          </a:p>
+        </p:txBody>
+      </p:sp>
+      <p:sp>
+        <p:nvSpPr>
+          <p:cNvPr id="6" name="Slide Number Placeholder 5"/>
+          <p:cNvSpPr>
+            <a:spLocks noGrp="1"/>
+          </p:cNvSpPr>
+          <p:nvPr>
+            <p:ph type="sldNum" sz="quarter" idx="4"/>
+          </p:nvPr>
+        </p:nvSpPr>
+        <p:spPr>
+          <a:xfrm>
+            <a:off x="6551494" y="6356351"/>
+            <a:ext cx="2133044" cy="365125"/>
+          </a:xfrm>
+          <a:prstGeom prst="rect">
+            <a:avLst/>
+          </a:prstGeom>
+        </p:spPr>
+        <p:txBody>
+          <a:bodyPr vert="horz" lIns="91440" tIns="45720" rIns="91440" bIns="45720" rtlCol="0" anchor="ctr"/>
+          <a:lstStyle>
+            <a:lvl1pPr algn="r">
+              <a:defRPr sz="1200">
+                <a:solidFill>
+                  <a:schemeClr val="tx1">
+                    <a:tint val="75000"/>
+                  </a:schemeClr>
+                </a:solidFill>
+              </a:defRPr>
+            </a:lvl1pPr>
+          </a:lstStyle>
+          <a:p>
+            <a:fld id="{C1FF6DA9-008F-8B48-92A6-B652298478BF}" type="slidenum">
+              <a:rPr lang="en-US" smtClean="0"/>
+              <a:t>‹#›</a:t>
+            </a:fld>
+            <a:endParaRPr lang="en-US"/>
+          </a:p>
+        </p:txBody>
+      </p:sp>
+    </p:spTree>
+    <p:extLst>
+      <p:ext uri="{BB962C8B-B14F-4D97-AF65-F5344CB8AC3E}">
+        <p14:creationId xmlns:p14="http://schemas.microsoft.com/office/powerpoint/2010/main" val="3145235845"/>
+      </p:ext>
+    </p:extLst>
+  </p:cSld>
+  <p:clrMap bg1="lt1" tx1="dk1" bg2="lt2" tx2="dk2" accent1="accent1" accent2="accent2" accent3="accent3" accent4="accent4" accent5="accent5" accent6="accent6" hlink="hlink" folHlink="folHlink"/>
+  <p:sldLayoutIdLst>
+    <p:sldLayoutId id="2147483661" r:id="rId1"/>
+    <p:sldLayoutId id="2147483662" r:id="rId2"/>
+    <p:sldLayoutId id="2147483663" r:id="rId3"/>
+    <p:sldLayoutId id="2147483664" r:id="rId4"/>
+    <p:sldLayoutId id="2147483665" r:id="rId5"/>
+    <p:sldLayoutId id="2147483666" r:id="rId6"/>
+    <p:sldLayoutId id="2147483667" r:id="rId7"/>
+    <p:sldLayoutId id="2147483668" r:id="rId8"/>
+    <p:sldLayoutId id="2147483669" r:id="rId9"/>
+    <p:sldLayoutId id="2147483670" r:id="rId10"/>
+    <p:sldLayoutId id="2147483671" r:id="rId11"/>
+  </p:sldLayoutIdLst>
+  <p:txStyles>
+    <p:titleStyle>
+      <a:lvl1pPr algn="ctr" defTabSz="457063" rtl="0" eaLnBrk="1" latinLnBrk="0" hangingPunct="1">
+        <a:spcBef>
+          <a:spcPct val="0"/>
+        </a:spcBef>
+        <a:buNone/>
+        <a:defRPr sz="4399" kern="1200">
+          <a:solidFill>
+            <a:schemeClr val="tx1"/>
+          </a:solidFill>
+          <a:latin typeface="+mj-lt"/>
+          <a:ea typeface="+mj-ea"/>
+          <a:cs typeface="+mj-cs"/>
+        </a:defRPr>
+      </a:lvl1pPr>
+    </p:titleStyle>
+    <p:bodyStyle>
+      <a:lvl1pPr marL="342797" indent="-342797" algn="l" defTabSz="457063" rtl="0" eaLnBrk="1" latinLnBrk="0" hangingPunct="1">
+        <a:spcBef>
+          <a:spcPct val="20000"/>
+        </a:spcBef>
+        <a:buFont typeface="Arial"/>
+        <a:buChar char="•"/>
+        <a:defRPr sz="3199" kern="1200">
+          <a:solidFill>
+            <a:schemeClr val="tx1"/>
+          </a:solidFill>
+          <a:latin typeface="+mn-lt"/>
+          <a:ea typeface="+mn-ea"/>
+          <a:cs typeface="+mn-cs"/>
+        </a:defRPr>
+      </a:lvl1pPr>
+      <a:lvl2pPr marL="742727" indent="-285664" algn="l" defTabSz="457063" rtl="0" eaLnBrk="1" latinLnBrk="0" hangingPunct="1">
+        <a:spcBef>
+          <a:spcPct val="20000"/>
+        </a:spcBef>
+        <a:buFont typeface="Arial"/>
+        <a:buChar char="–"/>
+        <a:defRPr sz="2799" kern="1200">
+          <a:solidFill>
+            <a:schemeClr val="tx1"/>
+          </a:solidFill>
+          <a:latin typeface="+mn-lt"/>
+          <a:ea typeface="+mn-ea"/>
+          <a:cs typeface="+mn-cs"/>
+        </a:defRPr>
+      </a:lvl2pPr>
+      <a:lvl3pPr marL="1142657" indent="-228531" algn="l" defTabSz="457063" rtl="0" eaLnBrk="1" latinLnBrk="0" hangingPunct="1">
+        <a:spcBef>
+          <a:spcPct val="20000"/>
+        </a:spcBef>
+        <a:buFont typeface="Arial"/>
+        <a:buChar char="•"/>
+        <a:defRPr sz="2399" kern="1200">
+          <a:solidFill>
+            <a:schemeClr val="tx1"/>
+          </a:solidFill>
+          <a:latin typeface="+mn-lt"/>
+          <a:ea typeface="+mn-ea"/>
+          <a:cs typeface="+mn-cs"/>
+        </a:defRPr>
+      </a:lvl3pPr>
+      <a:lvl4pPr marL="1599720" indent="-228531" algn="l" defTabSz="457063" rtl="0" eaLnBrk="1" latinLnBrk="0" hangingPunct="1">
+        <a:spcBef>
+          <a:spcPct val="20000"/>
+        </a:spcBef>
+        <a:buFont typeface="Arial"/>
+        <a:buChar char="–"/>
+        <a:defRPr sz="1999" kern="1200">
+          <a:solidFill>
+            <a:schemeClr val="tx1"/>
+          </a:solidFill>
+          <a:latin typeface="+mn-lt"/>
+          <a:ea typeface="+mn-ea"/>
+          <a:cs typeface="+mn-cs"/>
+        </a:defRPr>
+      </a:lvl4pPr>
+      <a:lvl5pPr marL="2056783" indent="-228531" algn="l" defTabSz="457063" rtl="0" eaLnBrk="1" latinLnBrk="0" hangingPunct="1">
+        <a:spcBef>
+          <a:spcPct val="20000"/>
+        </a:spcBef>
+        <a:buFont typeface="Arial"/>
+        <a:buChar char="»"/>
+        <a:defRPr sz="1999" kern="1200">
+          <a:solidFill>
+            <a:schemeClr val="tx1"/>
+          </a:solidFill>
+          <a:latin typeface="+mn-lt"/>
+          <a:ea typeface="+mn-ea"/>
+          <a:cs typeface="+mn-cs"/>
+        </a:defRPr>
+      </a:lvl5pPr>
+      <a:lvl6pPr marL="2513846" indent="-228531" algn="l" defTabSz="457063" rtl="0" eaLnBrk="1" latinLnBrk="0" hangingPunct="1">
+        <a:spcBef>
+          <a:spcPct val="20000"/>
+        </a:spcBef>
+        <a:buFont typeface="Arial"/>
+        <a:buChar char="•"/>
+        <a:defRPr sz="1999" kern="1200">
+          <a:solidFill>
+            <a:schemeClr val="tx1"/>
+          </a:solidFill>
+          <a:latin typeface="+mn-lt"/>
+          <a:ea typeface="+mn-ea"/>
+          <a:cs typeface="+mn-cs"/>
+        </a:defRPr>
+      </a:lvl6pPr>
+      <a:lvl7pPr marL="2970908" indent="-228531" algn="l" defTabSz="457063" rtl="0" eaLnBrk="1" latinLnBrk="0" hangingPunct="1">
+        <a:spcBef>
+          <a:spcPct val="20000"/>
+        </a:spcBef>
+        <a:buFont typeface="Arial"/>
+        <a:buChar char="•"/>
+        <a:defRPr sz="1999" kern="1200">
+          <a:solidFill>
+            <a:schemeClr val="tx1"/>
+          </a:solidFill>
+          <a:latin typeface="+mn-lt"/>
+          <a:ea typeface="+mn-ea"/>
+          <a:cs typeface="+mn-cs"/>
+        </a:defRPr>
+      </a:lvl7pPr>
+      <a:lvl8pPr marL="3427971" indent="-228531" algn="l" defTabSz="457063" rtl="0" eaLnBrk="1" latinLnBrk="0" hangingPunct="1">
+        <a:spcBef>
+          <a:spcPct val="20000"/>
+        </a:spcBef>
+        <a:buFont typeface="Arial"/>
+        <a:buChar char="•"/>
+        <a:defRPr sz="1999" kern="1200">
+          <a:solidFill>
+            <a:schemeClr val="tx1"/>
+          </a:solidFill>
+          <a:latin typeface="+mn-lt"/>
+          <a:ea typeface="+mn-ea"/>
+          <a:cs typeface="+mn-cs"/>
+        </a:defRPr>
+      </a:lvl8pPr>
+      <a:lvl9pPr marL="3885034" indent="-228531" algn="l" defTabSz="457063" rtl="0" eaLnBrk="1" latinLnBrk="0" hangingPunct="1">
+        <a:spcBef>
+          <a:spcPct val="20000"/>
+        </a:spcBef>
+        <a:buFont typeface="Arial"/>
+        <a:buChar char="•"/>
+        <a:defRPr sz="1999" kern="1200">
+          <a:solidFill>
+            <a:schemeClr val="tx1"/>
+          </a:solidFill>
+          <a:latin typeface="+mn-lt"/>
+          <a:ea typeface="+mn-ea"/>
+          <a:cs typeface="+mn-cs"/>
+        </a:defRPr>
+      </a:lvl9pPr>
+    </p:bodyStyle>
+    <p:otherStyle>
+      <a:defPPr>
+        <a:defRPr lang="en-US"/>
+      </a:defPPr>
+      <a:lvl1pPr marL="0" algn="l" defTabSz="457063" rtl="0" eaLnBrk="1" latinLnBrk="0" hangingPunct="1">
+        <a:defRPr sz="1799" kern="1200">
+          <a:solidFill>
+            <a:schemeClr val="tx1"/>
+          </a:solidFill>
+          <a:latin typeface="+mn-lt"/>
+          <a:ea typeface="+mn-ea"/>
+          <a:cs typeface="+mn-cs"/>
+        </a:defRPr>
+      </a:lvl1pPr>
+      <a:lvl2pPr marL="457063" algn="l" defTabSz="457063" rtl="0" eaLnBrk="1" latinLnBrk="0" hangingPunct="1">
+        <a:defRPr sz="1799" kern="1200">
+          <a:solidFill>
+            <a:schemeClr val="tx1"/>
+          </a:solidFill>
+          <a:latin typeface="+mn-lt"/>
+          <a:ea typeface="+mn-ea"/>
+          <a:cs typeface="+mn-cs"/>
+        </a:defRPr>
+      </a:lvl2pPr>
+      <a:lvl3pPr marL="914126" algn="l" defTabSz="457063" rtl="0" eaLnBrk="1" latinLnBrk="0" hangingPunct="1">
+        <a:defRPr sz="1799" kern="1200">
+          <a:solidFill>
+            <a:schemeClr val="tx1"/>
+          </a:solidFill>
+          <a:latin typeface="+mn-lt"/>
+          <a:ea typeface="+mn-ea"/>
+          <a:cs typeface="+mn-cs"/>
+        </a:defRPr>
+      </a:lvl3pPr>
+      <a:lvl4pPr marL="1371189" algn="l" defTabSz="457063" rtl="0" eaLnBrk="1" latinLnBrk="0" hangingPunct="1">
+        <a:defRPr sz="1799" kern="1200">
+          <a:solidFill>
+            <a:schemeClr val="tx1"/>
+          </a:solidFill>
+          <a:latin typeface="+mn-lt"/>
+          <a:ea typeface="+mn-ea"/>
+          <a:cs typeface="+mn-cs"/>
+        </a:defRPr>
+      </a:lvl4pPr>
+      <a:lvl5pPr marL="1828251" algn="l" defTabSz="457063" rtl="0" eaLnBrk="1" latinLnBrk="0" hangingPunct="1">
+        <a:defRPr sz="1799" kern="1200">
+          <a:solidFill>
+            <a:schemeClr val="tx1"/>
+          </a:solidFill>
+          <a:latin typeface="+mn-lt"/>
+          <a:ea typeface="+mn-ea"/>
+          <a:cs typeface="+mn-cs"/>
+        </a:defRPr>
+      </a:lvl5pPr>
+      <a:lvl6pPr marL="2285314" algn="l" defTabSz="457063" rtl="0" eaLnBrk="1" latinLnBrk="0" hangingPunct="1">
+        <a:defRPr sz="1799" kern="1200">
+          <a:solidFill>
+            <a:schemeClr val="tx1"/>
+          </a:solidFill>
+          <a:latin typeface="+mn-lt"/>
+          <a:ea typeface="+mn-ea"/>
+          <a:cs typeface="+mn-cs"/>
+        </a:defRPr>
+      </a:lvl6pPr>
+      <a:lvl7pPr marL="2742377" algn="l" defTabSz="457063" rtl="0" eaLnBrk="1" latinLnBrk="0" hangingPunct="1">
+        <a:defRPr sz="1799" kern="1200">
+          <a:solidFill>
+            <a:schemeClr val="tx1"/>
+          </a:solidFill>
+          <a:latin typeface="+mn-lt"/>
+          <a:ea typeface="+mn-ea"/>
+          <a:cs typeface="+mn-cs"/>
+        </a:defRPr>
+      </a:lvl7pPr>
+      <a:lvl8pPr marL="3199440" algn="l" defTabSz="457063" rtl="0" eaLnBrk="1" latinLnBrk="0" hangingPunct="1">
+        <a:defRPr sz="1799" kern="1200">
+          <a:solidFill>
+            <a:schemeClr val="tx1"/>
+          </a:solidFill>
+          <a:latin typeface="+mn-lt"/>
+          <a:ea typeface="+mn-ea"/>
+          <a:cs typeface="+mn-cs"/>
+        </a:defRPr>
+      </a:lvl8pPr>
+      <a:lvl9pPr marL="3656503" algn="l" defTabSz="457063" rtl="0" eaLnBrk="1" latinLnBrk="0" hangingPunct="1">
+        <a:defRPr sz="1799" kern="1200">
+          <a:solidFill>
+            <a:schemeClr val="tx1"/>
+          </a:solidFill>
+          <a:latin typeface="+mn-lt"/>
+          <a:ea typeface="+mn-ea"/>
+          <a:cs typeface="+mn-cs"/>
+        </a:defRPr>
+      </a:lvl9pPr>
+    </p:otherStyle>
+  </p:txStyles>
+</p:sldMaster>
+</file>
+
+<file path=ppt/slides/slide1.xml><?xml version="1.0" encoding="utf-8"?>
+<p:sld xmlns:a="http://schemas.openxmlformats.org/drawingml/2006/main" xmlns:r="http://schemas.openxmlformats.org/officeDocument/2006/relationships" xmlns:p="http://schemas.openxmlformats.org/presentationml/2006/main">
+  <p:cSld>
+    <p:bg>
+      <p:bgPr>
+        <a:solidFill>
+          <a:srgbClr val="0F2440"/>
+        </a:solidFill>
+        <a:effectLst/>
+      </p:bgPr>
+    </p:bg>
+    <p:spTree>
+      <p:nvGrpSpPr>
+        <p:cNvPr id="1" name=""/>
+        <p:cNvGrpSpPr/>
+        <p:nvPr/>
+      </p:nvGrpSpPr>
+      <p:grpSpPr>
+        <a:xfrm>
+          <a:off x="0" y="0"/>
+          <a:ext cx="0" cy="0"/>
+          <a:chOff x="0" y="0"/>
+          <a:chExt cx="0" cy="0"/>
+        </a:xfrm>
+      </p:grpSpPr>
+      <p:sp>
+        <p:nvSpPr>
+          <p:cNvPr id="2" name="TextBox 1"/>
+          <p:cNvSpPr txBox="1"/>
+          <p:nvPr/>
+        </p:nvSpPr>
+        <p:spPr>
+          <a:xfrm>
+            <a:off x="658196" y="1554968"/>
+            <a:ext cx="8227457" cy="184618"/>
+          </a:xfrm>
+          <a:prstGeom prst="rect">
+            <a:avLst/>
+          </a:prstGeom>
+          <a:noFill/>
+        </p:spPr>
+        <p:txBody>
+          <a:bodyPr wrap="square" lIns="0" tIns="0" rIns="0" bIns="0">
+            <a:spAutoFit/>
+          </a:bodyPr>
+          <a:lstStyle/>
+          <a:p>
+            <a:pPr defTabSz="457063"/>
+            <a:r>
+              <a:rPr sz="1200" b="1">
+                <a:solidFill>
+                  <a:srgbClr val="E0A106"/>
+                </a:solidFill>
+                <a:latin typeface="Calibri"/>
+              </a:rPr>
+              <a:t>EXECUTIVE SUMMARY  ·  AUGUST 2026</a:t>
+            </a:r>
+          </a:p>
+        </p:txBody>
+      </p:sp>
+      <p:sp>
+        <p:nvSpPr>
+          <p:cNvPr id="3" name="Rounded Rectangle 2"/>
           <p:cNvSpPr/>
           <p:nvPr/>
         </p:nvSpPr>
         <p:spPr>
           <a:xfrm>
-            <a:off x="640080" y="2148840"/>
-            <a:ext cx="310896" cy="310896"/>
+            <a:off x="639913" y="2149173"/>
+            <a:ext cx="310815" cy="310815"/>
           </a:xfrm>
           <a:prstGeom prst="roundRect">
             <a:avLst>
@@ -3160,21 +6154,26 @@
           <a:bodyPr rtlCol="0" anchor="ctr"/>
           <a:lstStyle/>
           <a:p>
-            <a:pPr algn="ctr"/>
-            <a:endParaRPr/>
-          </a:p>
-        </p:txBody>
-      </p:sp>
-      <p:sp>
-        <p:nvSpPr>
-          <p:cNvPr id="3" name="Rounded Rectangle 2"/>
+            <a:pPr algn="ctr" defTabSz="457063"/>
+            <a:endParaRPr sz="1799">
+              <a:solidFill>
+                <a:prstClr val="white"/>
+              </a:solidFill>
+              <a:latin typeface="Calibri"/>
+            </a:endParaRPr>
+          </a:p>
+        </p:txBody>
+      </p:sp>
+      <p:sp>
+        <p:nvSpPr>
+          <p:cNvPr id="4" name="Rounded Rectangle 3"/>
           <p:cNvSpPr/>
           <p:nvPr/>
         </p:nvSpPr>
         <p:spPr>
           <a:xfrm>
-            <a:off x="1024128" y="2148840"/>
-            <a:ext cx="310896" cy="310896"/>
+            <a:off x="1023860" y="2149173"/>
+            <a:ext cx="310815" cy="310815"/>
           </a:xfrm>
           <a:prstGeom prst="roundRect">
             <a:avLst>
@@ -3207,21 +6206,26 @@
           <a:bodyPr rtlCol="0" anchor="ctr"/>
           <a:lstStyle/>
           <a:p>
-            <a:pPr algn="ctr"/>
-            <a:endParaRPr/>
-          </a:p>
-        </p:txBody>
-      </p:sp>
-      <p:sp>
-        <p:nvSpPr>
-          <p:cNvPr id="4" name="Rounded Rectangle 3"/>
+            <a:pPr algn="ctr" defTabSz="457063"/>
+            <a:endParaRPr sz="1799">
+              <a:solidFill>
+                <a:prstClr val="white"/>
+              </a:solidFill>
+              <a:latin typeface="Calibri"/>
+            </a:endParaRPr>
+          </a:p>
+        </p:txBody>
+      </p:sp>
+      <p:sp>
+        <p:nvSpPr>
+          <p:cNvPr id="5" name="Rounded Rectangle 4"/>
           <p:cNvSpPr/>
           <p:nvPr/>
         </p:nvSpPr>
         <p:spPr>
           <a:xfrm>
-            <a:off x="1408176" y="2148840"/>
-            <a:ext cx="310896" cy="310896"/>
+            <a:off x="1407809" y="2149173"/>
+            <a:ext cx="310815" cy="310815"/>
           </a:xfrm>
           <a:prstGeom prst="roundRect">
             <a:avLst>
@@ -3254,43 +6258,13 @@
           <a:bodyPr rtlCol="0" anchor="ctr"/>
           <a:lstStyle/>
           <a:p>
-            <a:pPr algn="ctr"/>
-            <a:endParaRPr/>
-          </a:p>
-        </p:txBody>
-      </p:sp>
-      <p:sp>
-        <p:nvSpPr>
-          <p:cNvPr id="5" name="TextBox 4"/>
-          <p:cNvSpPr txBox="1"/>
-          <p:nvPr/>
-        </p:nvSpPr>
-        <p:spPr>
-          <a:xfrm>
-            <a:off x="658368" y="1554480"/>
-            <a:ext cx="8229600" cy="274320"/>
-          </a:xfrm>
-          <a:prstGeom prst="rect">
-            <a:avLst/>
-          </a:prstGeom>
-          <a:noFill/>
-        </p:spPr>
-        <p:txBody>
-          <a:bodyPr wrap="square" lIns="0" tIns="0" rIns="0" bIns="0">
-            <a:spAutoFit/>
-          </a:bodyPr>
-          <a:lstStyle/>
-          <a:p>
-            <a:pPr algn="l"/>
-            <a:r>
-              <a:rPr sz="1200" b="1">
-                <a:solidFill>
-                  <a:srgbClr val="E0A106"/>
-                </a:solidFill>
-                <a:latin typeface="Calibri"/>
-              </a:rPr>
-              <a:t>EXECUTIVE SHOWCASE · AUGUST 2026</a:t>
-            </a:r>
+            <a:pPr algn="ctr" defTabSz="457063"/>
+            <a:endParaRPr sz="1799">
+              <a:solidFill>
+                <a:prstClr val="white"/>
+              </a:solidFill>
+              <a:latin typeface="Calibri"/>
+            </a:endParaRPr>
           </a:p>
         </p:txBody>
       </p:sp>
@@ -3302,23 +6276,23 @@
         </p:nvSpPr>
         <p:spPr>
           <a:xfrm>
-            <a:off x="603504" y="2514600"/>
-            <a:ext cx="10515600" cy="1097280"/>
-          </a:xfrm>
-          <a:prstGeom prst="rect">
-            <a:avLst/>
-          </a:prstGeom>
-          <a:noFill/>
-        </p:spPr>
-        <p:txBody>
-          <a:bodyPr wrap="square" lIns="0" tIns="0" rIns="0" bIns="0">
-            <a:spAutoFit/>
-          </a:bodyPr>
-          <a:lstStyle/>
-          <a:p>
-            <a:pPr algn="l"/>
-            <a:r>
-              <a:rPr sz="5400" b="1">
+            <a:off x="603346" y="2514838"/>
+            <a:ext cx="10512862" cy="830461"/>
+          </a:xfrm>
+          <a:prstGeom prst="rect">
+            <a:avLst/>
+          </a:prstGeom>
+          <a:noFill/>
+        </p:spPr>
+        <p:txBody>
+          <a:bodyPr wrap="square" lIns="0" tIns="0" rIns="0" bIns="0">
+            <a:spAutoFit/>
+          </a:bodyPr>
+          <a:lstStyle/>
+          <a:p>
+            <a:pPr defTabSz="457063"/>
+            <a:r>
+              <a:rPr sz="5398" b="1">
                 <a:solidFill>
                   <a:srgbClr val="FFFFFF"/>
                 </a:solidFill>
@@ -3337,73 +6311,230 @@
         </p:nvSpPr>
         <p:spPr>
           <a:xfrm>
-            <a:off x="658368" y="3703320"/>
-            <a:ext cx="9692640" cy="1005840"/>
-          </a:xfrm>
-          <a:prstGeom prst="rect">
-            <a:avLst/>
-          </a:prstGeom>
-          <a:noFill/>
-        </p:spPr>
-        <p:txBody>
-          <a:bodyPr wrap="square" lIns="0" tIns="0" rIns="0" bIns="0">
-            <a:spAutoFit/>
-          </a:bodyPr>
-          <a:lstStyle/>
-          <a:p>
-            <a:pPr algn="l"/>
-            <a:r>
-              <a:rPr sz="1700" b="0">
+            <a:off x="658196" y="3703249"/>
+            <a:ext cx="9690116" cy="629496"/>
+          </a:xfrm>
+          <a:prstGeom prst="rect">
+            <a:avLst/>
+          </a:prstGeom>
+          <a:noFill/>
+        </p:spPr>
+        <p:txBody>
+          <a:bodyPr wrap="square" lIns="0" tIns="0" rIns="0" bIns="0">
+            <a:spAutoFit/>
+          </a:bodyPr>
+          <a:lstStyle/>
+          <a:p>
+            <a:pPr defTabSz="457063">
+              <a:lnSpc>
+                <a:spcPct val="125000"/>
+              </a:lnSpc>
+            </a:pPr>
+            <a:r>
+              <a:rPr sz="1699">
                 <a:solidFill>
                   <a:srgbClr val="CBD5E1"/>
                 </a:solidFill>
                 <a:latin typeface="Calibri"/>
               </a:rPr>
-              <a:t>A live market-drawdown dashboard, private-portfolio tracker &amp; retirement planner — designed, built, hardened, and documented through conversation with an AI agent.</a:t>
-            </a:r>
-          </a:p>
-        </p:txBody>
-      </p:sp>
-      <p:sp>
-        <p:nvSpPr>
-          <p:cNvPr id="8" name="TextBox 7"/>
-          <p:cNvSpPr txBox="1"/>
-          <p:nvPr/>
-        </p:nvSpPr>
-        <p:spPr>
-          <a:xfrm>
-            <a:off x="658368" y="5029200"/>
-            <a:ext cx="9144000" cy="365760"/>
-          </a:xfrm>
-          <a:prstGeom prst="rect">
-            <a:avLst/>
-          </a:prstGeom>
-          <a:noFill/>
-        </p:spPr>
-        <p:txBody>
-          <a:bodyPr wrap="square" lIns="0" tIns="0" rIns="0" bIns="0">
-            <a:spAutoFit/>
-          </a:bodyPr>
-          <a:lstStyle/>
-          <a:p>
-            <a:pPr algn="l"/>
-            <a:r>
-              <a:rPr sz="1300" b="1">
-                <a:solidFill>
-                  <a:srgbClr val="E0A106"/>
-                </a:solidFill>
-                <a:latin typeface="Calibri"/>
-              </a:rPr>
-              <a:t>Version 1.0</a:t>
-            </a:r>
-            <a:r>
-              <a:rPr sz="1300" b="0">
-                <a:solidFill>
-                  <a:srgbClr val="94A3B8"/>
-                </a:solidFill>
-                <a:latin typeface="Calibri"/>
-              </a:rPr>
-              <a:t>   ·   Rules-based analytics, not financial advice</a:t>
+              <a:t>A live market-drawdown dashboard, private-portfolio tracker, retirement planner and equity-valuation workbench — designed, built, tested and documented through conversation with IBM Bob.</a:t>
+            </a:r>
+          </a:p>
+        </p:txBody>
+      </p:sp>
+      <p:sp>
+        <p:nvSpPr>
+          <p:cNvPr id="8" name="Rectangle 7"/>
+          <p:cNvSpPr/>
+          <p:nvPr/>
+        </p:nvSpPr>
+        <p:spPr>
+          <a:xfrm>
+            <a:off x="658196" y="4891659"/>
+            <a:ext cx="2011156" cy="10969"/>
+          </a:xfrm>
+          <a:prstGeom prst="rect">
+            <a:avLst/>
+          </a:prstGeom>
+          <a:solidFill>
+            <a:srgbClr val="E0A106"/>
+          </a:solidFill>
+          <a:ln>
+            <a:noFill/>
+          </a:ln>
+          <a:effectLst/>
+        </p:spPr>
+        <p:style>
+          <a:lnRef idx="1">
+            <a:schemeClr val="accent1"/>
+          </a:lnRef>
+          <a:fillRef idx="3">
+            <a:schemeClr val="accent1"/>
+          </a:fillRef>
+          <a:effectRef idx="2">
+            <a:schemeClr val="accent1"/>
+          </a:effectRef>
+          <a:fontRef idx="minor">
+            <a:schemeClr val="lt1"/>
+          </a:fontRef>
+        </p:style>
+        <p:txBody>
+          <a:bodyPr rtlCol="0" anchor="ctr"/>
+          <a:lstStyle/>
+          <a:p>
+            <a:pPr algn="ctr" defTabSz="457063"/>
+            <a:endParaRPr sz="1799">
+              <a:solidFill>
+                <a:prstClr val="white"/>
+              </a:solidFill>
+              <a:latin typeface="Calibri"/>
+            </a:endParaRPr>
+          </a:p>
+        </p:txBody>
+      </p:sp>
+      <p:sp>
+        <p:nvSpPr>
+          <p:cNvPr id="10" name="TextBox 9"/>
+          <p:cNvSpPr txBox="1"/>
+          <p:nvPr/>
+        </p:nvSpPr>
+        <p:spPr>
+          <a:xfrm>
+            <a:off x="658196" y="5083146"/>
+            <a:ext cx="10055781" cy="192310"/>
+          </a:xfrm>
+          <a:prstGeom prst="rect">
+            <a:avLst/>
+          </a:prstGeom>
+          <a:noFill/>
+        </p:spPr>
+        <p:txBody>
+          <a:bodyPr wrap="square" lIns="0" tIns="0" rIns="0" bIns="0">
+            <a:spAutoFit/>
+          </a:bodyPr>
+          <a:lstStyle/>
+          <a:p>
+            <a:pPr defTabSz="457063"/>
+            <a:r>
+              <a:rPr sz="1250" dirty="0">
+                <a:solidFill>
+                  <a:srgbClr val="CBD5E1"/>
+                </a:solidFill>
+                <a:latin typeface="Calibri"/>
+              </a:rPr>
+              <a:t>One self-contained </a:t>
+            </a:r>
+            <a:r>
+              <a:rPr lang="en-US" sz="1250" dirty="0">
+                <a:solidFill>
+                  <a:srgbClr val="CBD5E1"/>
+                </a:solidFill>
+                <a:latin typeface="Calibri"/>
+              </a:rPr>
+              <a:t>Dashboard</a:t>
+            </a:r>
+            <a:r>
+              <a:rPr sz="1250" dirty="0">
+                <a:solidFill>
+                  <a:srgbClr val="CBD5E1"/>
+                </a:solidFill>
+                <a:latin typeface="Calibri"/>
+              </a:rPr>
+              <a:t>  ·  ~1,100 securities  ·  zero-touch daily refresh</a:t>
+            </a:r>
+          </a:p>
+        </p:txBody>
+      </p:sp>
+      <p:sp>
+        <p:nvSpPr>
+          <p:cNvPr id="11" name="TextBox 10"/>
+          <p:cNvSpPr txBox="1"/>
+          <p:nvPr/>
+        </p:nvSpPr>
+        <p:spPr>
+          <a:xfrm>
+            <a:off x="658196" y="6262902"/>
+            <a:ext cx="7313295" cy="161541"/>
+          </a:xfrm>
+          <a:prstGeom prst="rect">
+            <a:avLst/>
+          </a:prstGeom>
+          <a:noFill/>
+        </p:spPr>
+        <p:txBody>
+          <a:bodyPr wrap="square" lIns="0" tIns="0" rIns="0" bIns="0">
+            <a:spAutoFit/>
+          </a:bodyPr>
+          <a:lstStyle/>
+          <a:p>
+            <a:pPr defTabSz="457063"/>
+            <a:r>
+              <a:rPr sz="1050">
+                <a:solidFill>
+                  <a:srgbClr val="64748B"/>
+                </a:solidFill>
+                <a:latin typeface="Calibri"/>
+              </a:rPr>
+              <a:t>Rules-based analytics — not financial advice.</a:t>
+            </a:r>
+          </a:p>
+        </p:txBody>
+      </p:sp>
+      <p:sp>
+        <p:nvSpPr>
+          <p:cNvPr id="12" name="TextBox 11">
+            <a:extLst>
+              <a:ext uri="{FF2B5EF4-FFF2-40B4-BE49-F238E27FC236}">
+                <a16:creationId xmlns:a16="http://schemas.microsoft.com/office/drawing/2014/main" id="{E356B520-5E1B-3956-E979-F06A933AC113}"/>
+              </a:ext>
+            </a:extLst>
+          </p:cNvPr>
+          <p:cNvSpPr txBox="1"/>
+          <p:nvPr/>
+        </p:nvSpPr>
+        <p:spPr>
+          <a:xfrm>
+            <a:off x="9515475" y="5338486"/>
+            <a:ext cx="2533649" cy="923330"/>
+          </a:xfrm>
+          <a:prstGeom prst="rect">
+            <a:avLst/>
+          </a:prstGeom>
+          <a:noFill/>
+        </p:spPr>
+        <p:txBody>
+          <a:bodyPr wrap="square" rtlCol="0">
+            <a:spAutoFit/>
+          </a:bodyPr>
+          <a:lstStyle/>
+          <a:p>
+            <a:r>
+              <a:rPr lang="en-US" dirty="0">
+                <a:solidFill>
+                  <a:schemeClr val="bg1"/>
+                </a:solidFill>
+              </a:rPr>
+              <a:t>Sailaja Pudota</a:t>
+            </a:r>
+          </a:p>
+          <a:p>
+            <a:r>
+              <a:rPr lang="en-US" dirty="0">
+                <a:solidFill>
+                  <a:schemeClr val="bg1"/>
+                </a:solidFill>
+              </a:rPr>
+              <a:t>Sunil Pothakamuri</a:t>
+            </a:r>
+          </a:p>
+          <a:p>
+            <a:r>
+              <a:rPr lang="en-US" dirty="0">
+                <a:solidFill>
+                  <a:schemeClr val="bg1"/>
+                </a:solidFill>
+              </a:rPr>
+              <a:t>Suresh Pudota</a:t>
             </a:r>
           </a:p>
         </p:txBody>
@@ -26253,6 +29384,326 @@
 </a:theme>
 </file>
 
+<file path=ppt/theme/theme2.xml><?xml version="1.0" encoding="utf-8"?>
+<a:theme xmlns:a="http://schemas.openxmlformats.org/drawingml/2006/main" name="1_Office Theme">
+  <a:themeElements>
+    <a:clrScheme name="Office">
+      <a:dk1>
+        <a:sysClr val="windowText" lastClr="000000"/>
+      </a:dk1>
+      <a:lt1>
+        <a:sysClr val="window" lastClr="FFFFFF"/>
+      </a:lt1>
+      <a:dk2>
+        <a:srgbClr val="1F497D"/>
+      </a:dk2>
+      <a:lt2>
+        <a:srgbClr val="EEECE1"/>
+      </a:lt2>
+      <a:accent1>
+        <a:srgbClr val="4F81BD"/>
+      </a:accent1>
+      <a:accent2>
+        <a:srgbClr val="C0504D"/>
+      </a:accent2>
+      <a:accent3>
+        <a:srgbClr val="9BBB59"/>
+      </a:accent3>
+      <a:accent4>
+        <a:srgbClr val="8064A2"/>
+      </a:accent4>
+      <a:accent5>
+        <a:srgbClr val="4BACC6"/>
+      </a:accent5>
+      <a:accent6>
+        <a:srgbClr val="F79646"/>
+      </a:accent6>
+      <a:hlink>
+        <a:srgbClr val="0000FF"/>
+      </a:hlink>
+      <a:folHlink>
+        <a:srgbClr val="800080"/>
+      </a:folHlink>
+    </a:clrScheme>
+    <a:fontScheme name="Office">
+      <a:majorFont>
+        <a:latin typeface="Calibri"/>
+        <a:ea typeface=""/>
+        <a:cs typeface=""/>
+        <a:font script="Jpan" typeface="ＭＳ Ｐゴシック"/>
+        <a:font script="Hang" typeface="맑은 고딕"/>
+        <a:font script="Hans" typeface="宋体"/>
+        <a:font script="Hant" typeface="新細明體"/>
+        <a:font script="Arab" typeface="Times New Roman"/>
+        <a:font script="Hebr" typeface="Times New Roman"/>
+        <a:font script="Thai" typeface="Angsana New"/>
+        <a:font script="Ethi" typeface="Nyala"/>
+        <a:font script="Beng" typeface="Vrinda"/>
+        <a:font script="Gujr" typeface="Shruti"/>
+        <a:font script="Khmr" typeface="MoolBoran"/>
+        <a:font script="Knda" typeface="Tunga"/>
+        <a:font script="Guru" typeface="Raavi"/>
+        <a:font script="Cans" typeface="Euphemia"/>
+        <a:font script="Cher" typeface="Plantagenet Cherokee"/>
+        <a:font script="Yiii" typeface="Microsoft Yi Baiti"/>
+        <a:font script="Tibt" typeface="Microsoft Himalaya"/>
+        <a:font script="Thaa" typeface="MV Boli"/>
+        <a:font script="Deva" typeface="Mangal"/>
+        <a:font script="Telu" typeface="Gautami"/>
+        <a:font script="Taml" typeface="Latha"/>
+        <a:font script="Syrc" typeface="Estrangelo Edessa"/>
+        <a:font script="Orya" typeface="Kalinga"/>
+        <a:font script="Mlym" typeface="Kartika"/>
+        <a:font script="Laoo" typeface="DokChampa"/>
+        <a:font script="Sinh" typeface="Iskoola Pota"/>
+        <a:font script="Mong" typeface="Mongolian Baiti"/>
+        <a:font script="Viet" typeface="Times New Roman"/>
+        <a:font script="Uigh" typeface="Microsoft Uighur"/>
+        <a:font script="Geor" typeface="Sylfaen"/>
+      </a:majorFont>
+      <a:minorFont>
+        <a:latin typeface="Calibri"/>
+        <a:ea typeface=""/>
+        <a:cs typeface=""/>
+        <a:font script="Jpan" typeface="ＭＳ Ｐゴシック"/>
+        <a:font script="Hang" typeface="맑은 고딕"/>
+        <a:font script="Hans" typeface="宋体"/>
+        <a:font script="Hant" typeface="新細明體"/>
+        <a:font script="Arab" typeface="Arial"/>
+        <a:font script="Hebr" typeface="Arial"/>
+        <a:font script="Thai" typeface="Cordia New"/>
+        <a:font script="Ethi" typeface="Nyala"/>
+        <a:font script="Beng" typeface="Vrinda"/>
+        <a:font script="Gujr" typeface="Shruti"/>
+        <a:font script="Khmr" typeface="DaunPenh"/>
+        <a:font script="Knda" typeface="Tunga"/>
+        <a:font script="Guru" typeface="Raavi"/>
+        <a:font script="Cans" typeface="Euphemia"/>
+        <a:font script="Cher" typeface="Plantagenet Cherokee"/>
+        <a:font script="Yiii" typeface="Microsoft Yi Baiti"/>
+        <a:font script="Tibt" typeface="Microsoft Himalaya"/>
+        <a:font script="Thaa" typeface="MV Boli"/>
+        <a:font script="Deva" typeface="Mangal"/>
+        <a:font script="Telu" typeface="Gautami"/>
+        <a:font script="Taml" typeface="Latha"/>
+        <a:font script="Syrc" typeface="Estrangelo Edessa"/>
+        <a:font script="Orya" typeface="Kalinga"/>
+        <a:font script="Mlym" typeface="Kartika"/>
+        <a:font script="Laoo" typeface="DokChampa"/>
+        <a:font script="Sinh" typeface="Iskoola Pota"/>
+        <a:font script="Mong" typeface="Mongolian Baiti"/>
+        <a:font script="Viet" typeface="Arial"/>
+        <a:font script="Uigh" typeface="Microsoft Uighur"/>
+        <a:font script="Geor" typeface="Sylfaen"/>
+      </a:minorFont>
+    </a:fontScheme>
+    <a:fmtScheme name="Office">
+      <a:fillStyleLst>
+        <a:solidFill>
+          <a:schemeClr val="phClr"/>
+        </a:solidFill>
+        <a:gradFill rotWithShape="1">
+          <a:gsLst>
+            <a:gs pos="0">
+              <a:schemeClr val="phClr">
+                <a:tint val="50000"/>
+                <a:satMod val="300000"/>
+              </a:schemeClr>
+            </a:gs>
+            <a:gs pos="35000">
+              <a:schemeClr val="phClr">
+                <a:tint val="37000"/>
+                <a:satMod val="300000"/>
+              </a:schemeClr>
+            </a:gs>
+            <a:gs pos="100000">
+              <a:schemeClr val="phClr">
+                <a:tint val="15000"/>
+                <a:satMod val="350000"/>
+              </a:schemeClr>
+            </a:gs>
+          </a:gsLst>
+          <a:lin ang="16200000" scaled="1"/>
+        </a:gradFill>
+        <a:gradFill rotWithShape="1">
+          <a:gsLst>
+            <a:gs pos="0">
+              <a:schemeClr val="phClr">
+                <a:tint val="100000"/>
+                <a:shade val="100000"/>
+                <a:satMod val="130000"/>
+              </a:schemeClr>
+            </a:gs>
+            <a:gs pos="100000">
+              <a:schemeClr val="phClr">
+                <a:tint val="50000"/>
+                <a:shade val="100000"/>
+                <a:satMod val="350000"/>
+              </a:schemeClr>
+            </a:gs>
+          </a:gsLst>
+          <a:lin ang="16200000" scaled="0"/>
+        </a:gradFill>
+      </a:fillStyleLst>
+      <a:lnStyleLst>
+        <a:ln w="9525" cap="flat" cmpd="sng" algn="ctr">
+          <a:solidFill>
+            <a:schemeClr val="phClr">
+              <a:shade val="95000"/>
+              <a:satMod val="105000"/>
+            </a:schemeClr>
+          </a:solidFill>
+          <a:prstDash val="solid"/>
+        </a:ln>
+        <a:ln w="25400" cap="flat" cmpd="sng" algn="ctr">
+          <a:solidFill>
+            <a:schemeClr val="phClr"/>
+          </a:solidFill>
+          <a:prstDash val="solid"/>
+        </a:ln>
+        <a:ln w="38100" cap="flat" cmpd="sng" algn="ctr">
+          <a:solidFill>
+            <a:schemeClr val="phClr"/>
+          </a:solidFill>
+          <a:prstDash val="solid"/>
+        </a:ln>
+      </a:lnStyleLst>
+      <a:effectStyleLst>
+        <a:effectStyle>
+          <a:effectLst>
+            <a:outerShdw blurRad="40000" dist="20000" dir="5400000" rotWithShape="0">
+              <a:srgbClr val="000000">
+                <a:alpha val="38000"/>
+              </a:srgbClr>
+            </a:outerShdw>
+          </a:effectLst>
+        </a:effectStyle>
+        <a:effectStyle>
+          <a:effectLst>
+            <a:outerShdw blurRad="40000" dist="23000" dir="5400000" rotWithShape="0">
+              <a:srgbClr val="000000">
+                <a:alpha val="35000"/>
+              </a:srgbClr>
+            </a:outerShdw>
+          </a:effectLst>
+        </a:effectStyle>
+        <a:effectStyle>
+          <a:effectLst>
+            <a:outerShdw blurRad="40000" dist="23000" dir="5400000" rotWithShape="0">
+              <a:srgbClr val="000000">
+                <a:alpha val="35000"/>
+              </a:srgbClr>
+            </a:outerShdw>
+          </a:effectLst>
+          <a:scene3d>
+            <a:camera prst="orthographicFront">
+              <a:rot lat="0" lon="0" rev="0"/>
+            </a:camera>
+            <a:lightRig rig="threePt" dir="t">
+              <a:rot lat="0" lon="0" rev="1200000"/>
+            </a:lightRig>
+          </a:scene3d>
+          <a:sp3d>
+            <a:bevelT w="63500" h="25400"/>
+          </a:sp3d>
+        </a:effectStyle>
+      </a:effectStyleLst>
+      <a:bgFillStyleLst>
+        <a:solidFill>
+          <a:schemeClr val="phClr"/>
+        </a:solidFill>
+        <a:gradFill rotWithShape="1">
+          <a:gsLst>
+            <a:gs pos="0">
+              <a:schemeClr val="phClr">
+                <a:tint val="40000"/>
+                <a:satMod val="350000"/>
+              </a:schemeClr>
+            </a:gs>
+            <a:gs pos="40000">
+              <a:schemeClr val="phClr">
+                <a:tint val="45000"/>
+                <a:shade val="99000"/>
+                <a:satMod val="350000"/>
+              </a:schemeClr>
+            </a:gs>
+            <a:gs pos="100000">
+              <a:schemeClr val="phClr">
+                <a:shade val="20000"/>
+                <a:satMod val="255000"/>
+              </a:schemeClr>
+            </a:gs>
+          </a:gsLst>
+          <a:path path="circle">
+            <a:fillToRect l="50000" t="-80000" r="50000" b="180000"/>
+          </a:path>
+        </a:gradFill>
+        <a:gradFill rotWithShape="1">
+          <a:gsLst>
+            <a:gs pos="0">
+              <a:schemeClr val="phClr">
+                <a:tint val="80000"/>
+                <a:satMod val="300000"/>
+              </a:schemeClr>
+            </a:gs>
+            <a:gs pos="100000">
+              <a:schemeClr val="phClr">
+                <a:shade val="30000"/>
+                <a:satMod val="200000"/>
+              </a:schemeClr>
+            </a:gs>
+          </a:gsLst>
+          <a:path path="circle">
+            <a:fillToRect l="50000" t="50000" r="50000" b="50000"/>
+          </a:path>
+        </a:gradFill>
+      </a:bgFillStyleLst>
+    </a:fmtScheme>
+  </a:themeElements>
+  <a:objectDefaults>
+    <a:spDef>
+      <a:spPr/>
+      <a:bodyPr/>
+      <a:lstStyle/>
+      <a:style>
+        <a:lnRef idx="1">
+          <a:schemeClr val="accent1"/>
+        </a:lnRef>
+        <a:fillRef idx="3">
+          <a:schemeClr val="accent1"/>
+        </a:fillRef>
+        <a:effectRef idx="2">
+          <a:schemeClr val="accent1"/>
+        </a:effectRef>
+        <a:fontRef idx="minor">
+          <a:schemeClr val="lt1"/>
+        </a:fontRef>
+      </a:style>
+    </a:spDef>
+    <a:lnDef>
+      <a:spPr/>
+      <a:bodyPr/>
+      <a:lstStyle/>
+      <a:style>
+        <a:lnRef idx="2">
+          <a:schemeClr val="accent1"/>
+        </a:lnRef>
+        <a:fillRef idx="0">
+          <a:schemeClr val="accent1"/>
+        </a:fillRef>
+        <a:effectRef idx="1">
+          <a:schemeClr val="accent1"/>
+        </a:effectRef>
+        <a:fontRef idx="minor">
+          <a:schemeClr val="tx1"/>
+        </a:fontRef>
+      </a:style>
+    </a:lnDef>
+  </a:objectDefaults>
+  <a:extraClrSchemeLst/>
+</a:theme>
+</file>
+
 <file path=_xmlsignatures/sig1.xml><?xml version="1.0" encoding="utf-8"?>
 <Signature xmlns="http://www.w3.org/2000/09/xmldsig#" Id="idPackageSignature">
   <SignedInfo>
@@ -26260,22 +29711,22 @@
     <SignatureMethod Algorithm="http://www.w3.org/2001/04/xmldsig-more#ecdsa-sha384"/>
     <Reference Type="http://www.w3.org/2000/09/xmldsig#Object" URI="#idPackageObject">
       <DigestMethod Algorithm="http://www.w3.org/2001/04/xmldsig-more#sha384"/>
-      <DigestValue>/iLlDwc2/U2eD483Tq4olmKiKKTx7u485KcPHhVW+uFRJm6uh0k6uNV21ifBu6F+</DigestValue>
+      <DigestValue>yGXjssRUaNkjYduAYGwxdtXbOCK0BJahftwAOqbsPuAtDn2rAuYIV3yK4cYI4v7D</DigestValue>
     </Reference>
     <Reference Type="http://www.w3.org/2000/09/xmldsig#Object" URI="#idOfficeObject">
       <DigestMethod Algorithm="http://www.w3.org/2001/04/xmldsig-more#sha384"/>
-      <DigestValue>ORcsTLKsx8LxZq1FMwEVW+QjMiBfiBt5W9EinNcL+oxUWAHi/Epc+paZ0+XlkjeG</DigestValue>
+      <DigestValue>C5tzG1qJXH6LZ2fICTU/g6xZjltF5rnGiN+jSOxDPvCu0OqE54kmYLnlIPRM1Geu</DigestValue>
     </Reference>
     <Reference Type="http://uri.etsi.org/01903#SignedProperties" URI="#idSignedProperties">
       <Transforms>
         <Transform Algorithm="http://www.w3.org/TR/2001/REC-xml-c14n-20010315"/>
       </Transforms>
       <DigestMethod Algorithm="http://www.w3.org/2001/04/xmldsig-more#sha384"/>
-      <DigestValue>IwVcCE+ygHrFEdcae0lpKB2V0IxZdfh8A0Los2Opel1Qr47zWRG+6WKKV8xn940F</DigestValue>
+      <DigestValue>CXkW3aV3Iysenb5+oYdfnlbzDFhVZvDDXvamtjxJZC/vVJWClbH94cUtnJjxRq7/</DigestValue>
     </Reference>
   </SignedInfo>
-  <SignatureValue>YlotBwny0Fy1acj/4oitzWcTZdlX79LmV7sUhx3M2HyyU+TmyN3IrJ2of57ro+sBH+inPlMWWPFi
-USy/Ncei07fmbyl9KXdylBwkzcTSq64oRQ5Z0qf6Lr1rTLMvxtgL</SignatureValue>
+  <SignatureValue>ke8e2Lhg+Hdcle4fI8SPsg7iNTlym/j1oU0K+v6Iidsd+918LZGUnAHBI+yxajHak4G2XHHCYGhJ
+A3CbgvJV5DkLlKtENX+SLGH2OYPcJ5AeW6JjrwX2e3TX3AYjP/UB</SignatureValue>
   <KeyInfo>
     <X509Data>
       <X509Certificate>MIIBkTCCARagAwIBAgIJAPdIHSGNfZuUMAoGCCqGSM49BAMDMC8xLTArBgNVBAMTJGNhYTIyY2YxLWMxM2YtNDM3Yy1iYWZkLWFhNjM5MjU5MDkzMTAeFw0yNjAzMDgwMTU2MzlaFw0yNzAzMDgxMzU2MzlaMC8xLTArBgNVBAMTJGNhYTIyY2YxLWMxM2YtNDM3Yy1iYWZkLWFhNjM5MjU5MDkzMTB2MBAGByqGSM49AgEGBSuBBAAiA2IABNp6f9pfSrQcXKO+mGODiKCBvrFCgM6z6svOeFdn85eIZkMNYGiGy4qv372dsw6lUyYdMetE51bq0gc2taRfqpv74xATA8+srJCgSRF8wKRuy54sgtL8WciTs1VhOPHsaTAKBggqhkjOPQQDAwNpADBmAjEA5hZTKtauY9KNCFdXK5ZSsXmnIrEb3vm1m+GkTPdKWTDFsKMxe03DPvyHL6v5vvpnAjEAsDyuNkP5luWjdar8Nfd6yIN8WevzfJxqjLpxnT0OFiseNRTv1Xfsu9jmilU9jePZ</X509Certificate>
@@ -26296,6 +29747,8 @@
       <Reference URI="/ppt/_rels/presentation.xml.rels?ContentType=application/vnd.openxmlformats-package.relationships+xml">
         <Transforms>
           <Transform Algorithm="http://schemas.openxmlformats.org/package/2006/RelationshipTransform">
+            <mdssi:RelationshipReference xmlns:mdssi="http://schemas.openxmlformats.org/package/2006/digital-signature" SourceId="rId26"/>
+            <mdssi:RelationshipReference xmlns:mdssi="http://schemas.openxmlformats.org/package/2006/digital-signature" SourceId="rId3"/>
             <mdssi:RelationshipReference xmlns:mdssi="http://schemas.openxmlformats.org/package/2006/digital-signature" SourceId="rId21"/>
             <mdssi:RelationshipReference xmlns:mdssi="http://schemas.openxmlformats.org/package/2006/digital-signature" SourceId="rId34"/>
             <mdssi:RelationshipReference xmlns:mdssi="http://schemas.openxmlformats.org/package/2006/digital-signature" SourceId="rId7"/>
@@ -26325,16 +29778,15 @@
             <mdssi:RelationshipReference xmlns:mdssi="http://schemas.openxmlformats.org/package/2006/digital-signature" SourceId="rId22"/>
             <mdssi:RelationshipReference xmlns:mdssi="http://schemas.openxmlformats.org/package/2006/digital-signature" SourceId="rId27"/>
             <mdssi:RelationshipReference xmlns:mdssi="http://schemas.openxmlformats.org/package/2006/digital-signature" SourceId="rId30"/>
+            <mdssi:RelationshipReference xmlns:mdssi="http://schemas.openxmlformats.org/package/2006/digital-signature" SourceId="rId35"/>
             <mdssi:RelationshipReference xmlns:mdssi="http://schemas.openxmlformats.org/package/2006/digital-signature" SourceId="rId8"/>
             <mdssi:RelationshipReference xmlns:mdssi="http://schemas.openxmlformats.org/package/2006/digital-signature" SourceId="rId13"/>
             <mdssi:RelationshipReference xmlns:mdssi="http://schemas.openxmlformats.org/package/2006/digital-signature" SourceId="rId18"/>
-            <mdssi:RelationshipReference xmlns:mdssi="http://schemas.openxmlformats.org/package/2006/digital-signature" SourceId="rId26"/>
-            <mdssi:RelationshipReference xmlns:mdssi="http://schemas.openxmlformats.org/package/2006/digital-signature" SourceId="rId3"/>
           </Transform>
           <Transform Algorithm="http://www.w3.org/TR/2001/REC-xml-c14n-20010315"/>
         </Transforms>
         <DigestMethod Algorithm="http://www.w3.org/2001/04/xmldsig-more#sha384"/>
-        <DigestValue>IdxJBnVA9NuhP8Iwdf10cyw/nA28jo7Iop3bU0JvebJ6fdoo3/nk0nb4NbHwR8gV</DigestValue>
+        <DigestValue>wql02vktlYWnzesj7K+BdWOQShbwl2vgR5m8bBppupGi5L+YfQtqaIWZhJBk+O6s</DigestValue>
       </Reference>
       <Reference URI="/ppt/media/image1.png?ContentType=image/png">
         <DigestMethod Algorithm="http://www.w3.org/2001/04/xmldsig-more#sha384"/>
@@ -26350,7 +29802,7 @@
       </Reference>
       <Reference URI="/ppt/presentation.xml?ContentType=application/vnd.openxmlformats-officedocument.presentationml.presentation.main+xml">
         <DigestMethod Algorithm="http://www.w3.org/2001/04/xmldsig-more#sha384"/>
-        <DigestValue>o072Ubw+oLd8cOLHgixjJyMXJcfbnc3PR6mnX+/bs710PIbZjCiy0JBDVQt67Hdb</DigestValue>
+        <DigestValue>Ne8XPIrQ/528CQ7nGhX0WOZBKa5db+fiMvxvL0CQ9bRGYIIBZOM8KLloWQjxM5Ea</DigestValue>
       </Reference>
       <Reference URI="/ppt/presProps.xml?ContentType=application/vnd.openxmlformats-officedocument.presentationml.presProps+xml">
         <DigestMethod Algorithm="http://www.w3.org/2001/04/xmldsig-more#sha384"/>
@@ -26386,6 +29838,86 @@
         <DigestMethod Algorithm="http://www.w3.org/2001/04/xmldsig-more#sha384"/>
         <DigestValue>vXKY0l3kETR8Vc6sgq2XNne1/lKbiPCcvpVE+FibNlzcd0qcGOU3VnRHzlPx0D37</DigestValue>
       </Reference>
+      <Reference URI="/ppt/slideLayouts/_rels/slideLayout12.xml.rels?ContentType=application/vnd.openxmlformats-package.relationships+xml">
+        <Transforms>
+          <Transform Algorithm="http://schemas.openxmlformats.org/package/2006/RelationshipTransform">
+            <mdssi:RelationshipReference xmlns:mdssi="http://schemas.openxmlformats.org/package/2006/digital-signature" SourceId="rId1"/>
+          </Transform>
+          <Transform Algorithm="http://www.w3.org/TR/2001/REC-xml-c14n-20010315"/>
+        </Transforms>
+        <DigestMethod Algorithm="http://www.w3.org/2001/04/xmldsig-more#sha384"/>
+        <DigestValue>q+6iS7iT4muaXgnDhOclSgpVjh2cbJwBktD7a/kn5Kp2yUoPR5u7ZrjaysThq9xP</DigestValue>
+      </Reference>
+      <Reference URI="/ppt/slideLayouts/_rels/slideLayout13.xml.rels?ContentType=application/vnd.openxmlformats-package.relationships+xml">
+        <Transforms>
+          <Transform Algorithm="http://schemas.openxmlformats.org/package/2006/RelationshipTransform">
+            <mdssi:RelationshipReference xmlns:mdssi="http://schemas.openxmlformats.org/package/2006/digital-signature" SourceId="rId1"/>
+          </Transform>
+          <Transform Algorithm="http://www.w3.org/TR/2001/REC-xml-c14n-20010315"/>
+        </Transforms>
+        <DigestMethod Algorithm="http://www.w3.org/2001/04/xmldsig-more#sha384"/>
+        <DigestValue>q+6iS7iT4muaXgnDhOclSgpVjh2cbJwBktD7a/kn5Kp2yUoPR5u7ZrjaysThq9xP</DigestValue>
+      </Reference>
+      <Reference URI="/ppt/slideLayouts/_rels/slideLayout14.xml.rels?ContentType=application/vnd.openxmlformats-package.relationships+xml">
+        <Transforms>
+          <Transform Algorithm="http://schemas.openxmlformats.org/package/2006/RelationshipTransform">
+            <mdssi:RelationshipReference xmlns:mdssi="http://schemas.openxmlformats.org/package/2006/digital-signature" SourceId="rId1"/>
+          </Transform>
+          <Transform Algorithm="http://www.w3.org/TR/2001/REC-xml-c14n-20010315"/>
+        </Transforms>
+        <DigestMethod Algorithm="http://www.w3.org/2001/04/xmldsig-more#sha384"/>
+        <DigestValue>q+6iS7iT4muaXgnDhOclSgpVjh2cbJwBktD7a/kn5Kp2yUoPR5u7ZrjaysThq9xP</DigestValue>
+      </Reference>
+      <Reference URI="/ppt/slideLayouts/_rels/slideLayout15.xml.rels?ContentType=application/vnd.openxmlformats-package.relationships+xml">
+        <Transforms>
+          <Transform Algorithm="http://schemas.openxmlformats.org/package/2006/RelationshipTransform">
+            <mdssi:RelationshipReference xmlns:mdssi="http://schemas.openxmlformats.org/package/2006/digital-signature" SourceId="rId1"/>
+          </Transform>
+          <Transform Algorithm="http://www.w3.org/TR/2001/REC-xml-c14n-20010315"/>
+        </Transforms>
+        <DigestMethod Algorithm="http://www.w3.org/2001/04/xmldsig-more#sha384"/>
+        <DigestValue>q+6iS7iT4muaXgnDhOclSgpVjh2cbJwBktD7a/kn5Kp2yUoPR5u7ZrjaysThq9xP</DigestValue>
+      </Reference>
+      <Reference URI="/ppt/slideLayouts/_rels/slideLayout16.xml.rels?ContentType=application/vnd.openxmlformats-package.relationships+xml">
+        <Transforms>
+          <Transform Algorithm="http://schemas.openxmlformats.org/package/2006/RelationshipTransform">
+            <mdssi:RelationshipReference xmlns:mdssi="http://schemas.openxmlformats.org/package/2006/digital-signature" SourceId="rId1"/>
+          </Transform>
+          <Transform Algorithm="http://www.w3.org/TR/2001/REC-xml-c14n-20010315"/>
+        </Transforms>
+        <DigestMethod Algorithm="http://www.w3.org/2001/04/xmldsig-more#sha384"/>
+        <DigestValue>q+6iS7iT4muaXgnDhOclSgpVjh2cbJwBktD7a/kn5Kp2yUoPR5u7ZrjaysThq9xP</DigestValue>
+      </Reference>
+      <Reference URI="/ppt/slideLayouts/_rels/slideLayout17.xml.rels?ContentType=application/vnd.openxmlformats-package.relationships+xml">
+        <Transforms>
+          <Transform Algorithm="http://schemas.openxmlformats.org/package/2006/RelationshipTransform">
+            <mdssi:RelationshipReference xmlns:mdssi="http://schemas.openxmlformats.org/package/2006/digital-signature" SourceId="rId1"/>
+          </Transform>
+          <Transform Algorithm="http://www.w3.org/TR/2001/REC-xml-c14n-20010315"/>
+        </Transforms>
+        <DigestMethod Algorithm="http://www.w3.org/2001/04/xmldsig-more#sha384"/>
+        <DigestValue>q+6iS7iT4muaXgnDhOclSgpVjh2cbJwBktD7a/kn5Kp2yUoPR5u7ZrjaysThq9xP</DigestValue>
+      </Reference>
+      <Reference URI="/ppt/slideLayouts/_rels/slideLayout18.xml.rels?ContentType=application/vnd.openxmlformats-package.relationships+xml">
+        <Transforms>
+          <Transform Algorithm="http://schemas.openxmlformats.org/package/2006/RelationshipTransform">
+            <mdssi:RelationshipReference xmlns:mdssi="http://schemas.openxmlformats.org/package/2006/digital-signature" SourceId="rId1"/>
+          </Transform>
+          <Transform Algorithm="http://www.w3.org/TR/2001/REC-xml-c14n-20010315"/>
+        </Transforms>
+        <DigestMethod Algorithm="http://www.w3.org/2001/04/xmldsig-more#sha384"/>
+        <DigestValue>q+6iS7iT4muaXgnDhOclSgpVjh2cbJwBktD7a/kn5Kp2yUoPR5u7ZrjaysThq9xP</DigestValue>
+      </Reference>
+      <Reference URI="/ppt/slideLayouts/_rels/slideLayout19.xml.rels?ContentType=application/vnd.openxmlformats-package.relationships+xml">
+        <Transforms>
+          <Transform Algorithm="http://schemas.openxmlformats.org/package/2006/RelationshipTransform">
+            <mdssi:RelationshipReference xmlns:mdssi="http://schemas.openxmlformats.org/package/2006/digital-signature" SourceId="rId1"/>
+          </Transform>
+          <Transform Algorithm="http://www.w3.org/TR/2001/REC-xml-c14n-20010315"/>
+        </Transforms>
+        <DigestMethod Algorithm="http://www.w3.org/2001/04/xmldsig-more#sha384"/>
+        <DigestValue>q+6iS7iT4muaXgnDhOclSgpVjh2cbJwBktD7a/kn5Kp2yUoPR5u7ZrjaysThq9xP</DigestValue>
+      </Reference>
       <Reference URI="/ppt/slideLayouts/_rels/slideLayout2.xml.rels?ContentType=application/vnd.openxmlformats-package.relationships+xml">
         <Transforms>
           <Transform Algorithm="http://schemas.openxmlformats.org/package/2006/RelationshipTransform">
@@ -26395,6 +29927,36 @@
         </Transforms>
         <DigestMethod Algorithm="http://www.w3.org/2001/04/xmldsig-more#sha384"/>
         <DigestValue>vXKY0l3kETR8Vc6sgq2XNne1/lKbiPCcvpVE+FibNlzcd0qcGOU3VnRHzlPx0D37</DigestValue>
+      </Reference>
+      <Reference URI="/ppt/slideLayouts/_rels/slideLayout20.xml.rels?ContentType=application/vnd.openxmlformats-package.relationships+xml">
+        <Transforms>
+          <Transform Algorithm="http://schemas.openxmlformats.org/package/2006/RelationshipTransform">
+            <mdssi:RelationshipReference xmlns:mdssi="http://schemas.openxmlformats.org/package/2006/digital-signature" SourceId="rId1"/>
+          </Transform>
+          <Transform Algorithm="http://www.w3.org/TR/2001/REC-xml-c14n-20010315"/>
+        </Transforms>
+        <DigestMethod Algorithm="http://www.w3.org/2001/04/xmldsig-more#sha384"/>
+        <DigestValue>q+6iS7iT4muaXgnDhOclSgpVjh2cbJwBktD7a/kn5Kp2yUoPR5u7ZrjaysThq9xP</DigestValue>
+      </Reference>
+      <Reference URI="/ppt/slideLayouts/_rels/slideLayout21.xml.rels?ContentType=application/vnd.openxmlformats-package.relationships+xml">
+        <Transforms>
+          <Transform Algorithm="http://schemas.openxmlformats.org/package/2006/RelationshipTransform">
+            <mdssi:RelationshipReference xmlns:mdssi="http://schemas.openxmlformats.org/package/2006/digital-signature" SourceId="rId1"/>
+          </Transform>
+          <Transform Algorithm="http://www.w3.org/TR/2001/REC-xml-c14n-20010315"/>
+        </Transforms>
+        <DigestMethod Algorithm="http://www.w3.org/2001/04/xmldsig-more#sha384"/>
+        <DigestValue>q+6iS7iT4muaXgnDhOclSgpVjh2cbJwBktD7a/kn5Kp2yUoPR5u7ZrjaysThq9xP</DigestValue>
+      </Reference>
+      <Reference URI="/ppt/slideLayouts/_rels/slideLayout22.xml.rels?ContentType=application/vnd.openxmlformats-package.relationships+xml">
+        <Transforms>
+          <Transform Algorithm="http://schemas.openxmlformats.org/package/2006/RelationshipTransform">
+            <mdssi:RelationshipReference xmlns:mdssi="http://schemas.openxmlformats.org/package/2006/digital-signature" SourceId="rId1"/>
+          </Transform>
+          <Transform Algorithm="http://www.w3.org/TR/2001/REC-xml-c14n-20010315"/>
+        </Transforms>
+        <DigestMethod Algorithm="http://www.w3.org/2001/04/xmldsig-more#sha384"/>
+        <DigestValue>q+6iS7iT4muaXgnDhOclSgpVjh2cbJwBktD7a/kn5Kp2yUoPR5u7ZrjaysThq9xP</DigestValue>
       </Reference>
       <Reference URI="/ppt/slideLayouts/_rels/slideLayout3.xml.rels?ContentType=application/vnd.openxmlformats-package.relationships+xml">
         <Transforms>
@@ -26478,9 +30040,53 @@
         <DigestMethod Algorithm="http://www.w3.org/2001/04/xmldsig-more#sha384"/>
         <DigestValue>nBDmApEQxQzO4PR9LbzcRIJ1r/dqcBE9hihYJyF6n1qgW530AL74STupR8gpPhKs</DigestValue>
       </Reference>
+      <Reference URI="/ppt/slideLayouts/slideLayout12.xml?ContentType=application/vnd.openxmlformats-officedocument.presentationml.slideLayout+xml">
+        <DigestMethod Algorithm="http://www.w3.org/2001/04/xmldsig-more#sha384"/>
+        <DigestValue>tqoZci6g/hDogSnpGoV74A0Aj1vht6b9BbcyKgbjrhqu+Ruhjhnl2wH4VjEXfZm2</DigestValue>
+      </Reference>
+      <Reference URI="/ppt/slideLayouts/slideLayout13.xml?ContentType=application/vnd.openxmlformats-officedocument.presentationml.slideLayout+xml">
+        <DigestMethod Algorithm="http://www.w3.org/2001/04/xmldsig-more#sha384"/>
+        <DigestValue>xSa6MO5M/hY6OHic+ocu4+9QlmCkWe4Ec+JVJTc69YrVL567hAWkfJzIE3OUtn6s</DigestValue>
+      </Reference>
+      <Reference URI="/ppt/slideLayouts/slideLayout14.xml?ContentType=application/vnd.openxmlformats-officedocument.presentationml.slideLayout+xml">
+        <DigestMethod Algorithm="http://www.w3.org/2001/04/xmldsig-more#sha384"/>
+        <DigestValue>vh+1Qh/ocWliOr7sLVkyy7CsYQ+EXfFn9mHi/q84zF3Vrxg6hU7R1SQufvTjO6yx</DigestValue>
+      </Reference>
+      <Reference URI="/ppt/slideLayouts/slideLayout15.xml?ContentType=application/vnd.openxmlformats-officedocument.presentationml.slideLayout+xml">
+        <DigestMethod Algorithm="http://www.w3.org/2001/04/xmldsig-more#sha384"/>
+        <DigestValue>LborNEAFCRIEcCOQxkmj0ugOAm31hMVY+jlZy0W1mt8OVpNPTqhka5ETqSBQOi53</DigestValue>
+      </Reference>
+      <Reference URI="/ppt/slideLayouts/slideLayout16.xml?ContentType=application/vnd.openxmlformats-officedocument.presentationml.slideLayout+xml">
+        <DigestMethod Algorithm="http://www.w3.org/2001/04/xmldsig-more#sha384"/>
+        <DigestValue>aecDLVfzXvgZmNld0a5V1mn9RKQdfZcLbPUSALT7fYhKrEP5TEDGrZghB6AwVPNg</DigestValue>
+      </Reference>
+      <Reference URI="/ppt/slideLayouts/slideLayout17.xml?ContentType=application/vnd.openxmlformats-officedocument.presentationml.slideLayout+xml">
+        <DigestMethod Algorithm="http://www.w3.org/2001/04/xmldsig-more#sha384"/>
+        <DigestValue>BDuCZFplDMBhTfZFqlore5C2ZP59n0ij0VZhJnj24KRGeB8tsSzrDnV3KB0QzS4J</DigestValue>
+      </Reference>
+      <Reference URI="/ppt/slideLayouts/slideLayout18.xml?ContentType=application/vnd.openxmlformats-officedocument.presentationml.slideLayout+xml">
+        <DigestMethod Algorithm="http://www.w3.org/2001/04/xmldsig-more#sha384"/>
+        <DigestValue>Dtz7QHcg1zGTlrJRJuwMCmSFfJL6b4jR2Gg+XrxWPZNlzRFIN+nsWslaQU9fGDZ1</DigestValue>
+      </Reference>
+      <Reference URI="/ppt/slideLayouts/slideLayout19.xml?ContentType=application/vnd.openxmlformats-officedocument.presentationml.slideLayout+xml">
+        <DigestMethod Algorithm="http://www.w3.org/2001/04/xmldsig-more#sha384"/>
+        <DigestValue>5BnazN8iB3GkFWxNVPeuVKXs7uU9XDcglFrowuL6Lw0levuepUO+CGW5GFq7dMZP</DigestValue>
+      </Reference>
       <Reference URI="/ppt/slideLayouts/slideLayout2.xml?ContentType=application/vnd.openxmlformats-officedocument.presentationml.slideLayout+xml">
         <DigestMethod Algorithm="http://www.w3.org/2001/04/xmldsig-more#sha384"/>
         <DigestValue>4PhyZYc6/aXsapdv2ThEj9/ApTQQxdGbGhcZnH4oK8SMYnTftJdChGX0Z4Wpxuax</DigestValue>
+      </Reference>
+      <Reference URI="/ppt/slideLayouts/slideLayout20.xml?ContentType=application/vnd.openxmlformats-officedocument.presentationml.slideLayout+xml">
+        <DigestMethod Algorithm="http://www.w3.org/2001/04/xmldsig-more#sha384"/>
+        <DigestValue>g6bF+7gSc2wmVFCNplrogJUjnQczIbyDsL/LOA9Vq7b8/hRbzvcbmJ7qy21FrHaH</DigestValue>
+      </Reference>
+      <Reference URI="/ppt/slideLayouts/slideLayout21.xml?ContentType=application/vnd.openxmlformats-officedocument.presentationml.slideLayout+xml">
+        <DigestMethod Algorithm="http://www.w3.org/2001/04/xmldsig-more#sha384"/>
+        <DigestValue>n9I7GX2OJpOgDYhE9Q+xrIyKDu+xG/BY+DbBcWm8pemuqqPpI5bVEqdsex99JYLW</DigestValue>
+      </Reference>
+      <Reference URI="/ppt/slideLayouts/slideLayout22.xml?ContentType=application/vnd.openxmlformats-officedocument.presentationml.slideLayout+xml">
+        <DigestMethod Algorithm="http://www.w3.org/2001/04/xmldsig-more#sha384"/>
+        <DigestValue>/2uU4hh+tG87z8hm7c/uJoG4NkPR0qTfMYLF8CqGGOCEjeXQ3WdqJu5BY4g/Kc2Q</DigestValue>
       </Reference>
       <Reference URI="/ppt/slideLayouts/slideLayout3.xml?ContentType=application/vnd.openxmlformats-officedocument.presentationml.slideLayout+xml">
         <DigestMethod Algorithm="http://www.w3.org/2001/04/xmldsig-more#sha384"/>
@@ -26513,6 +30119,28 @@
       <Reference URI="/ppt/slideMasters/_rels/slideMaster1.xml.rels?ContentType=application/vnd.openxmlformats-package.relationships+xml">
         <Transforms>
           <Transform Algorithm="http://schemas.openxmlformats.org/package/2006/RelationshipTransform">
+            <mdssi:RelationshipReference xmlns:mdssi="http://schemas.openxmlformats.org/package/2006/digital-signature" SourceId="rId2"/>
+            <mdssi:RelationshipReference xmlns:mdssi="http://schemas.openxmlformats.org/package/2006/digital-signature" SourceId="rId1"/>
+            <mdssi:RelationshipReference xmlns:mdssi="http://schemas.openxmlformats.org/package/2006/digital-signature" SourceId="rId6"/>
+            <mdssi:RelationshipReference xmlns:mdssi="http://schemas.openxmlformats.org/package/2006/digital-signature" SourceId="rId11"/>
+            <mdssi:RelationshipReference xmlns:mdssi="http://schemas.openxmlformats.org/package/2006/digital-signature" SourceId="rId5"/>
+            <mdssi:RelationshipReference xmlns:mdssi="http://schemas.openxmlformats.org/package/2006/digital-signature" SourceId="rId10"/>
+            <mdssi:RelationshipReference xmlns:mdssi="http://schemas.openxmlformats.org/package/2006/digital-signature" SourceId="rId4"/>
+            <mdssi:RelationshipReference xmlns:mdssi="http://schemas.openxmlformats.org/package/2006/digital-signature" SourceId="rId9"/>
+            <mdssi:RelationshipReference xmlns:mdssi="http://schemas.openxmlformats.org/package/2006/digital-signature" SourceId="rId8"/>
+            <mdssi:RelationshipReference xmlns:mdssi="http://schemas.openxmlformats.org/package/2006/digital-signature" SourceId="rId3"/>
+            <mdssi:RelationshipReference xmlns:mdssi="http://schemas.openxmlformats.org/package/2006/digital-signature" SourceId="rId7"/>
+            <mdssi:RelationshipReference xmlns:mdssi="http://schemas.openxmlformats.org/package/2006/digital-signature" SourceId="rId12"/>
+          </Transform>
+          <Transform Algorithm="http://www.w3.org/TR/2001/REC-xml-c14n-20010315"/>
+        </Transforms>
+        <DigestMethod Algorithm="http://www.w3.org/2001/04/xmldsig-more#sha384"/>
+        <DigestValue>47ZJuK8ikC1eoQBhAP2kn50k7c4+/v2BvYxSahNLv8Kg5z7ff8LPtrVHaVAuIS5G</DigestValue>
+      </Reference>
+      <Reference URI="/ppt/slideMasters/_rels/slideMaster2.xml.rels?ContentType=application/vnd.openxmlformats-package.relationships+xml">
+        <Transforms>
+          <Transform Algorithm="http://schemas.openxmlformats.org/package/2006/RelationshipTransform">
+            <mdssi:RelationshipReference xmlns:mdssi="http://schemas.openxmlformats.org/package/2006/digital-signature" SourceId="rId1"/>
             <mdssi:RelationshipReference xmlns:mdssi="http://schemas.openxmlformats.org/package/2006/digital-signature" SourceId="rId6"/>
             <mdssi:RelationshipReference xmlns:mdssi="http://schemas.openxmlformats.org/package/2006/digital-signature" SourceId="rId11"/>
             <mdssi:RelationshipReference xmlns:mdssi="http://schemas.openxmlformats.org/package/2006/digital-signature" SourceId="rId5"/>
@@ -26524,16 +30152,19 @@
             <mdssi:RelationshipReference xmlns:mdssi="http://schemas.openxmlformats.org/package/2006/digital-signature" SourceId="rId7"/>
             <mdssi:RelationshipReference xmlns:mdssi="http://schemas.openxmlformats.org/package/2006/digital-signature" SourceId="rId12"/>
             <mdssi:RelationshipReference xmlns:mdssi="http://schemas.openxmlformats.org/package/2006/digital-signature" SourceId="rId2"/>
-            <mdssi:RelationshipReference xmlns:mdssi="http://schemas.openxmlformats.org/package/2006/digital-signature" SourceId="rId1"/>
           </Transform>
           <Transform Algorithm="http://www.w3.org/TR/2001/REC-xml-c14n-20010315"/>
         </Transforms>
         <DigestMethod Algorithm="http://www.w3.org/2001/04/xmldsig-more#sha384"/>
-        <DigestValue>47ZJuK8ikC1eoQBhAP2kn50k7c4+/v2BvYxSahNLv8Kg5z7ff8LPtrVHaVAuIS5G</DigestValue>
+        <DigestValue>mISB18KENxUP8enwL8kWU/JGjhkonT3Y/qGI37/JrTTSkJjYSTy/lgBvNquVDb0p</DigestValue>
       </Reference>
       <Reference URI="/ppt/slideMasters/slideMaster1.xml?ContentType=application/vnd.openxmlformats-officedocument.presentationml.slideMaster+xml">
         <DigestMethod Algorithm="http://www.w3.org/2001/04/xmldsig-more#sha384"/>
         <DigestValue>M7koemMndxX6WMMVef1j8kLToY/zkeY73EG1JzT0DEHD90YE2M21ccdBehRdd19E</DigestValue>
+      </Reference>
+      <Reference URI="/ppt/slideMasters/slideMaster2.xml?ContentType=application/vnd.openxmlformats-officedocument.presentationml.slideMaster+xml">
+        <DigestMethod Algorithm="http://www.w3.org/2001/04/xmldsig-more#sha384"/>
+        <DigestValue>QuBXbTfogNis9DlI7SJi5NmhHd1OJQrL0cL5TLnPBtpHqN7fSSSrA2V2tPYBxs6B</DigestValue>
       </Reference>
       <Reference URI="/ppt/slides/_rels/slide1.xml.rels?ContentType=application/vnd.openxmlformats-package.relationships+xml">
         <Transforms>
@@ -26543,7 +30174,7 @@
           <Transform Algorithm="http://www.w3.org/TR/2001/REC-xml-c14n-20010315"/>
         </Transforms>
         <DigestMethod Algorithm="http://www.w3.org/2001/04/xmldsig-more#sha384"/>
-        <DigestValue>ZKjue2dCKZIZjWOn0IfZysBt96pOFXWf7VjMEZgKIqpRM7gWuxBQpYFKH3oGljHV</DigestValue>
+        <DigestValue>QnkgEE8Hn8k0A1KvNrsua2cw/5Dt+vaYCQY9/lk+Erfip55RIGI2W4M5VRInTCsb</DigestValue>
       </Reference>
       <Reference URI="/ppt/slides/_rels/slide10.xml.rels?ContentType=application/vnd.openxmlformats-package.relationships+xml">
         <Transforms>
@@ -26830,7 +30461,7 @@
       </Reference>
       <Reference URI="/ppt/slides/slide1.xml?ContentType=application/vnd.openxmlformats-officedocument.presentationml.slide+xml">
         <DigestMethod Algorithm="http://www.w3.org/2001/04/xmldsig-more#sha384"/>
-        <DigestValue>6Q3h4pKLOVEfH/rfcs02chaYW4R0bywvpTRGpgDpwmLiulskGzpPxP4z3C2EbXrs</DigestValue>
+        <DigestValue>/K5NxnB6daPiQkm0Ob40n6fKjZg6gp3Xegbfft8MvNbHCUqQtABax3MZVYQlTJJJ</DigestValue>
       </Reference>
       <Reference URI="/ppt/slides/slide10.xml?ContentType=application/vnd.openxmlformats-officedocument.presentationml.slide+xml">
         <DigestMethod Algorithm="http://www.w3.org/2001/04/xmldsig-more#sha384"/>
@@ -26952,16 +30583,20 @@
         <DigestMethod Algorithm="http://www.w3.org/2001/04/xmldsig-more#sha384"/>
         <DigestValue>qs3oy3MjnXw7dJlojn7tAmLu2V67n/z/Im76qfeMTBFuoWTCsUe4I771fXWZ3G5U</DigestValue>
       </Reference>
+      <Reference URI="/ppt/theme/theme2.xml?ContentType=application/vnd.openxmlformats-officedocument.theme+xml">
+        <DigestMethod Algorithm="http://www.w3.org/2001/04/xmldsig-more#sha384"/>
+        <DigestValue>J6X8sUDLjyDe8vn99e+dhOH9py9iFlYjFT1xDQcM0WRp7IOOeBId87wLKmiCPHI8</DigestValue>
+      </Reference>
       <Reference URI="/ppt/viewProps.xml?ContentType=application/vnd.openxmlformats-officedocument.presentationml.viewProps+xml">
         <DigestMethod Algorithm="http://www.w3.org/2001/04/xmldsig-more#sha384"/>
-        <DigestValue>D9J8ziXFzRd/fiuJdj9hFF7cO/q1HuP3BL3JlGLSAG9fQ0c9vC2Y+fW7Vp9bTdZE</DigestValue>
+        <DigestValue>VvZejkZXE9zENf37wHLLnJtwQSsSQLrBAsoS/twySDseJueOVkYgllhYCwy00KDT</DigestValue>
       </Reference>
     </Manifest>
     <SignatureProperties>
       <SignatureProperty Id="idSignatureTime" Target="#idPackageSignature">
         <mdssi:SignatureTime xmlns:mdssi="http://schemas.openxmlformats.org/package/2006/digital-signature">
           <mdssi:Format>YYYY-MM-DDThh:mm:ssTZD</mdssi:Format>
-          <mdssi:Value>2026-08-29T16:54:09Z</mdssi:Value>
+          <mdssi:Value>2026-08-30T00:26:19Z</mdssi:Value>
         </mdssi:SignatureTime>
       </SignatureProperty>
     </SignatureProperties>
@@ -26973,7 +30608,7 @@
           <SetupID/>
           <SignatureText/>
           <SignatureImage/>
-          <SignatureComments>Submission for IBM review</SignatureComments>
+          <SignatureComments/>
           <WindowsVersion>10.0</WindowsVersion>
           <OfficeVersion>16.0.20326/27</OfficeVersion>
           <ApplicationVersion>16.0.20326</ApplicationVersion>
@@ -26993,7 +30628,7 @@
     <xd:QualifyingProperties xmlns:xd="http://uri.etsi.org/01903/v1.3.2#" Target="#idPackageSignature">
       <xd:SignedProperties Id="idSignedProperties">
         <xd:SignedSignatureProperties>
-          <xd:SigningTime>2026-08-29T16:54:09Z</xd:SigningTime>
+          <xd:SigningTime>2026-08-30T00:26:19Z</xd:SigningTime>
           <xd:SigningCertificate>
             <xd:Cert>
               <xd:CertDigest>
@@ -27017,9 +30652,6 @@
               <xd:Description>Created and approved this document</xd:Description>
             </xd:CommitmentTypeId>
             <xd:AllSignedDataObjects/>
-            <xd:CommitmentTypeQualifiers>
-              <xd:CommitmentTypeQualifier>Submission for IBM review</xd:CommitmentTypeQualifier>
-            </xd:CommitmentTypeQualifiers>
           </xd:CommitmentTypeIndication>
         </xd:SignedDataObjectProperties>
       </xd:SignedProperties>
